--- a/Introduccion a la Ingenieria/Clases/Clase 4 - Principios eticos en la Ingenieria/Presentacion.pptx
+++ b/Introduccion a la Ingenieria/Clases/Clase 4 - Principios eticos en la Ingenieria/Presentacion.pptx
@@ -18,6 +18,19 @@
     <p:sldId id="266" r:id="rId17"/>
     <p:sldId id="267" r:id="rId18"/>
     <p:sldId id="268" r:id="rId19"/>
+    <p:sldId id="269" r:id="rId20"/>
+    <p:sldId id="270" r:id="rId21"/>
+    <p:sldId id="271" r:id="rId22"/>
+    <p:sldId id="272" r:id="rId23"/>
+    <p:sldId id="273" r:id="rId24"/>
+    <p:sldId id="274" r:id="rId25"/>
+    <p:sldId id="275" r:id="rId26"/>
+    <p:sldId id="276" r:id="rId27"/>
+    <p:sldId id="277" r:id="rId28"/>
+    <p:sldId id="278" r:id="rId29"/>
+    <p:sldId id="279" r:id="rId30"/>
+    <p:sldId id="280" r:id="rId31"/>
+    <p:sldId id="281" r:id="rId32"/>
   </p:sldIdLst>
   <p:sldSz cx="12191695" cy="6858000" type="screen4x3"/>
   <p:notesSz cx="6858000" cy="9144000"/>
@@ -3512,7 +3525,7 @@
         <p:spPr>
           <a:xfrm>
             <a:off x="0" y="0"/>
-            <a:ext cx="12191695" cy="1170432"/>
+            <a:ext cx="12191695" cy="960120"/>
           </a:xfrm>
           <a:prstGeom prst="rect">
             <a:avLst/>
@@ -3554,7 +3567,7 @@
         </p:nvSpPr>
         <p:spPr>
           <a:xfrm>
-            <a:off x="0" y="1170432"/>
+            <a:off x="0" y="960120"/>
             <a:ext cx="12191695" cy="41148"/>
           </a:xfrm>
           <a:prstGeom prst="rect">
@@ -3598,7 +3611,7 @@
         <p:spPr>
           <a:xfrm>
             <a:off x="457200" y="164592"/>
-            <a:ext cx="11277295" cy="384048"/>
+            <a:ext cx="11277295" cy="502920"/>
           </a:xfrm>
           <a:prstGeom prst="rect">
             <a:avLst/>
@@ -3618,7 +3631,7 @@
                 </a:solidFill>
                 <a:latin typeface="Calibri"/>
               </a:rPr>
-              <a:t>Taller de hoy: Comité de ética</a:t>
+              <a:t>La pregunta de entrada: el ingeniero que fue a la cárcel</a:t>
             </a:r>
           </a:p>
         </p:txBody>
@@ -3631,8 +3644,8 @@
         </p:nvSpPr>
         <p:spPr>
           <a:xfrm>
-            <a:off x="457200" y="566928"/>
-            <a:ext cx="11277295" cy="411480"/>
+            <a:off x="457200" y="1170432"/>
+            <a:ext cx="11277295" cy="5230368"/>
           </a:xfrm>
           <a:prstGeom prst="rect">
             <a:avLst/>
@@ -3645,945 +3658,156 @@
           </a:bodyPr>
           <a:lstStyle/>
           <a:p>
-            <a:r>
-              <a:rPr sz="1400" b="0" i="0">
-                <a:solidFill>
-                  <a:srgbClr val="B8D8EE"/>
-                </a:solidFill>
-                <a:latin typeface="Calibri"/>
-              </a:rPr>
-              <a:t>17 min en equipos · un caso por equipo, del 1 al 5 · acta del comité con el numeral citado</a:t>
-            </a:r>
-          </a:p>
-        </p:txBody>
-      </p:sp>
-      <p:sp>
-        <p:nvSpPr>
-          <p:cNvPr id="6" name="Rounded Rectangle 5"/>
-          <p:cNvSpPr/>
-          <p:nvPr/>
-        </p:nvSpPr>
-        <p:spPr>
-          <a:xfrm>
-            <a:off x="457200" y="1472184"/>
-            <a:ext cx="11277295" cy="566928"/>
-          </a:xfrm>
-          <a:prstGeom prst="roundRect">
-            <a:avLst>
-              <a:gd name="adj" fmla="val 12000"/>
-            </a:avLst>
-          </a:prstGeom>
-          <a:solidFill>
-            <a:srgbClr val="F2F2F2"/>
-          </a:solidFill>
-          <a:ln>
-            <a:noFill/>
-          </a:ln>
-        </p:spPr>
-        <p:style>
-          <a:lnRef idx="1">
-            <a:schemeClr val="accent1"/>
-          </a:lnRef>
-          <a:fillRef idx="3">
-            <a:schemeClr val="accent1"/>
-          </a:fillRef>
-          <a:effectRef idx="2">
-            <a:schemeClr val="accent1"/>
-          </a:effectRef>
-          <a:fontRef idx="minor">
-            <a:schemeClr val="lt1"/>
-          </a:fontRef>
-        </p:style>
-        <p:txBody>
-          <a:bodyPr rtlCol="0" anchor="ctr"/>
-          <a:lstStyle/>
-          <a:p>
-            <a:pPr algn="ctr"/>
-          </a:p>
-        </p:txBody>
-      </p:sp>
-      <p:sp>
-        <p:nvSpPr>
-          <p:cNvPr id="7" name="Rectangle 6"/>
-          <p:cNvSpPr/>
-          <p:nvPr/>
-        </p:nvSpPr>
-        <p:spPr>
-          <a:xfrm>
-            <a:off x="640080" y="1618487"/>
-            <a:ext cx="274320" cy="274320"/>
-          </a:xfrm>
-          <a:prstGeom prst="rect">
-            <a:avLst/>
-          </a:prstGeom>
-          <a:solidFill>
-            <a:srgbClr val="FFFFFF"/>
-          </a:solidFill>
-          <a:ln>
-            <a:solidFill>
-              <a:srgbClr val="333333"/>
-            </a:solidFill>
-          </a:ln>
-        </p:spPr>
-        <p:style>
-          <a:lnRef idx="1">
-            <a:schemeClr val="accent1"/>
-          </a:lnRef>
-          <a:fillRef idx="3">
-            <a:schemeClr val="accent1"/>
-          </a:fillRef>
-          <a:effectRef idx="2">
-            <a:schemeClr val="accent1"/>
-          </a:effectRef>
-          <a:fontRef idx="minor">
-            <a:schemeClr val="lt1"/>
-          </a:fontRef>
-        </p:style>
-        <p:txBody>
-          <a:bodyPr rtlCol="0" anchor="ctr"/>
-          <a:lstStyle/>
-          <a:p>
-            <a:pPr algn="ctr"/>
-          </a:p>
-        </p:txBody>
-      </p:sp>
-      <p:sp>
-        <p:nvSpPr>
-          <p:cNvPr id="8" name="Rectangle 7"/>
-          <p:cNvSpPr/>
-          <p:nvPr/>
-        </p:nvSpPr>
-        <p:spPr>
-          <a:xfrm>
-            <a:off x="640080" y="1618487"/>
-            <a:ext cx="73152" cy="274320"/>
-          </a:xfrm>
-          <a:prstGeom prst="rect">
-            <a:avLst/>
-          </a:prstGeom>
-          <a:solidFill>
-            <a:srgbClr val="269CCB"/>
-          </a:solidFill>
-          <a:ln>
-            <a:noFill/>
-          </a:ln>
-        </p:spPr>
-        <p:style>
-          <a:lnRef idx="1">
-            <a:schemeClr val="accent1"/>
-          </a:lnRef>
-          <a:fillRef idx="3">
-            <a:schemeClr val="accent1"/>
-          </a:fillRef>
-          <a:effectRef idx="2">
-            <a:schemeClr val="accent1"/>
-          </a:effectRef>
-          <a:fontRef idx="minor">
-            <a:schemeClr val="lt1"/>
-          </a:fontRef>
-        </p:style>
-        <p:txBody>
-          <a:bodyPr rtlCol="0" anchor="ctr"/>
-          <a:lstStyle/>
-          <a:p>
-            <a:pPr algn="ctr"/>
-          </a:p>
-        </p:txBody>
-      </p:sp>
-      <p:sp>
-        <p:nvSpPr>
-          <p:cNvPr id="9" name="TextBox 8"/>
-          <p:cNvSpPr txBox="1"/>
-          <p:nvPr/>
-        </p:nvSpPr>
-        <p:spPr>
-          <a:xfrm>
-            <a:off x="1097280" y="1563624"/>
-            <a:ext cx="10362895" cy="402336"/>
-          </a:xfrm>
-          <a:prstGeom prst="rect">
-            <a:avLst/>
-          </a:prstGeom>
-          <a:noFill/>
-        </p:spPr>
-        <p:txBody>
-          <a:bodyPr wrap="square" anchor="ctr"/>
-          <a:lstStyle/>
-          <a:p>
-            <a:r>
-              <a:rPr sz="1500" b="1" i="0">
-                <a:solidFill>
-                  <a:srgbClr val="333333"/>
-                </a:solidFill>
-                <a:latin typeface="Calibri"/>
-              </a:rPr>
-              <a:t>LOS HECHOS, SIN ADJETIVOS</a:t>
-            </a:r>
-            <a:r>
-              <a:rPr sz="1500" b="0" i="0">
-                <a:solidFill>
-                  <a:srgbClr val="333333"/>
-                </a:solidFill>
-                <a:latin typeface="Calibri"/>
-              </a:rPr>
-              <a:t> — Qué pasó, en cinco líneas máximo: qué sistema era, qué hizo, a quién afectó y cómo se supo. Sin opinión todavía.</a:t>
-            </a:r>
-          </a:p>
-        </p:txBody>
-      </p:sp>
-      <p:sp>
-        <p:nvSpPr>
-          <p:cNvPr id="10" name="Rounded Rectangle 9"/>
-          <p:cNvSpPr/>
-          <p:nvPr/>
-        </p:nvSpPr>
-        <p:spPr>
-          <a:xfrm>
-            <a:off x="457200" y="2148839"/>
-            <a:ext cx="11277295" cy="566928"/>
-          </a:xfrm>
-          <a:prstGeom prst="roundRect">
-            <a:avLst>
-              <a:gd name="adj" fmla="val 12000"/>
-            </a:avLst>
-          </a:prstGeom>
-          <a:solidFill>
-            <a:srgbClr val="F2F2F2"/>
-          </a:solidFill>
-          <a:ln>
-            <a:noFill/>
-          </a:ln>
-        </p:spPr>
-        <p:style>
-          <a:lnRef idx="1">
-            <a:schemeClr val="accent1"/>
-          </a:lnRef>
-          <a:fillRef idx="3">
-            <a:schemeClr val="accent1"/>
-          </a:fillRef>
-          <a:effectRef idx="2">
-            <a:schemeClr val="accent1"/>
-          </a:effectRef>
-          <a:fontRef idx="minor">
-            <a:schemeClr val="lt1"/>
-          </a:fontRef>
-        </p:style>
-        <p:txBody>
-          <a:bodyPr rtlCol="0" anchor="ctr"/>
-          <a:lstStyle/>
-          <a:p>
-            <a:pPr algn="ctr"/>
-          </a:p>
-        </p:txBody>
-      </p:sp>
-      <p:sp>
-        <p:nvSpPr>
-          <p:cNvPr id="11" name="Rectangle 10"/>
-          <p:cNvSpPr/>
-          <p:nvPr/>
-        </p:nvSpPr>
-        <p:spPr>
-          <a:xfrm>
-            <a:off x="640080" y="2295144"/>
-            <a:ext cx="274320" cy="274320"/>
-          </a:xfrm>
-          <a:prstGeom prst="rect">
-            <a:avLst/>
-          </a:prstGeom>
-          <a:solidFill>
-            <a:srgbClr val="FFFFFF"/>
-          </a:solidFill>
-          <a:ln>
-            <a:solidFill>
-              <a:srgbClr val="333333"/>
-            </a:solidFill>
-          </a:ln>
-        </p:spPr>
-        <p:style>
-          <a:lnRef idx="1">
-            <a:schemeClr val="accent1"/>
-          </a:lnRef>
-          <a:fillRef idx="3">
-            <a:schemeClr val="accent1"/>
-          </a:fillRef>
-          <a:effectRef idx="2">
-            <a:schemeClr val="accent1"/>
-          </a:effectRef>
-          <a:fontRef idx="minor">
-            <a:schemeClr val="lt1"/>
-          </a:fontRef>
-        </p:style>
-        <p:txBody>
-          <a:bodyPr rtlCol="0" anchor="ctr"/>
-          <a:lstStyle/>
-          <a:p>
-            <a:pPr algn="ctr"/>
-          </a:p>
-        </p:txBody>
-      </p:sp>
-      <p:sp>
-        <p:nvSpPr>
-          <p:cNvPr id="12" name="Rectangle 11"/>
-          <p:cNvSpPr/>
-          <p:nvPr/>
-        </p:nvSpPr>
-        <p:spPr>
-          <a:xfrm>
-            <a:off x="640080" y="2295144"/>
-            <a:ext cx="73152" cy="274320"/>
-          </a:xfrm>
-          <a:prstGeom prst="rect">
-            <a:avLst/>
-          </a:prstGeom>
-          <a:solidFill>
-            <a:srgbClr val="269CCB"/>
-          </a:solidFill>
-          <a:ln>
-            <a:noFill/>
-          </a:ln>
-        </p:spPr>
-        <p:style>
-          <a:lnRef idx="1">
-            <a:schemeClr val="accent1"/>
-          </a:lnRef>
-          <a:fillRef idx="3">
-            <a:schemeClr val="accent1"/>
-          </a:fillRef>
-          <a:effectRef idx="2">
-            <a:schemeClr val="accent1"/>
-          </a:effectRef>
-          <a:fontRef idx="minor">
-            <a:schemeClr val="lt1"/>
-          </a:fontRef>
-        </p:style>
-        <p:txBody>
-          <a:bodyPr rtlCol="0" anchor="ctr"/>
-          <a:lstStyle/>
-          <a:p>
-            <a:pPr algn="ctr"/>
-          </a:p>
-        </p:txBody>
-      </p:sp>
-      <p:sp>
-        <p:nvSpPr>
-          <p:cNvPr id="13" name="TextBox 12"/>
-          <p:cNvSpPr txBox="1"/>
-          <p:nvPr/>
-        </p:nvSpPr>
-        <p:spPr>
-          <a:xfrm>
-            <a:off x="1097280" y="2240279"/>
-            <a:ext cx="10362895" cy="402336"/>
-          </a:xfrm>
-          <a:prstGeom prst="rect">
-            <a:avLst/>
-          </a:prstGeom>
-          <a:noFill/>
-        </p:spPr>
-        <p:txBody>
-          <a:bodyPr wrap="square" anchor="ctr"/>
-          <a:lstStyle/>
-          <a:p>
-            <a:r>
-              <a:rPr sz="1500" b="1" i="0">
-                <a:solidFill>
-                  <a:srgbClr val="333333"/>
-                </a:solidFill>
-                <a:latin typeface="Calibri"/>
-              </a:rPr>
-              <a:t>QUIÉN DECIDIÓ QUÉ</a:t>
-            </a:r>
-            <a:r>
-              <a:rPr sz="1500" b="0" i="0">
-                <a:solidFill>
-                  <a:srgbClr val="333333"/>
-                </a:solidFill>
-                <a:latin typeface="Calibri"/>
-              </a:rPr>
-              <a:t> — La decisión concreta que causó el daño y </a:t>
-            </a:r>
-            <a:r>
-              <a:rPr sz="1500" b="1" i="0">
-                <a:solidFill>
-                  <a:srgbClr val="333333"/>
-                </a:solidFill>
-                <a:latin typeface="Calibri"/>
-              </a:rPr>
-              <a:t>quién la tomó</a:t>
-            </a:r>
-            <a:r>
-              <a:rPr sz="1500" b="0" i="0">
-                <a:solidFill>
-                  <a:srgbClr val="333333"/>
-                </a:solidFill>
-                <a:latin typeface="Calibri"/>
-              </a:rPr>
-              <a:t> (el rol: el diseñador, el gerente de producto, el ingeniero que ejecutó). Si fueron varias personas en cadena, escriban la cadena.</a:t>
-            </a:r>
-          </a:p>
-        </p:txBody>
-      </p:sp>
-      <p:sp>
-        <p:nvSpPr>
-          <p:cNvPr id="14" name="Rounded Rectangle 13"/>
-          <p:cNvSpPr/>
-          <p:nvPr/>
-        </p:nvSpPr>
-        <p:spPr>
-          <a:xfrm>
-            <a:off x="457200" y="2825496"/>
-            <a:ext cx="11277295" cy="566928"/>
-          </a:xfrm>
-          <a:prstGeom prst="roundRect">
-            <a:avLst>
-              <a:gd name="adj" fmla="val 12000"/>
-            </a:avLst>
-          </a:prstGeom>
-          <a:solidFill>
-            <a:srgbClr val="F2F2F2"/>
-          </a:solidFill>
-          <a:ln>
-            <a:noFill/>
-          </a:ln>
-        </p:spPr>
-        <p:style>
-          <a:lnRef idx="1">
-            <a:schemeClr val="accent1"/>
-          </a:lnRef>
-          <a:fillRef idx="3">
-            <a:schemeClr val="accent1"/>
-          </a:fillRef>
-          <a:effectRef idx="2">
-            <a:schemeClr val="accent1"/>
-          </a:effectRef>
-          <a:fontRef idx="minor">
-            <a:schemeClr val="lt1"/>
-          </a:fontRef>
-        </p:style>
-        <p:txBody>
-          <a:bodyPr rtlCol="0" anchor="ctr"/>
-          <a:lstStyle/>
-          <a:p>
-            <a:pPr algn="ctr"/>
-          </a:p>
-        </p:txBody>
-      </p:sp>
-      <p:sp>
-        <p:nvSpPr>
-          <p:cNvPr id="15" name="Rectangle 14"/>
-          <p:cNvSpPr/>
-          <p:nvPr/>
-        </p:nvSpPr>
-        <p:spPr>
-          <a:xfrm>
-            <a:off x="640080" y="2971800"/>
-            <a:ext cx="274320" cy="274320"/>
-          </a:xfrm>
-          <a:prstGeom prst="rect">
-            <a:avLst/>
-          </a:prstGeom>
-          <a:solidFill>
-            <a:srgbClr val="FFFFFF"/>
-          </a:solidFill>
-          <a:ln>
-            <a:solidFill>
-              <a:srgbClr val="333333"/>
-            </a:solidFill>
-          </a:ln>
-        </p:spPr>
-        <p:style>
-          <a:lnRef idx="1">
-            <a:schemeClr val="accent1"/>
-          </a:lnRef>
-          <a:fillRef idx="3">
-            <a:schemeClr val="accent1"/>
-          </a:fillRef>
-          <a:effectRef idx="2">
-            <a:schemeClr val="accent1"/>
-          </a:effectRef>
-          <a:fontRef idx="minor">
-            <a:schemeClr val="lt1"/>
-          </a:fontRef>
-        </p:style>
-        <p:txBody>
-          <a:bodyPr rtlCol="0" anchor="ctr"/>
-          <a:lstStyle/>
-          <a:p>
-            <a:pPr algn="ctr"/>
-          </a:p>
-        </p:txBody>
-      </p:sp>
-      <p:sp>
-        <p:nvSpPr>
-          <p:cNvPr id="16" name="Rectangle 15"/>
-          <p:cNvSpPr/>
-          <p:nvPr/>
-        </p:nvSpPr>
-        <p:spPr>
-          <a:xfrm>
-            <a:off x="640080" y="2971800"/>
-            <a:ext cx="73152" cy="274320"/>
-          </a:xfrm>
-          <a:prstGeom prst="rect">
-            <a:avLst/>
-          </a:prstGeom>
-          <a:solidFill>
-            <a:srgbClr val="269CCB"/>
-          </a:solidFill>
-          <a:ln>
-            <a:noFill/>
-          </a:ln>
-        </p:spPr>
-        <p:style>
-          <a:lnRef idx="1">
-            <a:schemeClr val="accent1"/>
-          </a:lnRef>
-          <a:fillRef idx="3">
-            <a:schemeClr val="accent1"/>
-          </a:fillRef>
-          <a:effectRef idx="2">
-            <a:schemeClr val="accent1"/>
-          </a:effectRef>
-          <a:fontRef idx="minor">
-            <a:schemeClr val="lt1"/>
-          </a:fontRef>
-        </p:style>
-        <p:txBody>
-          <a:bodyPr rtlCol="0" anchor="ctr"/>
-          <a:lstStyle/>
-          <a:p>
-            <a:pPr algn="ctr"/>
-          </a:p>
-        </p:txBody>
-      </p:sp>
-      <p:sp>
-        <p:nvSpPr>
-          <p:cNvPr id="17" name="TextBox 16"/>
-          <p:cNvSpPr txBox="1"/>
-          <p:nvPr/>
-        </p:nvSpPr>
-        <p:spPr>
-          <a:xfrm>
-            <a:off x="1097280" y="2916936"/>
-            <a:ext cx="10362895" cy="402336"/>
-          </a:xfrm>
-          <a:prstGeom prst="rect">
-            <a:avLst/>
-          </a:prstGeom>
-          <a:noFill/>
-        </p:spPr>
-        <p:txBody>
-          <a:bodyPr wrap="square" anchor="ctr"/>
-          <a:lstStyle/>
-          <a:p>
-            <a:r>
-              <a:rPr sz="1500" b="1" i="0">
-                <a:solidFill>
-                  <a:srgbClr val="333333"/>
-                </a:solidFill>
-                <a:latin typeface="Calibri"/>
-              </a:rPr>
-              <a:t>EL NUMERAL QUE SE VIOLÓ</a:t>
-            </a:r>
-            <a:r>
-              <a:rPr sz="1500" b="0" i="0">
-                <a:solidFill>
-                  <a:srgbClr val="333333"/>
-                </a:solidFill>
-                <a:latin typeface="Calibri"/>
-              </a:rPr>
-              <a:t> — Cite </a:t>
-            </a:r>
-            <a:r>
-              <a:rPr sz="1500" b="1" i="0">
-                <a:solidFill>
-                  <a:srgbClr val="333333"/>
-                </a:solidFill>
-                <a:latin typeface="Calibri"/>
-              </a:rPr>
-              <a:t>literalmente</a:t>
-            </a:r>
-            <a:r>
-              <a:rPr sz="1500" b="0" i="0">
-                <a:solidFill>
-                  <a:srgbClr val="333333"/>
-                </a:solidFill>
-                <a:latin typeface="Calibri"/>
-              </a:rPr>
-              <a:t> al menos un principio del código ACM/IEEE o un artículo de la Ley 842 de 2003, la Ley 1581 de 2012 o la Ley 1273 de 2009, y explique en dos líneas por qué aplica a este caso.</a:t>
-            </a:r>
-          </a:p>
-        </p:txBody>
-      </p:sp>
-      <p:sp>
-        <p:nvSpPr>
-          <p:cNvPr id="18" name="Rounded Rectangle 17"/>
-          <p:cNvSpPr/>
-          <p:nvPr/>
-        </p:nvSpPr>
-        <p:spPr>
-          <a:xfrm>
-            <a:off x="457200" y="3502152"/>
-            <a:ext cx="11277295" cy="566928"/>
-          </a:xfrm>
-          <a:prstGeom prst="roundRect">
-            <a:avLst>
-              <a:gd name="adj" fmla="val 12000"/>
-            </a:avLst>
-          </a:prstGeom>
-          <a:solidFill>
-            <a:srgbClr val="F2F2F2"/>
-          </a:solidFill>
-          <a:ln>
-            <a:noFill/>
-          </a:ln>
-        </p:spPr>
-        <p:style>
-          <a:lnRef idx="1">
-            <a:schemeClr val="accent1"/>
-          </a:lnRef>
-          <a:fillRef idx="3">
-            <a:schemeClr val="accent1"/>
-          </a:fillRef>
-          <a:effectRef idx="2">
-            <a:schemeClr val="accent1"/>
-          </a:effectRef>
-          <a:fontRef idx="minor">
-            <a:schemeClr val="lt1"/>
-          </a:fontRef>
-        </p:style>
-        <p:txBody>
-          <a:bodyPr rtlCol="0" anchor="ctr"/>
-          <a:lstStyle/>
-          <a:p>
-            <a:pPr algn="ctr"/>
-          </a:p>
-        </p:txBody>
-      </p:sp>
-      <p:sp>
-        <p:nvSpPr>
-          <p:cNvPr id="19" name="Rectangle 18"/>
-          <p:cNvSpPr/>
-          <p:nvPr/>
-        </p:nvSpPr>
-        <p:spPr>
-          <a:xfrm>
-            <a:off x="640080" y="3648456"/>
-            <a:ext cx="274320" cy="274320"/>
-          </a:xfrm>
-          <a:prstGeom prst="rect">
-            <a:avLst/>
-          </a:prstGeom>
-          <a:solidFill>
-            <a:srgbClr val="FFFFFF"/>
-          </a:solidFill>
-          <a:ln>
-            <a:solidFill>
-              <a:srgbClr val="333333"/>
-            </a:solidFill>
-          </a:ln>
-        </p:spPr>
-        <p:style>
-          <a:lnRef idx="1">
-            <a:schemeClr val="accent1"/>
-          </a:lnRef>
-          <a:fillRef idx="3">
-            <a:schemeClr val="accent1"/>
-          </a:fillRef>
-          <a:effectRef idx="2">
-            <a:schemeClr val="accent1"/>
-          </a:effectRef>
-          <a:fontRef idx="minor">
-            <a:schemeClr val="lt1"/>
-          </a:fontRef>
-        </p:style>
-        <p:txBody>
-          <a:bodyPr rtlCol="0" anchor="ctr"/>
-          <a:lstStyle/>
-          <a:p>
-            <a:pPr algn="ctr"/>
-          </a:p>
-        </p:txBody>
-      </p:sp>
-      <p:sp>
-        <p:nvSpPr>
-          <p:cNvPr id="20" name="Rectangle 19"/>
-          <p:cNvSpPr/>
-          <p:nvPr/>
-        </p:nvSpPr>
-        <p:spPr>
-          <a:xfrm>
-            <a:off x="640080" y="3648456"/>
-            <a:ext cx="73152" cy="274320"/>
-          </a:xfrm>
-          <a:prstGeom prst="rect">
-            <a:avLst/>
-          </a:prstGeom>
-          <a:solidFill>
-            <a:srgbClr val="269CCB"/>
-          </a:solidFill>
-          <a:ln>
-            <a:noFill/>
-          </a:ln>
-        </p:spPr>
-        <p:style>
-          <a:lnRef idx="1">
-            <a:schemeClr val="accent1"/>
-          </a:lnRef>
-          <a:fillRef idx="3">
-            <a:schemeClr val="accent1"/>
-          </a:fillRef>
-          <a:effectRef idx="2">
-            <a:schemeClr val="accent1"/>
-          </a:effectRef>
-          <a:fontRef idx="minor">
-            <a:schemeClr val="lt1"/>
-          </a:fontRef>
-        </p:style>
-        <p:txBody>
-          <a:bodyPr rtlCol="0" anchor="ctr"/>
-          <a:lstStyle/>
-          <a:p>
-            <a:pPr algn="ctr"/>
-          </a:p>
-        </p:txBody>
-      </p:sp>
-      <p:sp>
-        <p:nvSpPr>
-          <p:cNvPr id="21" name="TextBox 20"/>
-          <p:cNvSpPr txBox="1"/>
-          <p:nvPr/>
-        </p:nvSpPr>
-        <p:spPr>
-          <a:xfrm>
-            <a:off x="1097280" y="3593592"/>
-            <a:ext cx="10362895" cy="402336"/>
-          </a:xfrm>
-          <a:prstGeom prst="rect">
-            <a:avLst/>
-          </a:prstGeom>
-          <a:noFill/>
-        </p:spPr>
-        <p:txBody>
-          <a:bodyPr wrap="square" anchor="ctr"/>
-          <a:lstStyle/>
-          <a:p>
-            <a:r>
-              <a:rPr sz="1500" b="1" i="0">
-                <a:solidFill>
-                  <a:srgbClr val="333333"/>
-                </a:solidFill>
-                <a:latin typeface="Calibri"/>
-              </a:rPr>
-              <a:t>EL MOMENTO EN QUE SE PUDO PARAR</a:t>
-            </a:r>
-            <a:r>
-              <a:rPr sz="1500" b="0" i="0">
-                <a:solidFill>
-                  <a:srgbClr val="333333"/>
-                </a:solidFill>
-                <a:latin typeface="Calibri"/>
-              </a:rPr>
-              <a:t> — El momento </a:t>
-            </a:r>
-            <a:r>
-              <a:rPr sz="1500" b="1" i="0">
-                <a:solidFill>
-                  <a:srgbClr val="333333"/>
-                </a:solidFill>
-                <a:latin typeface="Calibri"/>
-              </a:rPr>
-              <a:t>más temprano</a:t>
-            </a:r>
-            <a:r>
-              <a:rPr sz="1500" b="0" i="0">
-                <a:solidFill>
-                  <a:srgbClr val="333333"/>
-                </a:solidFill>
-                <a:latin typeface="Calibri"/>
-              </a:rPr>
-              <a:t> en que alguien con la información disponible podía cambiar el resultado, y qué debía hacer exactamente ahí (a quién decirle qué, y por escrito o no).</a:t>
-            </a:r>
-          </a:p>
-        </p:txBody>
-      </p:sp>
-      <p:sp>
-        <p:nvSpPr>
-          <p:cNvPr id="22" name="Rounded Rectangle 21"/>
-          <p:cNvSpPr/>
-          <p:nvPr/>
-        </p:nvSpPr>
-        <p:spPr>
-          <a:xfrm>
-            <a:off x="457200" y="4178808"/>
-            <a:ext cx="11277295" cy="566928"/>
-          </a:xfrm>
-          <a:prstGeom prst="roundRect">
-            <a:avLst>
-              <a:gd name="adj" fmla="val 12000"/>
-            </a:avLst>
-          </a:prstGeom>
-          <a:solidFill>
-            <a:srgbClr val="F2F2F2"/>
-          </a:solidFill>
-          <a:ln>
-            <a:noFill/>
-          </a:ln>
-        </p:spPr>
-        <p:style>
-          <a:lnRef idx="1">
-            <a:schemeClr val="accent1"/>
-          </a:lnRef>
-          <a:fillRef idx="3">
-            <a:schemeClr val="accent1"/>
-          </a:fillRef>
-          <a:effectRef idx="2">
-            <a:schemeClr val="accent1"/>
-          </a:effectRef>
-          <a:fontRef idx="minor">
-            <a:schemeClr val="lt1"/>
-          </a:fontRef>
-        </p:style>
-        <p:txBody>
-          <a:bodyPr rtlCol="0" anchor="ctr"/>
-          <a:lstStyle/>
-          <a:p>
-            <a:pPr algn="ctr"/>
-          </a:p>
-        </p:txBody>
-      </p:sp>
-      <p:sp>
-        <p:nvSpPr>
-          <p:cNvPr id="23" name="Rectangle 22"/>
-          <p:cNvSpPr/>
-          <p:nvPr/>
-        </p:nvSpPr>
-        <p:spPr>
-          <a:xfrm>
-            <a:off x="640080" y="4325112"/>
-            <a:ext cx="274320" cy="274320"/>
-          </a:xfrm>
-          <a:prstGeom prst="rect">
-            <a:avLst/>
-          </a:prstGeom>
-          <a:solidFill>
-            <a:srgbClr val="FFFFFF"/>
-          </a:solidFill>
-          <a:ln>
-            <a:solidFill>
-              <a:srgbClr val="333333"/>
-            </a:solidFill>
-          </a:ln>
-        </p:spPr>
-        <p:style>
-          <a:lnRef idx="1">
-            <a:schemeClr val="accent1"/>
-          </a:lnRef>
-          <a:fillRef idx="3">
-            <a:schemeClr val="accent1"/>
-          </a:fillRef>
-          <a:effectRef idx="2">
-            <a:schemeClr val="accent1"/>
-          </a:effectRef>
-          <a:fontRef idx="minor">
-            <a:schemeClr val="lt1"/>
-          </a:fontRef>
-        </p:style>
-        <p:txBody>
-          <a:bodyPr rtlCol="0" anchor="ctr"/>
-          <a:lstStyle/>
-          <a:p>
-            <a:pPr algn="ctr"/>
-          </a:p>
-        </p:txBody>
-      </p:sp>
-      <p:sp>
-        <p:nvSpPr>
-          <p:cNvPr id="24" name="Rectangle 23"/>
-          <p:cNvSpPr/>
-          <p:nvPr/>
-        </p:nvSpPr>
-        <p:spPr>
-          <a:xfrm>
-            <a:off x="640080" y="4325112"/>
-            <a:ext cx="73152" cy="274320"/>
-          </a:xfrm>
-          <a:prstGeom prst="rect">
-            <a:avLst/>
-          </a:prstGeom>
-          <a:solidFill>
-            <a:srgbClr val="269CCB"/>
-          </a:solidFill>
-          <a:ln>
-            <a:noFill/>
-          </a:ln>
-        </p:spPr>
-        <p:style>
-          <a:lnRef idx="1">
-            <a:schemeClr val="accent1"/>
-          </a:lnRef>
-          <a:fillRef idx="3">
-            <a:schemeClr val="accent1"/>
-          </a:fillRef>
-          <a:effectRef idx="2">
-            <a:schemeClr val="accent1"/>
-          </a:effectRef>
-          <a:fontRef idx="minor">
-            <a:schemeClr val="lt1"/>
-          </a:fontRef>
-        </p:style>
-        <p:txBody>
-          <a:bodyPr rtlCol="0" anchor="ctr"/>
-          <a:lstStyle/>
-          <a:p>
-            <a:pPr algn="ctr"/>
-          </a:p>
-        </p:txBody>
-      </p:sp>
-      <p:sp>
-        <p:nvSpPr>
-          <p:cNvPr id="25" name="TextBox 24"/>
-          <p:cNvSpPr txBox="1"/>
-          <p:nvPr/>
-        </p:nvSpPr>
-        <p:spPr>
-          <a:xfrm>
-            <a:off x="1097280" y="4270248"/>
-            <a:ext cx="10362895" cy="402336"/>
-          </a:xfrm>
-          <a:prstGeom prst="rect">
-            <a:avLst/>
-          </a:prstGeom>
-          <a:noFill/>
-        </p:spPr>
-        <p:txBody>
-          <a:bodyPr wrap="square" anchor="ctr"/>
-          <a:lstStyle/>
-          <a:p>
-            <a:r>
-              <a:rPr sz="1500" b="1" i="0">
-                <a:solidFill>
-                  <a:srgbClr val="333333"/>
-                </a:solidFill>
-                <a:latin typeface="Calibri"/>
-              </a:rPr>
-              <a:t>LA REGLA QUE SE LLEVAN</a:t>
-            </a:r>
-            <a:r>
-              <a:rPr sz="1500" b="0" i="0">
-                <a:solidFill>
-                  <a:srgbClr val="333333"/>
-                </a:solidFill>
-                <a:latin typeface="Calibri"/>
-              </a:rPr>
-              <a:t> — Una regla en una frase, escrita para ustedes mismos, que evite repetir esto en el proyecto de este curso. Tiene que ser verificable.</a:t>
-            </a:r>
-          </a:p>
-        </p:txBody>
-      </p:sp>
-      <p:sp>
-        <p:nvSpPr>
-          <p:cNvPr id="26" name="TextBox 25"/>
+            <a:pPr>
+              <a:spcAft>
+                <a:spcPts val="800"/>
+              </a:spcAft>
+            </a:pPr>
+            <a:r>
+              <a:rPr sz="1900" b="0" i="0">
+                <a:solidFill>
+                  <a:srgbClr val="333333"/>
+                </a:solidFill>
+                <a:latin typeface="Calibri"/>
+              </a:rPr>
+              <a:t>–   La apertura de hoy es un caso verdadero y conviene no revelar el nombre en el primer minuto, porque la fuerza está en la pregunta.</a:t>
+            </a:r>
+          </a:p>
+          <a:p>
+            <a:pPr>
+              <a:spcAft>
+                <a:spcPts val="800"/>
+              </a:spcAft>
+            </a:pPr>
+            <a:r>
+              <a:rPr sz="1900" b="0" i="0">
+                <a:solidFill>
+                  <a:srgbClr val="333333"/>
+                </a:solidFill>
+                <a:latin typeface="Calibri"/>
+              </a:rPr>
+              <a:t>–   Un ingeniero de Volkswagen escribió el software que detectaba cuándo el carro estaba en la prueba de emisiones para bajar los contaminantes solo durante el examen.</a:t>
+            </a:r>
+          </a:p>
+          <a:p>
+            <a:pPr>
+              <a:spcAft>
+                <a:spcPts val="800"/>
+              </a:spcAft>
+            </a:pPr>
+            <a:r>
+              <a:rPr sz="1900" b="0" i="0">
+                <a:solidFill>
+                  <a:srgbClr val="333333"/>
+                </a:solidFill>
+                <a:latin typeface="Calibri"/>
+              </a:rPr>
+              <a:t>–   El software funcionaba perfecto: hacía exactamente lo que se le pidió, sin errores.</a:t>
+            </a:r>
+          </a:p>
+          <a:p>
+            <a:pPr>
+              <a:spcAft>
+                <a:spcPts val="800"/>
+              </a:spcAft>
+            </a:pPr>
+            <a:r>
+              <a:rPr sz="1900" b="0" i="0">
+                <a:solidFill>
+                  <a:srgbClr val="333333"/>
+                </a:solidFill>
+                <a:latin typeface="Calibri"/>
+              </a:rPr>
+              <a:t>–   En 2017 ese ingeniero se declaró culpable en Estados Unidos y fue condenado a cuarenta meses de prisión, además de una multa.</a:t>
+            </a:r>
+          </a:p>
+          <a:p>
+            <a:pPr>
+              <a:spcAft>
+                <a:spcPts val="800"/>
+              </a:spcAft>
+            </a:pPr>
+            <a:r>
+              <a:rPr sz="1900" b="0" i="0">
+                <a:solidFill>
+                  <a:srgbClr val="333333"/>
+                </a:solidFill>
+                <a:latin typeface="Calibri"/>
+              </a:rPr>
+              <a:t>–   El estudiante de primer semestre tiene interiorizada la idea de que la responsabilidad es del jefe y que el programador ejecuta.</a:t>
+            </a:r>
+          </a:p>
+          <a:p>
+            <a:pPr>
+              <a:spcAft>
+                <a:spcPts val="800"/>
+              </a:spcAft>
+            </a:pPr>
+            <a:r>
+              <a:rPr sz="1900" b="0" i="0">
+                <a:solidFill>
+                  <a:srgbClr val="333333"/>
+                </a:solidFill>
+                <a:latin typeface="Calibri"/>
+              </a:rPr>
+              <a:t>–   Este caso la rompe con un hecho verificable, y por eso es mejor abrir con él que con una definición de ética.</a:t>
+            </a:r>
+          </a:p>
+          <a:p>
+            <a:pPr>
+              <a:spcAft>
+                <a:spcPts val="800"/>
+              </a:spcAft>
+            </a:pPr>
+            <a:r>
+              <a:rPr sz="1900" b="0" i="0">
+                <a:solidFill>
+                  <a:srgbClr val="333333"/>
+                </a:solidFill>
+                <a:latin typeface="Calibri"/>
+              </a:rPr>
+              <a:t>–   Recoja las respuestas en el muro los primeros diez minutos —van a aparecer «robó», «hackeó», «se equivocó»— y en el minuto 30</a:t>
+            </a:r>
+          </a:p>
+          <a:p>
+            <a:pPr>
+              <a:spcAft>
+                <a:spcPts val="800"/>
+              </a:spcAft>
+            </a:pPr>
+            <a:r>
+              <a:rPr sz="1900" b="0" i="0">
+                <a:solidFill>
+                  <a:srgbClr val="333333"/>
+                </a:solidFill>
+                <a:latin typeface="Calibri"/>
+              </a:rPr>
+              <a:t>–   Cuando llegue al caso en la tabla, muestre que ninguna era: </a:t>
+            </a:r>
+            <a:r>
+              <a:rPr sz="1900" b="1" i="0">
+                <a:solidFill>
+                  <a:srgbClr val="333333"/>
+                </a:solidFill>
+                <a:latin typeface="Calibri"/>
+              </a:rPr>
+              <a:t>no hubo error, no hubo robo, hubo una decisión de diseño que se ejecutó bien</a:t>
+            </a:r>
+            <a:r>
+              <a:rPr sz="1900" b="0" i="0">
+                <a:solidFill>
+                  <a:srgbClr val="333333"/>
+                </a:solidFill>
+                <a:latin typeface="Calibri"/>
+              </a:rPr>
+              <a:t>.</a:t>
+            </a:r>
+          </a:p>
+        </p:txBody>
+      </p:sp>
+      <p:sp>
+        <p:nvSpPr>
+          <p:cNvPr id="6" name="TextBox 5"/>
           <p:cNvSpPr txBox="1"/>
           <p:nvPr/>
         </p:nvSpPr>
@@ -4651,7 +3875,7 @@
         <p:spPr>
           <a:xfrm>
             <a:off x="0" y="0"/>
-            <a:ext cx="12191695" cy="1170432"/>
+            <a:ext cx="12191695" cy="960120"/>
           </a:xfrm>
           <a:prstGeom prst="rect">
             <a:avLst/>
@@ -4693,7 +3917,7 @@
         </p:nvSpPr>
         <p:spPr>
           <a:xfrm>
-            <a:off x="0" y="1170432"/>
+            <a:off x="0" y="960120"/>
             <a:ext cx="12191695" cy="41148"/>
           </a:xfrm>
           <a:prstGeom prst="rect">
@@ -4737,7 +3961,7 @@
         <p:spPr>
           <a:xfrm>
             <a:off x="457200" y="164592"/>
-            <a:ext cx="11277295" cy="384048"/>
+            <a:ext cx="11277295" cy="502920"/>
           </a:xfrm>
           <a:prstGeom prst="rect">
             <a:avLst/>
@@ -4757,7 +3981,7 @@
                 </a:solidFill>
                 <a:latin typeface="Calibri"/>
               </a:rPr>
-              <a:t>Cómo se expone en 3 minutos</a:t>
+              <a:t>Qué es la ética en una profesión y qué no es (1/3)</a:t>
             </a:r>
           </a:p>
         </p:txBody>
@@ -4770,8 +3994,8 @@
         </p:nvSpPr>
         <p:spPr>
           <a:xfrm>
-            <a:off x="457200" y="566928"/>
-            <a:ext cx="11277295" cy="411480"/>
+            <a:off x="457200" y="1170432"/>
+            <a:ext cx="11277295" cy="5230368"/>
           </a:xfrm>
           <a:prstGeom prst="rect">
             <a:avLst/>
@@ -4784,876 +4008,126 @@
           </a:bodyPr>
           <a:lstStyle/>
           <a:p>
-            <a:r>
-              <a:rPr sz="1400" b="0" i="0">
-                <a:solidFill>
-                  <a:srgbClr val="B8D8EE"/>
-                </a:solidFill>
-                <a:latin typeface="Calibri"/>
-              </a:rPr>
-              <a:t>Habla el vocero con la pantalla ya compartida · cronómetro en pantalla · se corta al llegar a cero</a:t>
-            </a:r>
-          </a:p>
-        </p:txBody>
-      </p:sp>
-      <p:sp>
-        <p:nvSpPr>
-          <p:cNvPr id="6" name="Rounded Rectangle 5"/>
-          <p:cNvSpPr/>
-          <p:nvPr/>
-        </p:nvSpPr>
-        <p:spPr>
-          <a:xfrm>
-            <a:off x="457200" y="1444752"/>
-            <a:ext cx="11277295" cy="908913"/>
-          </a:xfrm>
-          <a:prstGeom prst="roundRect">
-            <a:avLst>
-              <a:gd name="adj" fmla="val 12000"/>
-            </a:avLst>
-          </a:prstGeom>
-          <a:solidFill>
-            <a:srgbClr val="F2F2F2"/>
-          </a:solidFill>
-          <a:ln>
-            <a:noFill/>
-          </a:ln>
-        </p:spPr>
-        <p:style>
-          <a:lnRef idx="1">
-            <a:schemeClr val="accent1"/>
-          </a:lnRef>
-          <a:fillRef idx="3">
-            <a:schemeClr val="accent1"/>
-          </a:fillRef>
-          <a:effectRef idx="2">
-            <a:schemeClr val="accent1"/>
-          </a:effectRef>
-          <a:fontRef idx="minor">
-            <a:schemeClr val="lt1"/>
-          </a:fontRef>
-        </p:style>
-        <p:txBody>
-          <a:bodyPr rtlCol="0" anchor="ctr"/>
-          <a:lstStyle/>
-          <a:p>
-            <a:pPr algn="ctr"/>
-          </a:p>
-        </p:txBody>
-      </p:sp>
-      <p:sp>
-        <p:nvSpPr>
-          <p:cNvPr id="7" name="Rounded Rectangle 6"/>
-          <p:cNvSpPr/>
-          <p:nvPr/>
-        </p:nvSpPr>
-        <p:spPr>
-          <a:xfrm>
-            <a:off x="594360" y="1679752"/>
-            <a:ext cx="438912" cy="438912"/>
-          </a:xfrm>
-          <a:prstGeom prst="roundRect">
-            <a:avLst>
-              <a:gd name="adj" fmla="val 12000"/>
-            </a:avLst>
-          </a:prstGeom>
-          <a:solidFill>
-            <a:srgbClr val="095292"/>
-          </a:solidFill>
-          <a:ln>
-            <a:noFill/>
-          </a:ln>
-        </p:spPr>
-        <p:style>
-          <a:lnRef idx="1">
-            <a:schemeClr val="accent1"/>
-          </a:lnRef>
-          <a:fillRef idx="3">
-            <a:schemeClr val="accent1"/>
-          </a:fillRef>
-          <a:effectRef idx="2">
-            <a:schemeClr val="accent1"/>
-          </a:effectRef>
-          <a:fontRef idx="minor">
-            <a:schemeClr val="lt1"/>
-          </a:fontRef>
-        </p:style>
-        <p:txBody>
-          <a:bodyPr rtlCol="0" anchor="ctr"/>
-          <a:lstStyle/>
-          <a:p>
-            <a:pPr algn="ctr"/>
-          </a:p>
-        </p:txBody>
-      </p:sp>
-      <p:sp>
-        <p:nvSpPr>
-          <p:cNvPr id="8" name="TextBox 7"/>
-          <p:cNvSpPr txBox="1"/>
-          <p:nvPr/>
-        </p:nvSpPr>
-        <p:spPr>
-          <a:xfrm>
-            <a:off x="594360" y="1679752"/>
-            <a:ext cx="438912" cy="438912"/>
-          </a:xfrm>
-          <a:prstGeom prst="rect">
-            <a:avLst/>
-          </a:prstGeom>
-          <a:noFill/>
-        </p:spPr>
-        <p:txBody>
-          <a:bodyPr wrap="square" anchor="ctr"/>
-          <a:lstStyle/>
-          <a:p>
-            <a:pPr algn="ctr"/>
-            <a:r>
-              <a:rPr sz="1600" b="1" i="0">
-                <a:solidFill>
-                  <a:srgbClr val="FFFFFF"/>
-                </a:solidFill>
-                <a:latin typeface="Calibri"/>
-              </a:rPr>
-              <a:t>1</a:t>
-            </a:r>
-          </a:p>
-        </p:txBody>
-      </p:sp>
-      <p:sp>
-        <p:nvSpPr>
-          <p:cNvPr id="9" name="TextBox 8"/>
-          <p:cNvSpPr txBox="1"/>
-          <p:nvPr/>
-        </p:nvSpPr>
-        <p:spPr>
-          <a:xfrm>
-            <a:off x="1188720" y="1536192"/>
-            <a:ext cx="10271455" cy="744321"/>
-          </a:xfrm>
-          <a:prstGeom prst="rect">
-            <a:avLst/>
-          </a:prstGeom>
-          <a:noFill/>
-        </p:spPr>
-        <p:txBody>
-          <a:bodyPr wrap="square" anchor="ctr"/>
-          <a:lstStyle/>
-          <a:p>
-            <a:r>
-              <a:rPr sz="1500" b="1" i="0">
-                <a:solidFill>
-                  <a:srgbClr val="095292"/>
-                </a:solidFill>
-                <a:latin typeface="Calibri"/>
-              </a:rPr>
-              <a:t>30 s · Los hechos</a:t>
-            </a:r>
-          </a:p>
-          <a:p>
             <a:pPr>
-              <a:spcBef>
-                <a:spcPts val="200"/>
-              </a:spcBef>
+              <a:spcAft>
+                <a:spcPts val="800"/>
+              </a:spcAft>
             </a:pPr>
             <a:r>
-              <a:rPr sz="1300" b="0" i="0">
-                <a:solidFill>
-                  <a:srgbClr val="333333"/>
-                </a:solidFill>
-                <a:latin typeface="Calibri"/>
-              </a:rPr>
-              <a:t>Qué pasó, sin adjetivos. Cinco líneas dichas en medio minuto.</a:t>
-            </a:r>
-          </a:p>
-        </p:txBody>
-      </p:sp>
-      <p:sp>
-        <p:nvSpPr>
-          <p:cNvPr id="10" name="Rounded Rectangle 9"/>
-          <p:cNvSpPr/>
-          <p:nvPr/>
-        </p:nvSpPr>
-        <p:spPr>
-          <a:xfrm>
-            <a:off x="457200" y="2445105"/>
-            <a:ext cx="11277295" cy="908913"/>
-          </a:xfrm>
-          <a:prstGeom prst="roundRect">
-            <a:avLst>
-              <a:gd name="adj" fmla="val 12000"/>
-            </a:avLst>
-          </a:prstGeom>
-          <a:solidFill>
-            <a:srgbClr val="E8F4FA"/>
-          </a:solidFill>
-          <a:ln>
-            <a:noFill/>
-          </a:ln>
-        </p:spPr>
-        <p:style>
-          <a:lnRef idx="1">
-            <a:schemeClr val="accent1"/>
-          </a:lnRef>
-          <a:fillRef idx="3">
-            <a:schemeClr val="accent1"/>
-          </a:fillRef>
-          <a:effectRef idx="2">
-            <a:schemeClr val="accent1"/>
-          </a:effectRef>
-          <a:fontRef idx="minor">
-            <a:schemeClr val="lt1"/>
-          </a:fontRef>
-        </p:style>
-        <p:txBody>
-          <a:bodyPr rtlCol="0" anchor="ctr"/>
-          <a:lstStyle/>
-          <a:p>
-            <a:pPr algn="ctr"/>
-          </a:p>
-        </p:txBody>
-      </p:sp>
-      <p:sp>
-        <p:nvSpPr>
-          <p:cNvPr id="11" name="Rounded Rectangle 10"/>
-          <p:cNvSpPr/>
-          <p:nvPr/>
-        </p:nvSpPr>
-        <p:spPr>
-          <a:xfrm>
-            <a:off x="594360" y="2680106"/>
-            <a:ext cx="438912" cy="438912"/>
-          </a:xfrm>
-          <a:prstGeom prst="roundRect">
-            <a:avLst>
-              <a:gd name="adj" fmla="val 12000"/>
-            </a:avLst>
-          </a:prstGeom>
-          <a:solidFill>
-            <a:srgbClr val="095292"/>
-          </a:solidFill>
-          <a:ln>
-            <a:noFill/>
-          </a:ln>
-        </p:spPr>
-        <p:style>
-          <a:lnRef idx="1">
-            <a:schemeClr val="accent1"/>
-          </a:lnRef>
-          <a:fillRef idx="3">
-            <a:schemeClr val="accent1"/>
-          </a:fillRef>
-          <a:effectRef idx="2">
-            <a:schemeClr val="accent1"/>
-          </a:effectRef>
-          <a:fontRef idx="minor">
-            <a:schemeClr val="lt1"/>
-          </a:fontRef>
-        </p:style>
-        <p:txBody>
-          <a:bodyPr rtlCol="0" anchor="ctr"/>
-          <a:lstStyle/>
-          <a:p>
-            <a:pPr algn="ctr"/>
-          </a:p>
-        </p:txBody>
-      </p:sp>
-      <p:sp>
-        <p:nvSpPr>
-          <p:cNvPr id="12" name="TextBox 11"/>
-          <p:cNvSpPr txBox="1"/>
-          <p:nvPr/>
-        </p:nvSpPr>
-        <p:spPr>
-          <a:xfrm>
-            <a:off x="594360" y="2680106"/>
-            <a:ext cx="438912" cy="438912"/>
-          </a:xfrm>
-          <a:prstGeom prst="rect">
-            <a:avLst/>
-          </a:prstGeom>
-          <a:noFill/>
-        </p:spPr>
-        <p:txBody>
-          <a:bodyPr wrap="square" anchor="ctr"/>
-          <a:lstStyle/>
-          <a:p>
-            <a:pPr algn="ctr"/>
-            <a:r>
-              <a:rPr sz="1600" b="1" i="0">
-                <a:solidFill>
-                  <a:srgbClr val="FFFFFF"/>
-                </a:solidFill>
-                <a:latin typeface="Calibri"/>
-              </a:rPr>
-              <a:t>2</a:t>
-            </a:r>
-          </a:p>
-        </p:txBody>
-      </p:sp>
-      <p:sp>
-        <p:nvSpPr>
-          <p:cNvPr id="13" name="TextBox 12"/>
-          <p:cNvSpPr txBox="1"/>
-          <p:nvPr/>
-        </p:nvSpPr>
-        <p:spPr>
-          <a:xfrm>
-            <a:off x="1188720" y="2536545"/>
-            <a:ext cx="10271455" cy="744321"/>
-          </a:xfrm>
-          <a:prstGeom prst="rect">
-            <a:avLst/>
-          </a:prstGeom>
-          <a:noFill/>
-        </p:spPr>
-        <p:txBody>
-          <a:bodyPr wrap="square" anchor="ctr"/>
-          <a:lstStyle/>
-          <a:p>
-            <a:r>
-              <a:rPr sz="1500" b="1" i="0">
-                <a:solidFill>
-                  <a:srgbClr val="095292"/>
-                </a:solidFill>
-                <a:latin typeface="Calibri"/>
-              </a:rPr>
-              <a:t>40 s · Quién decidió</a:t>
+              <a:rPr sz="2000" b="0" i="0">
+                <a:solidFill>
+                  <a:srgbClr val="333333"/>
+                </a:solidFill>
+                <a:latin typeface="Calibri"/>
+              </a:rPr>
+              <a:t>–   Hay tres confusiones que hay que desmontar antes de tocar cualquier caso, porque si no</a:t>
             </a:r>
           </a:p>
           <a:p>
             <a:pPr>
-              <a:spcBef>
-                <a:spcPts val="200"/>
-              </a:spcBef>
+              <a:spcAft>
+                <a:spcPts val="800"/>
+              </a:spcAft>
             </a:pPr>
             <a:r>
-              <a:rPr sz="1300" b="0" i="0">
-                <a:solidFill>
-                  <a:srgbClr val="333333"/>
-                </a:solidFill>
-                <a:latin typeface="Calibri"/>
-              </a:rPr>
-              <a:t>La decisión y el rol de quien la tomó. No «la empresa».</a:t>
-            </a:r>
-          </a:p>
-        </p:txBody>
-      </p:sp>
-      <p:sp>
-        <p:nvSpPr>
-          <p:cNvPr id="14" name="Rounded Rectangle 13"/>
-          <p:cNvSpPr/>
-          <p:nvPr/>
-        </p:nvSpPr>
-        <p:spPr>
-          <a:xfrm>
-            <a:off x="457200" y="3445459"/>
-            <a:ext cx="11277295" cy="908913"/>
-          </a:xfrm>
-          <a:prstGeom prst="roundRect">
-            <a:avLst>
-              <a:gd name="adj" fmla="val 12000"/>
-            </a:avLst>
-          </a:prstGeom>
-          <a:solidFill>
-            <a:srgbClr val="F2F2F2"/>
-          </a:solidFill>
-          <a:ln>
-            <a:noFill/>
-          </a:ln>
-        </p:spPr>
-        <p:style>
-          <a:lnRef idx="1">
-            <a:schemeClr val="accent1"/>
-          </a:lnRef>
-          <a:fillRef idx="3">
-            <a:schemeClr val="accent1"/>
-          </a:fillRef>
-          <a:effectRef idx="2">
-            <a:schemeClr val="accent1"/>
-          </a:effectRef>
-          <a:fontRef idx="minor">
-            <a:schemeClr val="lt1"/>
-          </a:fontRef>
-        </p:style>
-        <p:txBody>
-          <a:bodyPr rtlCol="0" anchor="ctr"/>
-          <a:lstStyle/>
-          <a:p>
-            <a:pPr algn="ctr"/>
-          </a:p>
-        </p:txBody>
-      </p:sp>
-      <p:sp>
-        <p:nvSpPr>
-          <p:cNvPr id="15" name="Rounded Rectangle 14"/>
-          <p:cNvSpPr/>
-          <p:nvPr/>
-        </p:nvSpPr>
-        <p:spPr>
-          <a:xfrm>
-            <a:off x="594360" y="3680460"/>
-            <a:ext cx="438912" cy="438912"/>
-          </a:xfrm>
-          <a:prstGeom prst="roundRect">
-            <a:avLst>
-              <a:gd name="adj" fmla="val 12000"/>
-            </a:avLst>
-          </a:prstGeom>
-          <a:solidFill>
-            <a:srgbClr val="095292"/>
-          </a:solidFill>
-          <a:ln>
-            <a:noFill/>
-          </a:ln>
-        </p:spPr>
-        <p:style>
-          <a:lnRef idx="1">
-            <a:schemeClr val="accent1"/>
-          </a:lnRef>
-          <a:fillRef idx="3">
-            <a:schemeClr val="accent1"/>
-          </a:fillRef>
-          <a:effectRef idx="2">
-            <a:schemeClr val="accent1"/>
-          </a:effectRef>
-          <a:fontRef idx="minor">
-            <a:schemeClr val="lt1"/>
-          </a:fontRef>
-        </p:style>
-        <p:txBody>
-          <a:bodyPr rtlCol="0" anchor="ctr"/>
-          <a:lstStyle/>
-          <a:p>
-            <a:pPr algn="ctr"/>
-          </a:p>
-        </p:txBody>
-      </p:sp>
-      <p:sp>
-        <p:nvSpPr>
-          <p:cNvPr id="16" name="TextBox 15"/>
-          <p:cNvSpPr txBox="1"/>
-          <p:nvPr/>
-        </p:nvSpPr>
-        <p:spPr>
-          <a:xfrm>
-            <a:off x="594360" y="3680460"/>
-            <a:ext cx="438912" cy="438912"/>
-          </a:xfrm>
-          <a:prstGeom prst="rect">
-            <a:avLst/>
-          </a:prstGeom>
-          <a:noFill/>
-        </p:spPr>
-        <p:txBody>
-          <a:bodyPr wrap="square" anchor="ctr"/>
-          <a:lstStyle/>
-          <a:p>
-            <a:pPr algn="ctr"/>
-            <a:r>
-              <a:rPr sz="1600" b="1" i="0">
-                <a:solidFill>
-                  <a:srgbClr val="FFFFFF"/>
-                </a:solidFill>
-                <a:latin typeface="Calibri"/>
-              </a:rPr>
-              <a:t>3</a:t>
-            </a:r>
-          </a:p>
-        </p:txBody>
-      </p:sp>
-      <p:sp>
-        <p:nvSpPr>
-          <p:cNvPr id="17" name="TextBox 16"/>
-          <p:cNvSpPr txBox="1"/>
-          <p:nvPr/>
-        </p:nvSpPr>
-        <p:spPr>
-          <a:xfrm>
-            <a:off x="1188720" y="3536899"/>
-            <a:ext cx="10271455" cy="744321"/>
-          </a:xfrm>
-          <a:prstGeom prst="rect">
-            <a:avLst/>
-          </a:prstGeom>
-          <a:noFill/>
-        </p:spPr>
-        <p:txBody>
-          <a:bodyPr wrap="square" anchor="ctr"/>
-          <a:lstStyle/>
-          <a:p>
-            <a:r>
-              <a:rPr sz="1500" b="1" i="0">
-                <a:solidFill>
-                  <a:srgbClr val="095292"/>
-                </a:solidFill>
-                <a:latin typeface="Calibri"/>
-              </a:rPr>
-              <a:t>50 s · El numeral</a:t>
+              <a:rPr sz="2000" b="0" i="0">
+                <a:solidFill>
+                  <a:srgbClr val="333333"/>
+                </a:solidFill>
+                <a:latin typeface="Calibri"/>
+              </a:rPr>
+              <a:t>–   La discusión del taller se vuelve una conversación de opiniones y no se puede calificar. </a:t>
+            </a:r>
+            <a:r>
+              <a:rPr sz="2000" b="1" i="0">
+                <a:solidFill>
+                  <a:srgbClr val="333333"/>
+                </a:solidFill>
+                <a:latin typeface="Calibri"/>
+              </a:rPr>
+              <a:t>La primera: la ética profesional no es tener buenas intenciones.</a:t>
+            </a:r>
+            <a:r>
+              <a:rPr sz="2000" b="0" i="0">
+                <a:solidFill>
+                  <a:srgbClr val="333333"/>
+                </a:solidFill>
+                <a:latin typeface="Calibri"/>
+              </a:rPr>
+              <a:t> Es tomar decisiones defendibles con información incompleta y poder explicar el criterio.</a:t>
             </a:r>
           </a:p>
           <a:p>
             <a:pPr>
-              <a:spcBef>
-                <a:spcPts val="200"/>
-              </a:spcBef>
+              <a:spcAft>
+                <a:spcPts val="800"/>
+              </a:spcAft>
             </a:pPr>
             <a:r>
-              <a:rPr sz="1300" b="0" i="0">
-                <a:solidFill>
-                  <a:srgbClr val="333333"/>
-                </a:solidFill>
-                <a:latin typeface="Calibri"/>
-              </a:rPr>
-              <a:t>Lea el principio o el artículo y diga por qué aplica. Es lo que más pesa.</a:t>
-            </a:r>
-          </a:p>
-        </p:txBody>
-      </p:sp>
-      <p:sp>
-        <p:nvSpPr>
-          <p:cNvPr id="18" name="Rounded Rectangle 17"/>
-          <p:cNvSpPr/>
-          <p:nvPr/>
-        </p:nvSpPr>
-        <p:spPr>
-          <a:xfrm>
-            <a:off x="457200" y="4445812"/>
-            <a:ext cx="11277295" cy="908913"/>
-          </a:xfrm>
-          <a:prstGeom prst="roundRect">
-            <a:avLst>
-              <a:gd name="adj" fmla="val 12000"/>
-            </a:avLst>
-          </a:prstGeom>
-          <a:solidFill>
-            <a:srgbClr val="E8F4FA"/>
-          </a:solidFill>
-          <a:ln>
-            <a:noFill/>
-          </a:ln>
-        </p:spPr>
-        <p:style>
-          <a:lnRef idx="1">
-            <a:schemeClr val="accent1"/>
-          </a:lnRef>
-          <a:fillRef idx="3">
-            <a:schemeClr val="accent1"/>
-          </a:fillRef>
-          <a:effectRef idx="2">
-            <a:schemeClr val="accent1"/>
-          </a:effectRef>
-          <a:fontRef idx="minor">
-            <a:schemeClr val="lt1"/>
-          </a:fontRef>
-        </p:style>
-        <p:txBody>
-          <a:bodyPr rtlCol="0" anchor="ctr"/>
-          <a:lstStyle/>
-          <a:p>
-            <a:pPr algn="ctr"/>
-          </a:p>
-        </p:txBody>
-      </p:sp>
-      <p:sp>
-        <p:nvSpPr>
-          <p:cNvPr id="19" name="Rounded Rectangle 18"/>
-          <p:cNvSpPr/>
-          <p:nvPr/>
-        </p:nvSpPr>
-        <p:spPr>
-          <a:xfrm>
-            <a:off x="594360" y="4680813"/>
-            <a:ext cx="438912" cy="438912"/>
-          </a:xfrm>
-          <a:prstGeom prst="roundRect">
-            <a:avLst>
-              <a:gd name="adj" fmla="val 12000"/>
-            </a:avLst>
-          </a:prstGeom>
-          <a:solidFill>
-            <a:srgbClr val="095292"/>
-          </a:solidFill>
-          <a:ln>
-            <a:noFill/>
-          </a:ln>
-        </p:spPr>
-        <p:style>
-          <a:lnRef idx="1">
-            <a:schemeClr val="accent1"/>
-          </a:lnRef>
-          <a:fillRef idx="3">
-            <a:schemeClr val="accent1"/>
-          </a:fillRef>
-          <a:effectRef idx="2">
-            <a:schemeClr val="accent1"/>
-          </a:effectRef>
-          <a:fontRef idx="minor">
-            <a:schemeClr val="lt1"/>
-          </a:fontRef>
-        </p:style>
-        <p:txBody>
-          <a:bodyPr rtlCol="0" anchor="ctr"/>
-          <a:lstStyle/>
-          <a:p>
-            <a:pPr algn="ctr"/>
-          </a:p>
-        </p:txBody>
-      </p:sp>
-      <p:sp>
-        <p:nvSpPr>
-          <p:cNvPr id="20" name="TextBox 19"/>
-          <p:cNvSpPr txBox="1"/>
-          <p:nvPr/>
-        </p:nvSpPr>
-        <p:spPr>
-          <a:xfrm>
-            <a:off x="594360" y="4680813"/>
-            <a:ext cx="438912" cy="438912"/>
-          </a:xfrm>
-          <a:prstGeom prst="rect">
-            <a:avLst/>
-          </a:prstGeom>
-          <a:noFill/>
-        </p:spPr>
-        <p:txBody>
-          <a:bodyPr wrap="square" anchor="ctr"/>
-          <a:lstStyle/>
-          <a:p>
-            <a:pPr algn="ctr"/>
-            <a:r>
-              <a:rPr sz="1600" b="1" i="0">
-                <a:solidFill>
-                  <a:srgbClr val="FFFFFF"/>
-                </a:solidFill>
-                <a:latin typeface="Calibri"/>
-              </a:rPr>
-              <a:t>4</a:t>
-            </a:r>
-          </a:p>
-        </p:txBody>
-      </p:sp>
-      <p:sp>
-        <p:nvSpPr>
-          <p:cNvPr id="21" name="TextBox 20"/>
-          <p:cNvSpPr txBox="1"/>
-          <p:nvPr/>
-        </p:nvSpPr>
-        <p:spPr>
-          <a:xfrm>
-            <a:off x="1188720" y="4537252"/>
-            <a:ext cx="10271455" cy="744321"/>
-          </a:xfrm>
-          <a:prstGeom prst="rect">
-            <a:avLst/>
-          </a:prstGeom>
-          <a:noFill/>
-        </p:spPr>
-        <p:txBody>
-          <a:bodyPr wrap="square" anchor="ctr"/>
-          <a:lstStyle/>
-          <a:p>
-            <a:r>
-              <a:rPr sz="1500" b="1" i="0">
-                <a:solidFill>
-                  <a:srgbClr val="095292"/>
-                </a:solidFill>
-                <a:latin typeface="Calibri"/>
-              </a:rPr>
-              <a:t>50 s · El momento de parar</a:t>
+              <a:rPr sz="2000" b="0" i="0">
+                <a:solidFill>
+                  <a:srgbClr val="333333"/>
+                </a:solidFill>
+                <a:latin typeface="Calibri"/>
+              </a:rPr>
+              <a:t>–   Un ingeniero con excelentes intenciones que no preguntó a quién afecta su sistema hizo algo mal, y el resultado no mejora por su buena voluntad.</a:t>
             </a:r>
           </a:p>
           <a:p>
             <a:pPr>
-              <a:spcBef>
-                <a:spcPts val="200"/>
-              </a:spcBef>
+              <a:spcAft>
+                <a:spcPts val="800"/>
+              </a:spcAft>
             </a:pPr>
             <a:r>
-              <a:rPr sz="1300" b="0" i="0">
-                <a:solidFill>
-                  <a:srgbClr val="333333"/>
-                </a:solidFill>
-                <a:latin typeface="Calibri"/>
-              </a:rPr>
-              <a:t>Cuándo y qué había que hacer. Es el minuto obligatorio.</a:t>
-            </a:r>
-          </a:p>
-        </p:txBody>
-      </p:sp>
-      <p:sp>
-        <p:nvSpPr>
-          <p:cNvPr id="22" name="Rounded Rectangle 21"/>
-          <p:cNvSpPr/>
-          <p:nvPr/>
-        </p:nvSpPr>
-        <p:spPr>
-          <a:xfrm>
-            <a:off x="457200" y="5446166"/>
-            <a:ext cx="11277295" cy="908913"/>
-          </a:xfrm>
-          <a:prstGeom prst="roundRect">
-            <a:avLst>
-              <a:gd name="adj" fmla="val 12000"/>
-            </a:avLst>
-          </a:prstGeom>
-          <a:solidFill>
-            <a:srgbClr val="F2F2F2"/>
-          </a:solidFill>
-          <a:ln>
-            <a:noFill/>
-          </a:ln>
-        </p:spPr>
-        <p:style>
-          <a:lnRef idx="1">
-            <a:schemeClr val="accent1"/>
-          </a:lnRef>
-          <a:fillRef idx="3">
-            <a:schemeClr val="accent1"/>
-          </a:fillRef>
-          <a:effectRef idx="2">
-            <a:schemeClr val="accent1"/>
-          </a:effectRef>
-          <a:fontRef idx="minor">
-            <a:schemeClr val="lt1"/>
-          </a:fontRef>
-        </p:style>
-        <p:txBody>
-          <a:bodyPr rtlCol="0" anchor="ctr"/>
-          <a:lstStyle/>
-          <a:p>
-            <a:pPr algn="ctr"/>
-          </a:p>
-        </p:txBody>
-      </p:sp>
-      <p:sp>
-        <p:nvSpPr>
-          <p:cNvPr id="23" name="Rounded Rectangle 22"/>
-          <p:cNvSpPr/>
-          <p:nvPr/>
-        </p:nvSpPr>
-        <p:spPr>
-          <a:xfrm>
-            <a:off x="594360" y="5681167"/>
-            <a:ext cx="438912" cy="438912"/>
-          </a:xfrm>
-          <a:prstGeom prst="roundRect">
-            <a:avLst>
-              <a:gd name="adj" fmla="val 12000"/>
-            </a:avLst>
-          </a:prstGeom>
-          <a:solidFill>
-            <a:srgbClr val="095292"/>
-          </a:solidFill>
-          <a:ln>
-            <a:noFill/>
-          </a:ln>
-        </p:spPr>
-        <p:style>
-          <a:lnRef idx="1">
-            <a:schemeClr val="accent1"/>
-          </a:lnRef>
-          <a:fillRef idx="3">
-            <a:schemeClr val="accent1"/>
-          </a:fillRef>
-          <a:effectRef idx="2">
-            <a:schemeClr val="accent1"/>
-          </a:effectRef>
-          <a:fontRef idx="minor">
-            <a:schemeClr val="lt1"/>
-          </a:fontRef>
-        </p:style>
-        <p:txBody>
-          <a:bodyPr rtlCol="0" anchor="ctr"/>
-          <a:lstStyle/>
-          <a:p>
-            <a:pPr algn="ctr"/>
-          </a:p>
-        </p:txBody>
-      </p:sp>
-      <p:sp>
-        <p:nvSpPr>
-          <p:cNvPr id="24" name="TextBox 23"/>
-          <p:cNvSpPr txBox="1"/>
-          <p:nvPr/>
-        </p:nvSpPr>
-        <p:spPr>
-          <a:xfrm>
-            <a:off x="594360" y="5681167"/>
-            <a:ext cx="438912" cy="438912"/>
-          </a:xfrm>
-          <a:prstGeom prst="rect">
-            <a:avLst/>
-          </a:prstGeom>
-          <a:noFill/>
-        </p:spPr>
-        <p:txBody>
-          <a:bodyPr wrap="square" anchor="ctr"/>
-          <a:lstStyle/>
-          <a:p>
-            <a:pPr algn="ctr"/>
-            <a:r>
-              <a:rPr sz="1600" b="1" i="0">
-                <a:solidFill>
-                  <a:srgbClr val="FFFFFF"/>
-                </a:solidFill>
-                <a:latin typeface="Calibri"/>
-              </a:rPr>
-              <a:t>5</a:t>
-            </a:r>
-          </a:p>
-        </p:txBody>
-      </p:sp>
-      <p:sp>
-        <p:nvSpPr>
-          <p:cNvPr id="25" name="TextBox 24"/>
-          <p:cNvSpPr txBox="1"/>
-          <p:nvPr/>
-        </p:nvSpPr>
-        <p:spPr>
-          <a:xfrm>
-            <a:off x="1188720" y="5537606"/>
-            <a:ext cx="10271455" cy="744321"/>
-          </a:xfrm>
-          <a:prstGeom prst="rect">
-            <a:avLst/>
-          </a:prstGeom>
-          <a:noFill/>
-        </p:spPr>
-        <p:txBody>
-          <a:bodyPr wrap="square" anchor="ctr"/>
-          <a:lstStyle/>
-          <a:p>
-            <a:r>
-              <a:rPr sz="1500" b="1" i="0">
-                <a:solidFill>
-                  <a:srgbClr val="095292"/>
-                </a:solidFill>
-                <a:latin typeface="Calibri"/>
-              </a:rPr>
-              <a:t>10 s · La regla propia</a:t>
+              <a:rPr sz="2000" b="0" i="0">
+                <a:solidFill>
+                  <a:srgbClr val="333333"/>
+                </a:solidFill>
+                <a:latin typeface="Calibri"/>
+              </a:rPr>
+              <a:t>–   Al revés, un ingeniero que detecta un riesgo y lo escribe está actuando bien aunque el proyecto igual salga mal. </a:t>
+            </a:r>
+            <a:r>
+              <a:rPr sz="2000" b="1" i="0">
+                <a:solidFill>
+                  <a:srgbClr val="333333"/>
+                </a:solidFill>
+                <a:latin typeface="Calibri"/>
+              </a:rPr>
+              <a:t>La segunda: no es un tema de opinión.</a:t>
+            </a:r>
+            <a:r>
+              <a:rPr sz="2000" b="0" i="0">
+                <a:solidFill>
+                  <a:srgbClr val="333333"/>
+                </a:solidFill>
+                <a:latin typeface="Calibri"/>
+              </a:rPr>
+              <a:t> Esta es la que más rinde en clase</a:t>
             </a:r>
           </a:p>
           <a:p>
             <a:pPr>
-              <a:spcBef>
-                <a:spcPts val="200"/>
-              </a:spcBef>
+              <a:spcAft>
+                <a:spcPts val="800"/>
+              </a:spcAft>
             </a:pPr>
             <a:r>
-              <a:rPr sz="1300" b="0" i="0">
-                <a:solidFill>
-                  <a:srgbClr val="333333"/>
-                </a:solidFill>
-                <a:latin typeface="Calibri"/>
-              </a:rPr>
-              <a:t>Una frase, verificable, para su propio proyecto.</a:t>
-            </a:r>
-          </a:p>
-        </p:txBody>
-      </p:sp>
-      <p:sp>
-        <p:nvSpPr>
-          <p:cNvPr id="26" name="TextBox 25"/>
+              <a:rPr sz="2000" b="0" i="0">
+                <a:solidFill>
+                  <a:srgbClr val="333333"/>
+                </a:solidFill>
+                <a:latin typeface="Calibri"/>
+              </a:rPr>
+              <a:t>–   Porque el estudiante llega convencido de que en ética «cada uno piensa distinto».</a:t>
+            </a:r>
+          </a:p>
+        </p:txBody>
+      </p:sp>
+      <p:sp>
+        <p:nvSpPr>
+          <p:cNvPr id="6" name="TextBox 5"/>
           <p:cNvSpPr txBox="1"/>
           <p:nvPr/>
         </p:nvSpPr>
@@ -5827,7 +4301,7 @@
                 </a:solidFill>
                 <a:latin typeface="Calibri"/>
               </a:rPr>
-              <a:t>Para la Clase 5</a:t>
+              <a:t>Qué es la ética en una profesión y qué no es (2/3)</a:t>
             </a:r>
           </a:p>
         </p:txBody>
@@ -5866,25 +4340,7 @@
                 </a:solidFill>
                 <a:latin typeface="Calibri"/>
               </a:rPr>
-              <a:t>–   </a:t>
-            </a:r>
-            <a:r>
-              <a:rPr sz="2000" b="1" i="0">
-                <a:solidFill>
-                  <a:srgbClr val="333333"/>
-                </a:solidFill>
-                <a:latin typeface="Calibri"/>
-              </a:rPr>
-              <a:t>Trabajo dirigido:</a:t>
-            </a:r>
-            <a:r>
-              <a:rPr sz="2000" b="0" i="0">
-                <a:solidFill>
-                  <a:srgbClr val="333333"/>
-                </a:solidFill>
-                <a:latin typeface="Calibri"/>
-              </a:rPr>
-              <a:t> Lectura del código ético — el código ACM/IEEE completo, los ocho principios, y los deberes del ingeniero frente a la sociedad de la Ley 842 de 2003.</a:t>
+              <a:t>–   Existen códigos escritos, con principios numerados, que uno puede citar como se cita un artículo de una norma.</a:t>
             </a:r>
           </a:p>
           <a:p>
@@ -5900,43 +4356,7 @@
                 </a:solidFill>
                 <a:latin typeface="Calibri"/>
               </a:rPr>
-              <a:t>–   </a:t>
-            </a:r>
-            <a:r>
-              <a:rPr sz="2000" b="1" i="0">
-                <a:solidFill>
-                  <a:srgbClr val="333333"/>
-                </a:solidFill>
-                <a:latin typeface="Calibri"/>
-              </a:rPr>
-              <a:t>Trabajo independiente:</a:t>
-            </a:r>
-            <a:r>
-              <a:rPr sz="2000" b="0" i="0">
-                <a:solidFill>
-                  <a:srgbClr val="333333"/>
-                </a:solidFill>
-                <a:latin typeface="Calibri"/>
-              </a:rPr>
-              <a:t> Análisis crítico del código ético: media página sobre </a:t>
-            </a:r>
-            <a:r>
-              <a:rPr sz="2000" b="1" i="0">
-                <a:solidFill>
-                  <a:srgbClr val="333333"/>
-                </a:solidFill>
-                <a:latin typeface="Calibri"/>
-              </a:rPr>
-              <a:t>un principio que su equipo cree difícil de cumplir en la práctica</a:t>
-            </a:r>
-            <a:r>
-              <a:rPr sz="2000" b="0" i="0">
-                <a:solidFill>
-                  <a:srgbClr val="333333"/>
-                </a:solidFill>
-                <a:latin typeface="Calibri"/>
-              </a:rPr>
-              <a:t>, con el motivo.</a:t>
+              <a:t>–   El código de ética de ACM e IEEE Computer Society para ingeniería de software es de 1999 y tiene ocho principios; el código de ética del ingeniero en Colombia es la Ley 842 de 2003.</a:t>
             </a:r>
           </a:p>
           <a:p>
@@ -5952,25 +4372,7 @@
                 </a:solidFill>
                 <a:latin typeface="Calibri"/>
               </a:rPr>
-              <a:t>–   </a:t>
-            </a:r>
-            <a:r>
-              <a:rPr sz="2000" b="1" i="0">
-                <a:solidFill>
-                  <a:srgbClr val="333333"/>
-                </a:solidFill>
-                <a:latin typeface="Calibri"/>
-              </a:rPr>
-              <a:t>Clase 5 · El rol del ingeniero en el contexto ambiental</a:t>
-            </a:r>
-            <a:r>
-              <a:rPr sz="2000" b="0" i="0">
-                <a:solidFill>
-                  <a:srgbClr val="333333"/>
-                </a:solidFill>
-                <a:latin typeface="Calibri"/>
-              </a:rPr>
-              <a:t> — el impacto ambiental del software, que es el daño que no tiene una víctima con nombre y que casi nadie mide.</a:t>
+              <a:t>–   Un veredicto que cita el numeral es un argumento</a:t>
             </a:r>
           </a:p>
           <a:p>
@@ -5986,25 +4388,7 @@
                 </a:solidFill>
                 <a:latin typeface="Calibri"/>
               </a:rPr>
-              <a:t>–   </a:t>
-            </a:r>
-            <a:r>
-              <a:rPr sz="2000" b="1" i="0">
-                <a:solidFill>
-                  <a:srgbClr val="333333"/>
-                </a:solidFill>
-                <a:latin typeface="Calibri"/>
-              </a:rPr>
-              <a:t>Aviso:</a:t>
-            </a:r>
-            <a:r>
-              <a:rPr sz="2000" b="0" i="0">
-                <a:solidFill>
-                  <a:srgbClr val="333333"/>
-                </a:solidFill>
-                <a:latin typeface="Calibri"/>
-              </a:rPr>
-              <a:t> Traigan leído el código de ética y la regla propia de hoy escrita en el documento del equipo. En la sesión 6 esa regla entra en la ficha del problema del proyecto.</a:t>
+              <a:t>–   «a mí me parece que estuvo mal» no lo es.</a:t>
             </a:r>
           </a:p>
           <a:p>
@@ -6020,17 +4404,15 @@
                 </a:solidFill>
                 <a:latin typeface="Calibri"/>
               </a:rPr>
-              <a:t>–   </a:t>
-            </a:r>
-            <a:r>
-              <a:rPr sz="2000" b="1" i="0">
-                <a:solidFill>
-                  <a:srgbClr val="333333"/>
-                </a:solidFill>
-                <a:latin typeface="Calibri"/>
-              </a:rPr>
-              <a:t>Antes de salir:</a:t>
-            </a:r>
+              <a:t>–   En el taller de hoy se califica exactamente esa diferencia. **La tercera: la ley es el piso</a:t>
+            </a:r>
+          </a:p>
+          <a:p>
+            <a:pPr>
+              <a:spcAft>
+                <a:spcPts val="800"/>
+              </a:spcAft>
+            </a:pPr>
             <a:r>
               <a:rPr sz="2000" b="0" i="0">
                 <a:solidFill>
@@ -6038,7 +4420,7 @@
                 </a:solidFill>
                 <a:latin typeface="Calibri"/>
               </a:rPr>
-              <a:t> el enlace del documento del equipo en el chat, con permiso de lectura para el docente, y el nombre del vocero de hoy.</a:t>
+              <a:t>–   No el techo.** El caso de Cambridge Analytica es el mejor para mostrarlo: la interfaz que permitía a una aplicación tomar datos de los amigos del usuario estaba documentada públicamente y era permitida por las reglas de la plataforma.</a:t>
             </a:r>
           </a:p>
         </p:txBody>
@@ -6113,13 +4495,13 @@
         <p:spPr>
           <a:xfrm>
             <a:off x="0" y="0"/>
-            <a:ext cx="12191695" cy="164592"/>
+            <a:ext cx="12191695" cy="960120"/>
           </a:xfrm>
           <a:prstGeom prst="rect">
             <a:avLst/>
           </a:prstGeom>
           <a:solidFill>
-            <a:srgbClr val="269CCB"/>
+            <a:srgbClr val="095292"/>
           </a:solidFill>
           <a:ln>
             <a:noFill/>
@@ -6147,30 +4529,49 @@
           </a:p>
         </p:txBody>
       </p:sp>
-      <p:pic>
-        <p:nvPicPr>
-          <p:cNvPr id="3" name="Picture 2" descr="logo_uniajc_color.png"/>
-          <p:cNvPicPr>
-            <a:picLocks noChangeAspect="1"/>
-          </p:cNvPicPr>
-          <p:nvPr/>
-        </p:nvPicPr>
-        <p:blipFill>
-          <a:blip r:embed="rId2"/>
-          <a:stretch>
-            <a:fillRect/>
-          </a:stretch>
-        </p:blipFill>
-        <p:spPr>
-          <a:xfrm>
-            <a:off x="10271455" y="5998464"/>
-            <a:ext cx="1463040" cy="643233"/>
-          </a:xfrm>
-          <a:prstGeom prst="rect">
-            <a:avLst/>
-          </a:prstGeom>
-        </p:spPr>
-      </p:pic>
+      <p:sp>
+        <p:nvSpPr>
+          <p:cNvPr id="3" name="Rectangle 2"/>
+          <p:cNvSpPr/>
+          <p:nvPr/>
+        </p:nvSpPr>
+        <p:spPr>
+          <a:xfrm>
+            <a:off x="0" y="960120"/>
+            <a:ext cx="12191695" cy="41148"/>
+          </a:xfrm>
+          <a:prstGeom prst="rect">
+            <a:avLst/>
+          </a:prstGeom>
+          <a:solidFill>
+            <a:srgbClr val="FFD000"/>
+          </a:solidFill>
+          <a:ln>
+            <a:noFill/>
+          </a:ln>
+        </p:spPr>
+        <p:style>
+          <a:lnRef idx="1">
+            <a:schemeClr val="accent1"/>
+          </a:lnRef>
+          <a:fillRef idx="3">
+            <a:schemeClr val="accent1"/>
+          </a:fillRef>
+          <a:effectRef idx="2">
+            <a:schemeClr val="accent1"/>
+          </a:effectRef>
+          <a:fontRef idx="minor">
+            <a:schemeClr val="lt1"/>
+          </a:fontRef>
+        </p:style>
+        <p:txBody>
+          <a:bodyPr rtlCol="0" anchor="ctr"/>
+          <a:lstStyle/>
+          <a:p>
+            <a:pPr algn="ctr"/>
+          </a:p>
+        </p:txBody>
+      </p:sp>
       <p:sp>
         <p:nvSpPr>
           <p:cNvPr id="4" name="TextBox 3"/>
@@ -6179,41 +4580,8 @@
         </p:nvSpPr>
         <p:spPr>
           <a:xfrm>
-            <a:off x="457200" y="1737360"/>
-            <a:ext cx="11277295" cy="1097280"/>
-          </a:xfrm>
-          <a:prstGeom prst="rect">
-            <a:avLst/>
-          </a:prstGeom>
-          <a:noFill/>
-        </p:spPr>
-        <p:txBody>
-          <a:bodyPr wrap="square" anchor="ctr"/>
-          <a:lstStyle/>
-          <a:p>
-            <a:pPr algn="ctr"/>
-            <a:r>
-              <a:rPr sz="3400" b="1" i="0">
-                <a:solidFill>
-                  <a:srgbClr val="095292"/>
-                </a:solidFill>
-                <a:latin typeface="Calibri"/>
-              </a:rPr>
-              <a:t>Nos vemos en la sesión 5</a:t>
-            </a:r>
-          </a:p>
-        </p:txBody>
-      </p:sp>
-      <p:sp>
-        <p:nvSpPr>
-          <p:cNvPr id="5" name="TextBox 4"/>
-          <p:cNvSpPr txBox="1"/>
-          <p:nvPr/>
-        </p:nvSpPr>
-        <p:spPr>
-          <a:xfrm>
-            <a:off x="457200" y="3017520"/>
-            <a:ext cx="11277295" cy="1645920"/>
+            <a:off x="457200" y="164592"/>
+            <a:ext cx="11277295" cy="502920"/>
           </a:xfrm>
           <a:prstGeom prst="rect">
             <a:avLst/>
@@ -6226,49 +4594,28 @@
           </a:bodyPr>
           <a:lstStyle/>
           <a:p>
-            <a:pPr algn="ctr">
-              <a:spcAft>
-                <a:spcPts val="600"/>
-              </a:spcAft>
-            </a:pPr>
-            <a:r>
-              <a:rPr sz="1600" b="0" i="0">
-                <a:solidFill>
-                  <a:srgbClr val="333333"/>
-                </a:solidFill>
-                <a:latin typeface="Calibri"/>
-              </a:rPr>
-              <a:t>Principios éticos en la Ingeniería · Clase 4</a:t>
-            </a:r>
-          </a:p>
-          <a:p>
-            <a:pPr algn="ctr">
-              <a:spcAft>
-                <a:spcPts val="600"/>
-              </a:spcAft>
-            </a:pPr>
-            <a:r>
-              <a:rPr sz="1600" b="0" i="0">
-                <a:solidFill>
-                  <a:srgbClr val="333333"/>
-                </a:solidFill>
-                <a:latin typeface="Calibri"/>
-              </a:rPr>
-              <a:t>FI300101 · UNIAJC · Ingeniería de Sistemas</a:t>
-            </a:r>
-          </a:p>
-        </p:txBody>
-      </p:sp>
-      <p:sp>
-        <p:nvSpPr>
-          <p:cNvPr id="6" name="TextBox 5"/>
+            <a:r>
+              <a:rPr sz="2600" b="1" i="0">
+                <a:solidFill>
+                  <a:srgbClr val="FFFFFF"/>
+                </a:solidFill>
+                <a:latin typeface="Calibri"/>
+              </a:rPr>
+              <a:t>Qué es la ética en una profesión y qué no es (3/3)</a:t>
+            </a:r>
+          </a:p>
+        </p:txBody>
+      </p:sp>
+      <p:sp>
+        <p:nvSpPr>
+          <p:cNvPr id="5" name="TextBox 4"/>
           <p:cNvSpPr txBox="1"/>
           <p:nvPr/>
         </p:nvSpPr>
         <p:spPr>
           <a:xfrm>
-            <a:off x="457200" y="4754880"/>
-            <a:ext cx="11277295" cy="640080"/>
+            <a:off x="457200" y="1170432"/>
+            <a:ext cx="11277295" cy="5230368"/>
           </a:xfrm>
           <a:prstGeom prst="rect">
             <a:avLst/>
@@ -6281,15 +4628,2287 @@
           </a:bodyPr>
           <a:lstStyle/>
           <a:p>
+            <a:pPr>
+              <a:spcAft>
+                <a:spcPts val="800"/>
+              </a:spcAft>
+            </a:pPr>
+            <a:r>
+              <a:rPr sz="2000" b="0" i="0">
+                <a:solidFill>
+                  <a:srgbClr val="333333"/>
+                </a:solidFill>
+                <a:latin typeface="Calibri"/>
+              </a:rPr>
+              <a:t>–   Era legal y es indefendible.</a:t>
+            </a:r>
+          </a:p>
+          <a:p>
+            <a:pPr>
+              <a:spcAft>
+                <a:spcPts val="800"/>
+              </a:spcAft>
+            </a:pPr>
+            <a:r>
+              <a:rPr sz="2000" b="0" i="0">
+                <a:solidFill>
+                  <a:srgbClr val="333333"/>
+                </a:solidFill>
+                <a:latin typeface="Calibri"/>
+              </a:rPr>
+              <a:t>–   Al revés también ocurre: algo puede ser éticamente correcto y estar prohibido por una política interna.</a:t>
+            </a:r>
+          </a:p>
+          <a:p>
+            <a:pPr>
+              <a:spcAft>
+                <a:spcPts val="800"/>
+              </a:spcAft>
+            </a:pPr>
+            <a:r>
+              <a:rPr sz="2000" b="0" i="0">
+                <a:solidFill>
+                  <a:srgbClr val="333333"/>
+                </a:solidFill>
+                <a:latin typeface="Calibri"/>
+              </a:rPr>
+              <a:t>–   La ley y la ética se cruzan pero no coinciden, y el ingeniero tiene que mirar las dos.</a:t>
+            </a:r>
+          </a:p>
+          <a:p>
+            <a:pPr>
+              <a:spcAft>
+                <a:spcPts val="800"/>
+              </a:spcAft>
+            </a:pPr>
+            <a:r>
+              <a:rPr sz="2000" b="0" i="0">
+                <a:solidFill>
+                  <a:srgbClr val="333333"/>
+                </a:solidFill>
+                <a:latin typeface="Calibri"/>
+              </a:rPr>
+              <a:t>–   Una cuarta idea, que es la que más les sirve: </a:t>
+            </a:r>
+            <a:r>
+              <a:rPr sz="2000" b="1" i="0">
+                <a:solidFill>
+                  <a:srgbClr val="333333"/>
+                </a:solidFill>
+                <a:latin typeface="Calibri"/>
+              </a:rPr>
+              <a:t>el momento de la ética es el momento de decidir, y casi siempre es temprano</a:t>
+            </a:r>
+            <a:r>
+              <a:rPr sz="2000" b="0" i="0">
+                <a:solidFill>
+                  <a:srgbClr val="333333"/>
+                </a:solidFill>
+                <a:latin typeface="Calibri"/>
+              </a:rPr>
+              <a:t>.</a:t>
+            </a:r>
+          </a:p>
+          <a:p>
+            <a:pPr>
+              <a:spcAft>
+                <a:spcPts val="800"/>
+              </a:spcAft>
+            </a:pPr>
+            <a:r>
+              <a:rPr sz="2000" b="0" i="0">
+                <a:solidFill>
+                  <a:srgbClr val="333333"/>
+                </a:solidFill>
+                <a:latin typeface="Calibri"/>
+              </a:rPr>
+              <a:t>–   Quitar un seguro físico de una máquina de radioterapia porque el software ya lo cubre es una decisión que cuesta una reunión; enterarse de las consecuencias cuesta vidas y una investigación de años.</a:t>
+            </a:r>
+          </a:p>
+          <a:p>
+            <a:pPr>
+              <a:spcAft>
+                <a:spcPts val="800"/>
+              </a:spcAft>
+            </a:pPr>
+            <a:r>
+              <a:rPr sz="2000" b="0" i="0">
+                <a:solidFill>
+                  <a:srgbClr val="333333"/>
+                </a:solidFill>
+                <a:latin typeface="Calibri"/>
+              </a:rPr>
+              <a:t>–   La ética no es lo que se hace después del desastre.</a:t>
+            </a:r>
+          </a:p>
+        </p:txBody>
+      </p:sp>
+      <p:sp>
+        <p:nvSpPr>
+          <p:cNvPr id="6" name="TextBox 5"/>
+          <p:cNvSpPr txBox="1"/>
+          <p:nvPr/>
+        </p:nvSpPr>
+        <p:spPr>
+          <a:xfrm>
+            <a:off x="11185855" y="6473952"/>
+            <a:ext cx="640080" cy="274320"/>
+          </a:xfrm>
+          <a:prstGeom prst="rect">
+            <a:avLst/>
+          </a:prstGeom>
+          <a:noFill/>
+        </p:spPr>
+        <p:txBody>
+          <a:bodyPr wrap="square">
+            <a:spAutoFit/>
+          </a:bodyPr>
+          <a:lstStyle/>
+          <a:p>
+            <a:pPr algn="r"/>
+            <a:r>
+              <a:rPr sz="1100" b="0" i="0">
+                <a:solidFill>
+                  <a:srgbClr val="666666"/>
+                </a:solidFill>
+                <a:latin typeface="Calibri"/>
+              </a:rPr>
+              <a:t>13</a:t>
+            </a:r>
+          </a:p>
+        </p:txBody>
+      </p:sp>
+    </p:spTree>
+  </p:cSld>
+  <p:clrMapOvr>
+    <a:masterClrMapping/>
+  </p:clrMapOvr>
+</p:sld>
+</file>
+
+<file path=ppt/slides/slide14.xml><?xml version="1.0" encoding="utf-8"?>
+<p:sld xmlns:a="http://schemas.openxmlformats.org/drawingml/2006/main" xmlns:p="http://schemas.openxmlformats.org/presentationml/2006/main" xmlns:r="http://schemas.openxmlformats.org/officeDocument/2006/relationships">
+  <p:cSld>
+    <p:bg>
+      <p:bgPr>
+        <a:solidFill>
+          <a:srgbClr val="FFFFFF"/>
+        </a:solidFill>
+        <a:effectLst/>
+      </p:bgPr>
+    </p:bg>
+    <p:spTree>
+      <p:nvGrpSpPr>
+        <p:cNvPr id="1" name=""/>
+        <p:cNvGrpSpPr/>
+        <p:nvPr/>
+      </p:nvGrpSpPr>
+      <p:grpSpPr/>
+      <p:sp>
+        <p:nvSpPr>
+          <p:cNvPr id="2" name="Rectangle 1"/>
+          <p:cNvSpPr/>
+          <p:nvPr/>
+        </p:nvSpPr>
+        <p:spPr>
+          <a:xfrm>
+            <a:off x="0" y="0"/>
+            <a:ext cx="12191695" cy="960120"/>
+          </a:xfrm>
+          <a:prstGeom prst="rect">
+            <a:avLst/>
+          </a:prstGeom>
+          <a:solidFill>
+            <a:srgbClr val="095292"/>
+          </a:solidFill>
+          <a:ln>
+            <a:noFill/>
+          </a:ln>
+        </p:spPr>
+        <p:style>
+          <a:lnRef idx="1">
+            <a:schemeClr val="accent1"/>
+          </a:lnRef>
+          <a:fillRef idx="3">
+            <a:schemeClr val="accent1"/>
+          </a:fillRef>
+          <a:effectRef idx="2">
+            <a:schemeClr val="accent1"/>
+          </a:effectRef>
+          <a:fontRef idx="minor">
+            <a:schemeClr val="lt1"/>
+          </a:fontRef>
+        </p:style>
+        <p:txBody>
+          <a:bodyPr rtlCol="0" anchor="ctr"/>
+          <a:lstStyle/>
+          <a:p>
             <a:pPr algn="ctr"/>
+          </a:p>
+        </p:txBody>
+      </p:sp>
+      <p:sp>
+        <p:nvSpPr>
+          <p:cNvPr id="3" name="Rectangle 2"/>
+          <p:cNvSpPr/>
+          <p:nvPr/>
+        </p:nvSpPr>
+        <p:spPr>
+          <a:xfrm>
+            <a:off x="0" y="960120"/>
+            <a:ext cx="12191695" cy="41148"/>
+          </a:xfrm>
+          <a:prstGeom prst="rect">
+            <a:avLst/>
+          </a:prstGeom>
+          <a:solidFill>
+            <a:srgbClr val="FFD000"/>
+          </a:solidFill>
+          <a:ln>
+            <a:noFill/>
+          </a:ln>
+        </p:spPr>
+        <p:style>
+          <a:lnRef idx="1">
+            <a:schemeClr val="accent1"/>
+          </a:lnRef>
+          <a:fillRef idx="3">
+            <a:schemeClr val="accent1"/>
+          </a:fillRef>
+          <a:effectRef idx="2">
+            <a:schemeClr val="accent1"/>
+          </a:effectRef>
+          <a:fontRef idx="minor">
+            <a:schemeClr val="lt1"/>
+          </a:fontRef>
+        </p:style>
+        <p:txBody>
+          <a:bodyPr rtlCol="0" anchor="ctr"/>
+          <a:lstStyle/>
+          <a:p>
+            <a:pPr algn="ctr"/>
+          </a:p>
+        </p:txBody>
+      </p:sp>
+      <p:sp>
+        <p:nvSpPr>
+          <p:cNvPr id="4" name="TextBox 3"/>
+          <p:cNvSpPr txBox="1"/>
+          <p:nvPr/>
+        </p:nvSpPr>
+        <p:spPr>
+          <a:xfrm>
+            <a:off x="457200" y="164592"/>
+            <a:ext cx="11277295" cy="502920"/>
+          </a:xfrm>
+          <a:prstGeom prst="rect">
+            <a:avLst/>
+          </a:prstGeom>
+          <a:noFill/>
+        </p:spPr>
+        <p:txBody>
+          <a:bodyPr wrap="square">
+            <a:spAutoFit/>
+          </a:bodyPr>
+          <a:lstStyle/>
+          <a:p>
+            <a:r>
+              <a:rPr sz="2600" b="1" i="0">
+                <a:solidFill>
+                  <a:srgbClr val="FFFFFF"/>
+                </a:solidFill>
+                <a:latin typeface="Calibri"/>
+              </a:rPr>
+              <a:t>Los códigos y las tres normas colombianas que hay que saber nombrar (1/3)</a:t>
+            </a:r>
+          </a:p>
+        </p:txBody>
+      </p:sp>
+      <p:sp>
+        <p:nvSpPr>
+          <p:cNvPr id="5" name="TextBox 4"/>
+          <p:cNvSpPr txBox="1"/>
+          <p:nvPr/>
+        </p:nvSpPr>
+        <p:spPr>
+          <a:xfrm>
+            <a:off x="457200" y="1170432"/>
+            <a:ext cx="11277295" cy="5230368"/>
+          </a:xfrm>
+          <a:prstGeom prst="rect">
+            <a:avLst/>
+          </a:prstGeom>
+          <a:noFill/>
+        </p:spPr>
+        <p:txBody>
+          <a:bodyPr wrap="square">
+            <a:spAutoFit/>
+          </a:bodyPr>
+          <a:lstStyle/>
+          <a:p>
+            <a:pPr>
+              <a:spcAft>
+                <a:spcPts val="800"/>
+              </a:spcAft>
+            </a:pPr>
+            <a:r>
+              <a:rPr sz="2000" b="0" i="0">
+                <a:solidFill>
+                  <a:srgbClr val="333333"/>
+                </a:solidFill>
+                <a:latin typeface="Calibri"/>
+              </a:rPr>
+              <a:t>–   </a:t>
+            </a:r>
             <a:r>
               <a:rPr sz="2000" b="1" i="0">
                 <a:solidFill>
-                  <a:srgbClr val="269CCB"/>
-                </a:solidFill>
-                <a:latin typeface="Calibri"/>
-              </a:rPr>
-              <a:t>En los cuatro casos el software funcionó. Falló lo que se pidió construir</a:t>
+                  <a:srgbClr val="333333"/>
+                </a:solidFill>
+                <a:latin typeface="Calibri"/>
+              </a:rPr>
+              <a:t>ACM/IEEE, 1999.</a:t>
+            </a:r>
+            <a:r>
+              <a:rPr sz="2000" b="0" i="0">
+                <a:solidFill>
+                  <a:srgbClr val="333333"/>
+                </a:solidFill>
+                <a:latin typeface="Calibri"/>
+              </a:rPr>
+              <a:t> Ocho principios en este orden: público, cliente y empleador, producto, juicio, gestión, profesión, colegas y sí mismo.</a:t>
+            </a:r>
+          </a:p>
+          <a:p>
+            <a:pPr>
+              <a:spcAft>
+                <a:spcPts val="800"/>
+              </a:spcAft>
+            </a:pPr>
+            <a:r>
+              <a:rPr sz="2000" b="0" i="0">
+                <a:solidFill>
+                  <a:srgbClr val="333333"/>
+                </a:solidFill>
+                <a:latin typeface="Calibri"/>
+              </a:rPr>
+              <a:t>–   El orden importa y hay que decirlo en voz alta: el principio 1 —actuar de forma consistente con el interés público— </a:t>
+            </a:r>
+            <a:r>
+              <a:rPr sz="2000" b="1" i="0">
+                <a:solidFill>
+                  <a:srgbClr val="333333"/>
+                </a:solidFill>
+                <a:latin typeface="Calibri"/>
+              </a:rPr>
+              <a:t>está por encima</a:t>
+            </a:r>
+            <a:r>
+              <a:rPr sz="2000" b="0" i="0">
+                <a:solidFill>
+                  <a:srgbClr val="333333"/>
+                </a:solidFill>
+                <a:latin typeface="Calibri"/>
+              </a:rPr>
+              <a:t> del principio 2, que es el cliente y el empleador.</a:t>
+            </a:r>
+          </a:p>
+          <a:p>
+            <a:pPr>
+              <a:spcAft>
+                <a:spcPts val="800"/>
+              </a:spcAft>
+            </a:pPr>
+            <a:r>
+              <a:rPr sz="2000" b="0" i="0">
+                <a:solidFill>
+                  <a:srgbClr val="333333"/>
+                </a:solidFill>
+                <a:latin typeface="Calibri"/>
+              </a:rPr>
+              <a:t>–   Eso significa que el código ya resolvió el conflicto que el estudiante cree irresoluble: si lo que pide el jefe daña al público, el código dice cuál gana.</a:t>
+            </a:r>
+          </a:p>
+          <a:p>
+            <a:pPr>
+              <a:spcAft>
+                <a:spcPts val="800"/>
+              </a:spcAft>
+            </a:pPr>
+            <a:r>
+              <a:rPr sz="2000" b="0" i="0">
+                <a:solidFill>
+                  <a:srgbClr val="333333"/>
+                </a:solidFill>
+                <a:latin typeface="Calibri"/>
+              </a:rPr>
+              <a:t>–   La ACM actualizó además su código general en 2018. </a:t>
+            </a:r>
+            <a:r>
+              <a:rPr sz="2000" b="1" i="0">
+                <a:solidFill>
+                  <a:srgbClr val="333333"/>
+                </a:solidFill>
+                <a:latin typeface="Calibri"/>
+              </a:rPr>
+              <a:t>Ley 842 de 2003.</a:t>
+            </a:r>
+            <a:r>
+              <a:rPr sz="2000" b="0" i="0">
+                <a:solidFill>
+                  <a:srgbClr val="333333"/>
+                </a:solidFill>
+                <a:latin typeface="Calibri"/>
+              </a:rPr>
+              <a:t> Es el código de ética profesional de la ingeniería en Colombia y es la que aplica aquí, no las de otros países.</a:t>
+            </a:r>
+          </a:p>
+          <a:p>
+            <a:pPr>
+              <a:spcAft>
+                <a:spcPts val="800"/>
+              </a:spcAft>
+            </a:pPr>
+            <a:r>
+              <a:rPr sz="2000" b="0" i="0">
+                <a:solidFill>
+                  <a:srgbClr val="333333"/>
+                </a:solidFill>
+                <a:latin typeface="Calibri"/>
+              </a:rPr>
+              <a:t>–   Establece los deberes del ingeniero con la sociedad, con la profesión, con sus colegas y con sus clientes, y define las faltas y las sanciones.</a:t>
+            </a:r>
+          </a:p>
+          <a:p>
+            <a:pPr>
+              <a:spcAft>
+                <a:spcPts val="800"/>
+              </a:spcAft>
+            </a:pPr>
+            <a:r>
+              <a:rPr sz="2000" b="0" i="0">
+                <a:solidFill>
+                  <a:srgbClr val="333333"/>
+                </a:solidFill>
+                <a:latin typeface="Calibri"/>
+              </a:rPr>
+              <a:t>–   El punto práctico que hay que aterrizar para un estudiante de primer semestre es la </a:t>
+            </a:r>
+            <a:r>
+              <a:rPr sz="2000" b="1" i="0">
+                <a:solidFill>
+                  <a:srgbClr val="333333"/>
+                </a:solidFill>
+                <a:latin typeface="Calibri"/>
+              </a:rPr>
+              <a:t>matrícula profesional</a:t>
+            </a:r>
+            <a:r>
+              <a:rPr sz="2000" b="0" i="0">
+                <a:solidFill>
+                  <a:srgbClr val="333333"/>
+                </a:solidFill>
+                <a:latin typeface="Calibri"/>
+              </a:rPr>
+              <a:t>: en Colombia el ejercicio de la ingeniería requiere matrícula</a:t>
+            </a:r>
+          </a:p>
+        </p:txBody>
+      </p:sp>
+      <p:sp>
+        <p:nvSpPr>
+          <p:cNvPr id="6" name="TextBox 5"/>
+          <p:cNvSpPr txBox="1"/>
+          <p:nvPr/>
+        </p:nvSpPr>
+        <p:spPr>
+          <a:xfrm>
+            <a:off x="11185855" y="6473952"/>
+            <a:ext cx="640080" cy="274320"/>
+          </a:xfrm>
+          <a:prstGeom prst="rect">
+            <a:avLst/>
+          </a:prstGeom>
+          <a:noFill/>
+        </p:spPr>
+        <p:txBody>
+          <a:bodyPr wrap="square">
+            <a:spAutoFit/>
+          </a:bodyPr>
+          <a:lstStyle/>
+          <a:p>
+            <a:pPr algn="r"/>
+            <a:r>
+              <a:rPr sz="1100" b="0" i="0">
+                <a:solidFill>
+                  <a:srgbClr val="666666"/>
+                </a:solidFill>
+                <a:latin typeface="Calibri"/>
+              </a:rPr>
+              <a:t>14</a:t>
+            </a:r>
+          </a:p>
+        </p:txBody>
+      </p:sp>
+    </p:spTree>
+  </p:cSld>
+  <p:clrMapOvr>
+    <a:masterClrMapping/>
+  </p:clrMapOvr>
+</p:sld>
+</file>
+
+<file path=ppt/slides/slide15.xml><?xml version="1.0" encoding="utf-8"?>
+<p:sld xmlns:a="http://schemas.openxmlformats.org/drawingml/2006/main" xmlns:p="http://schemas.openxmlformats.org/presentationml/2006/main" xmlns:r="http://schemas.openxmlformats.org/officeDocument/2006/relationships">
+  <p:cSld>
+    <p:bg>
+      <p:bgPr>
+        <a:solidFill>
+          <a:srgbClr val="FFFFFF"/>
+        </a:solidFill>
+        <a:effectLst/>
+      </p:bgPr>
+    </p:bg>
+    <p:spTree>
+      <p:nvGrpSpPr>
+        <p:cNvPr id="1" name=""/>
+        <p:cNvGrpSpPr/>
+        <p:nvPr/>
+      </p:nvGrpSpPr>
+      <p:grpSpPr/>
+      <p:sp>
+        <p:nvSpPr>
+          <p:cNvPr id="2" name="Rectangle 1"/>
+          <p:cNvSpPr/>
+          <p:nvPr/>
+        </p:nvSpPr>
+        <p:spPr>
+          <a:xfrm>
+            <a:off x="0" y="0"/>
+            <a:ext cx="12191695" cy="960120"/>
+          </a:xfrm>
+          <a:prstGeom prst="rect">
+            <a:avLst/>
+          </a:prstGeom>
+          <a:solidFill>
+            <a:srgbClr val="095292"/>
+          </a:solidFill>
+          <a:ln>
+            <a:noFill/>
+          </a:ln>
+        </p:spPr>
+        <p:style>
+          <a:lnRef idx="1">
+            <a:schemeClr val="accent1"/>
+          </a:lnRef>
+          <a:fillRef idx="3">
+            <a:schemeClr val="accent1"/>
+          </a:fillRef>
+          <a:effectRef idx="2">
+            <a:schemeClr val="accent1"/>
+          </a:effectRef>
+          <a:fontRef idx="minor">
+            <a:schemeClr val="lt1"/>
+          </a:fontRef>
+        </p:style>
+        <p:txBody>
+          <a:bodyPr rtlCol="0" anchor="ctr"/>
+          <a:lstStyle/>
+          <a:p>
+            <a:pPr algn="ctr"/>
+          </a:p>
+        </p:txBody>
+      </p:sp>
+      <p:sp>
+        <p:nvSpPr>
+          <p:cNvPr id="3" name="Rectangle 2"/>
+          <p:cNvSpPr/>
+          <p:nvPr/>
+        </p:nvSpPr>
+        <p:spPr>
+          <a:xfrm>
+            <a:off x="0" y="960120"/>
+            <a:ext cx="12191695" cy="41148"/>
+          </a:xfrm>
+          <a:prstGeom prst="rect">
+            <a:avLst/>
+          </a:prstGeom>
+          <a:solidFill>
+            <a:srgbClr val="FFD000"/>
+          </a:solidFill>
+          <a:ln>
+            <a:noFill/>
+          </a:ln>
+        </p:spPr>
+        <p:style>
+          <a:lnRef idx="1">
+            <a:schemeClr val="accent1"/>
+          </a:lnRef>
+          <a:fillRef idx="3">
+            <a:schemeClr val="accent1"/>
+          </a:fillRef>
+          <a:effectRef idx="2">
+            <a:schemeClr val="accent1"/>
+          </a:effectRef>
+          <a:fontRef idx="minor">
+            <a:schemeClr val="lt1"/>
+          </a:fontRef>
+        </p:style>
+        <p:txBody>
+          <a:bodyPr rtlCol="0" anchor="ctr"/>
+          <a:lstStyle/>
+          <a:p>
+            <a:pPr algn="ctr"/>
+          </a:p>
+        </p:txBody>
+      </p:sp>
+      <p:sp>
+        <p:nvSpPr>
+          <p:cNvPr id="4" name="TextBox 3"/>
+          <p:cNvSpPr txBox="1"/>
+          <p:nvPr/>
+        </p:nvSpPr>
+        <p:spPr>
+          <a:xfrm>
+            <a:off x="457200" y="164592"/>
+            <a:ext cx="11277295" cy="502920"/>
+          </a:xfrm>
+          <a:prstGeom prst="rect">
+            <a:avLst/>
+          </a:prstGeom>
+          <a:noFill/>
+        </p:spPr>
+        <p:txBody>
+          <a:bodyPr wrap="square">
+            <a:spAutoFit/>
+          </a:bodyPr>
+          <a:lstStyle/>
+          <a:p>
+            <a:r>
+              <a:rPr sz="2600" b="1" i="0">
+                <a:solidFill>
+                  <a:srgbClr val="FFFFFF"/>
+                </a:solidFill>
+                <a:latin typeface="Calibri"/>
+              </a:rPr>
+              <a:t>Los códigos y las tres normas colombianas que hay que saber nombrar (2/3)</a:t>
+            </a:r>
+          </a:p>
+        </p:txBody>
+      </p:sp>
+      <p:sp>
+        <p:nvSpPr>
+          <p:cNvPr id="5" name="TextBox 4"/>
+          <p:cNvSpPr txBox="1"/>
+          <p:nvPr/>
+        </p:nvSpPr>
+        <p:spPr>
+          <a:xfrm>
+            <a:off x="457200" y="1170432"/>
+            <a:ext cx="11277295" cy="5230368"/>
+          </a:xfrm>
+          <a:prstGeom prst="rect">
+            <a:avLst/>
+          </a:prstGeom>
+          <a:noFill/>
+        </p:spPr>
+        <p:txBody>
+          <a:bodyPr wrap="square">
+            <a:spAutoFit/>
+          </a:bodyPr>
+          <a:lstStyle/>
+          <a:p>
+            <a:pPr>
+              <a:spcAft>
+                <a:spcPts val="800"/>
+              </a:spcAft>
+            </a:pPr>
+            <a:r>
+              <a:rPr sz="1900" b="0" i="0">
+                <a:solidFill>
+                  <a:srgbClr val="333333"/>
+                </a:solidFill>
+                <a:latin typeface="Calibri"/>
+              </a:rPr>
+              <a:t>–   La expide el COPNIA —Consejo Profesional Nacional de Ingeniería—, y el COPNIA puede sancionar y suspenderla.</a:t>
+            </a:r>
+          </a:p>
+          <a:p>
+            <a:pPr>
+              <a:spcAft>
+                <a:spcPts val="800"/>
+              </a:spcAft>
+            </a:pPr>
+            <a:r>
+              <a:rPr sz="1900" b="0" i="0">
+                <a:solidFill>
+                  <a:srgbClr val="333333"/>
+                </a:solidFill>
+                <a:latin typeface="Calibri"/>
+              </a:rPr>
+              <a:t>–   Es decir, la ética profesional aquí no es un discurso: tiene una autoridad, un procedimiento y una consecuencia sobre el derecho a ejercer. </a:t>
+            </a:r>
+            <a:r>
+              <a:rPr sz="1900" b="1" i="0">
+                <a:solidFill>
+                  <a:srgbClr val="333333"/>
+                </a:solidFill>
+                <a:latin typeface="Calibri"/>
+              </a:rPr>
+              <a:t>Ley 1581 de 2012</a:t>
+            </a:r>
+            <a:r>
+              <a:rPr sz="1900" b="0" i="0">
+                <a:solidFill>
+                  <a:srgbClr val="333333"/>
+                </a:solidFill>
+                <a:latin typeface="Calibri"/>
+              </a:rPr>
+              <a:t> (con el Decreto 1377 de 2013) es la de protección de datos personales</a:t>
+            </a:r>
+          </a:p>
+          <a:p>
+            <a:pPr>
+              <a:spcAft>
+                <a:spcPts val="800"/>
+              </a:spcAft>
+            </a:pPr>
+            <a:r>
+              <a:rPr sz="1900" b="0" i="0">
+                <a:solidFill>
+                  <a:srgbClr val="333333"/>
+                </a:solidFill>
+                <a:latin typeface="Calibri"/>
+              </a:rPr>
+              <a:t>–   Y es la norma que más van a tocar en su vida laboral, empezando por el proyecto de este curso.</a:t>
+            </a:r>
+          </a:p>
+          <a:p>
+            <a:pPr>
+              <a:spcAft>
+                <a:spcPts val="800"/>
+              </a:spcAft>
+            </a:pPr>
+            <a:r>
+              <a:rPr sz="1900" b="0" i="0">
+                <a:solidFill>
+                  <a:srgbClr val="333333"/>
+                </a:solidFill>
+                <a:latin typeface="Calibri"/>
+              </a:rPr>
+              <a:t>–   Los principios que hay que poder nombrar: finalidad (los datos se piden para algo declarado y no se usan para otra cosa)</a:t>
+            </a:r>
+          </a:p>
+          <a:p>
+            <a:pPr>
+              <a:spcAft>
+                <a:spcPts val="800"/>
+              </a:spcAft>
+            </a:pPr>
+            <a:r>
+              <a:rPr sz="1900" b="0" i="0">
+                <a:solidFill>
+                  <a:srgbClr val="333333"/>
+                </a:solidFill>
+                <a:latin typeface="Calibri"/>
+              </a:rPr>
+              <a:t>–   Libertad (hace falta autorización previa, expresa e informada), veracidad, transparencia, acceso restringido, seguridad y confidencialidad.</a:t>
+            </a:r>
+          </a:p>
+          <a:p>
+            <a:pPr>
+              <a:spcAft>
+                <a:spcPts val="800"/>
+              </a:spcAft>
+            </a:pPr>
+            <a:r>
+              <a:rPr sz="1900" b="0" i="0">
+                <a:solidFill>
+                  <a:srgbClr val="333333"/>
+                </a:solidFill>
+                <a:latin typeface="Calibri"/>
+              </a:rPr>
+              <a:t>–   Los </a:t>
+            </a:r>
+            <a:r>
+              <a:rPr sz="1900" b="1" i="0">
+                <a:solidFill>
+                  <a:srgbClr val="333333"/>
+                </a:solidFill>
+                <a:latin typeface="Calibri"/>
+              </a:rPr>
+              <a:t>datos sensibles</a:t>
+            </a:r>
+            <a:r>
+              <a:rPr sz="1900" b="0" i="0">
+                <a:solidFill>
+                  <a:srgbClr val="333333"/>
+                </a:solidFill>
+                <a:latin typeface="Calibri"/>
+              </a:rPr>
+              <a:t> —salud, biometría, orientación política, sexual o religiosa, datos de niños— tienen protección reforzada.</a:t>
+            </a:r>
+          </a:p>
+          <a:p>
+            <a:pPr>
+              <a:spcAft>
+                <a:spcPts val="800"/>
+              </a:spcAft>
+            </a:pPr>
+            <a:r>
+              <a:rPr sz="1900" b="0" i="0">
+                <a:solidFill>
+                  <a:srgbClr val="333333"/>
+                </a:solidFill>
+                <a:latin typeface="Calibri"/>
+              </a:rPr>
+              <a:t>–   La autoridad es la Superintendencia de Industria y Comercio.</a:t>
+            </a:r>
+          </a:p>
+          <a:p>
+            <a:pPr>
+              <a:spcAft>
+                <a:spcPts val="800"/>
+              </a:spcAft>
+            </a:pPr>
+            <a:r>
+              <a:rPr sz="1900" b="0" i="0">
+                <a:solidFill>
+                  <a:srgbClr val="333333"/>
+                </a:solidFill>
+                <a:latin typeface="Calibri"/>
+              </a:rPr>
+              <a:t>–   Aterrícelo en el curso: si un equipo quiere hacer un proyecto con una base de datos de pacientes de un consultorio del barrio, esta ley le aplica completa</a:t>
+            </a:r>
+          </a:p>
+        </p:txBody>
+      </p:sp>
+      <p:sp>
+        <p:nvSpPr>
+          <p:cNvPr id="6" name="TextBox 5"/>
+          <p:cNvSpPr txBox="1"/>
+          <p:nvPr/>
+        </p:nvSpPr>
+        <p:spPr>
+          <a:xfrm>
+            <a:off x="11185855" y="6473952"/>
+            <a:ext cx="640080" cy="274320"/>
+          </a:xfrm>
+          <a:prstGeom prst="rect">
+            <a:avLst/>
+          </a:prstGeom>
+          <a:noFill/>
+        </p:spPr>
+        <p:txBody>
+          <a:bodyPr wrap="square">
+            <a:spAutoFit/>
+          </a:bodyPr>
+          <a:lstStyle/>
+          <a:p>
+            <a:pPr algn="r"/>
+            <a:r>
+              <a:rPr sz="1100" b="0" i="0">
+                <a:solidFill>
+                  <a:srgbClr val="666666"/>
+                </a:solidFill>
+                <a:latin typeface="Calibri"/>
+              </a:rPr>
+              <a:t>15</a:t>
+            </a:r>
+          </a:p>
+        </p:txBody>
+      </p:sp>
+    </p:spTree>
+  </p:cSld>
+  <p:clrMapOvr>
+    <a:masterClrMapping/>
+  </p:clrMapOvr>
+</p:sld>
+</file>
+
+<file path=ppt/slides/slide16.xml><?xml version="1.0" encoding="utf-8"?>
+<p:sld xmlns:a="http://schemas.openxmlformats.org/drawingml/2006/main" xmlns:p="http://schemas.openxmlformats.org/presentationml/2006/main" xmlns:r="http://schemas.openxmlformats.org/officeDocument/2006/relationships">
+  <p:cSld>
+    <p:bg>
+      <p:bgPr>
+        <a:solidFill>
+          <a:srgbClr val="FFFFFF"/>
+        </a:solidFill>
+        <a:effectLst/>
+      </p:bgPr>
+    </p:bg>
+    <p:spTree>
+      <p:nvGrpSpPr>
+        <p:cNvPr id="1" name=""/>
+        <p:cNvGrpSpPr/>
+        <p:nvPr/>
+      </p:nvGrpSpPr>
+      <p:grpSpPr/>
+      <p:sp>
+        <p:nvSpPr>
+          <p:cNvPr id="2" name="Rectangle 1"/>
+          <p:cNvSpPr/>
+          <p:nvPr/>
+        </p:nvSpPr>
+        <p:spPr>
+          <a:xfrm>
+            <a:off x="0" y="0"/>
+            <a:ext cx="12191695" cy="960120"/>
+          </a:xfrm>
+          <a:prstGeom prst="rect">
+            <a:avLst/>
+          </a:prstGeom>
+          <a:solidFill>
+            <a:srgbClr val="095292"/>
+          </a:solidFill>
+          <a:ln>
+            <a:noFill/>
+          </a:ln>
+        </p:spPr>
+        <p:style>
+          <a:lnRef idx="1">
+            <a:schemeClr val="accent1"/>
+          </a:lnRef>
+          <a:fillRef idx="3">
+            <a:schemeClr val="accent1"/>
+          </a:fillRef>
+          <a:effectRef idx="2">
+            <a:schemeClr val="accent1"/>
+          </a:effectRef>
+          <a:fontRef idx="minor">
+            <a:schemeClr val="lt1"/>
+          </a:fontRef>
+        </p:style>
+        <p:txBody>
+          <a:bodyPr rtlCol="0" anchor="ctr"/>
+          <a:lstStyle/>
+          <a:p>
+            <a:pPr algn="ctr"/>
+          </a:p>
+        </p:txBody>
+      </p:sp>
+      <p:sp>
+        <p:nvSpPr>
+          <p:cNvPr id="3" name="Rectangle 2"/>
+          <p:cNvSpPr/>
+          <p:nvPr/>
+        </p:nvSpPr>
+        <p:spPr>
+          <a:xfrm>
+            <a:off x="0" y="960120"/>
+            <a:ext cx="12191695" cy="41148"/>
+          </a:xfrm>
+          <a:prstGeom prst="rect">
+            <a:avLst/>
+          </a:prstGeom>
+          <a:solidFill>
+            <a:srgbClr val="FFD000"/>
+          </a:solidFill>
+          <a:ln>
+            <a:noFill/>
+          </a:ln>
+        </p:spPr>
+        <p:style>
+          <a:lnRef idx="1">
+            <a:schemeClr val="accent1"/>
+          </a:lnRef>
+          <a:fillRef idx="3">
+            <a:schemeClr val="accent1"/>
+          </a:fillRef>
+          <a:effectRef idx="2">
+            <a:schemeClr val="accent1"/>
+          </a:effectRef>
+          <a:fontRef idx="minor">
+            <a:schemeClr val="lt1"/>
+          </a:fontRef>
+        </p:style>
+        <p:txBody>
+          <a:bodyPr rtlCol="0" anchor="ctr"/>
+          <a:lstStyle/>
+          <a:p>
+            <a:pPr algn="ctr"/>
+          </a:p>
+        </p:txBody>
+      </p:sp>
+      <p:sp>
+        <p:nvSpPr>
+          <p:cNvPr id="4" name="TextBox 3"/>
+          <p:cNvSpPr txBox="1"/>
+          <p:nvPr/>
+        </p:nvSpPr>
+        <p:spPr>
+          <a:xfrm>
+            <a:off x="457200" y="164592"/>
+            <a:ext cx="11277295" cy="502920"/>
+          </a:xfrm>
+          <a:prstGeom prst="rect">
+            <a:avLst/>
+          </a:prstGeom>
+          <a:noFill/>
+        </p:spPr>
+        <p:txBody>
+          <a:bodyPr wrap="square">
+            <a:spAutoFit/>
+          </a:bodyPr>
+          <a:lstStyle/>
+          <a:p>
+            <a:r>
+              <a:rPr sz="2600" b="1" i="0">
+                <a:solidFill>
+                  <a:srgbClr val="FFFFFF"/>
+                </a:solidFill>
+                <a:latin typeface="Calibri"/>
+              </a:rPr>
+              <a:t>Los códigos y las tres normas colombianas que hay que saber nombrar (3/3)</a:t>
+            </a:r>
+          </a:p>
+        </p:txBody>
+      </p:sp>
+      <p:sp>
+        <p:nvSpPr>
+          <p:cNvPr id="5" name="TextBox 4"/>
+          <p:cNvSpPr txBox="1"/>
+          <p:nvPr/>
+        </p:nvSpPr>
+        <p:spPr>
+          <a:xfrm>
+            <a:off x="457200" y="1170432"/>
+            <a:ext cx="11277295" cy="5230368"/>
+          </a:xfrm>
+          <a:prstGeom prst="rect">
+            <a:avLst/>
+          </a:prstGeom>
+          <a:noFill/>
+        </p:spPr>
+        <p:txBody>
+          <a:bodyPr wrap="square">
+            <a:spAutoFit/>
+          </a:bodyPr>
+          <a:lstStyle/>
+          <a:p>
+            <a:pPr>
+              <a:spcAft>
+                <a:spcPts val="800"/>
+              </a:spcAft>
+            </a:pPr>
+            <a:r>
+              <a:rPr sz="2000" b="0" i="0">
+                <a:solidFill>
+                  <a:srgbClr val="333333"/>
+                </a:solidFill>
+                <a:latin typeface="Calibri"/>
+              </a:rPr>
+              <a:t>–   Y por eso el curso prohíbe subir nombres y cédulas. </a:t>
+            </a:r>
+            <a:r>
+              <a:rPr sz="2000" b="1" i="0">
+                <a:solidFill>
+                  <a:srgbClr val="333333"/>
+                </a:solidFill>
+                <a:latin typeface="Calibri"/>
+              </a:rPr>
+              <a:t>Ley 1273 de 2009</a:t>
+            </a:r>
+            <a:r>
+              <a:rPr sz="2000" b="0" i="0">
+                <a:solidFill>
+                  <a:srgbClr val="333333"/>
+                </a:solidFill>
+                <a:latin typeface="Calibri"/>
+              </a:rPr>
+              <a:t> agregó al Código Penal un título sobre la protección de la información y los datos: acceso abusivo a un sistema informático</a:t>
+            </a:r>
+          </a:p>
+          <a:p>
+            <a:pPr>
+              <a:spcAft>
+                <a:spcPts val="800"/>
+              </a:spcAft>
+            </a:pPr>
+            <a:r>
+              <a:rPr sz="2000" b="0" i="0">
+                <a:solidFill>
+                  <a:srgbClr val="333333"/>
+                </a:solidFill>
+                <a:latin typeface="Calibri"/>
+              </a:rPr>
+              <a:t>–   Obstaculización ilegítima, interceptación de datos, daño informático, hurto por medios informáticos.</a:t>
+            </a:r>
+          </a:p>
+          <a:p>
+            <a:pPr>
+              <a:spcAft>
+                <a:spcPts val="800"/>
+              </a:spcAft>
+            </a:pPr>
+            <a:r>
+              <a:rPr sz="2000" b="0" i="0">
+                <a:solidFill>
+                  <a:srgbClr val="333333"/>
+                </a:solidFill>
+                <a:latin typeface="Calibri"/>
+              </a:rPr>
+              <a:t>–   La diferencia con la anterior hay que subrayarla: aquí la consecuencia es </a:t>
+            </a:r>
+            <a:r>
+              <a:rPr sz="2000" b="1" i="0">
+                <a:solidFill>
+                  <a:srgbClr val="333333"/>
+                </a:solidFill>
+                <a:latin typeface="Calibri"/>
+              </a:rPr>
+              <a:t>pena de prisión para la persona</a:t>
+            </a:r>
+            <a:r>
+              <a:rPr sz="2000" b="0" i="0">
+                <a:solidFill>
+                  <a:srgbClr val="333333"/>
+                </a:solidFill>
+                <a:latin typeface="Calibri"/>
+              </a:rPr>
+              <a:t>, no una sanción administrativa a la empresa.</a:t>
+            </a:r>
+          </a:p>
+          <a:p>
+            <a:pPr>
+              <a:spcAft>
+                <a:spcPts val="800"/>
+              </a:spcAft>
+            </a:pPr>
+            <a:r>
+              <a:rPr sz="2000" b="0" i="0">
+                <a:solidFill>
+                  <a:srgbClr val="333333"/>
+                </a:solidFill>
+                <a:latin typeface="Calibri"/>
+              </a:rPr>
+              <a:t>–   Es la norma que convierte en delito lo que un estudiante puede considerar una travesura —entrar a un sistema ajeno «solo para probar»— y conviene decirlo hoy, en la sesión 4, y no cuando ya pasó.</a:t>
+            </a:r>
+          </a:p>
+        </p:txBody>
+      </p:sp>
+      <p:sp>
+        <p:nvSpPr>
+          <p:cNvPr id="6" name="TextBox 5"/>
+          <p:cNvSpPr txBox="1"/>
+          <p:nvPr/>
+        </p:nvSpPr>
+        <p:spPr>
+          <a:xfrm>
+            <a:off x="11185855" y="6473952"/>
+            <a:ext cx="640080" cy="274320"/>
+          </a:xfrm>
+          <a:prstGeom prst="rect">
+            <a:avLst/>
+          </a:prstGeom>
+          <a:noFill/>
+        </p:spPr>
+        <p:txBody>
+          <a:bodyPr wrap="square">
+            <a:spAutoFit/>
+          </a:bodyPr>
+          <a:lstStyle/>
+          <a:p>
+            <a:pPr algn="r"/>
+            <a:r>
+              <a:rPr sz="1100" b="0" i="0">
+                <a:solidFill>
+                  <a:srgbClr val="666666"/>
+                </a:solidFill>
+                <a:latin typeface="Calibri"/>
+              </a:rPr>
+              <a:t>16</a:t>
+            </a:r>
+          </a:p>
+        </p:txBody>
+      </p:sp>
+    </p:spTree>
+  </p:cSld>
+  <p:clrMapOvr>
+    <a:masterClrMapping/>
+  </p:clrMapOvr>
+</p:sld>
+</file>
+
+<file path=ppt/slides/slide17.xml><?xml version="1.0" encoding="utf-8"?>
+<p:sld xmlns:a="http://schemas.openxmlformats.org/drawingml/2006/main" xmlns:p="http://schemas.openxmlformats.org/presentationml/2006/main" xmlns:r="http://schemas.openxmlformats.org/officeDocument/2006/relationships">
+  <p:cSld>
+    <p:bg>
+      <p:bgPr>
+        <a:solidFill>
+          <a:srgbClr val="FFFFFF"/>
+        </a:solidFill>
+        <a:effectLst/>
+      </p:bgPr>
+    </p:bg>
+    <p:spTree>
+      <p:nvGrpSpPr>
+        <p:cNvPr id="1" name=""/>
+        <p:cNvGrpSpPr/>
+        <p:nvPr/>
+      </p:nvGrpSpPr>
+      <p:grpSpPr/>
+      <p:sp>
+        <p:nvSpPr>
+          <p:cNvPr id="2" name="Rectangle 1"/>
+          <p:cNvSpPr/>
+          <p:nvPr/>
+        </p:nvSpPr>
+        <p:spPr>
+          <a:xfrm>
+            <a:off x="0" y="0"/>
+            <a:ext cx="12191695" cy="960120"/>
+          </a:xfrm>
+          <a:prstGeom prst="rect">
+            <a:avLst/>
+          </a:prstGeom>
+          <a:solidFill>
+            <a:srgbClr val="095292"/>
+          </a:solidFill>
+          <a:ln>
+            <a:noFill/>
+          </a:ln>
+        </p:spPr>
+        <p:style>
+          <a:lnRef idx="1">
+            <a:schemeClr val="accent1"/>
+          </a:lnRef>
+          <a:fillRef idx="3">
+            <a:schemeClr val="accent1"/>
+          </a:fillRef>
+          <a:effectRef idx="2">
+            <a:schemeClr val="accent1"/>
+          </a:effectRef>
+          <a:fontRef idx="minor">
+            <a:schemeClr val="lt1"/>
+          </a:fontRef>
+        </p:style>
+        <p:txBody>
+          <a:bodyPr rtlCol="0" anchor="ctr"/>
+          <a:lstStyle/>
+          <a:p>
+            <a:pPr algn="ctr"/>
+          </a:p>
+        </p:txBody>
+      </p:sp>
+      <p:sp>
+        <p:nvSpPr>
+          <p:cNvPr id="3" name="Rectangle 2"/>
+          <p:cNvSpPr/>
+          <p:nvPr/>
+        </p:nvSpPr>
+        <p:spPr>
+          <a:xfrm>
+            <a:off x="0" y="960120"/>
+            <a:ext cx="12191695" cy="41148"/>
+          </a:xfrm>
+          <a:prstGeom prst="rect">
+            <a:avLst/>
+          </a:prstGeom>
+          <a:solidFill>
+            <a:srgbClr val="FFD000"/>
+          </a:solidFill>
+          <a:ln>
+            <a:noFill/>
+          </a:ln>
+        </p:spPr>
+        <p:style>
+          <a:lnRef idx="1">
+            <a:schemeClr val="accent1"/>
+          </a:lnRef>
+          <a:fillRef idx="3">
+            <a:schemeClr val="accent1"/>
+          </a:fillRef>
+          <a:effectRef idx="2">
+            <a:schemeClr val="accent1"/>
+          </a:effectRef>
+          <a:fontRef idx="minor">
+            <a:schemeClr val="lt1"/>
+          </a:fontRef>
+        </p:style>
+        <p:txBody>
+          <a:bodyPr rtlCol="0" anchor="ctr"/>
+          <a:lstStyle/>
+          <a:p>
+            <a:pPr algn="ctr"/>
+          </a:p>
+        </p:txBody>
+      </p:sp>
+      <p:sp>
+        <p:nvSpPr>
+          <p:cNvPr id="4" name="TextBox 3"/>
+          <p:cNvSpPr txBox="1"/>
+          <p:nvPr/>
+        </p:nvSpPr>
+        <p:spPr>
+          <a:xfrm>
+            <a:off x="457200" y="164592"/>
+            <a:ext cx="11277295" cy="502920"/>
+          </a:xfrm>
+          <a:prstGeom prst="rect">
+            <a:avLst/>
+          </a:prstGeom>
+          <a:noFill/>
+        </p:spPr>
+        <p:txBody>
+          <a:bodyPr wrap="square">
+            <a:spAutoFit/>
+          </a:bodyPr>
+          <a:lstStyle/>
+          <a:p>
+            <a:r>
+              <a:rPr sz="2600" b="1" i="0">
+                <a:solidFill>
+                  <a:srgbClr val="FFFFFF"/>
+                </a:solidFill>
+                <a:latin typeface="Calibri"/>
+              </a:rPr>
+              <a:t>Los cuatro casos: qué contar de cada uno y cuál es el momento de parar (1/4)</a:t>
+            </a:r>
+          </a:p>
+        </p:txBody>
+      </p:sp>
+      <p:sp>
+        <p:nvSpPr>
+          <p:cNvPr id="5" name="TextBox 4"/>
+          <p:cNvSpPr txBox="1"/>
+          <p:nvPr/>
+        </p:nvSpPr>
+        <p:spPr>
+          <a:xfrm>
+            <a:off x="457200" y="1170432"/>
+            <a:ext cx="11277295" cy="5230368"/>
+          </a:xfrm>
+          <a:prstGeom prst="rect">
+            <a:avLst/>
+          </a:prstGeom>
+          <a:noFill/>
+        </p:spPr>
+        <p:txBody>
+          <a:bodyPr wrap="square">
+            <a:spAutoFit/>
+          </a:bodyPr>
+          <a:lstStyle/>
+          <a:p>
+            <a:pPr>
+              <a:spcAft>
+                <a:spcPts val="800"/>
+              </a:spcAft>
+            </a:pPr>
+            <a:r>
+              <a:rPr sz="2000" b="0" i="0">
+                <a:solidFill>
+                  <a:srgbClr val="333333"/>
+                </a:solidFill>
+                <a:latin typeface="Calibri"/>
+              </a:rPr>
+              <a:t>–   </a:t>
+            </a:r>
+            <a:r>
+              <a:rPr sz="2000" b="1" i="0">
+                <a:solidFill>
+                  <a:srgbClr val="333333"/>
+                </a:solidFill>
+                <a:latin typeface="Calibri"/>
+              </a:rPr>
+              <a:t>Therac-25 (1985–1987).</a:t>
+            </a:r>
+            <a:r>
+              <a:rPr sz="2000" b="0" i="0">
+                <a:solidFill>
+                  <a:srgbClr val="333333"/>
+                </a:solidFill>
+                <a:latin typeface="Calibri"/>
+              </a:rPr>
+              <a:t> Máquina de radioterapia de la Atomic Energy of Canada Limited.</a:t>
+            </a:r>
+          </a:p>
+          <a:p>
+            <a:pPr>
+              <a:spcAft>
+                <a:spcPts val="800"/>
+              </a:spcAft>
+            </a:pPr>
+            <a:r>
+              <a:rPr sz="2000" b="0" i="0">
+                <a:solidFill>
+                  <a:srgbClr val="333333"/>
+                </a:solidFill>
+                <a:latin typeface="Calibri"/>
+              </a:rPr>
+              <a:t>–   Seis accidentes conocidos con sobredosis masivas de radiación y varios muertos.</a:t>
+            </a:r>
+          </a:p>
+          <a:p>
+            <a:pPr>
+              <a:spcAft>
+                <a:spcPts val="800"/>
+              </a:spcAft>
+            </a:pPr>
+            <a:r>
+              <a:rPr sz="2000" b="0" i="0">
+                <a:solidFill>
+                  <a:srgbClr val="333333"/>
+                </a:solidFill>
+                <a:latin typeface="Calibri"/>
+              </a:rPr>
+              <a:t>–   Las causas son de manual y hay que contarlas completas porque son técnicas: los modelos anteriores tenían </a:t>
+            </a:r>
+            <a:r>
+              <a:rPr sz="2000" b="1" i="0">
+                <a:solidFill>
+                  <a:srgbClr val="333333"/>
+                </a:solidFill>
+                <a:latin typeface="Calibri"/>
+              </a:rPr>
+              <a:t>seguros físicos</a:t>
+            </a:r>
+            <a:r>
+              <a:rPr sz="2000" b="0" i="0">
+                <a:solidFill>
+                  <a:srgbClr val="333333"/>
+                </a:solidFill>
+                <a:latin typeface="Calibri"/>
+              </a:rPr>
+              <a:t> que impedían mecánicamente una configuración peligrosa</a:t>
+            </a:r>
+          </a:p>
+          <a:p>
+            <a:pPr>
+              <a:spcAft>
+                <a:spcPts val="800"/>
+              </a:spcAft>
+            </a:pPr>
+            <a:r>
+              <a:rPr sz="2000" b="0" i="0">
+                <a:solidFill>
+                  <a:srgbClr val="333333"/>
+                </a:solidFill>
+                <a:latin typeface="Calibri"/>
+              </a:rPr>
+              <a:t>–   Y en el Therac-25 se quitaron confiando en que el software lo evitaría; el software venía reutilizado de los modelos anteriores, con errores que antes quedaban tapados por esos seguros</a:t>
+            </a:r>
+          </a:p>
+          <a:p>
+            <a:pPr>
+              <a:spcAft>
+                <a:spcPts val="800"/>
+              </a:spcAft>
+            </a:pPr>
+            <a:r>
+              <a:rPr sz="2000" b="0" i="0">
+                <a:solidFill>
+                  <a:srgbClr val="333333"/>
+                </a:solidFill>
+                <a:latin typeface="Calibri"/>
+              </a:rPr>
+              <a:t>–   Había una condición de carrera que se disparaba cuando la operadora corregía la pantalla muy rápido, algo que hacían las operadoras expertas</a:t>
+            </a:r>
+          </a:p>
+          <a:p>
+            <a:pPr>
+              <a:spcAft>
+                <a:spcPts val="800"/>
+              </a:spcAft>
+            </a:pPr>
+            <a:r>
+              <a:rPr sz="2000" b="0" i="0">
+                <a:solidFill>
+                  <a:srgbClr val="333333"/>
+                </a:solidFill>
+                <a:latin typeface="Calibri"/>
+              </a:rPr>
+              <a:t>–   Los mensajes de error eran crípticos («MALFUNCTION 54») y aparecían tan seguido que se ignoraban; nunca hubo revisión independiente del código; y el fabricante sostuvo al principio que la sobredosis era imposible.</a:t>
+            </a:r>
+          </a:p>
+        </p:txBody>
+      </p:sp>
+      <p:sp>
+        <p:nvSpPr>
+          <p:cNvPr id="6" name="TextBox 5"/>
+          <p:cNvSpPr txBox="1"/>
+          <p:nvPr/>
+        </p:nvSpPr>
+        <p:spPr>
+          <a:xfrm>
+            <a:off x="11185855" y="6473952"/>
+            <a:ext cx="640080" cy="274320"/>
+          </a:xfrm>
+          <a:prstGeom prst="rect">
+            <a:avLst/>
+          </a:prstGeom>
+          <a:noFill/>
+        </p:spPr>
+        <p:txBody>
+          <a:bodyPr wrap="square">
+            <a:spAutoFit/>
+          </a:bodyPr>
+          <a:lstStyle/>
+          <a:p>
+            <a:pPr algn="r"/>
+            <a:r>
+              <a:rPr sz="1100" b="0" i="0">
+                <a:solidFill>
+                  <a:srgbClr val="666666"/>
+                </a:solidFill>
+                <a:latin typeface="Calibri"/>
+              </a:rPr>
+              <a:t>17</a:t>
+            </a:r>
+          </a:p>
+        </p:txBody>
+      </p:sp>
+    </p:spTree>
+  </p:cSld>
+  <p:clrMapOvr>
+    <a:masterClrMapping/>
+  </p:clrMapOvr>
+</p:sld>
+</file>
+
+<file path=ppt/slides/slide18.xml><?xml version="1.0" encoding="utf-8"?>
+<p:sld xmlns:a="http://schemas.openxmlformats.org/drawingml/2006/main" xmlns:p="http://schemas.openxmlformats.org/presentationml/2006/main" xmlns:r="http://schemas.openxmlformats.org/officeDocument/2006/relationships">
+  <p:cSld>
+    <p:bg>
+      <p:bgPr>
+        <a:solidFill>
+          <a:srgbClr val="FFFFFF"/>
+        </a:solidFill>
+        <a:effectLst/>
+      </p:bgPr>
+    </p:bg>
+    <p:spTree>
+      <p:nvGrpSpPr>
+        <p:cNvPr id="1" name=""/>
+        <p:cNvGrpSpPr/>
+        <p:nvPr/>
+      </p:nvGrpSpPr>
+      <p:grpSpPr/>
+      <p:sp>
+        <p:nvSpPr>
+          <p:cNvPr id="2" name="Rectangle 1"/>
+          <p:cNvSpPr/>
+          <p:nvPr/>
+        </p:nvSpPr>
+        <p:spPr>
+          <a:xfrm>
+            <a:off x="0" y="0"/>
+            <a:ext cx="12191695" cy="960120"/>
+          </a:xfrm>
+          <a:prstGeom prst="rect">
+            <a:avLst/>
+          </a:prstGeom>
+          <a:solidFill>
+            <a:srgbClr val="095292"/>
+          </a:solidFill>
+          <a:ln>
+            <a:noFill/>
+          </a:ln>
+        </p:spPr>
+        <p:style>
+          <a:lnRef idx="1">
+            <a:schemeClr val="accent1"/>
+          </a:lnRef>
+          <a:fillRef idx="3">
+            <a:schemeClr val="accent1"/>
+          </a:fillRef>
+          <a:effectRef idx="2">
+            <a:schemeClr val="accent1"/>
+          </a:effectRef>
+          <a:fontRef idx="minor">
+            <a:schemeClr val="lt1"/>
+          </a:fontRef>
+        </p:style>
+        <p:txBody>
+          <a:bodyPr rtlCol="0" anchor="ctr"/>
+          <a:lstStyle/>
+          <a:p>
+            <a:pPr algn="ctr"/>
+          </a:p>
+        </p:txBody>
+      </p:sp>
+      <p:sp>
+        <p:nvSpPr>
+          <p:cNvPr id="3" name="Rectangle 2"/>
+          <p:cNvSpPr/>
+          <p:nvPr/>
+        </p:nvSpPr>
+        <p:spPr>
+          <a:xfrm>
+            <a:off x="0" y="960120"/>
+            <a:ext cx="12191695" cy="41148"/>
+          </a:xfrm>
+          <a:prstGeom prst="rect">
+            <a:avLst/>
+          </a:prstGeom>
+          <a:solidFill>
+            <a:srgbClr val="FFD000"/>
+          </a:solidFill>
+          <a:ln>
+            <a:noFill/>
+          </a:ln>
+        </p:spPr>
+        <p:style>
+          <a:lnRef idx="1">
+            <a:schemeClr val="accent1"/>
+          </a:lnRef>
+          <a:fillRef idx="3">
+            <a:schemeClr val="accent1"/>
+          </a:fillRef>
+          <a:effectRef idx="2">
+            <a:schemeClr val="accent1"/>
+          </a:effectRef>
+          <a:fontRef idx="minor">
+            <a:schemeClr val="lt1"/>
+          </a:fontRef>
+        </p:style>
+        <p:txBody>
+          <a:bodyPr rtlCol="0" anchor="ctr"/>
+          <a:lstStyle/>
+          <a:p>
+            <a:pPr algn="ctr"/>
+          </a:p>
+        </p:txBody>
+      </p:sp>
+      <p:sp>
+        <p:nvSpPr>
+          <p:cNvPr id="4" name="TextBox 3"/>
+          <p:cNvSpPr txBox="1"/>
+          <p:nvPr/>
+        </p:nvSpPr>
+        <p:spPr>
+          <a:xfrm>
+            <a:off x="457200" y="164592"/>
+            <a:ext cx="11277295" cy="502920"/>
+          </a:xfrm>
+          <a:prstGeom prst="rect">
+            <a:avLst/>
+          </a:prstGeom>
+          <a:noFill/>
+        </p:spPr>
+        <p:txBody>
+          <a:bodyPr wrap="square">
+            <a:spAutoFit/>
+          </a:bodyPr>
+          <a:lstStyle/>
+          <a:p>
+            <a:r>
+              <a:rPr sz="2600" b="1" i="0">
+                <a:solidFill>
+                  <a:srgbClr val="FFFFFF"/>
+                </a:solidFill>
+                <a:latin typeface="Calibri"/>
+              </a:rPr>
+              <a:t>Los cuatro casos: qué contar de cada uno y cuál es el momento de parar (2/4)</a:t>
+            </a:r>
+          </a:p>
+        </p:txBody>
+      </p:sp>
+      <p:sp>
+        <p:nvSpPr>
+          <p:cNvPr id="5" name="TextBox 4"/>
+          <p:cNvSpPr txBox="1"/>
+          <p:nvPr/>
+        </p:nvSpPr>
+        <p:spPr>
+          <a:xfrm>
+            <a:off x="457200" y="1170432"/>
+            <a:ext cx="11277295" cy="5230368"/>
+          </a:xfrm>
+          <a:prstGeom prst="rect">
+            <a:avLst/>
+          </a:prstGeom>
+          <a:noFill/>
+        </p:spPr>
+        <p:txBody>
+          <a:bodyPr wrap="square">
+            <a:spAutoFit/>
+          </a:bodyPr>
+          <a:lstStyle/>
+          <a:p>
+            <a:pPr>
+              <a:spcAft>
+                <a:spcPts val="800"/>
+              </a:spcAft>
+            </a:pPr>
+            <a:r>
+              <a:rPr sz="2000" b="0" i="0">
+                <a:solidFill>
+                  <a:srgbClr val="333333"/>
+                </a:solidFill>
+                <a:latin typeface="Calibri"/>
+              </a:rPr>
+              <a:t>–   La investigación de Nancy Leveson y Clark Turner (1993) es la fuente canónica y está disponible. </a:t>
+            </a:r>
+            <a:r>
+              <a:rPr sz="2000" b="1" i="0">
+                <a:solidFill>
+                  <a:srgbClr val="333333"/>
+                </a:solidFill>
+                <a:latin typeface="Calibri"/>
+              </a:rPr>
+              <a:t>El momento de parar</a:t>
+            </a:r>
+            <a:r>
+              <a:rPr sz="2000" b="0" i="0">
+                <a:solidFill>
+                  <a:srgbClr val="333333"/>
+                </a:solidFill>
+                <a:latin typeface="Calibri"/>
+              </a:rPr>
+              <a:t> fue la decisión de quitar los seguros físicos: ahí, en una reunión de diseño</a:t>
+            </a:r>
+          </a:p>
+          <a:p>
+            <a:pPr>
+              <a:spcAft>
+                <a:spcPts val="800"/>
+              </a:spcAft>
+            </a:pPr>
+            <a:r>
+              <a:rPr sz="2000" b="0" i="0">
+                <a:solidFill>
+                  <a:srgbClr val="333333"/>
+                </a:solidFill>
+                <a:latin typeface="Calibri"/>
+              </a:rPr>
+              <a:t>–   Era gratis. </a:t>
+            </a:r>
+            <a:r>
+              <a:rPr sz="2000" b="1" i="0">
+                <a:solidFill>
+                  <a:srgbClr val="333333"/>
+                </a:solidFill>
+                <a:latin typeface="Calibri"/>
+              </a:rPr>
+              <a:t>Volkswagen (2015).</a:t>
+            </a:r>
+            <a:r>
+              <a:rPr sz="2000" b="0" i="0">
+                <a:solidFill>
+                  <a:srgbClr val="333333"/>
+                </a:solidFill>
+                <a:latin typeface="Calibri"/>
+              </a:rPr>
+              <a:t> El «defeat device»: software que reconocía las condiciones de la prueba de laboratorio y activaba el control de emisiones solo en ese momento.</a:t>
+            </a:r>
+          </a:p>
+          <a:p>
+            <a:pPr>
+              <a:spcAft>
+                <a:spcPts val="800"/>
+              </a:spcAft>
+            </a:pPr>
+            <a:r>
+              <a:rPr sz="2000" b="0" i="0">
+                <a:solidFill>
+                  <a:srgbClr val="333333"/>
+                </a:solidFill>
+                <a:latin typeface="Calibri"/>
+              </a:rPr>
+              <a:t>–   En circulación real el vehículo emitía óxidos de nitrógeno muy por encima del límite.</a:t>
+            </a:r>
+          </a:p>
+          <a:p>
+            <a:pPr>
+              <a:spcAft>
+                <a:spcPts val="800"/>
+              </a:spcAft>
+            </a:pPr>
+            <a:r>
+              <a:rPr sz="2000" b="0" i="0">
+                <a:solidFill>
+                  <a:srgbClr val="333333"/>
+                </a:solidFill>
+                <a:latin typeface="Calibri"/>
+              </a:rPr>
+              <a:t>–   Se descubrió en 2015 y el detalle que interesa aquí es judicial: el ingeniero James Liang se declaró culpable y fue condenado en 2017 a cuarenta meses de prisión y una multa</a:t>
+            </a:r>
+          </a:p>
+          <a:p>
+            <a:pPr>
+              <a:spcAft>
+                <a:spcPts val="800"/>
+              </a:spcAft>
+            </a:pPr>
+            <a:r>
+              <a:rPr sz="2000" b="0" i="0">
+                <a:solidFill>
+                  <a:srgbClr val="333333"/>
+                </a:solidFill>
+                <a:latin typeface="Calibri"/>
+              </a:rPr>
+              <a:t>–   Un directivo recibió una pena mayor. </a:t>
+            </a:r>
+            <a:r>
+              <a:rPr sz="2000" b="1" i="0">
+                <a:solidFill>
+                  <a:srgbClr val="333333"/>
+                </a:solidFill>
+                <a:latin typeface="Calibri"/>
+              </a:rPr>
+              <a:t>El momento de parar</a:t>
+            </a:r>
+            <a:r>
+              <a:rPr sz="2000" b="0" i="0">
+                <a:solidFill>
+                  <a:srgbClr val="333333"/>
+                </a:solidFill>
+                <a:latin typeface="Calibri"/>
+              </a:rPr>
+              <a:t> fue cuando le pidieron escribir la detección de la prueba: no hacía falta ser experto en emisiones para ver que un código cuyo propósito es comportarse distinto durante el examen existe para engañar. </a:t>
+            </a:r>
+            <a:r>
+              <a:rPr sz="2000" b="1" i="0">
+                <a:solidFill>
+                  <a:srgbClr val="333333"/>
+                </a:solidFill>
+                <a:latin typeface="Calibri"/>
+              </a:rPr>
+              <a:t>Boeing 737 MAX (2018–2019).</a:t>
+            </a:r>
+            <a:r>
+              <a:rPr sz="2000" b="0" i="0">
+                <a:solidFill>
+                  <a:srgbClr val="333333"/>
+                </a:solidFill>
+                <a:latin typeface="Calibri"/>
+              </a:rPr>
+              <a:t> El MCAS empujaba el morro hacia abajo con base en </a:t>
+            </a:r>
+            <a:r>
+              <a:rPr sz="2000" b="1" i="0">
+                <a:solidFill>
+                  <a:srgbClr val="333333"/>
+                </a:solidFill>
+                <a:latin typeface="Calibri"/>
+              </a:rPr>
+              <a:t>un solo sensor de ángulo de ataque</a:t>
+            </a:r>
+            <a:r>
+              <a:rPr sz="2000" b="0" i="0">
+                <a:solidFill>
+                  <a:srgbClr val="333333"/>
+                </a:solidFill>
+                <a:latin typeface="Calibri"/>
+              </a:rPr>
+              <a:t>, podía activarse repetidamente, y no estaba explicado en el manual de vuelo, así que los pilotos no sabían que existía.</a:t>
+            </a:r>
+          </a:p>
+        </p:txBody>
+      </p:sp>
+      <p:sp>
+        <p:nvSpPr>
+          <p:cNvPr id="6" name="TextBox 5"/>
+          <p:cNvSpPr txBox="1"/>
+          <p:nvPr/>
+        </p:nvSpPr>
+        <p:spPr>
+          <a:xfrm>
+            <a:off x="11185855" y="6473952"/>
+            <a:ext cx="640080" cy="274320"/>
+          </a:xfrm>
+          <a:prstGeom prst="rect">
+            <a:avLst/>
+          </a:prstGeom>
+          <a:noFill/>
+        </p:spPr>
+        <p:txBody>
+          <a:bodyPr wrap="square">
+            <a:spAutoFit/>
+          </a:bodyPr>
+          <a:lstStyle/>
+          <a:p>
+            <a:pPr algn="r"/>
+            <a:r>
+              <a:rPr sz="1100" b="0" i="0">
+                <a:solidFill>
+                  <a:srgbClr val="666666"/>
+                </a:solidFill>
+                <a:latin typeface="Calibri"/>
+              </a:rPr>
+              <a:t>18</a:t>
+            </a:r>
+          </a:p>
+        </p:txBody>
+      </p:sp>
+    </p:spTree>
+  </p:cSld>
+  <p:clrMapOvr>
+    <a:masterClrMapping/>
+  </p:clrMapOvr>
+</p:sld>
+</file>
+
+<file path=ppt/slides/slide19.xml><?xml version="1.0" encoding="utf-8"?>
+<p:sld xmlns:a="http://schemas.openxmlformats.org/drawingml/2006/main" xmlns:p="http://schemas.openxmlformats.org/presentationml/2006/main" xmlns:r="http://schemas.openxmlformats.org/officeDocument/2006/relationships">
+  <p:cSld>
+    <p:bg>
+      <p:bgPr>
+        <a:solidFill>
+          <a:srgbClr val="FFFFFF"/>
+        </a:solidFill>
+        <a:effectLst/>
+      </p:bgPr>
+    </p:bg>
+    <p:spTree>
+      <p:nvGrpSpPr>
+        <p:cNvPr id="1" name=""/>
+        <p:cNvGrpSpPr/>
+        <p:nvPr/>
+      </p:nvGrpSpPr>
+      <p:grpSpPr/>
+      <p:sp>
+        <p:nvSpPr>
+          <p:cNvPr id="2" name="Rectangle 1"/>
+          <p:cNvSpPr/>
+          <p:nvPr/>
+        </p:nvSpPr>
+        <p:spPr>
+          <a:xfrm>
+            <a:off x="0" y="0"/>
+            <a:ext cx="12191695" cy="960120"/>
+          </a:xfrm>
+          <a:prstGeom prst="rect">
+            <a:avLst/>
+          </a:prstGeom>
+          <a:solidFill>
+            <a:srgbClr val="095292"/>
+          </a:solidFill>
+          <a:ln>
+            <a:noFill/>
+          </a:ln>
+        </p:spPr>
+        <p:style>
+          <a:lnRef idx="1">
+            <a:schemeClr val="accent1"/>
+          </a:lnRef>
+          <a:fillRef idx="3">
+            <a:schemeClr val="accent1"/>
+          </a:fillRef>
+          <a:effectRef idx="2">
+            <a:schemeClr val="accent1"/>
+          </a:effectRef>
+          <a:fontRef idx="minor">
+            <a:schemeClr val="lt1"/>
+          </a:fontRef>
+        </p:style>
+        <p:txBody>
+          <a:bodyPr rtlCol="0" anchor="ctr"/>
+          <a:lstStyle/>
+          <a:p>
+            <a:pPr algn="ctr"/>
+          </a:p>
+        </p:txBody>
+      </p:sp>
+      <p:sp>
+        <p:nvSpPr>
+          <p:cNvPr id="3" name="Rectangle 2"/>
+          <p:cNvSpPr/>
+          <p:nvPr/>
+        </p:nvSpPr>
+        <p:spPr>
+          <a:xfrm>
+            <a:off x="0" y="960120"/>
+            <a:ext cx="12191695" cy="41148"/>
+          </a:xfrm>
+          <a:prstGeom prst="rect">
+            <a:avLst/>
+          </a:prstGeom>
+          <a:solidFill>
+            <a:srgbClr val="FFD000"/>
+          </a:solidFill>
+          <a:ln>
+            <a:noFill/>
+          </a:ln>
+        </p:spPr>
+        <p:style>
+          <a:lnRef idx="1">
+            <a:schemeClr val="accent1"/>
+          </a:lnRef>
+          <a:fillRef idx="3">
+            <a:schemeClr val="accent1"/>
+          </a:fillRef>
+          <a:effectRef idx="2">
+            <a:schemeClr val="accent1"/>
+          </a:effectRef>
+          <a:fontRef idx="minor">
+            <a:schemeClr val="lt1"/>
+          </a:fontRef>
+        </p:style>
+        <p:txBody>
+          <a:bodyPr rtlCol="0" anchor="ctr"/>
+          <a:lstStyle/>
+          <a:p>
+            <a:pPr algn="ctr"/>
+          </a:p>
+        </p:txBody>
+      </p:sp>
+      <p:sp>
+        <p:nvSpPr>
+          <p:cNvPr id="4" name="TextBox 3"/>
+          <p:cNvSpPr txBox="1"/>
+          <p:nvPr/>
+        </p:nvSpPr>
+        <p:spPr>
+          <a:xfrm>
+            <a:off x="457200" y="164592"/>
+            <a:ext cx="11277295" cy="502920"/>
+          </a:xfrm>
+          <a:prstGeom prst="rect">
+            <a:avLst/>
+          </a:prstGeom>
+          <a:noFill/>
+        </p:spPr>
+        <p:txBody>
+          <a:bodyPr wrap="square">
+            <a:spAutoFit/>
+          </a:bodyPr>
+          <a:lstStyle/>
+          <a:p>
+            <a:r>
+              <a:rPr sz="2600" b="1" i="0">
+                <a:solidFill>
+                  <a:srgbClr val="FFFFFF"/>
+                </a:solidFill>
+                <a:latin typeface="Calibri"/>
+              </a:rPr>
+              <a:t>Los cuatro casos: qué contar de cada uno y cuál es el momento de parar (3/4)</a:t>
+            </a:r>
+          </a:p>
+        </p:txBody>
+      </p:sp>
+      <p:sp>
+        <p:nvSpPr>
+          <p:cNvPr id="5" name="TextBox 4"/>
+          <p:cNvSpPr txBox="1"/>
+          <p:nvPr/>
+        </p:nvSpPr>
+        <p:spPr>
+          <a:xfrm>
+            <a:off x="457200" y="1170432"/>
+            <a:ext cx="11277295" cy="5230368"/>
+          </a:xfrm>
+          <a:prstGeom prst="rect">
+            <a:avLst/>
+          </a:prstGeom>
+          <a:noFill/>
+        </p:spPr>
+        <p:txBody>
+          <a:bodyPr wrap="square">
+            <a:spAutoFit/>
+          </a:bodyPr>
+          <a:lstStyle/>
+          <a:p>
+            <a:pPr>
+              <a:spcAft>
+                <a:spcPts val="800"/>
+              </a:spcAft>
+            </a:pPr>
+            <a:r>
+              <a:rPr sz="2000" b="0" i="0">
+                <a:solidFill>
+                  <a:srgbClr val="333333"/>
+                </a:solidFill>
+                <a:latin typeface="Calibri"/>
+              </a:rPr>
+              <a:t>–   Dos accidentes —Lion Air 610 en octubre de 2018 y Ethiopian 302 en marzo de 2019— con 346 muertos en total, y la flota mundial en tierra.</a:t>
+            </a:r>
+          </a:p>
+          <a:p>
+            <a:pPr>
+              <a:spcAft>
+                <a:spcPts val="800"/>
+              </a:spcAft>
+            </a:pPr>
+            <a:r>
+              <a:rPr sz="2000" b="0" i="0">
+                <a:solidFill>
+                  <a:srgbClr val="333333"/>
+                </a:solidFill>
+                <a:latin typeface="Calibri"/>
+              </a:rPr>
+              <a:t>–   Un detalle que vale oro para una clase de ingeniería: la alerta que avisaba de la discrepancia entre sensores era una </a:t>
+            </a:r>
+            <a:r>
+              <a:rPr sz="2000" b="1" i="0">
+                <a:solidFill>
+                  <a:srgbClr val="333333"/>
+                </a:solidFill>
+                <a:latin typeface="Calibri"/>
+              </a:rPr>
+              <a:t>opción de pago</a:t>
+            </a:r>
+            <a:r>
+              <a:rPr sz="2000" b="0" i="0">
+                <a:solidFill>
+                  <a:srgbClr val="333333"/>
+                </a:solidFill>
+                <a:latin typeface="Calibri"/>
+              </a:rPr>
+              <a:t>. </a:t>
+            </a:r>
+            <a:r>
+              <a:rPr sz="2000" b="1" i="0">
+                <a:solidFill>
+                  <a:srgbClr val="333333"/>
+                </a:solidFill>
+                <a:latin typeface="Calibri"/>
+              </a:rPr>
+              <a:t>El momento de parar</a:t>
+            </a:r>
+            <a:r>
+              <a:rPr sz="2000" b="0" i="0">
+                <a:solidFill>
+                  <a:srgbClr val="333333"/>
+                </a:solidFill>
+                <a:latin typeface="Calibri"/>
+              </a:rPr>
+              <a:t> fue la decisión de arquitectura de depender de un sensor único en un sistema capaz de mover el avión</a:t>
+            </a:r>
+          </a:p>
+          <a:p>
+            <a:pPr>
+              <a:spcAft>
+                <a:spcPts val="800"/>
+              </a:spcAft>
+            </a:pPr>
+            <a:r>
+              <a:rPr sz="2000" b="0" i="0">
+                <a:solidFill>
+                  <a:srgbClr val="333333"/>
+                </a:solidFill>
+                <a:latin typeface="Calibri"/>
+              </a:rPr>
+              <a:t>–   Y la de no documentarlo para no obligar a reentrenar pilotos. </a:t>
+            </a:r>
+            <a:r>
+              <a:rPr sz="2000" b="1" i="0">
+                <a:solidFill>
+                  <a:srgbClr val="333333"/>
+                </a:solidFill>
+                <a:latin typeface="Calibri"/>
+              </a:rPr>
+              <a:t>Cambridge Analytica (2018).</a:t>
+            </a:r>
+            <a:r>
+              <a:rPr sz="2000" b="0" i="0">
+                <a:solidFill>
+                  <a:srgbClr val="333333"/>
+                </a:solidFill>
+                <a:latin typeface="Calibri"/>
+              </a:rPr>
+              <a:t> Una aplicación de cuestionarios recogía datos del usuario </a:t>
+            </a:r>
+            <a:r>
+              <a:rPr sz="2000" b="1" i="0">
+                <a:solidFill>
+                  <a:srgbClr val="333333"/>
+                </a:solidFill>
+                <a:latin typeface="Calibri"/>
+              </a:rPr>
+              <a:t>y de sus amigos</a:t>
+            </a:r>
+          </a:p>
+          <a:p>
+            <a:pPr>
+              <a:spcAft>
+                <a:spcPts val="800"/>
+              </a:spcAft>
+            </a:pPr>
+            <a:r>
+              <a:rPr sz="2000" b="0" i="0">
+                <a:solidFill>
+                  <a:srgbClr val="333333"/>
+                </a:solidFill>
+                <a:latin typeface="Calibri"/>
+              </a:rPr>
+              <a:t>–   Que nunca la instalaron ni supieron de ella, aprovechando una interfaz de la plataforma que lo permitía.</a:t>
+            </a:r>
+          </a:p>
+          <a:p>
+            <a:pPr>
+              <a:spcAft>
+                <a:spcPts val="800"/>
+              </a:spcAft>
+            </a:pPr>
+            <a:r>
+              <a:rPr sz="2000" b="0" i="0">
+                <a:solidFill>
+                  <a:srgbClr val="333333"/>
+                </a:solidFill>
+                <a:latin typeface="Calibri"/>
+              </a:rPr>
+              <a:t>–   Los datos de decenas de millones de personas terminaron en perfilamiento político.</a:t>
+            </a:r>
+          </a:p>
+          <a:p>
+            <a:pPr>
+              <a:spcAft>
+                <a:spcPts val="800"/>
+              </a:spcAft>
+            </a:pPr>
+            <a:r>
+              <a:rPr sz="2000" b="0" i="0">
+                <a:solidFill>
+                  <a:srgbClr val="333333"/>
+                </a:solidFill>
+                <a:latin typeface="Calibri"/>
+              </a:rPr>
+              <a:t>–   La consecuencia fue una multa histórica a la plataforma. </a:t>
+            </a:r>
+            <a:r>
+              <a:rPr sz="2000" b="1" i="0">
+                <a:solidFill>
+                  <a:srgbClr val="333333"/>
+                </a:solidFill>
+                <a:latin typeface="Calibri"/>
+              </a:rPr>
+              <a:t>El momento de parar</a:t>
+            </a:r>
+            <a:r>
+              <a:rPr sz="2000" b="0" i="0">
+                <a:solidFill>
+                  <a:srgbClr val="333333"/>
+                </a:solidFill>
+                <a:latin typeface="Calibri"/>
+              </a:rPr>
+              <a:t> fue el diseño de esa interfaz: alguien decidió que el consentimiento de una persona alcanzara para entregar los datos de sus contactos.</a:t>
+            </a:r>
+          </a:p>
+        </p:txBody>
+      </p:sp>
+      <p:sp>
+        <p:nvSpPr>
+          <p:cNvPr id="6" name="TextBox 5"/>
+          <p:cNvSpPr txBox="1"/>
+          <p:nvPr/>
+        </p:nvSpPr>
+        <p:spPr>
+          <a:xfrm>
+            <a:off x="11185855" y="6473952"/>
+            <a:ext cx="640080" cy="274320"/>
+          </a:xfrm>
+          <a:prstGeom prst="rect">
+            <a:avLst/>
+          </a:prstGeom>
+          <a:noFill/>
+        </p:spPr>
+        <p:txBody>
+          <a:bodyPr wrap="square">
+            <a:spAutoFit/>
+          </a:bodyPr>
+          <a:lstStyle/>
+          <a:p>
+            <a:pPr algn="r"/>
+            <a:r>
+              <a:rPr sz="1100" b="0" i="0">
+                <a:solidFill>
+                  <a:srgbClr val="666666"/>
+                </a:solidFill>
+                <a:latin typeface="Calibri"/>
+              </a:rPr>
+              <a:t>19</a:t>
             </a:r>
           </a:p>
         </p:txBody>
@@ -7176,6 +7795,3727 @@
                 <a:latin typeface="Calibri"/>
               </a:rPr>
               <a:t>2</a:t>
+            </a:r>
+          </a:p>
+        </p:txBody>
+      </p:sp>
+    </p:spTree>
+  </p:cSld>
+  <p:clrMapOvr>
+    <a:masterClrMapping/>
+  </p:clrMapOvr>
+</p:sld>
+</file>
+
+<file path=ppt/slides/slide20.xml><?xml version="1.0" encoding="utf-8"?>
+<p:sld xmlns:a="http://schemas.openxmlformats.org/drawingml/2006/main" xmlns:p="http://schemas.openxmlformats.org/presentationml/2006/main" xmlns:r="http://schemas.openxmlformats.org/officeDocument/2006/relationships">
+  <p:cSld>
+    <p:bg>
+      <p:bgPr>
+        <a:solidFill>
+          <a:srgbClr val="FFFFFF"/>
+        </a:solidFill>
+        <a:effectLst/>
+      </p:bgPr>
+    </p:bg>
+    <p:spTree>
+      <p:nvGrpSpPr>
+        <p:cNvPr id="1" name=""/>
+        <p:cNvGrpSpPr/>
+        <p:nvPr/>
+      </p:nvGrpSpPr>
+      <p:grpSpPr/>
+      <p:sp>
+        <p:nvSpPr>
+          <p:cNvPr id="2" name="Rectangle 1"/>
+          <p:cNvSpPr/>
+          <p:nvPr/>
+        </p:nvSpPr>
+        <p:spPr>
+          <a:xfrm>
+            <a:off x="0" y="0"/>
+            <a:ext cx="12191695" cy="960120"/>
+          </a:xfrm>
+          <a:prstGeom prst="rect">
+            <a:avLst/>
+          </a:prstGeom>
+          <a:solidFill>
+            <a:srgbClr val="095292"/>
+          </a:solidFill>
+          <a:ln>
+            <a:noFill/>
+          </a:ln>
+        </p:spPr>
+        <p:style>
+          <a:lnRef idx="1">
+            <a:schemeClr val="accent1"/>
+          </a:lnRef>
+          <a:fillRef idx="3">
+            <a:schemeClr val="accent1"/>
+          </a:fillRef>
+          <a:effectRef idx="2">
+            <a:schemeClr val="accent1"/>
+          </a:effectRef>
+          <a:fontRef idx="minor">
+            <a:schemeClr val="lt1"/>
+          </a:fontRef>
+        </p:style>
+        <p:txBody>
+          <a:bodyPr rtlCol="0" anchor="ctr"/>
+          <a:lstStyle/>
+          <a:p>
+            <a:pPr algn="ctr"/>
+          </a:p>
+        </p:txBody>
+      </p:sp>
+      <p:sp>
+        <p:nvSpPr>
+          <p:cNvPr id="3" name="Rectangle 2"/>
+          <p:cNvSpPr/>
+          <p:nvPr/>
+        </p:nvSpPr>
+        <p:spPr>
+          <a:xfrm>
+            <a:off x="0" y="960120"/>
+            <a:ext cx="12191695" cy="41148"/>
+          </a:xfrm>
+          <a:prstGeom prst="rect">
+            <a:avLst/>
+          </a:prstGeom>
+          <a:solidFill>
+            <a:srgbClr val="FFD000"/>
+          </a:solidFill>
+          <a:ln>
+            <a:noFill/>
+          </a:ln>
+        </p:spPr>
+        <p:style>
+          <a:lnRef idx="1">
+            <a:schemeClr val="accent1"/>
+          </a:lnRef>
+          <a:fillRef idx="3">
+            <a:schemeClr val="accent1"/>
+          </a:fillRef>
+          <a:effectRef idx="2">
+            <a:schemeClr val="accent1"/>
+          </a:effectRef>
+          <a:fontRef idx="minor">
+            <a:schemeClr val="lt1"/>
+          </a:fontRef>
+        </p:style>
+        <p:txBody>
+          <a:bodyPr rtlCol="0" anchor="ctr"/>
+          <a:lstStyle/>
+          <a:p>
+            <a:pPr algn="ctr"/>
+          </a:p>
+        </p:txBody>
+      </p:sp>
+      <p:sp>
+        <p:nvSpPr>
+          <p:cNvPr id="4" name="TextBox 3"/>
+          <p:cNvSpPr txBox="1"/>
+          <p:nvPr/>
+        </p:nvSpPr>
+        <p:spPr>
+          <a:xfrm>
+            <a:off x="457200" y="164592"/>
+            <a:ext cx="11277295" cy="502920"/>
+          </a:xfrm>
+          <a:prstGeom prst="rect">
+            <a:avLst/>
+          </a:prstGeom>
+          <a:noFill/>
+        </p:spPr>
+        <p:txBody>
+          <a:bodyPr wrap="square">
+            <a:spAutoFit/>
+          </a:bodyPr>
+          <a:lstStyle/>
+          <a:p>
+            <a:r>
+              <a:rPr sz="2600" b="1" i="0">
+                <a:solidFill>
+                  <a:srgbClr val="FFFFFF"/>
+                </a:solidFill>
+                <a:latin typeface="Calibri"/>
+              </a:rPr>
+              <a:t>Los cuatro casos: qué contar de cada uno y cuál es el momento de parar (4/4)</a:t>
+            </a:r>
+          </a:p>
+        </p:txBody>
+      </p:sp>
+      <p:sp>
+        <p:nvSpPr>
+          <p:cNvPr id="5" name="TextBox 4"/>
+          <p:cNvSpPr txBox="1"/>
+          <p:nvPr/>
+        </p:nvSpPr>
+        <p:spPr>
+          <a:xfrm>
+            <a:off x="457200" y="1170432"/>
+            <a:ext cx="11277295" cy="5230368"/>
+          </a:xfrm>
+          <a:prstGeom prst="rect">
+            <a:avLst/>
+          </a:prstGeom>
+          <a:noFill/>
+        </p:spPr>
+        <p:txBody>
+          <a:bodyPr wrap="square">
+            <a:spAutoFit/>
+          </a:bodyPr>
+          <a:lstStyle/>
+          <a:p>
+            <a:pPr>
+              <a:spcAft>
+                <a:spcPts val="800"/>
+              </a:spcAft>
+            </a:pPr>
+            <a:r>
+              <a:rPr sz="2000" b="0" i="0">
+                <a:solidFill>
+                  <a:srgbClr val="333333"/>
+                </a:solidFill>
+                <a:latin typeface="Calibri"/>
+              </a:rPr>
+              <a:t>–   Es el caso que conecta directo con la Ley 1581 y con el principio de finalidad.</a:t>
+            </a:r>
+          </a:p>
+          <a:p>
+            <a:pPr>
+              <a:spcAft>
+                <a:spcPts val="800"/>
+              </a:spcAft>
+            </a:pPr>
+            <a:r>
+              <a:rPr sz="2000" b="0" i="0">
+                <a:solidFill>
+                  <a:srgbClr val="333333"/>
+                </a:solidFill>
+                <a:latin typeface="Calibri"/>
+              </a:rPr>
+              <a:t>–   El hilo común hay que enunciarlo al final de la tabla: </a:t>
+            </a:r>
+            <a:r>
+              <a:rPr sz="2000" b="1" i="0">
+                <a:solidFill>
+                  <a:srgbClr val="333333"/>
+                </a:solidFill>
+                <a:latin typeface="Calibri"/>
+              </a:rPr>
+              <a:t>en los cuatro casos el software funcionó</a:t>
+            </a:r>
+            <a:r>
+              <a:rPr sz="2000" b="0" i="0">
+                <a:solidFill>
+                  <a:srgbClr val="333333"/>
+                </a:solidFill>
+                <a:latin typeface="Calibri"/>
+              </a:rPr>
+              <a:t>.</a:t>
+            </a:r>
+          </a:p>
+          <a:p>
+            <a:pPr>
+              <a:spcAft>
+                <a:spcPts val="800"/>
+              </a:spcAft>
+            </a:pPr>
+            <a:r>
+              <a:rPr sz="2000" b="0" i="0">
+                <a:solidFill>
+                  <a:srgbClr val="333333"/>
+                </a:solidFill>
+                <a:latin typeface="Calibri"/>
+              </a:rPr>
+              <a:t>–   No hubo un error de programación que causara el desastre —salvo parcialmente en Therac-25, y ahí el error existía desde antes y estaba tapado por un seguro que alguien decidió quitar—.</a:t>
+            </a:r>
+          </a:p>
+          <a:p>
+            <a:pPr>
+              <a:spcAft>
+                <a:spcPts val="800"/>
+              </a:spcAft>
+            </a:pPr>
+            <a:r>
+              <a:rPr sz="2000" b="0" i="0">
+                <a:solidFill>
+                  <a:srgbClr val="333333"/>
+                </a:solidFill>
+                <a:latin typeface="Calibri"/>
+              </a:rPr>
+              <a:t>–   Lo que falló fue lo que se pidió construir y el hecho de que nadie con información suficiente lo detuvo.</a:t>
+            </a:r>
+          </a:p>
+          <a:p>
+            <a:pPr>
+              <a:spcAft>
+                <a:spcPts val="800"/>
+              </a:spcAft>
+            </a:pPr>
+            <a:r>
+              <a:rPr sz="2000" b="0" i="0">
+                <a:solidFill>
+                  <a:srgbClr val="333333"/>
+                </a:solidFill>
+                <a:latin typeface="Calibri"/>
+              </a:rPr>
+              <a:t>–   Esa frase es la tesis de la clase.</a:t>
+            </a:r>
+          </a:p>
+        </p:txBody>
+      </p:sp>
+      <p:sp>
+        <p:nvSpPr>
+          <p:cNvPr id="6" name="TextBox 5"/>
+          <p:cNvSpPr txBox="1"/>
+          <p:nvPr/>
+        </p:nvSpPr>
+        <p:spPr>
+          <a:xfrm>
+            <a:off x="11185855" y="6473952"/>
+            <a:ext cx="640080" cy="274320"/>
+          </a:xfrm>
+          <a:prstGeom prst="rect">
+            <a:avLst/>
+          </a:prstGeom>
+          <a:noFill/>
+        </p:spPr>
+        <p:txBody>
+          <a:bodyPr wrap="square">
+            <a:spAutoFit/>
+          </a:bodyPr>
+          <a:lstStyle/>
+          <a:p>
+            <a:pPr algn="r"/>
+            <a:r>
+              <a:rPr sz="1100" b="0" i="0">
+                <a:solidFill>
+                  <a:srgbClr val="666666"/>
+                </a:solidFill>
+                <a:latin typeface="Calibri"/>
+              </a:rPr>
+              <a:t>20</a:t>
+            </a:r>
+          </a:p>
+        </p:txBody>
+      </p:sp>
+    </p:spTree>
+  </p:cSld>
+  <p:clrMapOvr>
+    <a:masterClrMapping/>
+  </p:clrMapOvr>
+</p:sld>
+</file>
+
+<file path=ppt/slides/slide21.xml><?xml version="1.0" encoding="utf-8"?>
+<p:sld xmlns:a="http://schemas.openxmlformats.org/drawingml/2006/main" xmlns:p="http://schemas.openxmlformats.org/presentationml/2006/main" xmlns:r="http://schemas.openxmlformats.org/officeDocument/2006/relationships">
+  <p:cSld>
+    <p:bg>
+      <p:bgPr>
+        <a:solidFill>
+          <a:srgbClr val="FFFFFF"/>
+        </a:solidFill>
+        <a:effectLst/>
+      </p:bgPr>
+    </p:bg>
+    <p:spTree>
+      <p:nvGrpSpPr>
+        <p:cNvPr id="1" name=""/>
+        <p:cNvGrpSpPr/>
+        <p:nvPr/>
+      </p:nvGrpSpPr>
+      <p:grpSpPr/>
+      <p:sp>
+        <p:nvSpPr>
+          <p:cNvPr id="2" name="Rectangle 1"/>
+          <p:cNvSpPr/>
+          <p:nvPr/>
+        </p:nvSpPr>
+        <p:spPr>
+          <a:xfrm>
+            <a:off x="0" y="0"/>
+            <a:ext cx="12191695" cy="960120"/>
+          </a:xfrm>
+          <a:prstGeom prst="rect">
+            <a:avLst/>
+          </a:prstGeom>
+          <a:solidFill>
+            <a:srgbClr val="095292"/>
+          </a:solidFill>
+          <a:ln>
+            <a:noFill/>
+          </a:ln>
+        </p:spPr>
+        <p:style>
+          <a:lnRef idx="1">
+            <a:schemeClr val="accent1"/>
+          </a:lnRef>
+          <a:fillRef idx="3">
+            <a:schemeClr val="accent1"/>
+          </a:fillRef>
+          <a:effectRef idx="2">
+            <a:schemeClr val="accent1"/>
+          </a:effectRef>
+          <a:fontRef idx="minor">
+            <a:schemeClr val="lt1"/>
+          </a:fontRef>
+        </p:style>
+        <p:txBody>
+          <a:bodyPr rtlCol="0" anchor="ctr"/>
+          <a:lstStyle/>
+          <a:p>
+            <a:pPr algn="ctr"/>
+          </a:p>
+        </p:txBody>
+      </p:sp>
+      <p:sp>
+        <p:nvSpPr>
+          <p:cNvPr id="3" name="Rectangle 2"/>
+          <p:cNvSpPr/>
+          <p:nvPr/>
+        </p:nvSpPr>
+        <p:spPr>
+          <a:xfrm>
+            <a:off x="0" y="960120"/>
+            <a:ext cx="12191695" cy="41148"/>
+          </a:xfrm>
+          <a:prstGeom prst="rect">
+            <a:avLst/>
+          </a:prstGeom>
+          <a:solidFill>
+            <a:srgbClr val="FFD000"/>
+          </a:solidFill>
+          <a:ln>
+            <a:noFill/>
+          </a:ln>
+        </p:spPr>
+        <p:style>
+          <a:lnRef idx="1">
+            <a:schemeClr val="accent1"/>
+          </a:lnRef>
+          <a:fillRef idx="3">
+            <a:schemeClr val="accent1"/>
+          </a:fillRef>
+          <a:effectRef idx="2">
+            <a:schemeClr val="accent1"/>
+          </a:effectRef>
+          <a:fontRef idx="minor">
+            <a:schemeClr val="lt1"/>
+          </a:fontRef>
+        </p:style>
+        <p:txBody>
+          <a:bodyPr rtlCol="0" anchor="ctr"/>
+          <a:lstStyle/>
+          <a:p>
+            <a:pPr algn="ctr"/>
+          </a:p>
+        </p:txBody>
+      </p:sp>
+      <p:sp>
+        <p:nvSpPr>
+          <p:cNvPr id="4" name="TextBox 3"/>
+          <p:cNvSpPr txBox="1"/>
+          <p:nvPr/>
+        </p:nvSpPr>
+        <p:spPr>
+          <a:xfrm>
+            <a:off x="457200" y="164592"/>
+            <a:ext cx="11277295" cy="502920"/>
+          </a:xfrm>
+          <a:prstGeom prst="rect">
+            <a:avLst/>
+          </a:prstGeom>
+          <a:noFill/>
+        </p:spPr>
+        <p:txBody>
+          <a:bodyPr wrap="square">
+            <a:spAutoFit/>
+          </a:bodyPr>
+          <a:lstStyle/>
+          <a:p>
+            <a:r>
+              <a:rPr sz="2600" b="1" i="0">
+                <a:solidFill>
+                  <a:srgbClr val="FFFFFF"/>
+                </a:solidFill>
+                <a:latin typeface="Calibri"/>
+              </a:rPr>
+              <a:t>La defensa que no sirve y las cinco preguntas que sí (1/2)</a:t>
+            </a:r>
+          </a:p>
+        </p:txBody>
+      </p:sp>
+      <p:sp>
+        <p:nvSpPr>
+          <p:cNvPr id="5" name="TextBox 4"/>
+          <p:cNvSpPr txBox="1"/>
+          <p:nvPr/>
+        </p:nvSpPr>
+        <p:spPr>
+          <a:xfrm>
+            <a:off x="457200" y="1170432"/>
+            <a:ext cx="11277295" cy="5230368"/>
+          </a:xfrm>
+          <a:prstGeom prst="rect">
+            <a:avLst/>
+          </a:prstGeom>
+          <a:noFill/>
+        </p:spPr>
+        <p:txBody>
+          <a:bodyPr wrap="square">
+            <a:spAutoFit/>
+          </a:bodyPr>
+          <a:lstStyle/>
+          <a:p>
+            <a:pPr>
+              <a:spcAft>
+                <a:spcPts val="800"/>
+              </a:spcAft>
+            </a:pPr>
+            <a:r>
+              <a:rPr sz="2000" b="0" i="0">
+                <a:solidFill>
+                  <a:srgbClr val="333333"/>
+                </a:solidFill>
+                <a:latin typeface="Calibri"/>
+              </a:rPr>
+              <a:t>–   «Yo solo programé lo que me pidieron» es la frase que el estudiante va a usar espontáneamente en el taller, y hay que desarmarla con hechos en vez de con moralina.</a:t>
+            </a:r>
+          </a:p>
+          <a:p>
+            <a:pPr>
+              <a:spcAft>
+                <a:spcPts val="800"/>
+              </a:spcAft>
+            </a:pPr>
+            <a:r>
+              <a:rPr sz="2000" b="0" i="0">
+                <a:solidFill>
+                  <a:srgbClr val="333333"/>
+                </a:solidFill>
+                <a:latin typeface="Calibri"/>
+              </a:rPr>
+              <a:t>–   Legalmente no funciona: el caso Volkswagen tiene un ingeniero condenado a prisión por ejecutar.</a:t>
+            </a:r>
+          </a:p>
+          <a:p>
+            <a:pPr>
+              <a:spcAft>
+                <a:spcPts val="800"/>
+              </a:spcAft>
+            </a:pPr>
+            <a:r>
+              <a:rPr sz="2000" b="0" i="0">
+                <a:solidFill>
+                  <a:srgbClr val="333333"/>
+                </a:solidFill>
+                <a:latin typeface="Calibri"/>
+              </a:rPr>
+              <a:t>–   Profesionalmente tampoco: el código ACM/IEEE pone el interés público por encima del empleador, así que el conflicto ya está resuelto en el texto.</a:t>
+            </a:r>
+          </a:p>
+          <a:p>
+            <a:pPr>
+              <a:spcAft>
+                <a:spcPts val="800"/>
+              </a:spcAft>
+            </a:pPr>
+            <a:r>
+              <a:rPr sz="2000" b="0" i="0">
+                <a:solidFill>
+                  <a:srgbClr val="333333"/>
+                </a:solidFill>
+                <a:latin typeface="Calibri"/>
+              </a:rPr>
+              <a:t>–   Pero la parte útil no es la condena, es la alternativa, y conviene enseñarla en términos prácticos porque el estudiante que salga a trabajar el próximo año la va a necesitar: </a:t>
+            </a:r>
+            <a:r>
+              <a:rPr sz="2000" b="1" i="0">
+                <a:solidFill>
+                  <a:srgbClr val="333333"/>
+                </a:solidFill>
+                <a:latin typeface="Calibri"/>
+              </a:rPr>
+              <a:t>dejar rastro y escalar temprano</a:t>
+            </a:r>
+            <a:r>
+              <a:rPr sz="2000" b="0" i="0">
+                <a:solidFill>
+                  <a:srgbClr val="333333"/>
+                </a:solidFill>
+                <a:latin typeface="Calibri"/>
+              </a:rPr>
+              <a:t>.</a:t>
+            </a:r>
+          </a:p>
+          <a:p>
+            <a:pPr>
+              <a:spcAft>
+                <a:spcPts val="800"/>
+              </a:spcAft>
+            </a:pPr>
+            <a:r>
+              <a:rPr sz="2000" b="0" i="0">
+                <a:solidFill>
+                  <a:srgbClr val="333333"/>
+                </a:solidFill>
+                <a:latin typeface="Calibri"/>
+              </a:rPr>
+              <a:t>–   Un correo corto que diga «esto que se me pide tiene este riesgo para estas personas</a:t>
+            </a:r>
+          </a:p>
+          <a:p>
+            <a:pPr>
+              <a:spcAft>
+                <a:spcPts val="800"/>
+              </a:spcAft>
+            </a:pPr>
+            <a:r>
+              <a:rPr sz="2000" b="0" i="0">
+                <a:solidFill>
+                  <a:srgbClr val="333333"/>
+                </a:solidFill>
+                <a:latin typeface="Calibri"/>
+              </a:rPr>
+              <a:t>–   Lo dejo por escrito y propongo esta alternativa» hace tres cosas: aumenta la probabilidad de que se corrija, obliga a quien decide a decidir de verdad, y protege a quien lo escribió.</a:t>
+            </a:r>
+          </a:p>
+        </p:txBody>
+      </p:sp>
+      <p:sp>
+        <p:nvSpPr>
+          <p:cNvPr id="6" name="TextBox 5"/>
+          <p:cNvSpPr txBox="1"/>
+          <p:nvPr/>
+        </p:nvSpPr>
+        <p:spPr>
+          <a:xfrm>
+            <a:off x="11185855" y="6473952"/>
+            <a:ext cx="640080" cy="274320"/>
+          </a:xfrm>
+          <a:prstGeom prst="rect">
+            <a:avLst/>
+          </a:prstGeom>
+          <a:noFill/>
+        </p:spPr>
+        <p:txBody>
+          <a:bodyPr wrap="square">
+            <a:spAutoFit/>
+          </a:bodyPr>
+          <a:lstStyle/>
+          <a:p>
+            <a:pPr algn="r"/>
+            <a:r>
+              <a:rPr sz="1100" b="0" i="0">
+                <a:solidFill>
+                  <a:srgbClr val="666666"/>
+                </a:solidFill>
+                <a:latin typeface="Calibri"/>
+              </a:rPr>
+              <a:t>21</a:t>
+            </a:r>
+          </a:p>
+        </p:txBody>
+      </p:sp>
+    </p:spTree>
+  </p:cSld>
+  <p:clrMapOvr>
+    <a:masterClrMapping/>
+  </p:clrMapOvr>
+</p:sld>
+</file>
+
+<file path=ppt/slides/slide22.xml><?xml version="1.0" encoding="utf-8"?>
+<p:sld xmlns:a="http://schemas.openxmlformats.org/drawingml/2006/main" xmlns:p="http://schemas.openxmlformats.org/presentationml/2006/main" xmlns:r="http://schemas.openxmlformats.org/officeDocument/2006/relationships">
+  <p:cSld>
+    <p:bg>
+      <p:bgPr>
+        <a:solidFill>
+          <a:srgbClr val="FFFFFF"/>
+        </a:solidFill>
+        <a:effectLst/>
+      </p:bgPr>
+    </p:bg>
+    <p:spTree>
+      <p:nvGrpSpPr>
+        <p:cNvPr id="1" name=""/>
+        <p:cNvGrpSpPr/>
+        <p:nvPr/>
+      </p:nvGrpSpPr>
+      <p:grpSpPr/>
+      <p:sp>
+        <p:nvSpPr>
+          <p:cNvPr id="2" name="Rectangle 1"/>
+          <p:cNvSpPr/>
+          <p:nvPr/>
+        </p:nvSpPr>
+        <p:spPr>
+          <a:xfrm>
+            <a:off x="0" y="0"/>
+            <a:ext cx="12191695" cy="960120"/>
+          </a:xfrm>
+          <a:prstGeom prst="rect">
+            <a:avLst/>
+          </a:prstGeom>
+          <a:solidFill>
+            <a:srgbClr val="095292"/>
+          </a:solidFill>
+          <a:ln>
+            <a:noFill/>
+          </a:ln>
+        </p:spPr>
+        <p:style>
+          <a:lnRef idx="1">
+            <a:schemeClr val="accent1"/>
+          </a:lnRef>
+          <a:fillRef idx="3">
+            <a:schemeClr val="accent1"/>
+          </a:fillRef>
+          <a:effectRef idx="2">
+            <a:schemeClr val="accent1"/>
+          </a:effectRef>
+          <a:fontRef idx="minor">
+            <a:schemeClr val="lt1"/>
+          </a:fontRef>
+        </p:style>
+        <p:txBody>
+          <a:bodyPr rtlCol="0" anchor="ctr"/>
+          <a:lstStyle/>
+          <a:p>
+            <a:pPr algn="ctr"/>
+          </a:p>
+        </p:txBody>
+      </p:sp>
+      <p:sp>
+        <p:nvSpPr>
+          <p:cNvPr id="3" name="Rectangle 2"/>
+          <p:cNvSpPr/>
+          <p:nvPr/>
+        </p:nvSpPr>
+        <p:spPr>
+          <a:xfrm>
+            <a:off x="0" y="960120"/>
+            <a:ext cx="12191695" cy="41148"/>
+          </a:xfrm>
+          <a:prstGeom prst="rect">
+            <a:avLst/>
+          </a:prstGeom>
+          <a:solidFill>
+            <a:srgbClr val="FFD000"/>
+          </a:solidFill>
+          <a:ln>
+            <a:noFill/>
+          </a:ln>
+        </p:spPr>
+        <p:style>
+          <a:lnRef idx="1">
+            <a:schemeClr val="accent1"/>
+          </a:lnRef>
+          <a:fillRef idx="3">
+            <a:schemeClr val="accent1"/>
+          </a:fillRef>
+          <a:effectRef idx="2">
+            <a:schemeClr val="accent1"/>
+          </a:effectRef>
+          <a:fontRef idx="minor">
+            <a:schemeClr val="lt1"/>
+          </a:fontRef>
+        </p:style>
+        <p:txBody>
+          <a:bodyPr rtlCol="0" anchor="ctr"/>
+          <a:lstStyle/>
+          <a:p>
+            <a:pPr algn="ctr"/>
+          </a:p>
+        </p:txBody>
+      </p:sp>
+      <p:sp>
+        <p:nvSpPr>
+          <p:cNvPr id="4" name="TextBox 3"/>
+          <p:cNvSpPr txBox="1"/>
+          <p:nvPr/>
+        </p:nvSpPr>
+        <p:spPr>
+          <a:xfrm>
+            <a:off x="457200" y="164592"/>
+            <a:ext cx="11277295" cy="502920"/>
+          </a:xfrm>
+          <a:prstGeom prst="rect">
+            <a:avLst/>
+          </a:prstGeom>
+          <a:noFill/>
+        </p:spPr>
+        <p:txBody>
+          <a:bodyPr wrap="square">
+            <a:spAutoFit/>
+          </a:bodyPr>
+          <a:lstStyle/>
+          <a:p>
+            <a:r>
+              <a:rPr sz="2600" b="1" i="0">
+                <a:solidFill>
+                  <a:srgbClr val="FFFFFF"/>
+                </a:solidFill>
+                <a:latin typeface="Calibri"/>
+              </a:rPr>
+              <a:t>La defensa que no sirve y las cinco preguntas que sí (2/2)</a:t>
+            </a:r>
+          </a:p>
+        </p:txBody>
+      </p:sp>
+      <p:sp>
+        <p:nvSpPr>
+          <p:cNvPr id="5" name="TextBox 4"/>
+          <p:cNvSpPr txBox="1"/>
+          <p:nvPr/>
+        </p:nvSpPr>
+        <p:spPr>
+          <a:xfrm>
+            <a:off x="457200" y="1170432"/>
+            <a:ext cx="11277295" cy="5230368"/>
+          </a:xfrm>
+          <a:prstGeom prst="rect">
+            <a:avLst/>
+          </a:prstGeom>
+          <a:noFill/>
+        </p:spPr>
+        <p:txBody>
+          <a:bodyPr wrap="square">
+            <a:spAutoFit/>
+          </a:bodyPr>
+          <a:lstStyle/>
+          <a:p>
+            <a:pPr>
+              <a:spcAft>
+                <a:spcPts val="800"/>
+              </a:spcAft>
+            </a:pPr>
+            <a:r>
+              <a:rPr sz="2000" b="0" i="0">
+                <a:solidFill>
+                  <a:srgbClr val="333333"/>
+                </a:solidFill>
+                <a:latin typeface="Calibri"/>
+              </a:rPr>
+              <a:t>–   La única postura que no tiene defensa posible es callar.</a:t>
+            </a:r>
+          </a:p>
+          <a:p>
+            <a:pPr>
+              <a:spcAft>
+                <a:spcPts val="800"/>
+              </a:spcAft>
+            </a:pPr>
+            <a:r>
+              <a:rPr sz="2000" b="0" i="0">
+                <a:solidFill>
+                  <a:srgbClr val="333333"/>
+                </a:solidFill>
+                <a:latin typeface="Calibri"/>
+              </a:rPr>
+              <a:t>–   Las cinco preguntas son el método del taller.</a:t>
+            </a:r>
+          </a:p>
+          <a:p>
+            <a:pPr>
+              <a:spcAft>
+                <a:spcPts val="800"/>
+              </a:spcAft>
+            </a:pPr>
+            <a:r>
+              <a:rPr sz="2000" b="0" i="0">
+                <a:solidFill>
+                  <a:srgbClr val="333333"/>
+                </a:solidFill>
+                <a:latin typeface="Calibri"/>
+              </a:rPr>
+              <a:t>–   La más potente es la tercera —«¿aguanta que se sepa?»— porque no requiere saber nada de códigos ni de leyes y descarta la mayoría de las malas ideas en diez segundos: si la decisión depende de que los afectados no se enteren, ya está juzgada.</a:t>
+            </a:r>
+          </a:p>
+          <a:p>
+            <a:pPr>
+              <a:spcAft>
+                <a:spcPts val="800"/>
+              </a:spcAft>
+            </a:pPr>
+            <a:r>
+              <a:rPr sz="2000" b="0" i="0">
+                <a:solidFill>
+                  <a:srgbClr val="333333"/>
+                </a:solidFill>
+                <a:latin typeface="Calibri"/>
+              </a:rPr>
+              <a:t>–   La cuarta —buscar el numeral— es la que convierte una intuición en un argumento profesional, y es la que más pesa en la rúbrica.</a:t>
+            </a:r>
+          </a:p>
+          <a:p>
+            <a:pPr>
+              <a:spcAft>
+                <a:spcPts val="800"/>
+              </a:spcAft>
+            </a:pPr>
+            <a:r>
+              <a:rPr sz="2000" b="0" i="0">
+                <a:solidFill>
+                  <a:srgbClr val="333333"/>
+                </a:solidFill>
+                <a:latin typeface="Calibri"/>
+              </a:rPr>
+              <a:t>–   Y la quinta —¿cuándo se pudo parar?— es la que le da a la clase valor de ingeniería y no de conferencia: en los cuatro casos hubo un momento temprano, identificable y barato, en el que una persona con la información suficiente podía cambiar el resultado.</a:t>
+            </a:r>
+          </a:p>
+        </p:txBody>
+      </p:sp>
+      <p:sp>
+        <p:nvSpPr>
+          <p:cNvPr id="6" name="TextBox 5"/>
+          <p:cNvSpPr txBox="1"/>
+          <p:nvPr/>
+        </p:nvSpPr>
+        <p:spPr>
+          <a:xfrm>
+            <a:off x="11185855" y="6473952"/>
+            <a:ext cx="640080" cy="274320"/>
+          </a:xfrm>
+          <a:prstGeom prst="rect">
+            <a:avLst/>
+          </a:prstGeom>
+          <a:noFill/>
+        </p:spPr>
+        <p:txBody>
+          <a:bodyPr wrap="square">
+            <a:spAutoFit/>
+          </a:bodyPr>
+          <a:lstStyle/>
+          <a:p>
+            <a:pPr algn="r"/>
+            <a:r>
+              <a:rPr sz="1100" b="0" i="0">
+                <a:solidFill>
+                  <a:srgbClr val="666666"/>
+                </a:solidFill>
+                <a:latin typeface="Calibri"/>
+              </a:rPr>
+              <a:t>22</a:t>
+            </a:r>
+          </a:p>
+        </p:txBody>
+      </p:sp>
+    </p:spTree>
+  </p:cSld>
+  <p:clrMapOvr>
+    <a:masterClrMapping/>
+  </p:clrMapOvr>
+</p:sld>
+</file>
+
+<file path=ppt/slides/slide23.xml><?xml version="1.0" encoding="utf-8"?>
+<p:sld xmlns:a="http://schemas.openxmlformats.org/drawingml/2006/main" xmlns:p="http://schemas.openxmlformats.org/presentationml/2006/main" xmlns:r="http://schemas.openxmlformats.org/officeDocument/2006/relationships">
+  <p:cSld>
+    <p:bg>
+      <p:bgPr>
+        <a:solidFill>
+          <a:srgbClr val="FFFFFF"/>
+        </a:solidFill>
+        <a:effectLst/>
+      </p:bgPr>
+    </p:bg>
+    <p:spTree>
+      <p:nvGrpSpPr>
+        <p:cNvPr id="1" name=""/>
+        <p:cNvGrpSpPr/>
+        <p:nvPr/>
+      </p:nvGrpSpPr>
+      <p:grpSpPr/>
+      <p:sp>
+        <p:nvSpPr>
+          <p:cNvPr id="2" name="Rectangle 1"/>
+          <p:cNvSpPr/>
+          <p:nvPr/>
+        </p:nvSpPr>
+        <p:spPr>
+          <a:xfrm>
+            <a:off x="0" y="0"/>
+            <a:ext cx="12191695" cy="1170432"/>
+          </a:xfrm>
+          <a:prstGeom prst="rect">
+            <a:avLst/>
+          </a:prstGeom>
+          <a:solidFill>
+            <a:srgbClr val="095292"/>
+          </a:solidFill>
+          <a:ln>
+            <a:noFill/>
+          </a:ln>
+        </p:spPr>
+        <p:style>
+          <a:lnRef idx="1">
+            <a:schemeClr val="accent1"/>
+          </a:lnRef>
+          <a:fillRef idx="3">
+            <a:schemeClr val="accent1"/>
+          </a:fillRef>
+          <a:effectRef idx="2">
+            <a:schemeClr val="accent1"/>
+          </a:effectRef>
+          <a:fontRef idx="minor">
+            <a:schemeClr val="lt1"/>
+          </a:fontRef>
+        </p:style>
+        <p:txBody>
+          <a:bodyPr rtlCol="0" anchor="ctr"/>
+          <a:lstStyle/>
+          <a:p>
+            <a:pPr algn="ctr"/>
+          </a:p>
+        </p:txBody>
+      </p:sp>
+      <p:sp>
+        <p:nvSpPr>
+          <p:cNvPr id="3" name="Rectangle 2"/>
+          <p:cNvSpPr/>
+          <p:nvPr/>
+        </p:nvSpPr>
+        <p:spPr>
+          <a:xfrm>
+            <a:off x="0" y="1170432"/>
+            <a:ext cx="12191695" cy="41148"/>
+          </a:xfrm>
+          <a:prstGeom prst="rect">
+            <a:avLst/>
+          </a:prstGeom>
+          <a:solidFill>
+            <a:srgbClr val="FFD000"/>
+          </a:solidFill>
+          <a:ln>
+            <a:noFill/>
+          </a:ln>
+        </p:spPr>
+        <p:style>
+          <a:lnRef idx="1">
+            <a:schemeClr val="accent1"/>
+          </a:lnRef>
+          <a:fillRef idx="3">
+            <a:schemeClr val="accent1"/>
+          </a:fillRef>
+          <a:effectRef idx="2">
+            <a:schemeClr val="accent1"/>
+          </a:effectRef>
+          <a:fontRef idx="minor">
+            <a:schemeClr val="lt1"/>
+          </a:fontRef>
+        </p:style>
+        <p:txBody>
+          <a:bodyPr rtlCol="0" anchor="ctr"/>
+          <a:lstStyle/>
+          <a:p>
+            <a:pPr algn="ctr"/>
+          </a:p>
+        </p:txBody>
+      </p:sp>
+      <p:sp>
+        <p:nvSpPr>
+          <p:cNvPr id="4" name="TextBox 3"/>
+          <p:cNvSpPr txBox="1"/>
+          <p:nvPr/>
+        </p:nvSpPr>
+        <p:spPr>
+          <a:xfrm>
+            <a:off x="457200" y="164592"/>
+            <a:ext cx="11277295" cy="384048"/>
+          </a:xfrm>
+          <a:prstGeom prst="rect">
+            <a:avLst/>
+          </a:prstGeom>
+          <a:noFill/>
+        </p:spPr>
+        <p:txBody>
+          <a:bodyPr wrap="square">
+            <a:spAutoFit/>
+          </a:bodyPr>
+          <a:lstStyle/>
+          <a:p>
+            <a:r>
+              <a:rPr sz="2600" b="1" i="0">
+                <a:solidFill>
+                  <a:srgbClr val="FFFFFF"/>
+                </a:solidFill>
+                <a:latin typeface="Calibri"/>
+              </a:rPr>
+              <a:t>Taller de hoy: Comité de ética</a:t>
+            </a:r>
+          </a:p>
+        </p:txBody>
+      </p:sp>
+      <p:sp>
+        <p:nvSpPr>
+          <p:cNvPr id="5" name="TextBox 4"/>
+          <p:cNvSpPr txBox="1"/>
+          <p:nvPr/>
+        </p:nvSpPr>
+        <p:spPr>
+          <a:xfrm>
+            <a:off x="457200" y="566928"/>
+            <a:ext cx="11277295" cy="411480"/>
+          </a:xfrm>
+          <a:prstGeom prst="rect">
+            <a:avLst/>
+          </a:prstGeom>
+          <a:noFill/>
+        </p:spPr>
+        <p:txBody>
+          <a:bodyPr wrap="square">
+            <a:spAutoFit/>
+          </a:bodyPr>
+          <a:lstStyle/>
+          <a:p>
+            <a:r>
+              <a:rPr sz="1400" b="0" i="0">
+                <a:solidFill>
+                  <a:srgbClr val="B8D8EE"/>
+                </a:solidFill>
+                <a:latin typeface="Calibri"/>
+              </a:rPr>
+              <a:t>17 min en equipos · un caso por equipo, del 1 al 5 · acta del comité con el numeral citado</a:t>
+            </a:r>
+          </a:p>
+        </p:txBody>
+      </p:sp>
+      <p:sp>
+        <p:nvSpPr>
+          <p:cNvPr id="6" name="Rounded Rectangle 5"/>
+          <p:cNvSpPr/>
+          <p:nvPr/>
+        </p:nvSpPr>
+        <p:spPr>
+          <a:xfrm>
+            <a:off x="457200" y="1472184"/>
+            <a:ext cx="11277295" cy="566928"/>
+          </a:xfrm>
+          <a:prstGeom prst="roundRect">
+            <a:avLst>
+              <a:gd name="adj" fmla="val 12000"/>
+            </a:avLst>
+          </a:prstGeom>
+          <a:solidFill>
+            <a:srgbClr val="F2F2F2"/>
+          </a:solidFill>
+          <a:ln>
+            <a:noFill/>
+          </a:ln>
+        </p:spPr>
+        <p:style>
+          <a:lnRef idx="1">
+            <a:schemeClr val="accent1"/>
+          </a:lnRef>
+          <a:fillRef idx="3">
+            <a:schemeClr val="accent1"/>
+          </a:fillRef>
+          <a:effectRef idx="2">
+            <a:schemeClr val="accent1"/>
+          </a:effectRef>
+          <a:fontRef idx="minor">
+            <a:schemeClr val="lt1"/>
+          </a:fontRef>
+        </p:style>
+        <p:txBody>
+          <a:bodyPr rtlCol="0" anchor="ctr"/>
+          <a:lstStyle/>
+          <a:p>
+            <a:pPr algn="ctr"/>
+          </a:p>
+        </p:txBody>
+      </p:sp>
+      <p:sp>
+        <p:nvSpPr>
+          <p:cNvPr id="7" name="Rectangle 6"/>
+          <p:cNvSpPr/>
+          <p:nvPr/>
+        </p:nvSpPr>
+        <p:spPr>
+          <a:xfrm>
+            <a:off x="640080" y="1618487"/>
+            <a:ext cx="274320" cy="274320"/>
+          </a:xfrm>
+          <a:prstGeom prst="rect">
+            <a:avLst/>
+          </a:prstGeom>
+          <a:solidFill>
+            <a:srgbClr val="FFFFFF"/>
+          </a:solidFill>
+          <a:ln>
+            <a:solidFill>
+              <a:srgbClr val="333333"/>
+            </a:solidFill>
+          </a:ln>
+        </p:spPr>
+        <p:style>
+          <a:lnRef idx="1">
+            <a:schemeClr val="accent1"/>
+          </a:lnRef>
+          <a:fillRef idx="3">
+            <a:schemeClr val="accent1"/>
+          </a:fillRef>
+          <a:effectRef idx="2">
+            <a:schemeClr val="accent1"/>
+          </a:effectRef>
+          <a:fontRef idx="minor">
+            <a:schemeClr val="lt1"/>
+          </a:fontRef>
+        </p:style>
+        <p:txBody>
+          <a:bodyPr rtlCol="0" anchor="ctr"/>
+          <a:lstStyle/>
+          <a:p>
+            <a:pPr algn="ctr"/>
+          </a:p>
+        </p:txBody>
+      </p:sp>
+      <p:sp>
+        <p:nvSpPr>
+          <p:cNvPr id="8" name="Rectangle 7"/>
+          <p:cNvSpPr/>
+          <p:nvPr/>
+        </p:nvSpPr>
+        <p:spPr>
+          <a:xfrm>
+            <a:off x="640080" y="1618487"/>
+            <a:ext cx="73152" cy="274320"/>
+          </a:xfrm>
+          <a:prstGeom prst="rect">
+            <a:avLst/>
+          </a:prstGeom>
+          <a:solidFill>
+            <a:srgbClr val="269CCB"/>
+          </a:solidFill>
+          <a:ln>
+            <a:noFill/>
+          </a:ln>
+        </p:spPr>
+        <p:style>
+          <a:lnRef idx="1">
+            <a:schemeClr val="accent1"/>
+          </a:lnRef>
+          <a:fillRef idx="3">
+            <a:schemeClr val="accent1"/>
+          </a:fillRef>
+          <a:effectRef idx="2">
+            <a:schemeClr val="accent1"/>
+          </a:effectRef>
+          <a:fontRef idx="minor">
+            <a:schemeClr val="lt1"/>
+          </a:fontRef>
+        </p:style>
+        <p:txBody>
+          <a:bodyPr rtlCol="0" anchor="ctr"/>
+          <a:lstStyle/>
+          <a:p>
+            <a:pPr algn="ctr"/>
+          </a:p>
+        </p:txBody>
+      </p:sp>
+      <p:sp>
+        <p:nvSpPr>
+          <p:cNvPr id="9" name="TextBox 8"/>
+          <p:cNvSpPr txBox="1"/>
+          <p:nvPr/>
+        </p:nvSpPr>
+        <p:spPr>
+          <a:xfrm>
+            <a:off x="1097280" y="1563624"/>
+            <a:ext cx="10362895" cy="402336"/>
+          </a:xfrm>
+          <a:prstGeom prst="rect">
+            <a:avLst/>
+          </a:prstGeom>
+          <a:noFill/>
+        </p:spPr>
+        <p:txBody>
+          <a:bodyPr wrap="square" anchor="ctr"/>
+          <a:lstStyle/>
+          <a:p>
+            <a:r>
+              <a:rPr sz="1500" b="1" i="0">
+                <a:solidFill>
+                  <a:srgbClr val="333333"/>
+                </a:solidFill>
+                <a:latin typeface="Calibri"/>
+              </a:rPr>
+              <a:t>LOS HECHOS, SIN ADJETIVOS</a:t>
+            </a:r>
+            <a:r>
+              <a:rPr sz="1500" b="0" i="0">
+                <a:solidFill>
+                  <a:srgbClr val="333333"/>
+                </a:solidFill>
+                <a:latin typeface="Calibri"/>
+              </a:rPr>
+              <a:t> — Qué pasó, en cinco líneas máximo: qué sistema era, qué hizo, a quién afectó y cómo se supo. Sin opinión todavía.</a:t>
+            </a:r>
+          </a:p>
+        </p:txBody>
+      </p:sp>
+      <p:sp>
+        <p:nvSpPr>
+          <p:cNvPr id="10" name="Rounded Rectangle 9"/>
+          <p:cNvSpPr/>
+          <p:nvPr/>
+        </p:nvSpPr>
+        <p:spPr>
+          <a:xfrm>
+            <a:off x="457200" y="2148839"/>
+            <a:ext cx="11277295" cy="566928"/>
+          </a:xfrm>
+          <a:prstGeom prst="roundRect">
+            <a:avLst>
+              <a:gd name="adj" fmla="val 12000"/>
+            </a:avLst>
+          </a:prstGeom>
+          <a:solidFill>
+            <a:srgbClr val="F2F2F2"/>
+          </a:solidFill>
+          <a:ln>
+            <a:noFill/>
+          </a:ln>
+        </p:spPr>
+        <p:style>
+          <a:lnRef idx="1">
+            <a:schemeClr val="accent1"/>
+          </a:lnRef>
+          <a:fillRef idx="3">
+            <a:schemeClr val="accent1"/>
+          </a:fillRef>
+          <a:effectRef idx="2">
+            <a:schemeClr val="accent1"/>
+          </a:effectRef>
+          <a:fontRef idx="minor">
+            <a:schemeClr val="lt1"/>
+          </a:fontRef>
+        </p:style>
+        <p:txBody>
+          <a:bodyPr rtlCol="0" anchor="ctr"/>
+          <a:lstStyle/>
+          <a:p>
+            <a:pPr algn="ctr"/>
+          </a:p>
+        </p:txBody>
+      </p:sp>
+      <p:sp>
+        <p:nvSpPr>
+          <p:cNvPr id="11" name="Rectangle 10"/>
+          <p:cNvSpPr/>
+          <p:nvPr/>
+        </p:nvSpPr>
+        <p:spPr>
+          <a:xfrm>
+            <a:off x="640080" y="2295144"/>
+            <a:ext cx="274320" cy="274320"/>
+          </a:xfrm>
+          <a:prstGeom prst="rect">
+            <a:avLst/>
+          </a:prstGeom>
+          <a:solidFill>
+            <a:srgbClr val="FFFFFF"/>
+          </a:solidFill>
+          <a:ln>
+            <a:solidFill>
+              <a:srgbClr val="333333"/>
+            </a:solidFill>
+          </a:ln>
+        </p:spPr>
+        <p:style>
+          <a:lnRef idx="1">
+            <a:schemeClr val="accent1"/>
+          </a:lnRef>
+          <a:fillRef idx="3">
+            <a:schemeClr val="accent1"/>
+          </a:fillRef>
+          <a:effectRef idx="2">
+            <a:schemeClr val="accent1"/>
+          </a:effectRef>
+          <a:fontRef idx="minor">
+            <a:schemeClr val="lt1"/>
+          </a:fontRef>
+        </p:style>
+        <p:txBody>
+          <a:bodyPr rtlCol="0" anchor="ctr"/>
+          <a:lstStyle/>
+          <a:p>
+            <a:pPr algn="ctr"/>
+          </a:p>
+        </p:txBody>
+      </p:sp>
+      <p:sp>
+        <p:nvSpPr>
+          <p:cNvPr id="12" name="Rectangle 11"/>
+          <p:cNvSpPr/>
+          <p:nvPr/>
+        </p:nvSpPr>
+        <p:spPr>
+          <a:xfrm>
+            <a:off x="640080" y="2295144"/>
+            <a:ext cx="73152" cy="274320"/>
+          </a:xfrm>
+          <a:prstGeom prst="rect">
+            <a:avLst/>
+          </a:prstGeom>
+          <a:solidFill>
+            <a:srgbClr val="269CCB"/>
+          </a:solidFill>
+          <a:ln>
+            <a:noFill/>
+          </a:ln>
+        </p:spPr>
+        <p:style>
+          <a:lnRef idx="1">
+            <a:schemeClr val="accent1"/>
+          </a:lnRef>
+          <a:fillRef idx="3">
+            <a:schemeClr val="accent1"/>
+          </a:fillRef>
+          <a:effectRef idx="2">
+            <a:schemeClr val="accent1"/>
+          </a:effectRef>
+          <a:fontRef idx="minor">
+            <a:schemeClr val="lt1"/>
+          </a:fontRef>
+        </p:style>
+        <p:txBody>
+          <a:bodyPr rtlCol="0" anchor="ctr"/>
+          <a:lstStyle/>
+          <a:p>
+            <a:pPr algn="ctr"/>
+          </a:p>
+        </p:txBody>
+      </p:sp>
+      <p:sp>
+        <p:nvSpPr>
+          <p:cNvPr id="13" name="TextBox 12"/>
+          <p:cNvSpPr txBox="1"/>
+          <p:nvPr/>
+        </p:nvSpPr>
+        <p:spPr>
+          <a:xfrm>
+            <a:off x="1097280" y="2240279"/>
+            <a:ext cx="10362895" cy="402336"/>
+          </a:xfrm>
+          <a:prstGeom prst="rect">
+            <a:avLst/>
+          </a:prstGeom>
+          <a:noFill/>
+        </p:spPr>
+        <p:txBody>
+          <a:bodyPr wrap="square" anchor="ctr"/>
+          <a:lstStyle/>
+          <a:p>
+            <a:r>
+              <a:rPr sz="1500" b="1" i="0">
+                <a:solidFill>
+                  <a:srgbClr val="333333"/>
+                </a:solidFill>
+                <a:latin typeface="Calibri"/>
+              </a:rPr>
+              <a:t>QUIÉN DECIDIÓ QUÉ</a:t>
+            </a:r>
+            <a:r>
+              <a:rPr sz="1500" b="0" i="0">
+                <a:solidFill>
+                  <a:srgbClr val="333333"/>
+                </a:solidFill>
+                <a:latin typeface="Calibri"/>
+              </a:rPr>
+              <a:t> — La decisión concreta que causó el daño y </a:t>
+            </a:r>
+            <a:r>
+              <a:rPr sz="1500" b="1" i="0">
+                <a:solidFill>
+                  <a:srgbClr val="333333"/>
+                </a:solidFill>
+                <a:latin typeface="Calibri"/>
+              </a:rPr>
+              <a:t>quién la tomó</a:t>
+            </a:r>
+            <a:r>
+              <a:rPr sz="1500" b="0" i="0">
+                <a:solidFill>
+                  <a:srgbClr val="333333"/>
+                </a:solidFill>
+                <a:latin typeface="Calibri"/>
+              </a:rPr>
+              <a:t> (el rol: el diseñador, el gerente de producto, el ingeniero que ejecutó). Si fueron varias personas en cadena, escriban la cadena.</a:t>
+            </a:r>
+          </a:p>
+        </p:txBody>
+      </p:sp>
+      <p:sp>
+        <p:nvSpPr>
+          <p:cNvPr id="14" name="Rounded Rectangle 13"/>
+          <p:cNvSpPr/>
+          <p:nvPr/>
+        </p:nvSpPr>
+        <p:spPr>
+          <a:xfrm>
+            <a:off x="457200" y="2825496"/>
+            <a:ext cx="11277295" cy="566928"/>
+          </a:xfrm>
+          <a:prstGeom prst="roundRect">
+            <a:avLst>
+              <a:gd name="adj" fmla="val 12000"/>
+            </a:avLst>
+          </a:prstGeom>
+          <a:solidFill>
+            <a:srgbClr val="F2F2F2"/>
+          </a:solidFill>
+          <a:ln>
+            <a:noFill/>
+          </a:ln>
+        </p:spPr>
+        <p:style>
+          <a:lnRef idx="1">
+            <a:schemeClr val="accent1"/>
+          </a:lnRef>
+          <a:fillRef idx="3">
+            <a:schemeClr val="accent1"/>
+          </a:fillRef>
+          <a:effectRef idx="2">
+            <a:schemeClr val="accent1"/>
+          </a:effectRef>
+          <a:fontRef idx="minor">
+            <a:schemeClr val="lt1"/>
+          </a:fontRef>
+        </p:style>
+        <p:txBody>
+          <a:bodyPr rtlCol="0" anchor="ctr"/>
+          <a:lstStyle/>
+          <a:p>
+            <a:pPr algn="ctr"/>
+          </a:p>
+        </p:txBody>
+      </p:sp>
+      <p:sp>
+        <p:nvSpPr>
+          <p:cNvPr id="15" name="Rectangle 14"/>
+          <p:cNvSpPr/>
+          <p:nvPr/>
+        </p:nvSpPr>
+        <p:spPr>
+          <a:xfrm>
+            <a:off x="640080" y="2971800"/>
+            <a:ext cx="274320" cy="274320"/>
+          </a:xfrm>
+          <a:prstGeom prst="rect">
+            <a:avLst/>
+          </a:prstGeom>
+          <a:solidFill>
+            <a:srgbClr val="FFFFFF"/>
+          </a:solidFill>
+          <a:ln>
+            <a:solidFill>
+              <a:srgbClr val="333333"/>
+            </a:solidFill>
+          </a:ln>
+        </p:spPr>
+        <p:style>
+          <a:lnRef idx="1">
+            <a:schemeClr val="accent1"/>
+          </a:lnRef>
+          <a:fillRef idx="3">
+            <a:schemeClr val="accent1"/>
+          </a:fillRef>
+          <a:effectRef idx="2">
+            <a:schemeClr val="accent1"/>
+          </a:effectRef>
+          <a:fontRef idx="minor">
+            <a:schemeClr val="lt1"/>
+          </a:fontRef>
+        </p:style>
+        <p:txBody>
+          <a:bodyPr rtlCol="0" anchor="ctr"/>
+          <a:lstStyle/>
+          <a:p>
+            <a:pPr algn="ctr"/>
+          </a:p>
+        </p:txBody>
+      </p:sp>
+      <p:sp>
+        <p:nvSpPr>
+          <p:cNvPr id="16" name="Rectangle 15"/>
+          <p:cNvSpPr/>
+          <p:nvPr/>
+        </p:nvSpPr>
+        <p:spPr>
+          <a:xfrm>
+            <a:off x="640080" y="2971800"/>
+            <a:ext cx="73152" cy="274320"/>
+          </a:xfrm>
+          <a:prstGeom prst="rect">
+            <a:avLst/>
+          </a:prstGeom>
+          <a:solidFill>
+            <a:srgbClr val="269CCB"/>
+          </a:solidFill>
+          <a:ln>
+            <a:noFill/>
+          </a:ln>
+        </p:spPr>
+        <p:style>
+          <a:lnRef idx="1">
+            <a:schemeClr val="accent1"/>
+          </a:lnRef>
+          <a:fillRef idx="3">
+            <a:schemeClr val="accent1"/>
+          </a:fillRef>
+          <a:effectRef idx="2">
+            <a:schemeClr val="accent1"/>
+          </a:effectRef>
+          <a:fontRef idx="minor">
+            <a:schemeClr val="lt1"/>
+          </a:fontRef>
+        </p:style>
+        <p:txBody>
+          <a:bodyPr rtlCol="0" anchor="ctr"/>
+          <a:lstStyle/>
+          <a:p>
+            <a:pPr algn="ctr"/>
+          </a:p>
+        </p:txBody>
+      </p:sp>
+      <p:sp>
+        <p:nvSpPr>
+          <p:cNvPr id="17" name="TextBox 16"/>
+          <p:cNvSpPr txBox="1"/>
+          <p:nvPr/>
+        </p:nvSpPr>
+        <p:spPr>
+          <a:xfrm>
+            <a:off x="1097280" y="2916936"/>
+            <a:ext cx="10362895" cy="402336"/>
+          </a:xfrm>
+          <a:prstGeom prst="rect">
+            <a:avLst/>
+          </a:prstGeom>
+          <a:noFill/>
+        </p:spPr>
+        <p:txBody>
+          <a:bodyPr wrap="square" anchor="ctr"/>
+          <a:lstStyle/>
+          <a:p>
+            <a:r>
+              <a:rPr sz="1500" b="1" i="0">
+                <a:solidFill>
+                  <a:srgbClr val="333333"/>
+                </a:solidFill>
+                <a:latin typeface="Calibri"/>
+              </a:rPr>
+              <a:t>EL NUMERAL QUE SE VIOLÓ</a:t>
+            </a:r>
+            <a:r>
+              <a:rPr sz="1500" b="0" i="0">
+                <a:solidFill>
+                  <a:srgbClr val="333333"/>
+                </a:solidFill>
+                <a:latin typeface="Calibri"/>
+              </a:rPr>
+              <a:t> — Cite </a:t>
+            </a:r>
+            <a:r>
+              <a:rPr sz="1500" b="1" i="0">
+                <a:solidFill>
+                  <a:srgbClr val="333333"/>
+                </a:solidFill>
+                <a:latin typeface="Calibri"/>
+              </a:rPr>
+              <a:t>literalmente</a:t>
+            </a:r>
+            <a:r>
+              <a:rPr sz="1500" b="0" i="0">
+                <a:solidFill>
+                  <a:srgbClr val="333333"/>
+                </a:solidFill>
+                <a:latin typeface="Calibri"/>
+              </a:rPr>
+              <a:t> al menos un principio del código ACM/IEEE o un artículo de la Ley 842 de 2003, la Ley 1581 de 2012 o la Ley 1273 de 2009, y explique en dos líneas por qué aplica a este caso.</a:t>
+            </a:r>
+          </a:p>
+        </p:txBody>
+      </p:sp>
+      <p:sp>
+        <p:nvSpPr>
+          <p:cNvPr id="18" name="Rounded Rectangle 17"/>
+          <p:cNvSpPr/>
+          <p:nvPr/>
+        </p:nvSpPr>
+        <p:spPr>
+          <a:xfrm>
+            <a:off x="457200" y="3502152"/>
+            <a:ext cx="11277295" cy="566928"/>
+          </a:xfrm>
+          <a:prstGeom prst="roundRect">
+            <a:avLst>
+              <a:gd name="adj" fmla="val 12000"/>
+            </a:avLst>
+          </a:prstGeom>
+          <a:solidFill>
+            <a:srgbClr val="F2F2F2"/>
+          </a:solidFill>
+          <a:ln>
+            <a:noFill/>
+          </a:ln>
+        </p:spPr>
+        <p:style>
+          <a:lnRef idx="1">
+            <a:schemeClr val="accent1"/>
+          </a:lnRef>
+          <a:fillRef idx="3">
+            <a:schemeClr val="accent1"/>
+          </a:fillRef>
+          <a:effectRef idx="2">
+            <a:schemeClr val="accent1"/>
+          </a:effectRef>
+          <a:fontRef idx="minor">
+            <a:schemeClr val="lt1"/>
+          </a:fontRef>
+        </p:style>
+        <p:txBody>
+          <a:bodyPr rtlCol="0" anchor="ctr"/>
+          <a:lstStyle/>
+          <a:p>
+            <a:pPr algn="ctr"/>
+          </a:p>
+        </p:txBody>
+      </p:sp>
+      <p:sp>
+        <p:nvSpPr>
+          <p:cNvPr id="19" name="Rectangle 18"/>
+          <p:cNvSpPr/>
+          <p:nvPr/>
+        </p:nvSpPr>
+        <p:spPr>
+          <a:xfrm>
+            <a:off x="640080" y="3648456"/>
+            <a:ext cx="274320" cy="274320"/>
+          </a:xfrm>
+          <a:prstGeom prst="rect">
+            <a:avLst/>
+          </a:prstGeom>
+          <a:solidFill>
+            <a:srgbClr val="FFFFFF"/>
+          </a:solidFill>
+          <a:ln>
+            <a:solidFill>
+              <a:srgbClr val="333333"/>
+            </a:solidFill>
+          </a:ln>
+        </p:spPr>
+        <p:style>
+          <a:lnRef idx="1">
+            <a:schemeClr val="accent1"/>
+          </a:lnRef>
+          <a:fillRef idx="3">
+            <a:schemeClr val="accent1"/>
+          </a:fillRef>
+          <a:effectRef idx="2">
+            <a:schemeClr val="accent1"/>
+          </a:effectRef>
+          <a:fontRef idx="minor">
+            <a:schemeClr val="lt1"/>
+          </a:fontRef>
+        </p:style>
+        <p:txBody>
+          <a:bodyPr rtlCol="0" anchor="ctr"/>
+          <a:lstStyle/>
+          <a:p>
+            <a:pPr algn="ctr"/>
+          </a:p>
+        </p:txBody>
+      </p:sp>
+      <p:sp>
+        <p:nvSpPr>
+          <p:cNvPr id="20" name="Rectangle 19"/>
+          <p:cNvSpPr/>
+          <p:nvPr/>
+        </p:nvSpPr>
+        <p:spPr>
+          <a:xfrm>
+            <a:off x="640080" y="3648456"/>
+            <a:ext cx="73152" cy="274320"/>
+          </a:xfrm>
+          <a:prstGeom prst="rect">
+            <a:avLst/>
+          </a:prstGeom>
+          <a:solidFill>
+            <a:srgbClr val="269CCB"/>
+          </a:solidFill>
+          <a:ln>
+            <a:noFill/>
+          </a:ln>
+        </p:spPr>
+        <p:style>
+          <a:lnRef idx="1">
+            <a:schemeClr val="accent1"/>
+          </a:lnRef>
+          <a:fillRef idx="3">
+            <a:schemeClr val="accent1"/>
+          </a:fillRef>
+          <a:effectRef idx="2">
+            <a:schemeClr val="accent1"/>
+          </a:effectRef>
+          <a:fontRef idx="minor">
+            <a:schemeClr val="lt1"/>
+          </a:fontRef>
+        </p:style>
+        <p:txBody>
+          <a:bodyPr rtlCol="0" anchor="ctr"/>
+          <a:lstStyle/>
+          <a:p>
+            <a:pPr algn="ctr"/>
+          </a:p>
+        </p:txBody>
+      </p:sp>
+      <p:sp>
+        <p:nvSpPr>
+          <p:cNvPr id="21" name="TextBox 20"/>
+          <p:cNvSpPr txBox="1"/>
+          <p:nvPr/>
+        </p:nvSpPr>
+        <p:spPr>
+          <a:xfrm>
+            <a:off x="1097280" y="3593592"/>
+            <a:ext cx="10362895" cy="402336"/>
+          </a:xfrm>
+          <a:prstGeom prst="rect">
+            <a:avLst/>
+          </a:prstGeom>
+          <a:noFill/>
+        </p:spPr>
+        <p:txBody>
+          <a:bodyPr wrap="square" anchor="ctr"/>
+          <a:lstStyle/>
+          <a:p>
+            <a:r>
+              <a:rPr sz="1500" b="1" i="0">
+                <a:solidFill>
+                  <a:srgbClr val="333333"/>
+                </a:solidFill>
+                <a:latin typeface="Calibri"/>
+              </a:rPr>
+              <a:t>EL MOMENTO EN QUE SE PUDO PARAR</a:t>
+            </a:r>
+            <a:r>
+              <a:rPr sz="1500" b="0" i="0">
+                <a:solidFill>
+                  <a:srgbClr val="333333"/>
+                </a:solidFill>
+                <a:latin typeface="Calibri"/>
+              </a:rPr>
+              <a:t> — El momento </a:t>
+            </a:r>
+            <a:r>
+              <a:rPr sz="1500" b="1" i="0">
+                <a:solidFill>
+                  <a:srgbClr val="333333"/>
+                </a:solidFill>
+                <a:latin typeface="Calibri"/>
+              </a:rPr>
+              <a:t>más temprano</a:t>
+            </a:r>
+            <a:r>
+              <a:rPr sz="1500" b="0" i="0">
+                <a:solidFill>
+                  <a:srgbClr val="333333"/>
+                </a:solidFill>
+                <a:latin typeface="Calibri"/>
+              </a:rPr>
+              <a:t> en que alguien con la información disponible podía cambiar el resultado, y qué debía hacer exactamente ahí (a quién decirle qué, y por escrito o no).</a:t>
+            </a:r>
+          </a:p>
+        </p:txBody>
+      </p:sp>
+      <p:sp>
+        <p:nvSpPr>
+          <p:cNvPr id="22" name="Rounded Rectangle 21"/>
+          <p:cNvSpPr/>
+          <p:nvPr/>
+        </p:nvSpPr>
+        <p:spPr>
+          <a:xfrm>
+            <a:off x="457200" y="4178808"/>
+            <a:ext cx="11277295" cy="566928"/>
+          </a:xfrm>
+          <a:prstGeom prst="roundRect">
+            <a:avLst>
+              <a:gd name="adj" fmla="val 12000"/>
+            </a:avLst>
+          </a:prstGeom>
+          <a:solidFill>
+            <a:srgbClr val="F2F2F2"/>
+          </a:solidFill>
+          <a:ln>
+            <a:noFill/>
+          </a:ln>
+        </p:spPr>
+        <p:style>
+          <a:lnRef idx="1">
+            <a:schemeClr val="accent1"/>
+          </a:lnRef>
+          <a:fillRef idx="3">
+            <a:schemeClr val="accent1"/>
+          </a:fillRef>
+          <a:effectRef idx="2">
+            <a:schemeClr val="accent1"/>
+          </a:effectRef>
+          <a:fontRef idx="minor">
+            <a:schemeClr val="lt1"/>
+          </a:fontRef>
+        </p:style>
+        <p:txBody>
+          <a:bodyPr rtlCol="0" anchor="ctr"/>
+          <a:lstStyle/>
+          <a:p>
+            <a:pPr algn="ctr"/>
+          </a:p>
+        </p:txBody>
+      </p:sp>
+      <p:sp>
+        <p:nvSpPr>
+          <p:cNvPr id="23" name="Rectangle 22"/>
+          <p:cNvSpPr/>
+          <p:nvPr/>
+        </p:nvSpPr>
+        <p:spPr>
+          <a:xfrm>
+            <a:off x="640080" y="4325112"/>
+            <a:ext cx="274320" cy="274320"/>
+          </a:xfrm>
+          <a:prstGeom prst="rect">
+            <a:avLst/>
+          </a:prstGeom>
+          <a:solidFill>
+            <a:srgbClr val="FFFFFF"/>
+          </a:solidFill>
+          <a:ln>
+            <a:solidFill>
+              <a:srgbClr val="333333"/>
+            </a:solidFill>
+          </a:ln>
+        </p:spPr>
+        <p:style>
+          <a:lnRef idx="1">
+            <a:schemeClr val="accent1"/>
+          </a:lnRef>
+          <a:fillRef idx="3">
+            <a:schemeClr val="accent1"/>
+          </a:fillRef>
+          <a:effectRef idx="2">
+            <a:schemeClr val="accent1"/>
+          </a:effectRef>
+          <a:fontRef idx="minor">
+            <a:schemeClr val="lt1"/>
+          </a:fontRef>
+        </p:style>
+        <p:txBody>
+          <a:bodyPr rtlCol="0" anchor="ctr"/>
+          <a:lstStyle/>
+          <a:p>
+            <a:pPr algn="ctr"/>
+          </a:p>
+        </p:txBody>
+      </p:sp>
+      <p:sp>
+        <p:nvSpPr>
+          <p:cNvPr id="24" name="Rectangle 23"/>
+          <p:cNvSpPr/>
+          <p:nvPr/>
+        </p:nvSpPr>
+        <p:spPr>
+          <a:xfrm>
+            <a:off x="640080" y="4325112"/>
+            <a:ext cx="73152" cy="274320"/>
+          </a:xfrm>
+          <a:prstGeom prst="rect">
+            <a:avLst/>
+          </a:prstGeom>
+          <a:solidFill>
+            <a:srgbClr val="269CCB"/>
+          </a:solidFill>
+          <a:ln>
+            <a:noFill/>
+          </a:ln>
+        </p:spPr>
+        <p:style>
+          <a:lnRef idx="1">
+            <a:schemeClr val="accent1"/>
+          </a:lnRef>
+          <a:fillRef idx="3">
+            <a:schemeClr val="accent1"/>
+          </a:fillRef>
+          <a:effectRef idx="2">
+            <a:schemeClr val="accent1"/>
+          </a:effectRef>
+          <a:fontRef idx="minor">
+            <a:schemeClr val="lt1"/>
+          </a:fontRef>
+        </p:style>
+        <p:txBody>
+          <a:bodyPr rtlCol="0" anchor="ctr"/>
+          <a:lstStyle/>
+          <a:p>
+            <a:pPr algn="ctr"/>
+          </a:p>
+        </p:txBody>
+      </p:sp>
+      <p:sp>
+        <p:nvSpPr>
+          <p:cNvPr id="25" name="TextBox 24"/>
+          <p:cNvSpPr txBox="1"/>
+          <p:nvPr/>
+        </p:nvSpPr>
+        <p:spPr>
+          <a:xfrm>
+            <a:off x="1097280" y="4270248"/>
+            <a:ext cx="10362895" cy="402336"/>
+          </a:xfrm>
+          <a:prstGeom prst="rect">
+            <a:avLst/>
+          </a:prstGeom>
+          <a:noFill/>
+        </p:spPr>
+        <p:txBody>
+          <a:bodyPr wrap="square" anchor="ctr"/>
+          <a:lstStyle/>
+          <a:p>
+            <a:r>
+              <a:rPr sz="1500" b="1" i="0">
+                <a:solidFill>
+                  <a:srgbClr val="333333"/>
+                </a:solidFill>
+                <a:latin typeface="Calibri"/>
+              </a:rPr>
+              <a:t>LA REGLA QUE SE LLEVAN</a:t>
+            </a:r>
+            <a:r>
+              <a:rPr sz="1500" b="0" i="0">
+                <a:solidFill>
+                  <a:srgbClr val="333333"/>
+                </a:solidFill>
+                <a:latin typeface="Calibri"/>
+              </a:rPr>
+              <a:t> — Una regla en una frase, escrita para ustedes mismos, que evite repetir esto en el proyecto de este curso. Tiene que ser verificable.</a:t>
+            </a:r>
+          </a:p>
+        </p:txBody>
+      </p:sp>
+      <p:sp>
+        <p:nvSpPr>
+          <p:cNvPr id="26" name="TextBox 25"/>
+          <p:cNvSpPr txBox="1"/>
+          <p:nvPr/>
+        </p:nvSpPr>
+        <p:spPr>
+          <a:xfrm>
+            <a:off x="11185855" y="6473952"/>
+            <a:ext cx="640080" cy="274320"/>
+          </a:xfrm>
+          <a:prstGeom prst="rect">
+            <a:avLst/>
+          </a:prstGeom>
+          <a:noFill/>
+        </p:spPr>
+        <p:txBody>
+          <a:bodyPr wrap="square">
+            <a:spAutoFit/>
+          </a:bodyPr>
+          <a:lstStyle/>
+          <a:p>
+            <a:pPr algn="r"/>
+            <a:r>
+              <a:rPr sz="1100" b="0" i="0">
+                <a:solidFill>
+                  <a:srgbClr val="666666"/>
+                </a:solidFill>
+                <a:latin typeface="Calibri"/>
+              </a:rPr>
+              <a:t>23</a:t>
+            </a:r>
+          </a:p>
+        </p:txBody>
+      </p:sp>
+    </p:spTree>
+  </p:cSld>
+  <p:clrMapOvr>
+    <a:masterClrMapping/>
+  </p:clrMapOvr>
+</p:sld>
+</file>
+
+<file path=ppt/slides/slide24.xml><?xml version="1.0" encoding="utf-8"?>
+<p:sld xmlns:a="http://schemas.openxmlformats.org/drawingml/2006/main" xmlns:p="http://schemas.openxmlformats.org/presentationml/2006/main" xmlns:r="http://schemas.openxmlformats.org/officeDocument/2006/relationships">
+  <p:cSld>
+    <p:bg>
+      <p:bgPr>
+        <a:solidFill>
+          <a:srgbClr val="FFFFFF"/>
+        </a:solidFill>
+        <a:effectLst/>
+      </p:bgPr>
+    </p:bg>
+    <p:spTree>
+      <p:nvGrpSpPr>
+        <p:cNvPr id="1" name=""/>
+        <p:cNvGrpSpPr/>
+        <p:nvPr/>
+      </p:nvGrpSpPr>
+      <p:grpSpPr/>
+      <p:sp>
+        <p:nvSpPr>
+          <p:cNvPr id="2" name="Rectangle 1"/>
+          <p:cNvSpPr/>
+          <p:nvPr/>
+        </p:nvSpPr>
+        <p:spPr>
+          <a:xfrm>
+            <a:off x="0" y="0"/>
+            <a:ext cx="12191695" cy="1170432"/>
+          </a:xfrm>
+          <a:prstGeom prst="rect">
+            <a:avLst/>
+          </a:prstGeom>
+          <a:solidFill>
+            <a:srgbClr val="095292"/>
+          </a:solidFill>
+          <a:ln>
+            <a:noFill/>
+          </a:ln>
+        </p:spPr>
+        <p:style>
+          <a:lnRef idx="1">
+            <a:schemeClr val="accent1"/>
+          </a:lnRef>
+          <a:fillRef idx="3">
+            <a:schemeClr val="accent1"/>
+          </a:fillRef>
+          <a:effectRef idx="2">
+            <a:schemeClr val="accent1"/>
+          </a:effectRef>
+          <a:fontRef idx="minor">
+            <a:schemeClr val="lt1"/>
+          </a:fontRef>
+        </p:style>
+        <p:txBody>
+          <a:bodyPr rtlCol="0" anchor="ctr"/>
+          <a:lstStyle/>
+          <a:p>
+            <a:pPr algn="ctr"/>
+          </a:p>
+        </p:txBody>
+      </p:sp>
+      <p:sp>
+        <p:nvSpPr>
+          <p:cNvPr id="3" name="Rectangle 2"/>
+          <p:cNvSpPr/>
+          <p:nvPr/>
+        </p:nvSpPr>
+        <p:spPr>
+          <a:xfrm>
+            <a:off x="0" y="1170432"/>
+            <a:ext cx="12191695" cy="41148"/>
+          </a:xfrm>
+          <a:prstGeom prst="rect">
+            <a:avLst/>
+          </a:prstGeom>
+          <a:solidFill>
+            <a:srgbClr val="FFD000"/>
+          </a:solidFill>
+          <a:ln>
+            <a:noFill/>
+          </a:ln>
+        </p:spPr>
+        <p:style>
+          <a:lnRef idx="1">
+            <a:schemeClr val="accent1"/>
+          </a:lnRef>
+          <a:fillRef idx="3">
+            <a:schemeClr val="accent1"/>
+          </a:fillRef>
+          <a:effectRef idx="2">
+            <a:schemeClr val="accent1"/>
+          </a:effectRef>
+          <a:fontRef idx="minor">
+            <a:schemeClr val="lt1"/>
+          </a:fontRef>
+        </p:style>
+        <p:txBody>
+          <a:bodyPr rtlCol="0" anchor="ctr"/>
+          <a:lstStyle/>
+          <a:p>
+            <a:pPr algn="ctr"/>
+          </a:p>
+        </p:txBody>
+      </p:sp>
+      <p:sp>
+        <p:nvSpPr>
+          <p:cNvPr id="4" name="TextBox 3"/>
+          <p:cNvSpPr txBox="1"/>
+          <p:nvPr/>
+        </p:nvSpPr>
+        <p:spPr>
+          <a:xfrm>
+            <a:off x="457200" y="164592"/>
+            <a:ext cx="11277295" cy="384048"/>
+          </a:xfrm>
+          <a:prstGeom prst="rect">
+            <a:avLst/>
+          </a:prstGeom>
+          <a:noFill/>
+        </p:spPr>
+        <p:txBody>
+          <a:bodyPr wrap="square">
+            <a:spAutoFit/>
+          </a:bodyPr>
+          <a:lstStyle/>
+          <a:p>
+            <a:r>
+              <a:rPr sz="2600" b="1" i="0">
+                <a:solidFill>
+                  <a:srgbClr val="FFFFFF"/>
+                </a:solidFill>
+                <a:latin typeface="Calibri"/>
+              </a:rPr>
+              <a:t>Cómo se expone en 3 minutos</a:t>
+            </a:r>
+          </a:p>
+        </p:txBody>
+      </p:sp>
+      <p:sp>
+        <p:nvSpPr>
+          <p:cNvPr id="5" name="TextBox 4"/>
+          <p:cNvSpPr txBox="1"/>
+          <p:nvPr/>
+        </p:nvSpPr>
+        <p:spPr>
+          <a:xfrm>
+            <a:off x="457200" y="566928"/>
+            <a:ext cx="11277295" cy="411480"/>
+          </a:xfrm>
+          <a:prstGeom prst="rect">
+            <a:avLst/>
+          </a:prstGeom>
+          <a:noFill/>
+        </p:spPr>
+        <p:txBody>
+          <a:bodyPr wrap="square">
+            <a:spAutoFit/>
+          </a:bodyPr>
+          <a:lstStyle/>
+          <a:p>
+            <a:r>
+              <a:rPr sz="1400" b="0" i="0">
+                <a:solidFill>
+                  <a:srgbClr val="B8D8EE"/>
+                </a:solidFill>
+                <a:latin typeface="Calibri"/>
+              </a:rPr>
+              <a:t>Habla el vocero con la pantalla ya compartida · cronómetro en pantalla · se corta al llegar a cero</a:t>
+            </a:r>
+          </a:p>
+        </p:txBody>
+      </p:sp>
+      <p:sp>
+        <p:nvSpPr>
+          <p:cNvPr id="6" name="Rounded Rectangle 5"/>
+          <p:cNvSpPr/>
+          <p:nvPr/>
+        </p:nvSpPr>
+        <p:spPr>
+          <a:xfrm>
+            <a:off x="457200" y="1444752"/>
+            <a:ext cx="11277295" cy="908913"/>
+          </a:xfrm>
+          <a:prstGeom prst="roundRect">
+            <a:avLst>
+              <a:gd name="adj" fmla="val 12000"/>
+            </a:avLst>
+          </a:prstGeom>
+          <a:solidFill>
+            <a:srgbClr val="F2F2F2"/>
+          </a:solidFill>
+          <a:ln>
+            <a:noFill/>
+          </a:ln>
+        </p:spPr>
+        <p:style>
+          <a:lnRef idx="1">
+            <a:schemeClr val="accent1"/>
+          </a:lnRef>
+          <a:fillRef idx="3">
+            <a:schemeClr val="accent1"/>
+          </a:fillRef>
+          <a:effectRef idx="2">
+            <a:schemeClr val="accent1"/>
+          </a:effectRef>
+          <a:fontRef idx="minor">
+            <a:schemeClr val="lt1"/>
+          </a:fontRef>
+        </p:style>
+        <p:txBody>
+          <a:bodyPr rtlCol="0" anchor="ctr"/>
+          <a:lstStyle/>
+          <a:p>
+            <a:pPr algn="ctr"/>
+          </a:p>
+        </p:txBody>
+      </p:sp>
+      <p:sp>
+        <p:nvSpPr>
+          <p:cNvPr id="7" name="Rounded Rectangle 6"/>
+          <p:cNvSpPr/>
+          <p:nvPr/>
+        </p:nvSpPr>
+        <p:spPr>
+          <a:xfrm>
+            <a:off x="594360" y="1679752"/>
+            <a:ext cx="438912" cy="438912"/>
+          </a:xfrm>
+          <a:prstGeom prst="roundRect">
+            <a:avLst>
+              <a:gd name="adj" fmla="val 12000"/>
+            </a:avLst>
+          </a:prstGeom>
+          <a:solidFill>
+            <a:srgbClr val="095292"/>
+          </a:solidFill>
+          <a:ln>
+            <a:noFill/>
+          </a:ln>
+        </p:spPr>
+        <p:style>
+          <a:lnRef idx="1">
+            <a:schemeClr val="accent1"/>
+          </a:lnRef>
+          <a:fillRef idx="3">
+            <a:schemeClr val="accent1"/>
+          </a:fillRef>
+          <a:effectRef idx="2">
+            <a:schemeClr val="accent1"/>
+          </a:effectRef>
+          <a:fontRef idx="minor">
+            <a:schemeClr val="lt1"/>
+          </a:fontRef>
+        </p:style>
+        <p:txBody>
+          <a:bodyPr rtlCol="0" anchor="ctr"/>
+          <a:lstStyle/>
+          <a:p>
+            <a:pPr algn="ctr"/>
+          </a:p>
+        </p:txBody>
+      </p:sp>
+      <p:sp>
+        <p:nvSpPr>
+          <p:cNvPr id="8" name="TextBox 7"/>
+          <p:cNvSpPr txBox="1"/>
+          <p:nvPr/>
+        </p:nvSpPr>
+        <p:spPr>
+          <a:xfrm>
+            <a:off x="594360" y="1679752"/>
+            <a:ext cx="438912" cy="438912"/>
+          </a:xfrm>
+          <a:prstGeom prst="rect">
+            <a:avLst/>
+          </a:prstGeom>
+          <a:noFill/>
+        </p:spPr>
+        <p:txBody>
+          <a:bodyPr wrap="square" anchor="ctr"/>
+          <a:lstStyle/>
+          <a:p>
+            <a:pPr algn="ctr"/>
+            <a:r>
+              <a:rPr sz="1600" b="1" i="0">
+                <a:solidFill>
+                  <a:srgbClr val="FFFFFF"/>
+                </a:solidFill>
+                <a:latin typeface="Calibri"/>
+              </a:rPr>
+              <a:t>1</a:t>
+            </a:r>
+          </a:p>
+        </p:txBody>
+      </p:sp>
+      <p:sp>
+        <p:nvSpPr>
+          <p:cNvPr id="9" name="TextBox 8"/>
+          <p:cNvSpPr txBox="1"/>
+          <p:nvPr/>
+        </p:nvSpPr>
+        <p:spPr>
+          <a:xfrm>
+            <a:off x="1188720" y="1536192"/>
+            <a:ext cx="10271455" cy="744321"/>
+          </a:xfrm>
+          <a:prstGeom prst="rect">
+            <a:avLst/>
+          </a:prstGeom>
+          <a:noFill/>
+        </p:spPr>
+        <p:txBody>
+          <a:bodyPr wrap="square" anchor="ctr"/>
+          <a:lstStyle/>
+          <a:p>
+            <a:r>
+              <a:rPr sz="1500" b="1" i="0">
+                <a:solidFill>
+                  <a:srgbClr val="095292"/>
+                </a:solidFill>
+                <a:latin typeface="Calibri"/>
+              </a:rPr>
+              <a:t>30 s · Los hechos</a:t>
+            </a:r>
+          </a:p>
+          <a:p>
+            <a:pPr>
+              <a:spcBef>
+                <a:spcPts val="200"/>
+              </a:spcBef>
+            </a:pPr>
+            <a:r>
+              <a:rPr sz="1300" b="0" i="0">
+                <a:solidFill>
+                  <a:srgbClr val="333333"/>
+                </a:solidFill>
+                <a:latin typeface="Calibri"/>
+              </a:rPr>
+              <a:t>Qué pasó, sin adjetivos. Cinco líneas dichas en medio minuto.</a:t>
+            </a:r>
+          </a:p>
+        </p:txBody>
+      </p:sp>
+      <p:sp>
+        <p:nvSpPr>
+          <p:cNvPr id="10" name="Rounded Rectangle 9"/>
+          <p:cNvSpPr/>
+          <p:nvPr/>
+        </p:nvSpPr>
+        <p:spPr>
+          <a:xfrm>
+            <a:off x="457200" y="2445105"/>
+            <a:ext cx="11277295" cy="908913"/>
+          </a:xfrm>
+          <a:prstGeom prst="roundRect">
+            <a:avLst>
+              <a:gd name="adj" fmla="val 12000"/>
+            </a:avLst>
+          </a:prstGeom>
+          <a:solidFill>
+            <a:srgbClr val="E8F4FA"/>
+          </a:solidFill>
+          <a:ln>
+            <a:noFill/>
+          </a:ln>
+        </p:spPr>
+        <p:style>
+          <a:lnRef idx="1">
+            <a:schemeClr val="accent1"/>
+          </a:lnRef>
+          <a:fillRef idx="3">
+            <a:schemeClr val="accent1"/>
+          </a:fillRef>
+          <a:effectRef idx="2">
+            <a:schemeClr val="accent1"/>
+          </a:effectRef>
+          <a:fontRef idx="minor">
+            <a:schemeClr val="lt1"/>
+          </a:fontRef>
+        </p:style>
+        <p:txBody>
+          <a:bodyPr rtlCol="0" anchor="ctr"/>
+          <a:lstStyle/>
+          <a:p>
+            <a:pPr algn="ctr"/>
+          </a:p>
+        </p:txBody>
+      </p:sp>
+      <p:sp>
+        <p:nvSpPr>
+          <p:cNvPr id="11" name="Rounded Rectangle 10"/>
+          <p:cNvSpPr/>
+          <p:nvPr/>
+        </p:nvSpPr>
+        <p:spPr>
+          <a:xfrm>
+            <a:off x="594360" y="2680106"/>
+            <a:ext cx="438912" cy="438912"/>
+          </a:xfrm>
+          <a:prstGeom prst="roundRect">
+            <a:avLst>
+              <a:gd name="adj" fmla="val 12000"/>
+            </a:avLst>
+          </a:prstGeom>
+          <a:solidFill>
+            <a:srgbClr val="095292"/>
+          </a:solidFill>
+          <a:ln>
+            <a:noFill/>
+          </a:ln>
+        </p:spPr>
+        <p:style>
+          <a:lnRef idx="1">
+            <a:schemeClr val="accent1"/>
+          </a:lnRef>
+          <a:fillRef idx="3">
+            <a:schemeClr val="accent1"/>
+          </a:fillRef>
+          <a:effectRef idx="2">
+            <a:schemeClr val="accent1"/>
+          </a:effectRef>
+          <a:fontRef idx="minor">
+            <a:schemeClr val="lt1"/>
+          </a:fontRef>
+        </p:style>
+        <p:txBody>
+          <a:bodyPr rtlCol="0" anchor="ctr"/>
+          <a:lstStyle/>
+          <a:p>
+            <a:pPr algn="ctr"/>
+          </a:p>
+        </p:txBody>
+      </p:sp>
+      <p:sp>
+        <p:nvSpPr>
+          <p:cNvPr id="12" name="TextBox 11"/>
+          <p:cNvSpPr txBox="1"/>
+          <p:nvPr/>
+        </p:nvSpPr>
+        <p:spPr>
+          <a:xfrm>
+            <a:off x="594360" y="2680106"/>
+            <a:ext cx="438912" cy="438912"/>
+          </a:xfrm>
+          <a:prstGeom prst="rect">
+            <a:avLst/>
+          </a:prstGeom>
+          <a:noFill/>
+        </p:spPr>
+        <p:txBody>
+          <a:bodyPr wrap="square" anchor="ctr"/>
+          <a:lstStyle/>
+          <a:p>
+            <a:pPr algn="ctr"/>
+            <a:r>
+              <a:rPr sz="1600" b="1" i="0">
+                <a:solidFill>
+                  <a:srgbClr val="FFFFFF"/>
+                </a:solidFill>
+                <a:latin typeface="Calibri"/>
+              </a:rPr>
+              <a:t>2</a:t>
+            </a:r>
+          </a:p>
+        </p:txBody>
+      </p:sp>
+      <p:sp>
+        <p:nvSpPr>
+          <p:cNvPr id="13" name="TextBox 12"/>
+          <p:cNvSpPr txBox="1"/>
+          <p:nvPr/>
+        </p:nvSpPr>
+        <p:spPr>
+          <a:xfrm>
+            <a:off x="1188720" y="2536545"/>
+            <a:ext cx="10271455" cy="744321"/>
+          </a:xfrm>
+          <a:prstGeom prst="rect">
+            <a:avLst/>
+          </a:prstGeom>
+          <a:noFill/>
+        </p:spPr>
+        <p:txBody>
+          <a:bodyPr wrap="square" anchor="ctr"/>
+          <a:lstStyle/>
+          <a:p>
+            <a:r>
+              <a:rPr sz="1500" b="1" i="0">
+                <a:solidFill>
+                  <a:srgbClr val="095292"/>
+                </a:solidFill>
+                <a:latin typeface="Calibri"/>
+              </a:rPr>
+              <a:t>40 s · Quién decidió</a:t>
+            </a:r>
+          </a:p>
+          <a:p>
+            <a:pPr>
+              <a:spcBef>
+                <a:spcPts val="200"/>
+              </a:spcBef>
+            </a:pPr>
+            <a:r>
+              <a:rPr sz="1300" b="0" i="0">
+                <a:solidFill>
+                  <a:srgbClr val="333333"/>
+                </a:solidFill>
+                <a:latin typeface="Calibri"/>
+              </a:rPr>
+              <a:t>La decisión y el rol de quien la tomó. No «la empresa».</a:t>
+            </a:r>
+          </a:p>
+        </p:txBody>
+      </p:sp>
+      <p:sp>
+        <p:nvSpPr>
+          <p:cNvPr id="14" name="Rounded Rectangle 13"/>
+          <p:cNvSpPr/>
+          <p:nvPr/>
+        </p:nvSpPr>
+        <p:spPr>
+          <a:xfrm>
+            <a:off x="457200" y="3445459"/>
+            <a:ext cx="11277295" cy="908913"/>
+          </a:xfrm>
+          <a:prstGeom prst="roundRect">
+            <a:avLst>
+              <a:gd name="adj" fmla="val 12000"/>
+            </a:avLst>
+          </a:prstGeom>
+          <a:solidFill>
+            <a:srgbClr val="F2F2F2"/>
+          </a:solidFill>
+          <a:ln>
+            <a:noFill/>
+          </a:ln>
+        </p:spPr>
+        <p:style>
+          <a:lnRef idx="1">
+            <a:schemeClr val="accent1"/>
+          </a:lnRef>
+          <a:fillRef idx="3">
+            <a:schemeClr val="accent1"/>
+          </a:fillRef>
+          <a:effectRef idx="2">
+            <a:schemeClr val="accent1"/>
+          </a:effectRef>
+          <a:fontRef idx="minor">
+            <a:schemeClr val="lt1"/>
+          </a:fontRef>
+        </p:style>
+        <p:txBody>
+          <a:bodyPr rtlCol="0" anchor="ctr"/>
+          <a:lstStyle/>
+          <a:p>
+            <a:pPr algn="ctr"/>
+          </a:p>
+        </p:txBody>
+      </p:sp>
+      <p:sp>
+        <p:nvSpPr>
+          <p:cNvPr id="15" name="Rounded Rectangle 14"/>
+          <p:cNvSpPr/>
+          <p:nvPr/>
+        </p:nvSpPr>
+        <p:spPr>
+          <a:xfrm>
+            <a:off x="594360" y="3680460"/>
+            <a:ext cx="438912" cy="438912"/>
+          </a:xfrm>
+          <a:prstGeom prst="roundRect">
+            <a:avLst>
+              <a:gd name="adj" fmla="val 12000"/>
+            </a:avLst>
+          </a:prstGeom>
+          <a:solidFill>
+            <a:srgbClr val="095292"/>
+          </a:solidFill>
+          <a:ln>
+            <a:noFill/>
+          </a:ln>
+        </p:spPr>
+        <p:style>
+          <a:lnRef idx="1">
+            <a:schemeClr val="accent1"/>
+          </a:lnRef>
+          <a:fillRef idx="3">
+            <a:schemeClr val="accent1"/>
+          </a:fillRef>
+          <a:effectRef idx="2">
+            <a:schemeClr val="accent1"/>
+          </a:effectRef>
+          <a:fontRef idx="minor">
+            <a:schemeClr val="lt1"/>
+          </a:fontRef>
+        </p:style>
+        <p:txBody>
+          <a:bodyPr rtlCol="0" anchor="ctr"/>
+          <a:lstStyle/>
+          <a:p>
+            <a:pPr algn="ctr"/>
+          </a:p>
+        </p:txBody>
+      </p:sp>
+      <p:sp>
+        <p:nvSpPr>
+          <p:cNvPr id="16" name="TextBox 15"/>
+          <p:cNvSpPr txBox="1"/>
+          <p:nvPr/>
+        </p:nvSpPr>
+        <p:spPr>
+          <a:xfrm>
+            <a:off x="594360" y="3680460"/>
+            <a:ext cx="438912" cy="438912"/>
+          </a:xfrm>
+          <a:prstGeom prst="rect">
+            <a:avLst/>
+          </a:prstGeom>
+          <a:noFill/>
+        </p:spPr>
+        <p:txBody>
+          <a:bodyPr wrap="square" anchor="ctr"/>
+          <a:lstStyle/>
+          <a:p>
+            <a:pPr algn="ctr"/>
+            <a:r>
+              <a:rPr sz="1600" b="1" i="0">
+                <a:solidFill>
+                  <a:srgbClr val="FFFFFF"/>
+                </a:solidFill>
+                <a:latin typeface="Calibri"/>
+              </a:rPr>
+              <a:t>3</a:t>
+            </a:r>
+          </a:p>
+        </p:txBody>
+      </p:sp>
+      <p:sp>
+        <p:nvSpPr>
+          <p:cNvPr id="17" name="TextBox 16"/>
+          <p:cNvSpPr txBox="1"/>
+          <p:nvPr/>
+        </p:nvSpPr>
+        <p:spPr>
+          <a:xfrm>
+            <a:off x="1188720" y="3536899"/>
+            <a:ext cx="10271455" cy="744321"/>
+          </a:xfrm>
+          <a:prstGeom prst="rect">
+            <a:avLst/>
+          </a:prstGeom>
+          <a:noFill/>
+        </p:spPr>
+        <p:txBody>
+          <a:bodyPr wrap="square" anchor="ctr"/>
+          <a:lstStyle/>
+          <a:p>
+            <a:r>
+              <a:rPr sz="1500" b="1" i="0">
+                <a:solidFill>
+                  <a:srgbClr val="095292"/>
+                </a:solidFill>
+                <a:latin typeface="Calibri"/>
+              </a:rPr>
+              <a:t>50 s · El numeral</a:t>
+            </a:r>
+          </a:p>
+          <a:p>
+            <a:pPr>
+              <a:spcBef>
+                <a:spcPts val="200"/>
+              </a:spcBef>
+            </a:pPr>
+            <a:r>
+              <a:rPr sz="1300" b="0" i="0">
+                <a:solidFill>
+                  <a:srgbClr val="333333"/>
+                </a:solidFill>
+                <a:latin typeface="Calibri"/>
+              </a:rPr>
+              <a:t>Lea el principio o el artículo y diga por qué aplica. Es lo que más pesa.</a:t>
+            </a:r>
+          </a:p>
+        </p:txBody>
+      </p:sp>
+      <p:sp>
+        <p:nvSpPr>
+          <p:cNvPr id="18" name="Rounded Rectangle 17"/>
+          <p:cNvSpPr/>
+          <p:nvPr/>
+        </p:nvSpPr>
+        <p:spPr>
+          <a:xfrm>
+            <a:off x="457200" y="4445812"/>
+            <a:ext cx="11277295" cy="908913"/>
+          </a:xfrm>
+          <a:prstGeom prst="roundRect">
+            <a:avLst>
+              <a:gd name="adj" fmla="val 12000"/>
+            </a:avLst>
+          </a:prstGeom>
+          <a:solidFill>
+            <a:srgbClr val="E8F4FA"/>
+          </a:solidFill>
+          <a:ln>
+            <a:noFill/>
+          </a:ln>
+        </p:spPr>
+        <p:style>
+          <a:lnRef idx="1">
+            <a:schemeClr val="accent1"/>
+          </a:lnRef>
+          <a:fillRef idx="3">
+            <a:schemeClr val="accent1"/>
+          </a:fillRef>
+          <a:effectRef idx="2">
+            <a:schemeClr val="accent1"/>
+          </a:effectRef>
+          <a:fontRef idx="minor">
+            <a:schemeClr val="lt1"/>
+          </a:fontRef>
+        </p:style>
+        <p:txBody>
+          <a:bodyPr rtlCol="0" anchor="ctr"/>
+          <a:lstStyle/>
+          <a:p>
+            <a:pPr algn="ctr"/>
+          </a:p>
+        </p:txBody>
+      </p:sp>
+      <p:sp>
+        <p:nvSpPr>
+          <p:cNvPr id="19" name="Rounded Rectangle 18"/>
+          <p:cNvSpPr/>
+          <p:nvPr/>
+        </p:nvSpPr>
+        <p:spPr>
+          <a:xfrm>
+            <a:off x="594360" y="4680813"/>
+            <a:ext cx="438912" cy="438912"/>
+          </a:xfrm>
+          <a:prstGeom prst="roundRect">
+            <a:avLst>
+              <a:gd name="adj" fmla="val 12000"/>
+            </a:avLst>
+          </a:prstGeom>
+          <a:solidFill>
+            <a:srgbClr val="095292"/>
+          </a:solidFill>
+          <a:ln>
+            <a:noFill/>
+          </a:ln>
+        </p:spPr>
+        <p:style>
+          <a:lnRef idx="1">
+            <a:schemeClr val="accent1"/>
+          </a:lnRef>
+          <a:fillRef idx="3">
+            <a:schemeClr val="accent1"/>
+          </a:fillRef>
+          <a:effectRef idx="2">
+            <a:schemeClr val="accent1"/>
+          </a:effectRef>
+          <a:fontRef idx="minor">
+            <a:schemeClr val="lt1"/>
+          </a:fontRef>
+        </p:style>
+        <p:txBody>
+          <a:bodyPr rtlCol="0" anchor="ctr"/>
+          <a:lstStyle/>
+          <a:p>
+            <a:pPr algn="ctr"/>
+          </a:p>
+        </p:txBody>
+      </p:sp>
+      <p:sp>
+        <p:nvSpPr>
+          <p:cNvPr id="20" name="TextBox 19"/>
+          <p:cNvSpPr txBox="1"/>
+          <p:nvPr/>
+        </p:nvSpPr>
+        <p:spPr>
+          <a:xfrm>
+            <a:off x="594360" y="4680813"/>
+            <a:ext cx="438912" cy="438912"/>
+          </a:xfrm>
+          <a:prstGeom prst="rect">
+            <a:avLst/>
+          </a:prstGeom>
+          <a:noFill/>
+        </p:spPr>
+        <p:txBody>
+          <a:bodyPr wrap="square" anchor="ctr"/>
+          <a:lstStyle/>
+          <a:p>
+            <a:pPr algn="ctr"/>
+            <a:r>
+              <a:rPr sz="1600" b="1" i="0">
+                <a:solidFill>
+                  <a:srgbClr val="FFFFFF"/>
+                </a:solidFill>
+                <a:latin typeface="Calibri"/>
+              </a:rPr>
+              <a:t>4</a:t>
+            </a:r>
+          </a:p>
+        </p:txBody>
+      </p:sp>
+      <p:sp>
+        <p:nvSpPr>
+          <p:cNvPr id="21" name="TextBox 20"/>
+          <p:cNvSpPr txBox="1"/>
+          <p:nvPr/>
+        </p:nvSpPr>
+        <p:spPr>
+          <a:xfrm>
+            <a:off x="1188720" y="4537252"/>
+            <a:ext cx="10271455" cy="744321"/>
+          </a:xfrm>
+          <a:prstGeom prst="rect">
+            <a:avLst/>
+          </a:prstGeom>
+          <a:noFill/>
+        </p:spPr>
+        <p:txBody>
+          <a:bodyPr wrap="square" anchor="ctr"/>
+          <a:lstStyle/>
+          <a:p>
+            <a:r>
+              <a:rPr sz="1500" b="1" i="0">
+                <a:solidFill>
+                  <a:srgbClr val="095292"/>
+                </a:solidFill>
+                <a:latin typeface="Calibri"/>
+              </a:rPr>
+              <a:t>50 s · El momento de parar</a:t>
+            </a:r>
+          </a:p>
+          <a:p>
+            <a:pPr>
+              <a:spcBef>
+                <a:spcPts val="200"/>
+              </a:spcBef>
+            </a:pPr>
+            <a:r>
+              <a:rPr sz="1300" b="0" i="0">
+                <a:solidFill>
+                  <a:srgbClr val="333333"/>
+                </a:solidFill>
+                <a:latin typeface="Calibri"/>
+              </a:rPr>
+              <a:t>Cuándo y qué había que hacer. Es el minuto obligatorio.</a:t>
+            </a:r>
+          </a:p>
+        </p:txBody>
+      </p:sp>
+      <p:sp>
+        <p:nvSpPr>
+          <p:cNvPr id="22" name="Rounded Rectangle 21"/>
+          <p:cNvSpPr/>
+          <p:nvPr/>
+        </p:nvSpPr>
+        <p:spPr>
+          <a:xfrm>
+            <a:off x="457200" y="5446166"/>
+            <a:ext cx="11277295" cy="908913"/>
+          </a:xfrm>
+          <a:prstGeom prst="roundRect">
+            <a:avLst>
+              <a:gd name="adj" fmla="val 12000"/>
+            </a:avLst>
+          </a:prstGeom>
+          <a:solidFill>
+            <a:srgbClr val="F2F2F2"/>
+          </a:solidFill>
+          <a:ln>
+            <a:noFill/>
+          </a:ln>
+        </p:spPr>
+        <p:style>
+          <a:lnRef idx="1">
+            <a:schemeClr val="accent1"/>
+          </a:lnRef>
+          <a:fillRef idx="3">
+            <a:schemeClr val="accent1"/>
+          </a:fillRef>
+          <a:effectRef idx="2">
+            <a:schemeClr val="accent1"/>
+          </a:effectRef>
+          <a:fontRef idx="minor">
+            <a:schemeClr val="lt1"/>
+          </a:fontRef>
+        </p:style>
+        <p:txBody>
+          <a:bodyPr rtlCol="0" anchor="ctr"/>
+          <a:lstStyle/>
+          <a:p>
+            <a:pPr algn="ctr"/>
+          </a:p>
+        </p:txBody>
+      </p:sp>
+      <p:sp>
+        <p:nvSpPr>
+          <p:cNvPr id="23" name="Rounded Rectangle 22"/>
+          <p:cNvSpPr/>
+          <p:nvPr/>
+        </p:nvSpPr>
+        <p:spPr>
+          <a:xfrm>
+            <a:off x="594360" y="5681167"/>
+            <a:ext cx="438912" cy="438912"/>
+          </a:xfrm>
+          <a:prstGeom prst="roundRect">
+            <a:avLst>
+              <a:gd name="adj" fmla="val 12000"/>
+            </a:avLst>
+          </a:prstGeom>
+          <a:solidFill>
+            <a:srgbClr val="095292"/>
+          </a:solidFill>
+          <a:ln>
+            <a:noFill/>
+          </a:ln>
+        </p:spPr>
+        <p:style>
+          <a:lnRef idx="1">
+            <a:schemeClr val="accent1"/>
+          </a:lnRef>
+          <a:fillRef idx="3">
+            <a:schemeClr val="accent1"/>
+          </a:fillRef>
+          <a:effectRef idx="2">
+            <a:schemeClr val="accent1"/>
+          </a:effectRef>
+          <a:fontRef idx="minor">
+            <a:schemeClr val="lt1"/>
+          </a:fontRef>
+        </p:style>
+        <p:txBody>
+          <a:bodyPr rtlCol="0" anchor="ctr"/>
+          <a:lstStyle/>
+          <a:p>
+            <a:pPr algn="ctr"/>
+          </a:p>
+        </p:txBody>
+      </p:sp>
+      <p:sp>
+        <p:nvSpPr>
+          <p:cNvPr id="24" name="TextBox 23"/>
+          <p:cNvSpPr txBox="1"/>
+          <p:nvPr/>
+        </p:nvSpPr>
+        <p:spPr>
+          <a:xfrm>
+            <a:off x="594360" y="5681167"/>
+            <a:ext cx="438912" cy="438912"/>
+          </a:xfrm>
+          <a:prstGeom prst="rect">
+            <a:avLst/>
+          </a:prstGeom>
+          <a:noFill/>
+        </p:spPr>
+        <p:txBody>
+          <a:bodyPr wrap="square" anchor="ctr"/>
+          <a:lstStyle/>
+          <a:p>
+            <a:pPr algn="ctr"/>
+            <a:r>
+              <a:rPr sz="1600" b="1" i="0">
+                <a:solidFill>
+                  <a:srgbClr val="FFFFFF"/>
+                </a:solidFill>
+                <a:latin typeface="Calibri"/>
+              </a:rPr>
+              <a:t>5</a:t>
+            </a:r>
+          </a:p>
+        </p:txBody>
+      </p:sp>
+      <p:sp>
+        <p:nvSpPr>
+          <p:cNvPr id="25" name="TextBox 24"/>
+          <p:cNvSpPr txBox="1"/>
+          <p:nvPr/>
+        </p:nvSpPr>
+        <p:spPr>
+          <a:xfrm>
+            <a:off x="1188720" y="5537606"/>
+            <a:ext cx="10271455" cy="744321"/>
+          </a:xfrm>
+          <a:prstGeom prst="rect">
+            <a:avLst/>
+          </a:prstGeom>
+          <a:noFill/>
+        </p:spPr>
+        <p:txBody>
+          <a:bodyPr wrap="square" anchor="ctr"/>
+          <a:lstStyle/>
+          <a:p>
+            <a:r>
+              <a:rPr sz="1500" b="1" i="0">
+                <a:solidFill>
+                  <a:srgbClr val="095292"/>
+                </a:solidFill>
+                <a:latin typeface="Calibri"/>
+              </a:rPr>
+              <a:t>10 s · La regla propia</a:t>
+            </a:r>
+          </a:p>
+          <a:p>
+            <a:pPr>
+              <a:spcBef>
+                <a:spcPts val="200"/>
+              </a:spcBef>
+            </a:pPr>
+            <a:r>
+              <a:rPr sz="1300" b="0" i="0">
+                <a:solidFill>
+                  <a:srgbClr val="333333"/>
+                </a:solidFill>
+                <a:latin typeface="Calibri"/>
+              </a:rPr>
+              <a:t>Una frase, verificable, para su propio proyecto.</a:t>
+            </a:r>
+          </a:p>
+        </p:txBody>
+      </p:sp>
+      <p:sp>
+        <p:nvSpPr>
+          <p:cNvPr id="26" name="TextBox 25"/>
+          <p:cNvSpPr txBox="1"/>
+          <p:nvPr/>
+        </p:nvSpPr>
+        <p:spPr>
+          <a:xfrm>
+            <a:off x="11185855" y="6473952"/>
+            <a:ext cx="640080" cy="274320"/>
+          </a:xfrm>
+          <a:prstGeom prst="rect">
+            <a:avLst/>
+          </a:prstGeom>
+          <a:noFill/>
+        </p:spPr>
+        <p:txBody>
+          <a:bodyPr wrap="square">
+            <a:spAutoFit/>
+          </a:bodyPr>
+          <a:lstStyle/>
+          <a:p>
+            <a:pPr algn="r"/>
+            <a:r>
+              <a:rPr sz="1100" b="0" i="0">
+                <a:solidFill>
+                  <a:srgbClr val="666666"/>
+                </a:solidFill>
+                <a:latin typeface="Calibri"/>
+              </a:rPr>
+              <a:t>24</a:t>
+            </a:r>
+          </a:p>
+        </p:txBody>
+      </p:sp>
+    </p:spTree>
+  </p:cSld>
+  <p:clrMapOvr>
+    <a:masterClrMapping/>
+  </p:clrMapOvr>
+</p:sld>
+</file>
+
+<file path=ppt/slides/slide25.xml><?xml version="1.0" encoding="utf-8"?>
+<p:sld xmlns:a="http://schemas.openxmlformats.org/drawingml/2006/main" xmlns:p="http://schemas.openxmlformats.org/presentationml/2006/main" xmlns:r="http://schemas.openxmlformats.org/officeDocument/2006/relationships">
+  <p:cSld>
+    <p:bg>
+      <p:bgPr>
+        <a:solidFill>
+          <a:srgbClr val="FFFFFF"/>
+        </a:solidFill>
+        <a:effectLst/>
+      </p:bgPr>
+    </p:bg>
+    <p:spTree>
+      <p:nvGrpSpPr>
+        <p:cNvPr id="1" name=""/>
+        <p:cNvGrpSpPr/>
+        <p:nvPr/>
+      </p:nvGrpSpPr>
+      <p:grpSpPr/>
+      <p:sp>
+        <p:nvSpPr>
+          <p:cNvPr id="2" name="Rectangle 1"/>
+          <p:cNvSpPr/>
+          <p:nvPr/>
+        </p:nvSpPr>
+        <p:spPr>
+          <a:xfrm>
+            <a:off x="0" y="0"/>
+            <a:ext cx="12191695" cy="960120"/>
+          </a:xfrm>
+          <a:prstGeom prst="rect">
+            <a:avLst/>
+          </a:prstGeom>
+          <a:solidFill>
+            <a:srgbClr val="095292"/>
+          </a:solidFill>
+          <a:ln>
+            <a:noFill/>
+          </a:ln>
+        </p:spPr>
+        <p:style>
+          <a:lnRef idx="1">
+            <a:schemeClr val="accent1"/>
+          </a:lnRef>
+          <a:fillRef idx="3">
+            <a:schemeClr val="accent1"/>
+          </a:fillRef>
+          <a:effectRef idx="2">
+            <a:schemeClr val="accent1"/>
+          </a:effectRef>
+          <a:fontRef idx="minor">
+            <a:schemeClr val="lt1"/>
+          </a:fontRef>
+        </p:style>
+        <p:txBody>
+          <a:bodyPr rtlCol="0" anchor="ctr"/>
+          <a:lstStyle/>
+          <a:p>
+            <a:pPr algn="ctr"/>
+          </a:p>
+        </p:txBody>
+      </p:sp>
+      <p:sp>
+        <p:nvSpPr>
+          <p:cNvPr id="3" name="Rectangle 2"/>
+          <p:cNvSpPr/>
+          <p:nvPr/>
+        </p:nvSpPr>
+        <p:spPr>
+          <a:xfrm>
+            <a:off x="0" y="960120"/>
+            <a:ext cx="12191695" cy="41148"/>
+          </a:xfrm>
+          <a:prstGeom prst="rect">
+            <a:avLst/>
+          </a:prstGeom>
+          <a:solidFill>
+            <a:srgbClr val="FFD000"/>
+          </a:solidFill>
+          <a:ln>
+            <a:noFill/>
+          </a:ln>
+        </p:spPr>
+        <p:style>
+          <a:lnRef idx="1">
+            <a:schemeClr val="accent1"/>
+          </a:lnRef>
+          <a:fillRef idx="3">
+            <a:schemeClr val="accent1"/>
+          </a:fillRef>
+          <a:effectRef idx="2">
+            <a:schemeClr val="accent1"/>
+          </a:effectRef>
+          <a:fontRef idx="minor">
+            <a:schemeClr val="lt1"/>
+          </a:fontRef>
+        </p:style>
+        <p:txBody>
+          <a:bodyPr rtlCol="0" anchor="ctr"/>
+          <a:lstStyle/>
+          <a:p>
+            <a:pPr algn="ctr"/>
+          </a:p>
+        </p:txBody>
+      </p:sp>
+      <p:sp>
+        <p:nvSpPr>
+          <p:cNvPr id="4" name="TextBox 3"/>
+          <p:cNvSpPr txBox="1"/>
+          <p:nvPr/>
+        </p:nvSpPr>
+        <p:spPr>
+          <a:xfrm>
+            <a:off x="457200" y="164592"/>
+            <a:ext cx="11277295" cy="502920"/>
+          </a:xfrm>
+          <a:prstGeom prst="rect">
+            <a:avLst/>
+          </a:prstGeom>
+          <a:noFill/>
+        </p:spPr>
+        <p:txBody>
+          <a:bodyPr wrap="square">
+            <a:spAutoFit/>
+          </a:bodyPr>
+          <a:lstStyle/>
+          <a:p>
+            <a:r>
+              <a:rPr sz="2600" b="1" i="0">
+                <a:solidFill>
+                  <a:srgbClr val="FFFFFF"/>
+                </a:solidFill>
+                <a:latin typeface="Calibri"/>
+              </a:rPr>
+              <a:t>Para la Clase 5</a:t>
+            </a:r>
+          </a:p>
+        </p:txBody>
+      </p:sp>
+      <p:sp>
+        <p:nvSpPr>
+          <p:cNvPr id="5" name="TextBox 4"/>
+          <p:cNvSpPr txBox="1"/>
+          <p:nvPr/>
+        </p:nvSpPr>
+        <p:spPr>
+          <a:xfrm>
+            <a:off x="457200" y="1170432"/>
+            <a:ext cx="11277295" cy="5230368"/>
+          </a:xfrm>
+          <a:prstGeom prst="rect">
+            <a:avLst/>
+          </a:prstGeom>
+          <a:noFill/>
+        </p:spPr>
+        <p:txBody>
+          <a:bodyPr wrap="square">
+            <a:spAutoFit/>
+          </a:bodyPr>
+          <a:lstStyle/>
+          <a:p>
+            <a:pPr>
+              <a:spcAft>
+                <a:spcPts val="800"/>
+              </a:spcAft>
+            </a:pPr>
+            <a:r>
+              <a:rPr sz="2000" b="0" i="0">
+                <a:solidFill>
+                  <a:srgbClr val="333333"/>
+                </a:solidFill>
+                <a:latin typeface="Calibri"/>
+              </a:rPr>
+              <a:t>–   </a:t>
+            </a:r>
+            <a:r>
+              <a:rPr sz="2000" b="1" i="0">
+                <a:solidFill>
+                  <a:srgbClr val="333333"/>
+                </a:solidFill>
+                <a:latin typeface="Calibri"/>
+              </a:rPr>
+              <a:t>Trabajo dirigido:</a:t>
+            </a:r>
+            <a:r>
+              <a:rPr sz="2000" b="0" i="0">
+                <a:solidFill>
+                  <a:srgbClr val="333333"/>
+                </a:solidFill>
+                <a:latin typeface="Calibri"/>
+              </a:rPr>
+              <a:t> Lectura del código ético — el código ACM/IEEE completo, los ocho principios, y los deberes del ingeniero frente a la sociedad de la Ley 842 de 2003.</a:t>
+            </a:r>
+          </a:p>
+          <a:p>
+            <a:pPr>
+              <a:spcAft>
+                <a:spcPts val="800"/>
+              </a:spcAft>
+            </a:pPr>
+            <a:r>
+              <a:rPr sz="2000" b="0" i="0">
+                <a:solidFill>
+                  <a:srgbClr val="333333"/>
+                </a:solidFill>
+                <a:latin typeface="Calibri"/>
+              </a:rPr>
+              <a:t>–   </a:t>
+            </a:r>
+            <a:r>
+              <a:rPr sz="2000" b="1" i="0">
+                <a:solidFill>
+                  <a:srgbClr val="333333"/>
+                </a:solidFill>
+                <a:latin typeface="Calibri"/>
+              </a:rPr>
+              <a:t>Trabajo independiente:</a:t>
+            </a:r>
+            <a:r>
+              <a:rPr sz="2000" b="0" i="0">
+                <a:solidFill>
+                  <a:srgbClr val="333333"/>
+                </a:solidFill>
+                <a:latin typeface="Calibri"/>
+              </a:rPr>
+              <a:t> Análisis crítico del código ético: media página sobre </a:t>
+            </a:r>
+            <a:r>
+              <a:rPr sz="2000" b="1" i="0">
+                <a:solidFill>
+                  <a:srgbClr val="333333"/>
+                </a:solidFill>
+                <a:latin typeface="Calibri"/>
+              </a:rPr>
+              <a:t>un principio que su equipo cree difícil de cumplir en la práctica</a:t>
+            </a:r>
+            <a:r>
+              <a:rPr sz="2000" b="0" i="0">
+                <a:solidFill>
+                  <a:srgbClr val="333333"/>
+                </a:solidFill>
+                <a:latin typeface="Calibri"/>
+              </a:rPr>
+              <a:t>, con el motivo.</a:t>
+            </a:r>
+          </a:p>
+          <a:p>
+            <a:pPr>
+              <a:spcAft>
+                <a:spcPts val="800"/>
+              </a:spcAft>
+            </a:pPr>
+            <a:r>
+              <a:rPr sz="2000" b="0" i="0">
+                <a:solidFill>
+                  <a:srgbClr val="333333"/>
+                </a:solidFill>
+                <a:latin typeface="Calibri"/>
+              </a:rPr>
+              <a:t>–   </a:t>
+            </a:r>
+            <a:r>
+              <a:rPr sz="2000" b="1" i="0">
+                <a:solidFill>
+                  <a:srgbClr val="333333"/>
+                </a:solidFill>
+                <a:latin typeface="Calibri"/>
+              </a:rPr>
+              <a:t>Clase 5 · El rol del ingeniero en el contexto ambiental</a:t>
+            </a:r>
+            <a:r>
+              <a:rPr sz="2000" b="0" i="0">
+                <a:solidFill>
+                  <a:srgbClr val="333333"/>
+                </a:solidFill>
+                <a:latin typeface="Calibri"/>
+              </a:rPr>
+              <a:t> — el impacto ambiental del software, que es el daño que no tiene una víctima con nombre y que casi nadie mide.</a:t>
+            </a:r>
+          </a:p>
+          <a:p>
+            <a:pPr>
+              <a:spcAft>
+                <a:spcPts val="800"/>
+              </a:spcAft>
+            </a:pPr>
+            <a:r>
+              <a:rPr sz="2000" b="0" i="0">
+                <a:solidFill>
+                  <a:srgbClr val="333333"/>
+                </a:solidFill>
+                <a:latin typeface="Calibri"/>
+              </a:rPr>
+              <a:t>–   </a:t>
+            </a:r>
+            <a:r>
+              <a:rPr sz="2000" b="1" i="0">
+                <a:solidFill>
+                  <a:srgbClr val="333333"/>
+                </a:solidFill>
+                <a:latin typeface="Calibri"/>
+              </a:rPr>
+              <a:t>Aviso:</a:t>
+            </a:r>
+            <a:r>
+              <a:rPr sz="2000" b="0" i="0">
+                <a:solidFill>
+                  <a:srgbClr val="333333"/>
+                </a:solidFill>
+                <a:latin typeface="Calibri"/>
+              </a:rPr>
+              <a:t> Traigan leído el código de ética y la regla propia de hoy escrita en el documento del equipo. En la sesión 6 esa regla entra en la ficha del problema del proyecto.</a:t>
+            </a:r>
+          </a:p>
+          <a:p>
+            <a:pPr>
+              <a:spcAft>
+                <a:spcPts val="800"/>
+              </a:spcAft>
+            </a:pPr>
+            <a:r>
+              <a:rPr sz="2000" b="0" i="0">
+                <a:solidFill>
+                  <a:srgbClr val="333333"/>
+                </a:solidFill>
+                <a:latin typeface="Calibri"/>
+              </a:rPr>
+              <a:t>–   </a:t>
+            </a:r>
+            <a:r>
+              <a:rPr sz="2000" b="1" i="0">
+                <a:solidFill>
+                  <a:srgbClr val="333333"/>
+                </a:solidFill>
+                <a:latin typeface="Calibri"/>
+              </a:rPr>
+              <a:t>Antes de salir:</a:t>
+            </a:r>
+            <a:r>
+              <a:rPr sz="2000" b="0" i="0">
+                <a:solidFill>
+                  <a:srgbClr val="333333"/>
+                </a:solidFill>
+                <a:latin typeface="Calibri"/>
+              </a:rPr>
+              <a:t> el enlace del documento del equipo en el chat, con permiso de lectura para el docente, y el nombre del vocero de hoy.</a:t>
+            </a:r>
+          </a:p>
+        </p:txBody>
+      </p:sp>
+      <p:sp>
+        <p:nvSpPr>
+          <p:cNvPr id="6" name="TextBox 5"/>
+          <p:cNvSpPr txBox="1"/>
+          <p:nvPr/>
+        </p:nvSpPr>
+        <p:spPr>
+          <a:xfrm>
+            <a:off x="11185855" y="6473952"/>
+            <a:ext cx="640080" cy="274320"/>
+          </a:xfrm>
+          <a:prstGeom prst="rect">
+            <a:avLst/>
+          </a:prstGeom>
+          <a:noFill/>
+        </p:spPr>
+        <p:txBody>
+          <a:bodyPr wrap="square">
+            <a:spAutoFit/>
+          </a:bodyPr>
+          <a:lstStyle/>
+          <a:p>
+            <a:pPr algn="r"/>
+            <a:r>
+              <a:rPr sz="1100" b="0" i="0">
+                <a:solidFill>
+                  <a:srgbClr val="666666"/>
+                </a:solidFill>
+                <a:latin typeface="Calibri"/>
+              </a:rPr>
+              <a:t>25</a:t>
+            </a:r>
+          </a:p>
+        </p:txBody>
+      </p:sp>
+    </p:spTree>
+  </p:cSld>
+  <p:clrMapOvr>
+    <a:masterClrMapping/>
+  </p:clrMapOvr>
+</p:sld>
+</file>
+
+<file path=ppt/slides/slide26.xml><?xml version="1.0" encoding="utf-8"?>
+<p:sld xmlns:a="http://schemas.openxmlformats.org/drawingml/2006/main" xmlns:p="http://schemas.openxmlformats.org/presentationml/2006/main" xmlns:r="http://schemas.openxmlformats.org/officeDocument/2006/relationships">
+  <p:cSld>
+    <p:bg>
+      <p:bgPr>
+        <a:solidFill>
+          <a:srgbClr val="FFFFFF"/>
+        </a:solidFill>
+        <a:effectLst/>
+      </p:bgPr>
+    </p:bg>
+    <p:spTree>
+      <p:nvGrpSpPr>
+        <p:cNvPr id="1" name=""/>
+        <p:cNvGrpSpPr/>
+        <p:nvPr/>
+      </p:nvGrpSpPr>
+      <p:grpSpPr/>
+      <p:sp>
+        <p:nvSpPr>
+          <p:cNvPr id="2" name="Rectangle 1"/>
+          <p:cNvSpPr/>
+          <p:nvPr/>
+        </p:nvSpPr>
+        <p:spPr>
+          <a:xfrm>
+            <a:off x="0" y="0"/>
+            <a:ext cx="12191695" cy="164592"/>
+          </a:xfrm>
+          <a:prstGeom prst="rect">
+            <a:avLst/>
+          </a:prstGeom>
+          <a:solidFill>
+            <a:srgbClr val="269CCB"/>
+          </a:solidFill>
+          <a:ln>
+            <a:noFill/>
+          </a:ln>
+        </p:spPr>
+        <p:style>
+          <a:lnRef idx="1">
+            <a:schemeClr val="accent1"/>
+          </a:lnRef>
+          <a:fillRef idx="3">
+            <a:schemeClr val="accent1"/>
+          </a:fillRef>
+          <a:effectRef idx="2">
+            <a:schemeClr val="accent1"/>
+          </a:effectRef>
+          <a:fontRef idx="minor">
+            <a:schemeClr val="lt1"/>
+          </a:fontRef>
+        </p:style>
+        <p:txBody>
+          <a:bodyPr rtlCol="0" anchor="ctr"/>
+          <a:lstStyle/>
+          <a:p>
+            <a:pPr algn="ctr"/>
+          </a:p>
+        </p:txBody>
+      </p:sp>
+      <p:pic>
+        <p:nvPicPr>
+          <p:cNvPr id="3" name="Picture 2" descr="logo_uniajc_color.png"/>
+          <p:cNvPicPr>
+            <a:picLocks noChangeAspect="1"/>
+          </p:cNvPicPr>
+          <p:nvPr/>
+        </p:nvPicPr>
+        <p:blipFill>
+          <a:blip r:embed="rId2"/>
+          <a:stretch>
+            <a:fillRect/>
+          </a:stretch>
+        </p:blipFill>
+        <p:spPr>
+          <a:xfrm>
+            <a:off x="10271455" y="5998464"/>
+            <a:ext cx="1463040" cy="643233"/>
+          </a:xfrm>
+          <a:prstGeom prst="rect">
+            <a:avLst/>
+          </a:prstGeom>
+        </p:spPr>
+      </p:pic>
+      <p:sp>
+        <p:nvSpPr>
+          <p:cNvPr id="4" name="TextBox 3"/>
+          <p:cNvSpPr txBox="1"/>
+          <p:nvPr/>
+        </p:nvSpPr>
+        <p:spPr>
+          <a:xfrm>
+            <a:off x="457200" y="1737360"/>
+            <a:ext cx="11277295" cy="1097280"/>
+          </a:xfrm>
+          <a:prstGeom prst="rect">
+            <a:avLst/>
+          </a:prstGeom>
+          <a:noFill/>
+        </p:spPr>
+        <p:txBody>
+          <a:bodyPr wrap="square" anchor="ctr"/>
+          <a:lstStyle/>
+          <a:p>
+            <a:pPr algn="ctr"/>
+            <a:r>
+              <a:rPr sz="3400" b="1" i="0">
+                <a:solidFill>
+                  <a:srgbClr val="095292"/>
+                </a:solidFill>
+                <a:latin typeface="Calibri"/>
+              </a:rPr>
+              <a:t>Nos vemos en la sesión 5</a:t>
+            </a:r>
+          </a:p>
+        </p:txBody>
+      </p:sp>
+      <p:sp>
+        <p:nvSpPr>
+          <p:cNvPr id="5" name="TextBox 4"/>
+          <p:cNvSpPr txBox="1"/>
+          <p:nvPr/>
+        </p:nvSpPr>
+        <p:spPr>
+          <a:xfrm>
+            <a:off x="457200" y="3017520"/>
+            <a:ext cx="11277295" cy="1645920"/>
+          </a:xfrm>
+          <a:prstGeom prst="rect">
+            <a:avLst/>
+          </a:prstGeom>
+          <a:noFill/>
+        </p:spPr>
+        <p:txBody>
+          <a:bodyPr wrap="square">
+            <a:spAutoFit/>
+          </a:bodyPr>
+          <a:lstStyle/>
+          <a:p>
+            <a:pPr algn="ctr">
+              <a:spcAft>
+                <a:spcPts val="600"/>
+              </a:spcAft>
+            </a:pPr>
+            <a:r>
+              <a:rPr sz="1600" b="0" i="0">
+                <a:solidFill>
+                  <a:srgbClr val="333333"/>
+                </a:solidFill>
+                <a:latin typeface="Calibri"/>
+              </a:rPr>
+              <a:t>Principios éticos en la Ingeniería · Clase 4</a:t>
+            </a:r>
+          </a:p>
+          <a:p>
+            <a:pPr algn="ctr">
+              <a:spcAft>
+                <a:spcPts val="600"/>
+              </a:spcAft>
+            </a:pPr>
+            <a:r>
+              <a:rPr sz="1600" b="0" i="0">
+                <a:solidFill>
+                  <a:srgbClr val="333333"/>
+                </a:solidFill>
+                <a:latin typeface="Calibri"/>
+              </a:rPr>
+              <a:t>FI300101 · UNIAJC · Ingeniería de Sistemas</a:t>
+            </a:r>
+          </a:p>
+        </p:txBody>
+      </p:sp>
+      <p:sp>
+        <p:nvSpPr>
+          <p:cNvPr id="6" name="TextBox 5"/>
+          <p:cNvSpPr txBox="1"/>
+          <p:nvPr/>
+        </p:nvSpPr>
+        <p:spPr>
+          <a:xfrm>
+            <a:off x="457200" y="4754880"/>
+            <a:ext cx="11277295" cy="640080"/>
+          </a:xfrm>
+          <a:prstGeom prst="rect">
+            <a:avLst/>
+          </a:prstGeom>
+          <a:noFill/>
+        </p:spPr>
+        <p:txBody>
+          <a:bodyPr wrap="square">
+            <a:spAutoFit/>
+          </a:bodyPr>
+          <a:lstStyle/>
+          <a:p>
+            <a:pPr algn="ctr"/>
+            <a:r>
+              <a:rPr sz="2000" b="1" i="0">
+                <a:solidFill>
+                  <a:srgbClr val="269CCB"/>
+                </a:solidFill>
+                <a:latin typeface="Calibri"/>
+              </a:rPr>
+              <a:t>En los cuatro casos el software funcionó. Falló lo que se pidió construir</a:t>
             </a:r>
           </a:p>
         </p:txBody>

--- a/Introduccion a la Ingenieria/Clases/Clase 4 - Principios eticos en la Ingenieria/Presentacion.pptx
+++ b/Introduccion a la Ingenieria/Clases/Clase 4 - Principios eticos en la Ingenieria/Presentacion.pptx
@@ -3631,7 +3631,7 @@
                 </a:solidFill>
                 <a:latin typeface="Calibri"/>
               </a:rPr>
-              <a:t>La pregunta de entrada: el ingeniero que fue a la cárcel</a:t>
+              <a:t>La pregunta de entrada: el ingeniero que fue a la cárcel (1/2)</a:t>
             </a:r>
           </a:p>
         </p:txBody>
@@ -3664,7 +3664,7 @@
               </a:spcAft>
             </a:pPr>
             <a:r>
-              <a:rPr sz="1900" b="0" i="0">
+              <a:rPr sz="2000" b="0" i="0">
                 <a:solidFill>
                   <a:srgbClr val="333333"/>
                 </a:solidFill>
@@ -3680,13 +3680,13 @@
               </a:spcAft>
             </a:pPr>
             <a:r>
-              <a:rPr sz="1900" b="0" i="0">
-                <a:solidFill>
-                  <a:srgbClr val="333333"/>
-                </a:solidFill>
-                <a:latin typeface="Calibri"/>
-              </a:rPr>
-              <a:t>–   Un ingeniero de Volkswagen escribió el software que detectaba cuándo el carro estaba en la prueba de emisiones para bajar los contaminantes solo durante el examen.</a:t>
+              <a:rPr sz="2000" b="0" i="0">
+                <a:solidFill>
+                  <a:srgbClr val="333333"/>
+                </a:solidFill>
+                <a:latin typeface="Calibri"/>
+              </a:rPr>
+              <a:t>–   El software funcionaba perfecto: hacía exactamente lo que se le pidió, sin errores.</a:t>
             </a:r>
           </a:p>
           <a:p>
@@ -3696,13 +3696,13 @@
               </a:spcAft>
             </a:pPr>
             <a:r>
-              <a:rPr sz="1900" b="0" i="0">
-                <a:solidFill>
-                  <a:srgbClr val="333333"/>
-                </a:solidFill>
-                <a:latin typeface="Calibri"/>
-              </a:rPr>
-              <a:t>–   El software funcionaba perfecto: hacía exactamente lo que se le pidió, sin errores.</a:t>
+              <a:rPr sz="2000" b="0" i="0">
+                <a:solidFill>
+                  <a:srgbClr val="333333"/>
+                </a:solidFill>
+                <a:latin typeface="Calibri"/>
+              </a:rPr>
+              <a:t>–   En 2017 ese ingeniero se declaró culpable en Estados Unidos y fue condenado a cuarenta meses de prisión, además de una multa.</a:t>
             </a:r>
           </a:p>
           <a:p>
@@ -3712,95 +3712,13 @@
               </a:spcAft>
             </a:pPr>
             <a:r>
-              <a:rPr sz="1900" b="0" i="0">
-                <a:solidFill>
-                  <a:srgbClr val="333333"/>
-                </a:solidFill>
-                <a:latin typeface="Calibri"/>
-              </a:rPr>
-              <a:t>–   En 2017 ese ingeniero se declaró culpable en Estados Unidos y fue condenado a cuarenta meses de prisión, además de una multa.</a:t>
-            </a:r>
-          </a:p>
-          <a:p>
-            <a:pPr>
-              <a:spcAft>
-                <a:spcPts val="800"/>
-              </a:spcAft>
-            </a:pPr>
-            <a:r>
-              <a:rPr sz="1900" b="0" i="0">
+              <a:rPr sz="2000" b="0" i="0">
                 <a:solidFill>
                   <a:srgbClr val="333333"/>
                 </a:solidFill>
                 <a:latin typeface="Calibri"/>
               </a:rPr>
               <a:t>–   El estudiante de primer semestre tiene interiorizada la idea de que la responsabilidad es del jefe y que el programador ejecuta.</a:t>
-            </a:r>
-          </a:p>
-          <a:p>
-            <a:pPr>
-              <a:spcAft>
-                <a:spcPts val="800"/>
-              </a:spcAft>
-            </a:pPr>
-            <a:r>
-              <a:rPr sz="1900" b="0" i="0">
-                <a:solidFill>
-                  <a:srgbClr val="333333"/>
-                </a:solidFill>
-                <a:latin typeface="Calibri"/>
-              </a:rPr>
-              <a:t>–   Este caso la rompe con un hecho verificable, y por eso es mejor abrir con él que con una definición de ética.</a:t>
-            </a:r>
-          </a:p>
-          <a:p>
-            <a:pPr>
-              <a:spcAft>
-                <a:spcPts val="800"/>
-              </a:spcAft>
-            </a:pPr>
-            <a:r>
-              <a:rPr sz="1900" b="0" i="0">
-                <a:solidFill>
-                  <a:srgbClr val="333333"/>
-                </a:solidFill>
-                <a:latin typeface="Calibri"/>
-              </a:rPr>
-              <a:t>–   Recoja las respuestas en el muro los primeros diez minutos —van a aparecer «robó», «hackeó», «se equivocó»— y en el minuto 30</a:t>
-            </a:r>
-          </a:p>
-          <a:p>
-            <a:pPr>
-              <a:spcAft>
-                <a:spcPts val="800"/>
-              </a:spcAft>
-            </a:pPr>
-            <a:r>
-              <a:rPr sz="1900" b="0" i="0">
-                <a:solidFill>
-                  <a:srgbClr val="333333"/>
-                </a:solidFill>
-                <a:latin typeface="Calibri"/>
-              </a:rPr>
-              <a:t>–   Cuando llegue al caso en la tabla, muestre que ninguna era: </a:t>
-            </a:r>
-            <a:r>
-              <a:rPr sz="1900" b="1" i="0">
-                <a:solidFill>
-                  <a:srgbClr val="333333"/>
-                </a:solidFill>
-                <a:latin typeface="Calibri"/>
-              </a:rPr>
-              <a:t>no hubo error, no hubo robo, hubo una decisión de diseño que se ejecutó bien</a:t>
-            </a:r>
-            <a:r>
-              <a:rPr sz="1900" b="0" i="0">
-                <a:solidFill>
-                  <a:srgbClr val="333333"/>
-                </a:solidFill>
-                <a:latin typeface="Calibri"/>
-              </a:rPr>
-              <a:t>.</a:t>
             </a:r>
           </a:p>
         </p:txBody>
@@ -3981,7 +3899,7 @@
                 </a:solidFill>
                 <a:latin typeface="Calibri"/>
               </a:rPr>
-              <a:t>Qué es la ética en una profesión y qué no es (1/3)</a:t>
+              <a:t>La pregunta de entrada: el ingeniero que fue a la cárcel (2/2)</a:t>
             </a:r>
           </a:p>
         </p:txBody>
@@ -4020,7 +3938,7 @@
                 </a:solidFill>
                 <a:latin typeface="Calibri"/>
               </a:rPr>
-              <a:t>–   Hay tres confusiones que hay que desmontar antes de tocar cualquier caso, porque si no</a:t>
+              <a:t>–   Este caso la rompe con un hecho verificable, y por eso es mejor abrir con él que con una definición de ética.</a:t>
             </a:r>
           </a:p>
           <a:p>
@@ -4036,25 +3954,7 @@
                 </a:solidFill>
                 <a:latin typeface="Calibri"/>
               </a:rPr>
-              <a:t>–   La discusión del taller se vuelve una conversación de opiniones y no se puede calificar. </a:t>
-            </a:r>
-            <a:r>
-              <a:rPr sz="2000" b="1" i="0">
-                <a:solidFill>
-                  <a:srgbClr val="333333"/>
-                </a:solidFill>
-                <a:latin typeface="Calibri"/>
-              </a:rPr>
-              <a:t>La primera: la ética profesional no es tener buenas intenciones.</a:t>
-            </a:r>
-            <a:r>
-              <a:rPr sz="2000" b="0" i="0">
-                <a:solidFill>
-                  <a:srgbClr val="333333"/>
-                </a:solidFill>
-                <a:latin typeface="Calibri"/>
-              </a:rPr>
-              <a:t> Es tomar decisiones defendibles con información incompleta y poder explicar el criterio.</a:t>
+              <a:t>–   Recoja las respuestas en el muro los primeros diez minutos —van a aparecer «robó», «hackeó», «se equivocó»— y en el minuto 30</a:t>
             </a:r>
           </a:p>
           <a:p>
@@ -4070,15 +3970,17 @@
                 </a:solidFill>
                 <a:latin typeface="Calibri"/>
               </a:rPr>
-              <a:t>–   Un ingeniero con excelentes intenciones que no preguntó a quién afecta su sistema hizo algo mal, y el resultado no mejora por su buena voluntad.</a:t>
-            </a:r>
-          </a:p>
-          <a:p>
-            <a:pPr>
-              <a:spcAft>
-                <a:spcPts val="800"/>
-              </a:spcAft>
-            </a:pPr>
+              <a:t>–   Cuando llegue al caso en la tabla, muestre que ninguna era: </a:t>
+            </a:r>
+            <a:r>
+              <a:rPr sz="2000" b="1" i="0">
+                <a:solidFill>
+                  <a:srgbClr val="333333"/>
+                </a:solidFill>
+                <a:latin typeface="Calibri"/>
+              </a:rPr>
+              <a:t>no hubo error, no hubo robo, hubo una decisión de diseño que se ejecutó bien</a:t>
+            </a:r>
             <a:r>
               <a:rPr sz="2000" b="0" i="0">
                 <a:solidFill>
@@ -4086,41 +3988,7 @@
                 </a:solidFill>
                 <a:latin typeface="Calibri"/>
               </a:rPr>
-              <a:t>–   Al revés, un ingeniero que detecta un riesgo y lo escribe está actuando bien aunque el proyecto igual salga mal. </a:t>
-            </a:r>
-            <a:r>
-              <a:rPr sz="2000" b="1" i="0">
-                <a:solidFill>
-                  <a:srgbClr val="333333"/>
-                </a:solidFill>
-                <a:latin typeface="Calibri"/>
-              </a:rPr>
-              <a:t>La segunda: no es un tema de opinión.</a:t>
-            </a:r>
-            <a:r>
-              <a:rPr sz="2000" b="0" i="0">
-                <a:solidFill>
-                  <a:srgbClr val="333333"/>
-                </a:solidFill>
-                <a:latin typeface="Calibri"/>
-              </a:rPr>
-              <a:t> Esta es la que más rinde en clase</a:t>
-            </a:r>
-          </a:p>
-          <a:p>
-            <a:pPr>
-              <a:spcAft>
-                <a:spcPts val="800"/>
-              </a:spcAft>
-            </a:pPr>
-            <a:r>
-              <a:rPr sz="2000" b="0" i="0">
-                <a:solidFill>
-                  <a:srgbClr val="333333"/>
-                </a:solidFill>
-                <a:latin typeface="Calibri"/>
-              </a:rPr>
-              <a:t>–   Porque el estudiante llega convencido de que en ética «cada uno piensa distinto».</a:t>
+              <a:t>.</a:t>
             </a:r>
           </a:p>
         </p:txBody>
@@ -4301,7 +4169,7 @@
                 </a:solidFill>
                 <a:latin typeface="Calibri"/>
               </a:rPr>
-              <a:t>Qué es la ética en una profesión y qué no es (2/3)</a:t>
+              <a:t>Qué es la ética en una profesión y qué no es (1/2)</a:t>
             </a:r>
           </a:p>
         </p:txBody>
@@ -4340,7 +4208,7 @@
                 </a:solidFill>
                 <a:latin typeface="Calibri"/>
               </a:rPr>
-              <a:t>–   Existen códigos escritos, con principios numerados, que uno puede citar como se cita un artículo de una norma.</a:t>
+              <a:t>–   Hay tres confusiones que hay que desmontar antes de tocar cualquier caso, porque si no</a:t>
             </a:r>
           </a:p>
           <a:p>
@@ -4356,7 +4224,25 @@
                 </a:solidFill>
                 <a:latin typeface="Calibri"/>
               </a:rPr>
-              <a:t>–   El código de ética de ACM e IEEE Computer Society para ingeniería de software es de 1999 y tiene ocho principios; el código de ética del ingeniero en Colombia es la Ley 842 de 2003.</a:t>
+              <a:t>–   La discusión del taller se vuelve una conversación de opiniones y no se puede calificar. </a:t>
+            </a:r>
+            <a:r>
+              <a:rPr sz="2000" b="1" i="0">
+                <a:solidFill>
+                  <a:srgbClr val="333333"/>
+                </a:solidFill>
+                <a:latin typeface="Calibri"/>
+              </a:rPr>
+              <a:t>La primera: la ética profesional no es tener buenas intenciones.</a:t>
+            </a:r>
+            <a:r>
+              <a:rPr sz="2000" b="0" i="0">
+                <a:solidFill>
+                  <a:srgbClr val="333333"/>
+                </a:solidFill>
+                <a:latin typeface="Calibri"/>
+              </a:rPr>
+              <a:t> Es tomar decisiones defendibles con información incompleta y poder explicar el criterio.</a:t>
             </a:r>
           </a:p>
           <a:p>
@@ -4372,7 +4258,7 @@
                 </a:solidFill>
                 <a:latin typeface="Calibri"/>
               </a:rPr>
-              <a:t>–   Un veredicto que cita el numeral es un argumento</a:t>
+              <a:t>–   El código de ética de ACM e IEEE Computer Society para ingeniería de software es de 1999 y tiene ocho principios; el código de ética del ingeniero en Colombia es la Ley 842 de 2003.</a:t>
             </a:r>
           </a:p>
           <a:p>
@@ -4388,7 +4274,7 @@
                 </a:solidFill>
                 <a:latin typeface="Calibri"/>
               </a:rPr>
-              <a:t>–   «a mí me parece que estuvo mal» no lo es.</a:t>
+              <a:t>–   Un veredicto que cita el numeral es un argumento</a:t>
             </a:r>
           </a:p>
           <a:p>
@@ -4404,7 +4290,7 @@
                 </a:solidFill>
                 <a:latin typeface="Calibri"/>
               </a:rPr>
-              <a:t>–   En el taller de hoy se califica exactamente esa diferencia. **La tercera: la ley es el piso</a:t>
+              <a:t>–   «a mí me parece que estuvo mal» no lo es.</a:t>
             </a:r>
           </a:p>
           <a:p>
@@ -4420,7 +4306,7 @@
                 </a:solidFill>
                 <a:latin typeface="Calibri"/>
               </a:rPr>
-              <a:t>–   No el techo.** El caso de Cambridge Analytica es el mejor para mostrarlo: la interfaz que permitía a una aplicación tomar datos de los amigos del usuario estaba documentada públicamente y era permitida por las reglas de la plataforma.</a:t>
+              <a:t>–   En el taller de hoy se califica exactamente esa diferencia. **La tercera: la ley es el piso</a:t>
             </a:r>
           </a:p>
         </p:txBody>
@@ -4601,7 +4487,7 @@
                 </a:solidFill>
                 <a:latin typeface="Calibri"/>
               </a:rPr>
-              <a:t>Qué es la ética en una profesión y qué no es (3/3)</a:t>
+              <a:t>Qué es la ética en una profesión y qué no es (2/2)</a:t>
             </a:r>
           </a:p>
         </p:txBody>
@@ -4640,7 +4526,7 @@
                 </a:solidFill>
                 <a:latin typeface="Calibri"/>
               </a:rPr>
-              <a:t>–   Era legal y es indefendible.</a:t>
+              <a:t>–   No el techo.** El caso de Cambridge Analytica es el mejor para mostrarlo: la interfaz que permitía a una aplicación tomar datos de los amigos del usuario estaba documentada públicamente y era permitida por las reglas de la plataforma.</a:t>
             </a:r>
           </a:p>
           <a:p>
@@ -4656,7 +4542,7 @@
                 </a:solidFill>
                 <a:latin typeface="Calibri"/>
               </a:rPr>
-              <a:t>–   Al revés también ocurre: algo puede ser éticamente correcto y estar prohibido por una política interna.</a:t>
+              <a:t>–   Era legal y es indefendible.</a:t>
             </a:r>
           </a:p>
           <a:p>
@@ -4672,41 +4558,7 @@
                 </a:solidFill>
                 <a:latin typeface="Calibri"/>
               </a:rPr>
-              <a:t>–   La ley y la ética se cruzan pero no coinciden, y el ingeniero tiene que mirar las dos.</a:t>
-            </a:r>
-          </a:p>
-          <a:p>
-            <a:pPr>
-              <a:spcAft>
-                <a:spcPts val="800"/>
-              </a:spcAft>
-            </a:pPr>
-            <a:r>
-              <a:rPr sz="2000" b="0" i="0">
-                <a:solidFill>
-                  <a:srgbClr val="333333"/>
-                </a:solidFill>
-                <a:latin typeface="Calibri"/>
-              </a:rPr>
-              <a:t>–   Una cuarta idea, que es la que más les sirve: </a:t>
-            </a:r>
-            <a:r>
-              <a:rPr sz="2000" b="1" i="0">
-                <a:solidFill>
-                  <a:srgbClr val="333333"/>
-                </a:solidFill>
-                <a:latin typeface="Calibri"/>
-              </a:rPr>
-              <a:t>el momento de la ética es el momento de decidir, y casi siempre es temprano</a:t>
-            </a:r>
-            <a:r>
-              <a:rPr sz="2000" b="0" i="0">
-                <a:solidFill>
-                  <a:srgbClr val="333333"/>
-                </a:solidFill>
-                <a:latin typeface="Calibri"/>
-              </a:rPr>
-              <a:t>.</a:t>
+              <a:t>–   Al revés también ocurre: algo puede ser éticamente correcto y estar prohibido por una política interna.</a:t>
             </a:r>
           </a:p>
           <a:p>
@@ -5026,7 +4878,25 @@
                 </a:solidFill>
                 <a:latin typeface="Calibri"/>
               </a:rPr>
-              <a:t>–   Eso significa que el código ya resolvió el conflicto que el estudiante cree irresoluble: si lo que pide el jefe daña al público, el código dice cuál gana.</a:t>
+              <a:t>–   El punto práctico que hay que aterrizar para un estudiante de primer semestre es la </a:t>
+            </a:r>
+            <a:r>
+              <a:rPr sz="2000" b="1" i="0">
+                <a:solidFill>
+                  <a:srgbClr val="333333"/>
+                </a:solidFill>
+                <a:latin typeface="Calibri"/>
+              </a:rPr>
+              <a:t>matrícula profesional</a:t>
+            </a:r>
+            <a:r>
+              <a:rPr sz="2000" b="0" i="0">
+                <a:solidFill>
+                  <a:srgbClr val="333333"/>
+                </a:solidFill>
+                <a:latin typeface="Calibri"/>
+              </a:rPr>
+              <a:t>: en Colombia el ejercicio de la ingeniería requiere matrícula</a:t>
             </a:r>
           </a:p>
           <a:p>
@@ -5042,25 +4912,7 @@
                 </a:solidFill>
                 <a:latin typeface="Calibri"/>
               </a:rPr>
-              <a:t>–   La ACM actualizó además su código general en 2018. </a:t>
-            </a:r>
-            <a:r>
-              <a:rPr sz="2000" b="1" i="0">
-                <a:solidFill>
-                  <a:srgbClr val="333333"/>
-                </a:solidFill>
-                <a:latin typeface="Calibri"/>
-              </a:rPr>
-              <a:t>Ley 842 de 2003.</a:t>
-            </a:r>
-            <a:r>
-              <a:rPr sz="2000" b="0" i="0">
-                <a:solidFill>
-                  <a:srgbClr val="333333"/>
-                </a:solidFill>
-                <a:latin typeface="Calibri"/>
-              </a:rPr>
-              <a:t> Es el código de ética profesional de la ingeniería en Colombia y es la que aplica aquí, no las de otros países.</a:t>
+              <a:t>–   La expide el COPNIA —Consejo Profesional Nacional de Ingeniería—, y el COPNIA puede sancionar y suspenderla.</a:t>
             </a:r>
           </a:p>
           <a:p>
@@ -5076,15 +4928,17 @@
                 </a:solidFill>
                 <a:latin typeface="Calibri"/>
               </a:rPr>
-              <a:t>–   Establece los deberes del ingeniero con la sociedad, con la profesión, con sus colegas y con sus clientes, y define las faltas y las sanciones.</a:t>
-            </a:r>
-          </a:p>
-          <a:p>
-            <a:pPr>
-              <a:spcAft>
-                <a:spcPts val="800"/>
-              </a:spcAft>
-            </a:pPr>
+              <a:t>–   Es decir, la ética profesional aquí no es un discurso: tiene una autoridad, un procedimiento y una consecuencia sobre el derecho a ejercer. </a:t>
+            </a:r>
+            <a:r>
+              <a:rPr sz="2000" b="1" i="0">
+                <a:solidFill>
+                  <a:srgbClr val="333333"/>
+                </a:solidFill>
+                <a:latin typeface="Calibri"/>
+              </a:rPr>
+              <a:t>Ley 1581 de 2012</a:t>
+            </a:r>
             <a:r>
               <a:rPr sz="2000" b="0" i="0">
                 <a:solidFill>
@@ -5092,25 +4946,7 @@
                 </a:solidFill>
                 <a:latin typeface="Calibri"/>
               </a:rPr>
-              <a:t>–   El punto práctico que hay que aterrizar para un estudiante de primer semestre es la </a:t>
-            </a:r>
-            <a:r>
-              <a:rPr sz="2000" b="1" i="0">
-                <a:solidFill>
-                  <a:srgbClr val="333333"/>
-                </a:solidFill>
-                <a:latin typeface="Calibri"/>
-              </a:rPr>
-              <a:t>matrícula profesional</a:t>
-            </a:r>
-            <a:r>
-              <a:rPr sz="2000" b="0" i="0">
-                <a:solidFill>
-                  <a:srgbClr val="333333"/>
-                </a:solidFill>
-                <a:latin typeface="Calibri"/>
-              </a:rPr>
-              <a:t>: en Colombia el ejercicio de la ingeniería requiere matrícula</a:t>
+              <a:t> (con el Decreto 1377 de 2013) es la de protección de datos personales</a:t>
             </a:r>
           </a:p>
         </p:txBody>
@@ -5324,13 +5160,13 @@
               </a:spcAft>
             </a:pPr>
             <a:r>
-              <a:rPr sz="1900" b="0" i="0">
-                <a:solidFill>
-                  <a:srgbClr val="333333"/>
-                </a:solidFill>
-                <a:latin typeface="Calibri"/>
-              </a:rPr>
-              <a:t>–   La expide el COPNIA —Consejo Profesional Nacional de Ingeniería—, y el COPNIA puede sancionar y suspenderla.</a:t>
+              <a:rPr sz="2000" b="0" i="0">
+                <a:solidFill>
+                  <a:srgbClr val="333333"/>
+                </a:solidFill>
+                <a:latin typeface="Calibri"/>
+              </a:rPr>
+              <a:t>–   Y es la norma que más van a tocar en su vida laboral, empezando por el proyecto de este curso.</a:t>
             </a:r>
           </a:p>
           <a:p>
@@ -5340,31 +5176,13 @@
               </a:spcAft>
             </a:pPr>
             <a:r>
-              <a:rPr sz="1900" b="0" i="0">
-                <a:solidFill>
-                  <a:srgbClr val="333333"/>
-                </a:solidFill>
-                <a:latin typeface="Calibri"/>
-              </a:rPr>
-              <a:t>–   Es decir, la ética profesional aquí no es un discurso: tiene una autoridad, un procedimiento y una consecuencia sobre el derecho a ejercer. </a:t>
-            </a:r>
-            <a:r>
-              <a:rPr sz="1900" b="1" i="0">
-                <a:solidFill>
-                  <a:srgbClr val="333333"/>
-                </a:solidFill>
-                <a:latin typeface="Calibri"/>
-              </a:rPr>
-              <a:t>Ley 1581 de 2012</a:t>
-            </a:r>
-            <a:r>
-              <a:rPr sz="1900" b="0" i="0">
-                <a:solidFill>
-                  <a:srgbClr val="333333"/>
-                </a:solidFill>
-                <a:latin typeface="Calibri"/>
-              </a:rPr>
-              <a:t> (con el Decreto 1377 de 2013) es la de protección de datos personales</a:t>
+              <a:rPr sz="2000" b="0" i="0">
+                <a:solidFill>
+                  <a:srgbClr val="333333"/>
+                </a:solidFill>
+                <a:latin typeface="Calibri"/>
+              </a:rPr>
+              <a:t>–   Los principios que hay que poder nombrar: finalidad (los datos se piden para algo declarado y no se usan para otra cosa)</a:t>
             </a:r>
           </a:p>
           <a:p>
@@ -5374,13 +5192,13 @@
               </a:spcAft>
             </a:pPr>
             <a:r>
-              <a:rPr sz="1900" b="0" i="0">
-                <a:solidFill>
-                  <a:srgbClr val="333333"/>
-                </a:solidFill>
-                <a:latin typeface="Calibri"/>
-              </a:rPr>
-              <a:t>–   Y es la norma que más van a tocar en su vida laboral, empezando por el proyecto de este curso.</a:t>
+              <a:rPr sz="2000" b="0" i="0">
+                <a:solidFill>
+                  <a:srgbClr val="333333"/>
+                </a:solidFill>
+                <a:latin typeface="Calibri"/>
+              </a:rPr>
+              <a:t>–   Libertad (hace falta autorización previa, expresa e informada), veracidad, transparencia, acceso restringido, seguridad y confidencialidad.</a:t>
             </a:r>
           </a:p>
           <a:p>
@@ -5390,13 +5208,13 @@
               </a:spcAft>
             </a:pPr>
             <a:r>
-              <a:rPr sz="1900" b="0" i="0">
-                <a:solidFill>
-                  <a:srgbClr val="333333"/>
-                </a:solidFill>
-                <a:latin typeface="Calibri"/>
-              </a:rPr>
-              <a:t>–   Los principios que hay que poder nombrar: finalidad (los datos se piden para algo declarado y no se usan para otra cosa)</a:t>
+              <a:rPr sz="2000" b="0" i="0">
+                <a:solidFill>
+                  <a:srgbClr val="333333"/>
+                </a:solidFill>
+                <a:latin typeface="Calibri"/>
+              </a:rPr>
+              <a:t>–   La autoridad es la Superintendencia de Industria y Comercio.</a:t>
             </a:r>
           </a:p>
           <a:p>
@@ -5406,13 +5224,13 @@
               </a:spcAft>
             </a:pPr>
             <a:r>
-              <a:rPr sz="1900" b="0" i="0">
-                <a:solidFill>
-                  <a:srgbClr val="333333"/>
-                </a:solidFill>
-                <a:latin typeface="Calibri"/>
-              </a:rPr>
-              <a:t>–   Libertad (hace falta autorización previa, expresa e informada), veracidad, transparencia, acceso restringido, seguridad y confidencialidad.</a:t>
+              <a:rPr sz="2000" b="0" i="0">
+                <a:solidFill>
+                  <a:srgbClr val="333333"/>
+                </a:solidFill>
+                <a:latin typeface="Calibri"/>
+              </a:rPr>
+              <a:t>–   Aterrícelo en el curso: si un equipo quiere hacer un proyecto con una base de datos de pacientes de un consultorio del barrio, esta ley le aplica completa</a:t>
             </a:r>
           </a:p>
           <a:p>
@@ -5422,63 +5240,31 @@
               </a:spcAft>
             </a:pPr>
             <a:r>
-              <a:rPr sz="1900" b="0" i="0">
-                <a:solidFill>
-                  <a:srgbClr val="333333"/>
-                </a:solidFill>
-                <a:latin typeface="Calibri"/>
-              </a:rPr>
-              <a:t>–   Los </a:t>
-            </a:r>
-            <a:r>
-              <a:rPr sz="1900" b="1" i="0">
-                <a:solidFill>
-                  <a:srgbClr val="333333"/>
-                </a:solidFill>
-                <a:latin typeface="Calibri"/>
-              </a:rPr>
-              <a:t>datos sensibles</a:t>
-            </a:r>
-            <a:r>
-              <a:rPr sz="1900" b="0" i="0">
-                <a:solidFill>
-                  <a:srgbClr val="333333"/>
-                </a:solidFill>
-                <a:latin typeface="Calibri"/>
-              </a:rPr>
-              <a:t> —salud, biometría, orientación política, sexual o religiosa, datos de niños— tienen protección reforzada.</a:t>
-            </a:r>
-          </a:p>
-          <a:p>
-            <a:pPr>
-              <a:spcAft>
-                <a:spcPts val="800"/>
-              </a:spcAft>
-            </a:pPr>
-            <a:r>
-              <a:rPr sz="1900" b="0" i="0">
-                <a:solidFill>
-                  <a:srgbClr val="333333"/>
-                </a:solidFill>
-                <a:latin typeface="Calibri"/>
-              </a:rPr>
-              <a:t>–   La autoridad es la Superintendencia de Industria y Comercio.</a:t>
-            </a:r>
-          </a:p>
-          <a:p>
-            <a:pPr>
-              <a:spcAft>
-                <a:spcPts val="800"/>
-              </a:spcAft>
-            </a:pPr>
-            <a:r>
-              <a:rPr sz="1900" b="0" i="0">
-                <a:solidFill>
-                  <a:srgbClr val="333333"/>
-                </a:solidFill>
-                <a:latin typeface="Calibri"/>
-              </a:rPr>
-              <a:t>–   Aterrícelo en el curso: si un equipo quiere hacer un proyecto con una base de datos de pacientes de un consultorio del barrio, esta ley le aplica completa</a:t>
+              <a:rPr sz="2000" b="0" i="0">
+                <a:solidFill>
+                  <a:srgbClr val="333333"/>
+                </a:solidFill>
+                <a:latin typeface="Calibri"/>
+              </a:rPr>
+              <a:t>–   Y por eso el curso prohíbe subir nombres y cédulas. </a:t>
+            </a:r>
+            <a:r>
+              <a:rPr sz="2000" b="1" i="0">
+                <a:solidFill>
+                  <a:srgbClr val="333333"/>
+                </a:solidFill>
+                <a:latin typeface="Calibri"/>
+              </a:rPr>
+              <a:t>Ley 1273 de 2009</a:t>
+            </a:r>
+            <a:r>
+              <a:rPr sz="2000" b="0" i="0">
+                <a:solidFill>
+                  <a:srgbClr val="333333"/>
+                </a:solidFill>
+                <a:latin typeface="Calibri"/>
+              </a:rPr>
+              <a:t> agregó al Código Penal un título sobre la protección de la información y los datos: acceso abusivo a un sistema informático</a:t>
             </a:r>
           </a:p>
         </p:txBody>
@@ -5698,40 +5484,6 @@
                 </a:solidFill>
                 <a:latin typeface="Calibri"/>
               </a:rPr>
-              <a:t>–   Y por eso el curso prohíbe subir nombres y cédulas. </a:t>
-            </a:r>
-            <a:r>
-              <a:rPr sz="2000" b="1" i="0">
-                <a:solidFill>
-                  <a:srgbClr val="333333"/>
-                </a:solidFill>
-                <a:latin typeface="Calibri"/>
-              </a:rPr>
-              <a:t>Ley 1273 de 2009</a:t>
-            </a:r>
-            <a:r>
-              <a:rPr sz="2000" b="0" i="0">
-                <a:solidFill>
-                  <a:srgbClr val="333333"/>
-                </a:solidFill>
-                <a:latin typeface="Calibri"/>
-              </a:rPr>
-              <a:t> agregó al Código Penal un título sobre la protección de la información y los datos: acceso abusivo a un sistema informático</a:t>
-            </a:r>
-          </a:p>
-          <a:p>
-            <a:pPr>
-              <a:spcAft>
-                <a:spcPts val="800"/>
-              </a:spcAft>
-            </a:pPr>
-            <a:r>
-              <a:rPr sz="2000" b="0" i="0">
-                <a:solidFill>
-                  <a:srgbClr val="333333"/>
-                </a:solidFill>
-                <a:latin typeface="Calibri"/>
-              </a:rPr>
               <a:t>–   Obstaculización ilegítima, interceptación de datos, daño informático, hurto por medios informáticos.</a:t>
             </a:r>
           </a:p>
@@ -6036,22 +5788,6 @@
                 </a:solidFill>
                 <a:latin typeface="Calibri"/>
               </a:rPr>
-              <a:t>–   Seis accidentes conocidos con sobredosis masivas de radiación y varios muertos.</a:t>
-            </a:r>
-          </a:p>
-          <a:p>
-            <a:pPr>
-              <a:spcAft>
-                <a:spcPts val="800"/>
-              </a:spcAft>
-            </a:pPr>
-            <a:r>
-              <a:rPr sz="2000" b="0" i="0">
-                <a:solidFill>
-                  <a:srgbClr val="333333"/>
-                </a:solidFill>
-                <a:latin typeface="Calibri"/>
-              </a:rPr>
               <a:t>–   Las causas son de manual y hay que contarlas completas porque son técnicas: los modelos anteriores tenían </a:t>
             </a:r>
             <a:r>
@@ -6406,22 +6142,6 @@
                 </a:solidFill>
                 <a:latin typeface="Calibri"/>
               </a:rPr>
-              <a:t>–   En circulación real el vehículo emitía óxidos de nitrógeno muy por encima del límite.</a:t>
-            </a:r>
-          </a:p>
-          <a:p>
-            <a:pPr>
-              <a:spcAft>
-                <a:spcPts val="800"/>
-              </a:spcAft>
-            </a:pPr>
-            <a:r>
-              <a:rPr sz="2000" b="0" i="0">
-                <a:solidFill>
-                  <a:srgbClr val="333333"/>
-                </a:solidFill>
-                <a:latin typeface="Calibri"/>
-              </a:rPr>
               <a:t>–   Se descubrió en 2015 y el detalle que interesa aquí es judicial: el ingeniero James Liang se declaró culpable y fue condenado en 2017 a cuarenta meses de prisión y una multa</a:t>
             </a:r>
           </a:p>
@@ -6839,22 +6559,6 @@
                 </a:solidFill>
                 <a:latin typeface="Calibri"/>
               </a:rPr>
-              <a:t>–   Los datos de decenas de millones de personas terminaron en perfilamiento político.</a:t>
-            </a:r>
-          </a:p>
-          <a:p>
-            <a:pPr>
-              <a:spcAft>
-                <a:spcPts val="800"/>
-              </a:spcAft>
-            </a:pPr>
-            <a:r>
-              <a:rPr sz="2000" b="0" i="0">
-                <a:solidFill>
-                  <a:srgbClr val="333333"/>
-                </a:solidFill>
-                <a:latin typeface="Calibri"/>
-              </a:rPr>
               <a:t>–   La consecuencia fue una multa histórica a la plataforma. </a:t>
             </a:r>
             <a:r>
@@ -8032,38 +7736,6 @@
               <a:t>–   No hubo un error de programación que causara el desastre —salvo parcialmente en Therac-25, y ahí el error existía desde antes y estaba tapado por un seguro que alguien decidió quitar—.</a:t>
             </a:r>
           </a:p>
-          <a:p>
-            <a:pPr>
-              <a:spcAft>
-                <a:spcPts val="800"/>
-              </a:spcAft>
-            </a:pPr>
-            <a:r>
-              <a:rPr sz="2000" b="0" i="0">
-                <a:solidFill>
-                  <a:srgbClr val="333333"/>
-                </a:solidFill>
-                <a:latin typeface="Calibri"/>
-              </a:rPr>
-              <a:t>–   Lo que falló fue lo que se pidió construir y el hecho de que nadie con información suficiente lo detuvo.</a:t>
-            </a:r>
-          </a:p>
-          <a:p>
-            <a:pPr>
-              <a:spcAft>
-                <a:spcPts val="800"/>
-              </a:spcAft>
-            </a:pPr>
-            <a:r>
-              <a:rPr sz="2000" b="0" i="0">
-                <a:solidFill>
-                  <a:srgbClr val="333333"/>
-                </a:solidFill>
-                <a:latin typeface="Calibri"/>
-              </a:rPr>
-              <a:t>–   Esa frase es la tesis de la clase.</a:t>
-            </a:r>
-          </a:p>
         </p:txBody>
       </p:sp>
       <p:sp>
@@ -8350,38 +8022,6 @@
               <a:t>.</a:t>
             </a:r>
           </a:p>
-          <a:p>
-            <a:pPr>
-              <a:spcAft>
-                <a:spcPts val="800"/>
-              </a:spcAft>
-            </a:pPr>
-            <a:r>
-              <a:rPr sz="2000" b="0" i="0">
-                <a:solidFill>
-                  <a:srgbClr val="333333"/>
-                </a:solidFill>
-                <a:latin typeface="Calibri"/>
-              </a:rPr>
-              <a:t>–   Un correo corto que diga «esto que se me pide tiene este riesgo para estas personas</a:t>
-            </a:r>
-          </a:p>
-          <a:p>
-            <a:pPr>
-              <a:spcAft>
-                <a:spcPts val="800"/>
-              </a:spcAft>
-            </a:pPr>
-            <a:r>
-              <a:rPr sz="2000" b="0" i="0">
-                <a:solidFill>
-                  <a:srgbClr val="333333"/>
-                </a:solidFill>
-                <a:latin typeface="Calibri"/>
-              </a:rPr>
-              <a:t>–   Lo dejo por escrito y propongo esta alternativa» hace tres cosas: aumenta la probabilidad de que se corrija, obliga a quien decide a decidir de verdad, y protege a quien lo escribió.</a:t>
-            </a:r>
-          </a:p>
         </p:txBody>
       </p:sp>
       <p:sp>
@@ -8599,7 +8239,7 @@
                 </a:solidFill>
                 <a:latin typeface="Calibri"/>
               </a:rPr>
-              <a:t>–   La única postura que no tiene defensa posible es callar.</a:t>
+              <a:t>–   Un correo corto que diga «esto que se me pide tiene este riesgo para estas personas</a:t>
             </a:r>
           </a:p>
           <a:p>
@@ -8615,7 +8255,7 @@
                 </a:solidFill>
                 <a:latin typeface="Calibri"/>
               </a:rPr>
-              <a:t>–   Las cinco preguntas son el método del taller.</a:t>
+              <a:t>–   Lo dejo por escrito y propongo esta alternativa» hace tres cosas: aumenta la probabilidad de que se corrija, obliga a quien decide a decidir de verdad, y protege a quien lo escribió.</a:t>
             </a:r>
           </a:p>
           <a:p>
@@ -8631,7 +8271,7 @@
                 </a:solidFill>
                 <a:latin typeface="Calibri"/>
               </a:rPr>
-              <a:t>–   La más potente es la tercera —«¿aguanta que se sepa?»— porque no requiere saber nada de códigos ni de leyes y descarta la mayoría de las malas ideas en diez segundos: si la decisión depende de que los afectados no se enteren, ya está juzgada.</a:t>
+              <a:t>–   La única postura que no tiene defensa posible es callar.</a:t>
             </a:r>
           </a:p>
           <a:p>
@@ -8647,7 +8287,7 @@
                 </a:solidFill>
                 <a:latin typeface="Calibri"/>
               </a:rPr>
-              <a:t>–   La cuarta —buscar el numeral— es la que convierte una intuición en un argumento profesional, y es la que más pesa en la rúbrica.</a:t>
+              <a:t>–   Las cinco preguntas son el método del taller.</a:t>
             </a:r>
           </a:p>
           <a:p>
@@ -8663,7 +8303,7 @@
                 </a:solidFill>
                 <a:latin typeface="Calibri"/>
               </a:rPr>
-              <a:t>–   Y la quinta —¿cuándo se pudo parar?— es la que le da a la clase valor de ingeniería y no de conferencia: en los cuatro casos hubo un momento temprano, identificable y barato, en el que una persona con la información suficiente podía cambiar el resultado.</a:t>
+              <a:t>–   La más potente es la tercera —«¿aguanta que se sepa?»— porque no requiere saber nada de códigos ni de leyes y descarta la mayoría de las malas ideas en diez segundos: si la decisión depende de que los afectados no se enteren, ya está juzgada.</a:t>
             </a:r>
           </a:p>
         </p:txBody>

--- a/Introduccion a la Ingenieria/Clases/Clase 4 - Principios eticos en la Ingenieria/Presentacion.pptx
+++ b/Introduccion a la Ingenieria/Clases/Clase 4 - Principios eticos en la Ingenieria/Presentacion.pptx
@@ -31,6 +31,8 @@
     <p:sldId id="279" r:id="rId30"/>
     <p:sldId id="280" r:id="rId31"/>
     <p:sldId id="281" r:id="rId32"/>
+    <p:sldId id="282" r:id="rId33"/>
+    <p:sldId id="283" r:id="rId34"/>
   </p:sldIdLst>
   <p:sldSz cx="12191695" cy="6858000" type="screen4x3"/>
   <p:notesSz cx="6858000" cy="9144000"/>
@@ -8378,7 +8380,7 @@
         <p:spPr>
           <a:xfrm>
             <a:off x="0" y="0"/>
-            <a:ext cx="12191695" cy="1170432"/>
+            <a:ext cx="12191695" cy="960120"/>
           </a:xfrm>
           <a:prstGeom prst="rect">
             <a:avLst/>
@@ -8420,7 +8422,7 @@
         </p:nvSpPr>
         <p:spPr>
           <a:xfrm>
-            <a:off x="0" y="1170432"/>
+            <a:off x="0" y="960120"/>
             <a:ext cx="12191695" cy="41148"/>
           </a:xfrm>
           <a:prstGeom prst="rect">
@@ -8464,7 +8466,7 @@
         <p:spPr>
           <a:xfrm>
             <a:off x="457200" y="164592"/>
-            <a:ext cx="11277295" cy="384048"/>
+            <a:ext cx="11277295" cy="502920"/>
           </a:xfrm>
           <a:prstGeom prst="rect">
             <a:avLst/>
@@ -8484,55 +8486,21 @@
                 </a:solidFill>
                 <a:latin typeface="Calibri"/>
               </a:rPr>
-              <a:t>Taller de hoy: Comité de ética</a:t>
-            </a:r>
-          </a:p>
-        </p:txBody>
-      </p:sp>
-      <p:sp>
-        <p:nvSpPr>
-          <p:cNvPr id="5" name="TextBox 4"/>
-          <p:cNvSpPr txBox="1"/>
-          <p:nvPr/>
-        </p:nvSpPr>
-        <p:spPr>
-          <a:xfrm>
-            <a:off x="457200" y="566928"/>
-            <a:ext cx="11277295" cy="411480"/>
-          </a:xfrm>
-          <a:prstGeom prst="rect">
-            <a:avLst/>
-          </a:prstGeom>
-          <a:noFill/>
-        </p:spPr>
-        <p:txBody>
-          <a:bodyPr wrap="square">
-            <a:spAutoFit/>
-          </a:bodyPr>
-          <a:lstStyle/>
-          <a:p>
-            <a:r>
-              <a:rPr sz="1400" b="0" i="0">
-                <a:solidFill>
-                  <a:srgbClr val="B8D8EE"/>
-                </a:solidFill>
-                <a:latin typeface="Calibri"/>
-              </a:rPr>
-              <a:t>17 min en equipos · un caso por equipo, del 1 al 5 · acta del comité con el numeral citado</a:t>
-            </a:r>
-          </a:p>
-        </p:txBody>
-      </p:sp>
-      <p:sp>
-        <p:nvSpPr>
-          <p:cNvPr id="6" name="Rounded Rectangle 5"/>
+              <a:t>Plantilla del entregable: los 5 bloques</a:t>
+            </a:r>
+          </a:p>
+        </p:txBody>
+      </p:sp>
+      <p:sp>
+        <p:nvSpPr>
+          <p:cNvPr id="5" name="Rounded Rectangle 4"/>
           <p:cNvSpPr/>
           <p:nvPr/>
         </p:nvSpPr>
         <p:spPr>
           <a:xfrm>
-            <a:off x="457200" y="1472184"/>
-            <a:ext cx="11277295" cy="566928"/>
+            <a:off x="457200" y="1261872"/>
+            <a:ext cx="11277295" cy="5093208"/>
           </a:xfrm>
           <a:prstGeom prst="roundRect">
             <a:avLst>
@@ -8540,7 +8508,7 @@
             </a:avLst>
           </a:prstGeom>
           <a:solidFill>
-            <a:srgbClr val="F2F2F2"/>
+            <a:srgbClr val="1E2A38"/>
           </a:solidFill>
           <a:ln>
             <a:noFill/>
@@ -8570,25 +8538,23 @@
       </p:sp>
       <p:sp>
         <p:nvSpPr>
-          <p:cNvPr id="7" name="Rectangle 6"/>
+          <p:cNvPr id="6" name="Rectangle 5"/>
           <p:cNvSpPr/>
           <p:nvPr/>
         </p:nvSpPr>
         <p:spPr>
           <a:xfrm>
-            <a:off x="640080" y="1618487"/>
-            <a:ext cx="274320" cy="274320"/>
+            <a:off x="457200" y="1261872"/>
+            <a:ext cx="11277295" cy="320040"/>
           </a:xfrm>
           <a:prstGeom prst="rect">
             <a:avLst/>
           </a:prstGeom>
           <a:solidFill>
-            <a:srgbClr val="FFFFFF"/>
+            <a:srgbClr val="095292"/>
           </a:solidFill>
           <a:ln>
-            <a:solidFill>
-              <a:srgbClr val="333333"/>
-            </a:solidFill>
+            <a:noFill/>
           </a:ln>
         </p:spPr>
         <p:style>
@@ -8615,841 +8581,222 @@
       </p:sp>
       <p:sp>
         <p:nvSpPr>
-          <p:cNvPr id="8" name="Rectangle 7"/>
-          <p:cNvSpPr/>
-          <p:nvPr/>
-        </p:nvSpPr>
-        <p:spPr>
-          <a:xfrm>
-            <a:off x="640080" y="1618487"/>
-            <a:ext cx="73152" cy="274320"/>
-          </a:xfrm>
-          <a:prstGeom prst="rect">
-            <a:avLst/>
-          </a:prstGeom>
-          <a:solidFill>
-            <a:srgbClr val="269CCB"/>
-          </a:solidFill>
-          <a:ln>
-            <a:noFill/>
-          </a:ln>
-        </p:spPr>
-        <p:style>
-          <a:lnRef idx="1">
-            <a:schemeClr val="accent1"/>
-          </a:lnRef>
-          <a:fillRef idx="3">
-            <a:schemeClr val="accent1"/>
-          </a:fillRef>
-          <a:effectRef idx="2">
-            <a:schemeClr val="accent1"/>
-          </a:effectRef>
-          <a:fontRef idx="minor">
-            <a:schemeClr val="lt1"/>
-          </a:fontRef>
-        </p:style>
-        <p:txBody>
-          <a:bodyPr rtlCol="0" anchor="ctr"/>
-          <a:lstStyle/>
-          <a:p>
-            <a:pPr algn="ctr"/>
+          <p:cNvPr id="7" name="TextBox 6"/>
+          <p:cNvSpPr txBox="1"/>
+          <p:nvPr/>
+        </p:nvSpPr>
+        <p:spPr>
+          <a:xfrm>
+            <a:off x="685800" y="1307592"/>
+            <a:ext cx="10820095" cy="256032"/>
+          </a:xfrm>
+          <a:prstGeom prst="rect">
+            <a:avLst/>
+          </a:prstGeom>
+          <a:noFill/>
+        </p:spPr>
+        <p:txBody>
+          <a:bodyPr wrap="square" anchor="ctr"/>
+          <a:lstStyle/>
+          <a:p>
+            <a:r>
+              <a:rPr sz="1000" b="1" i="0">
+                <a:solidFill>
+                  <a:srgbClr val="269CCB"/>
+                </a:solidFill>
+                <a:latin typeface="Calibri"/>
+              </a:rPr>
+              <a:t>● ● ●</a:t>
+            </a:r>
+          </a:p>
+        </p:txBody>
+      </p:sp>
+      <p:sp>
+        <p:nvSpPr>
+          <p:cNvPr id="8" name="TextBox 7"/>
+          <p:cNvSpPr txBox="1"/>
+          <p:nvPr/>
+        </p:nvSpPr>
+        <p:spPr>
+          <a:xfrm>
+            <a:off x="777240" y="1719072"/>
+            <a:ext cx="10637215" cy="4453128"/>
+          </a:xfrm>
+          <a:prstGeom prst="rect">
+            <a:avLst/>
+          </a:prstGeom>
+          <a:noFill/>
+        </p:spPr>
+        <p:txBody>
+          <a:bodyPr wrap="square">
+            <a:spAutoFit/>
+          </a:bodyPr>
+          <a:lstStyle/>
+          <a:p>
+            <a:pPr>
+              <a:spcAft>
+                <a:spcPts val="400"/>
+              </a:spcAft>
+            </a:pPr>
+            <a:r>
+              <a:rPr sz="1400" b="0" i="0">
+                <a:solidFill>
+                  <a:srgbClr val="FFFFFF"/>
+                </a:solidFill>
+                <a:latin typeface="Calibri"/>
+              </a:rPr>
+              <a:t># Comité de ética</a:t>
+            </a:r>
+          </a:p>
+          <a:p>
+            <a:pPr>
+              <a:spcAft>
+                <a:spcPts val="400"/>
+              </a:spcAft>
+            </a:pPr>
+            <a:r>
+              <a:rPr sz="1400" b="0" i="0">
+                <a:solidFill>
+                  <a:srgbClr val="FFFFFF"/>
+                </a:solidFill>
+                <a:latin typeface="Calibri"/>
+              </a:rPr>
+              <a:t># Documento del equipo · un bloque por titulo, sin cambiar los nombres</a:t>
+            </a:r>
+          </a:p>
+          <a:p>
+            <a:pPr>
+              <a:spcAft>
+                <a:spcPts val="400"/>
+              </a:spcAft>
+            </a:pPr>
+            <a:r>
+              <a:rPr sz="1400" b="0" i="0">
+                <a:solidFill>
+                  <a:srgbClr val="FFFFFF"/>
+                </a:solidFill>
+                <a:latin typeface="Calibri"/>
+              </a:rPr>
+              <a:t/>
+            </a:r>
+          </a:p>
+          <a:p>
+            <a:pPr>
+              <a:spcAft>
+                <a:spcPts val="400"/>
+              </a:spcAft>
+            </a:pPr>
+            <a:r>
+              <a:rPr sz="1400" b="0" i="0">
+                <a:solidFill>
+                  <a:srgbClr val="FFFFFF"/>
+                </a:solidFill>
+                <a:latin typeface="Calibri"/>
+              </a:rPr>
+              <a:t>## 1. LOS HECHOS, SIN ADJETIVOS</a:t>
+            </a:r>
+          </a:p>
+          <a:p>
+            <a:pPr>
+              <a:spcAft>
+                <a:spcPts val="400"/>
+              </a:spcAft>
+            </a:pPr>
+            <a:r>
+              <a:rPr sz="1400" b="0" i="0">
+                <a:solidFill>
+                  <a:srgbClr val="FFFFFF"/>
+                </a:solidFill>
+                <a:latin typeface="Calibri"/>
+              </a:rPr>
+              <a:t>## 2. QUIÉN DECIDIÓ QUÉ</a:t>
+            </a:r>
+          </a:p>
+          <a:p>
+            <a:pPr>
+              <a:spcAft>
+                <a:spcPts val="400"/>
+              </a:spcAft>
+            </a:pPr>
+            <a:r>
+              <a:rPr sz="1400" b="0" i="0">
+                <a:solidFill>
+                  <a:srgbClr val="FFFFFF"/>
+                </a:solidFill>
+                <a:latin typeface="Calibri"/>
+              </a:rPr>
+              <a:t>## 3. EL NUMERAL QUE SE VIOLÓ</a:t>
+            </a:r>
+          </a:p>
+          <a:p>
+            <a:pPr>
+              <a:spcAft>
+                <a:spcPts val="400"/>
+              </a:spcAft>
+            </a:pPr>
+            <a:r>
+              <a:rPr sz="1400" b="0" i="0">
+                <a:solidFill>
+                  <a:srgbClr val="FFFFFF"/>
+                </a:solidFill>
+                <a:latin typeface="Calibri"/>
+              </a:rPr>
+              <a:t>## 4. EL MOMENTO EN QUE SE PUDO PARAR</a:t>
+            </a:r>
+          </a:p>
+          <a:p>
+            <a:pPr>
+              <a:spcAft>
+                <a:spcPts val="400"/>
+              </a:spcAft>
+            </a:pPr>
+            <a:r>
+              <a:rPr sz="1400" b="0" i="0">
+                <a:solidFill>
+                  <a:srgbClr val="FFFFFF"/>
+                </a:solidFill>
+                <a:latin typeface="Calibri"/>
+              </a:rPr>
+              <a:t>## 5. LA REGLA QUE SE LLEVAN</a:t>
+            </a:r>
+          </a:p>
+          <a:p>
+            <a:pPr>
+              <a:spcAft>
+                <a:spcPts val="400"/>
+              </a:spcAft>
+            </a:pPr>
+            <a:r>
+              <a:rPr sz="1400" b="0" i="0">
+                <a:solidFill>
+                  <a:srgbClr val="FFFFFF"/>
+                </a:solidFill>
+                <a:latin typeface="Calibri"/>
+              </a:rPr>
+              <a:t/>
+            </a:r>
+          </a:p>
+          <a:p>
+            <a:pPr>
+              <a:spcAft>
+                <a:spcPts val="400"/>
+              </a:spcAft>
+            </a:pPr>
+            <a:r>
+              <a:rPr sz="1400" b="0" i="0">
+                <a:solidFill>
+                  <a:srgbClr val="FFFFFF"/>
+                </a:solidFill>
+                <a:latin typeface="Calibri"/>
+              </a:rPr>
+              <a:t># Los titulos van TAL CUAL: son con los que se califica.</a:t>
+            </a:r>
           </a:p>
         </p:txBody>
       </p:sp>
       <p:sp>
         <p:nvSpPr>
           <p:cNvPr id="9" name="TextBox 8"/>
-          <p:cNvSpPr txBox="1"/>
-          <p:nvPr/>
-        </p:nvSpPr>
-        <p:spPr>
-          <a:xfrm>
-            <a:off x="1097280" y="1563624"/>
-            <a:ext cx="10362895" cy="402336"/>
-          </a:xfrm>
-          <a:prstGeom prst="rect">
-            <a:avLst/>
-          </a:prstGeom>
-          <a:noFill/>
-        </p:spPr>
-        <p:txBody>
-          <a:bodyPr wrap="square" anchor="ctr"/>
-          <a:lstStyle/>
-          <a:p>
-            <a:r>
-              <a:rPr sz="1500" b="1" i="0">
-                <a:solidFill>
-                  <a:srgbClr val="333333"/>
-                </a:solidFill>
-                <a:latin typeface="Calibri"/>
-              </a:rPr>
-              <a:t>LOS HECHOS, SIN ADJETIVOS</a:t>
-            </a:r>
-            <a:r>
-              <a:rPr sz="1500" b="0" i="0">
-                <a:solidFill>
-                  <a:srgbClr val="333333"/>
-                </a:solidFill>
-                <a:latin typeface="Calibri"/>
-              </a:rPr>
-              <a:t> — Qué pasó, en cinco líneas máximo: qué sistema era, qué hizo, a quién afectó y cómo se supo. Sin opinión todavía.</a:t>
-            </a:r>
-          </a:p>
-        </p:txBody>
-      </p:sp>
-      <p:sp>
-        <p:nvSpPr>
-          <p:cNvPr id="10" name="Rounded Rectangle 9"/>
-          <p:cNvSpPr/>
-          <p:nvPr/>
-        </p:nvSpPr>
-        <p:spPr>
-          <a:xfrm>
-            <a:off x="457200" y="2148839"/>
-            <a:ext cx="11277295" cy="566928"/>
-          </a:xfrm>
-          <a:prstGeom prst="roundRect">
-            <a:avLst>
-              <a:gd name="adj" fmla="val 12000"/>
-            </a:avLst>
-          </a:prstGeom>
-          <a:solidFill>
-            <a:srgbClr val="F2F2F2"/>
-          </a:solidFill>
-          <a:ln>
-            <a:noFill/>
-          </a:ln>
-        </p:spPr>
-        <p:style>
-          <a:lnRef idx="1">
-            <a:schemeClr val="accent1"/>
-          </a:lnRef>
-          <a:fillRef idx="3">
-            <a:schemeClr val="accent1"/>
-          </a:fillRef>
-          <a:effectRef idx="2">
-            <a:schemeClr val="accent1"/>
-          </a:effectRef>
-          <a:fontRef idx="minor">
-            <a:schemeClr val="lt1"/>
-          </a:fontRef>
-        </p:style>
-        <p:txBody>
-          <a:bodyPr rtlCol="0" anchor="ctr"/>
-          <a:lstStyle/>
-          <a:p>
-            <a:pPr algn="ctr"/>
-          </a:p>
-        </p:txBody>
-      </p:sp>
-      <p:sp>
-        <p:nvSpPr>
-          <p:cNvPr id="11" name="Rectangle 10"/>
-          <p:cNvSpPr/>
-          <p:nvPr/>
-        </p:nvSpPr>
-        <p:spPr>
-          <a:xfrm>
-            <a:off x="640080" y="2295144"/>
-            <a:ext cx="274320" cy="274320"/>
-          </a:xfrm>
-          <a:prstGeom prst="rect">
-            <a:avLst/>
-          </a:prstGeom>
-          <a:solidFill>
-            <a:srgbClr val="FFFFFF"/>
-          </a:solidFill>
-          <a:ln>
-            <a:solidFill>
-              <a:srgbClr val="333333"/>
-            </a:solidFill>
-          </a:ln>
-        </p:spPr>
-        <p:style>
-          <a:lnRef idx="1">
-            <a:schemeClr val="accent1"/>
-          </a:lnRef>
-          <a:fillRef idx="3">
-            <a:schemeClr val="accent1"/>
-          </a:fillRef>
-          <a:effectRef idx="2">
-            <a:schemeClr val="accent1"/>
-          </a:effectRef>
-          <a:fontRef idx="minor">
-            <a:schemeClr val="lt1"/>
-          </a:fontRef>
-        </p:style>
-        <p:txBody>
-          <a:bodyPr rtlCol="0" anchor="ctr"/>
-          <a:lstStyle/>
-          <a:p>
-            <a:pPr algn="ctr"/>
-          </a:p>
-        </p:txBody>
-      </p:sp>
-      <p:sp>
-        <p:nvSpPr>
-          <p:cNvPr id="12" name="Rectangle 11"/>
-          <p:cNvSpPr/>
-          <p:nvPr/>
-        </p:nvSpPr>
-        <p:spPr>
-          <a:xfrm>
-            <a:off x="640080" y="2295144"/>
-            <a:ext cx="73152" cy="274320"/>
-          </a:xfrm>
-          <a:prstGeom prst="rect">
-            <a:avLst/>
-          </a:prstGeom>
-          <a:solidFill>
-            <a:srgbClr val="269CCB"/>
-          </a:solidFill>
-          <a:ln>
-            <a:noFill/>
-          </a:ln>
-        </p:spPr>
-        <p:style>
-          <a:lnRef idx="1">
-            <a:schemeClr val="accent1"/>
-          </a:lnRef>
-          <a:fillRef idx="3">
-            <a:schemeClr val="accent1"/>
-          </a:fillRef>
-          <a:effectRef idx="2">
-            <a:schemeClr val="accent1"/>
-          </a:effectRef>
-          <a:fontRef idx="minor">
-            <a:schemeClr val="lt1"/>
-          </a:fontRef>
-        </p:style>
-        <p:txBody>
-          <a:bodyPr rtlCol="0" anchor="ctr"/>
-          <a:lstStyle/>
-          <a:p>
-            <a:pPr algn="ctr"/>
-          </a:p>
-        </p:txBody>
-      </p:sp>
-      <p:sp>
-        <p:nvSpPr>
-          <p:cNvPr id="13" name="TextBox 12"/>
-          <p:cNvSpPr txBox="1"/>
-          <p:nvPr/>
-        </p:nvSpPr>
-        <p:spPr>
-          <a:xfrm>
-            <a:off x="1097280" y="2240279"/>
-            <a:ext cx="10362895" cy="402336"/>
-          </a:xfrm>
-          <a:prstGeom prst="rect">
-            <a:avLst/>
-          </a:prstGeom>
-          <a:noFill/>
-        </p:spPr>
-        <p:txBody>
-          <a:bodyPr wrap="square" anchor="ctr"/>
-          <a:lstStyle/>
-          <a:p>
-            <a:r>
-              <a:rPr sz="1500" b="1" i="0">
-                <a:solidFill>
-                  <a:srgbClr val="333333"/>
-                </a:solidFill>
-                <a:latin typeface="Calibri"/>
-              </a:rPr>
-              <a:t>QUIÉN DECIDIÓ QUÉ</a:t>
-            </a:r>
-            <a:r>
-              <a:rPr sz="1500" b="0" i="0">
-                <a:solidFill>
-                  <a:srgbClr val="333333"/>
-                </a:solidFill>
-                <a:latin typeface="Calibri"/>
-              </a:rPr>
-              <a:t> — La decisión concreta que causó el daño y </a:t>
-            </a:r>
-            <a:r>
-              <a:rPr sz="1500" b="1" i="0">
-                <a:solidFill>
-                  <a:srgbClr val="333333"/>
-                </a:solidFill>
-                <a:latin typeface="Calibri"/>
-              </a:rPr>
-              <a:t>quién la tomó</a:t>
-            </a:r>
-            <a:r>
-              <a:rPr sz="1500" b="0" i="0">
-                <a:solidFill>
-                  <a:srgbClr val="333333"/>
-                </a:solidFill>
-                <a:latin typeface="Calibri"/>
-              </a:rPr>
-              <a:t> (el rol: el diseñador, el gerente de producto, el ingeniero que ejecutó). Si fueron varias personas en cadena, escriban la cadena.</a:t>
-            </a:r>
-          </a:p>
-        </p:txBody>
-      </p:sp>
-      <p:sp>
-        <p:nvSpPr>
-          <p:cNvPr id="14" name="Rounded Rectangle 13"/>
-          <p:cNvSpPr/>
-          <p:nvPr/>
-        </p:nvSpPr>
-        <p:spPr>
-          <a:xfrm>
-            <a:off x="457200" y="2825496"/>
-            <a:ext cx="11277295" cy="566928"/>
-          </a:xfrm>
-          <a:prstGeom prst="roundRect">
-            <a:avLst>
-              <a:gd name="adj" fmla="val 12000"/>
-            </a:avLst>
-          </a:prstGeom>
-          <a:solidFill>
-            <a:srgbClr val="F2F2F2"/>
-          </a:solidFill>
-          <a:ln>
-            <a:noFill/>
-          </a:ln>
-        </p:spPr>
-        <p:style>
-          <a:lnRef idx="1">
-            <a:schemeClr val="accent1"/>
-          </a:lnRef>
-          <a:fillRef idx="3">
-            <a:schemeClr val="accent1"/>
-          </a:fillRef>
-          <a:effectRef idx="2">
-            <a:schemeClr val="accent1"/>
-          </a:effectRef>
-          <a:fontRef idx="minor">
-            <a:schemeClr val="lt1"/>
-          </a:fontRef>
-        </p:style>
-        <p:txBody>
-          <a:bodyPr rtlCol="0" anchor="ctr"/>
-          <a:lstStyle/>
-          <a:p>
-            <a:pPr algn="ctr"/>
-          </a:p>
-        </p:txBody>
-      </p:sp>
-      <p:sp>
-        <p:nvSpPr>
-          <p:cNvPr id="15" name="Rectangle 14"/>
-          <p:cNvSpPr/>
-          <p:nvPr/>
-        </p:nvSpPr>
-        <p:spPr>
-          <a:xfrm>
-            <a:off x="640080" y="2971800"/>
-            <a:ext cx="274320" cy="274320"/>
-          </a:xfrm>
-          <a:prstGeom prst="rect">
-            <a:avLst/>
-          </a:prstGeom>
-          <a:solidFill>
-            <a:srgbClr val="FFFFFF"/>
-          </a:solidFill>
-          <a:ln>
-            <a:solidFill>
-              <a:srgbClr val="333333"/>
-            </a:solidFill>
-          </a:ln>
-        </p:spPr>
-        <p:style>
-          <a:lnRef idx="1">
-            <a:schemeClr val="accent1"/>
-          </a:lnRef>
-          <a:fillRef idx="3">
-            <a:schemeClr val="accent1"/>
-          </a:fillRef>
-          <a:effectRef idx="2">
-            <a:schemeClr val="accent1"/>
-          </a:effectRef>
-          <a:fontRef idx="minor">
-            <a:schemeClr val="lt1"/>
-          </a:fontRef>
-        </p:style>
-        <p:txBody>
-          <a:bodyPr rtlCol="0" anchor="ctr"/>
-          <a:lstStyle/>
-          <a:p>
-            <a:pPr algn="ctr"/>
-          </a:p>
-        </p:txBody>
-      </p:sp>
-      <p:sp>
-        <p:nvSpPr>
-          <p:cNvPr id="16" name="Rectangle 15"/>
-          <p:cNvSpPr/>
-          <p:nvPr/>
-        </p:nvSpPr>
-        <p:spPr>
-          <a:xfrm>
-            <a:off x="640080" y="2971800"/>
-            <a:ext cx="73152" cy="274320"/>
-          </a:xfrm>
-          <a:prstGeom prst="rect">
-            <a:avLst/>
-          </a:prstGeom>
-          <a:solidFill>
-            <a:srgbClr val="269CCB"/>
-          </a:solidFill>
-          <a:ln>
-            <a:noFill/>
-          </a:ln>
-        </p:spPr>
-        <p:style>
-          <a:lnRef idx="1">
-            <a:schemeClr val="accent1"/>
-          </a:lnRef>
-          <a:fillRef idx="3">
-            <a:schemeClr val="accent1"/>
-          </a:fillRef>
-          <a:effectRef idx="2">
-            <a:schemeClr val="accent1"/>
-          </a:effectRef>
-          <a:fontRef idx="minor">
-            <a:schemeClr val="lt1"/>
-          </a:fontRef>
-        </p:style>
-        <p:txBody>
-          <a:bodyPr rtlCol="0" anchor="ctr"/>
-          <a:lstStyle/>
-          <a:p>
-            <a:pPr algn="ctr"/>
-          </a:p>
-        </p:txBody>
-      </p:sp>
-      <p:sp>
-        <p:nvSpPr>
-          <p:cNvPr id="17" name="TextBox 16"/>
-          <p:cNvSpPr txBox="1"/>
-          <p:nvPr/>
-        </p:nvSpPr>
-        <p:spPr>
-          <a:xfrm>
-            <a:off x="1097280" y="2916936"/>
-            <a:ext cx="10362895" cy="402336"/>
-          </a:xfrm>
-          <a:prstGeom prst="rect">
-            <a:avLst/>
-          </a:prstGeom>
-          <a:noFill/>
-        </p:spPr>
-        <p:txBody>
-          <a:bodyPr wrap="square" anchor="ctr"/>
-          <a:lstStyle/>
-          <a:p>
-            <a:r>
-              <a:rPr sz="1500" b="1" i="0">
-                <a:solidFill>
-                  <a:srgbClr val="333333"/>
-                </a:solidFill>
-                <a:latin typeface="Calibri"/>
-              </a:rPr>
-              <a:t>EL NUMERAL QUE SE VIOLÓ</a:t>
-            </a:r>
-            <a:r>
-              <a:rPr sz="1500" b="0" i="0">
-                <a:solidFill>
-                  <a:srgbClr val="333333"/>
-                </a:solidFill>
-                <a:latin typeface="Calibri"/>
-              </a:rPr>
-              <a:t> — Cite </a:t>
-            </a:r>
-            <a:r>
-              <a:rPr sz="1500" b="1" i="0">
-                <a:solidFill>
-                  <a:srgbClr val="333333"/>
-                </a:solidFill>
-                <a:latin typeface="Calibri"/>
-              </a:rPr>
-              <a:t>literalmente</a:t>
-            </a:r>
-            <a:r>
-              <a:rPr sz="1500" b="0" i="0">
-                <a:solidFill>
-                  <a:srgbClr val="333333"/>
-                </a:solidFill>
-                <a:latin typeface="Calibri"/>
-              </a:rPr>
-              <a:t> al menos un principio del código ACM/IEEE o un artículo de la Ley 842 de 2003, la Ley 1581 de 2012 o la Ley 1273 de 2009, y explique en dos líneas por qué aplica a este caso.</a:t>
-            </a:r>
-          </a:p>
-        </p:txBody>
-      </p:sp>
-      <p:sp>
-        <p:nvSpPr>
-          <p:cNvPr id="18" name="Rounded Rectangle 17"/>
-          <p:cNvSpPr/>
-          <p:nvPr/>
-        </p:nvSpPr>
-        <p:spPr>
-          <a:xfrm>
-            <a:off x="457200" y="3502152"/>
-            <a:ext cx="11277295" cy="566928"/>
-          </a:xfrm>
-          <a:prstGeom prst="roundRect">
-            <a:avLst>
-              <a:gd name="adj" fmla="val 12000"/>
-            </a:avLst>
-          </a:prstGeom>
-          <a:solidFill>
-            <a:srgbClr val="F2F2F2"/>
-          </a:solidFill>
-          <a:ln>
-            <a:noFill/>
-          </a:ln>
-        </p:spPr>
-        <p:style>
-          <a:lnRef idx="1">
-            <a:schemeClr val="accent1"/>
-          </a:lnRef>
-          <a:fillRef idx="3">
-            <a:schemeClr val="accent1"/>
-          </a:fillRef>
-          <a:effectRef idx="2">
-            <a:schemeClr val="accent1"/>
-          </a:effectRef>
-          <a:fontRef idx="minor">
-            <a:schemeClr val="lt1"/>
-          </a:fontRef>
-        </p:style>
-        <p:txBody>
-          <a:bodyPr rtlCol="0" anchor="ctr"/>
-          <a:lstStyle/>
-          <a:p>
-            <a:pPr algn="ctr"/>
-          </a:p>
-        </p:txBody>
-      </p:sp>
-      <p:sp>
-        <p:nvSpPr>
-          <p:cNvPr id="19" name="Rectangle 18"/>
-          <p:cNvSpPr/>
-          <p:nvPr/>
-        </p:nvSpPr>
-        <p:spPr>
-          <a:xfrm>
-            <a:off x="640080" y="3648456"/>
-            <a:ext cx="274320" cy="274320"/>
-          </a:xfrm>
-          <a:prstGeom prst="rect">
-            <a:avLst/>
-          </a:prstGeom>
-          <a:solidFill>
-            <a:srgbClr val="FFFFFF"/>
-          </a:solidFill>
-          <a:ln>
-            <a:solidFill>
-              <a:srgbClr val="333333"/>
-            </a:solidFill>
-          </a:ln>
-        </p:spPr>
-        <p:style>
-          <a:lnRef idx="1">
-            <a:schemeClr val="accent1"/>
-          </a:lnRef>
-          <a:fillRef idx="3">
-            <a:schemeClr val="accent1"/>
-          </a:fillRef>
-          <a:effectRef idx="2">
-            <a:schemeClr val="accent1"/>
-          </a:effectRef>
-          <a:fontRef idx="minor">
-            <a:schemeClr val="lt1"/>
-          </a:fontRef>
-        </p:style>
-        <p:txBody>
-          <a:bodyPr rtlCol="0" anchor="ctr"/>
-          <a:lstStyle/>
-          <a:p>
-            <a:pPr algn="ctr"/>
-          </a:p>
-        </p:txBody>
-      </p:sp>
-      <p:sp>
-        <p:nvSpPr>
-          <p:cNvPr id="20" name="Rectangle 19"/>
-          <p:cNvSpPr/>
-          <p:nvPr/>
-        </p:nvSpPr>
-        <p:spPr>
-          <a:xfrm>
-            <a:off x="640080" y="3648456"/>
-            <a:ext cx="73152" cy="274320"/>
-          </a:xfrm>
-          <a:prstGeom prst="rect">
-            <a:avLst/>
-          </a:prstGeom>
-          <a:solidFill>
-            <a:srgbClr val="269CCB"/>
-          </a:solidFill>
-          <a:ln>
-            <a:noFill/>
-          </a:ln>
-        </p:spPr>
-        <p:style>
-          <a:lnRef idx="1">
-            <a:schemeClr val="accent1"/>
-          </a:lnRef>
-          <a:fillRef idx="3">
-            <a:schemeClr val="accent1"/>
-          </a:fillRef>
-          <a:effectRef idx="2">
-            <a:schemeClr val="accent1"/>
-          </a:effectRef>
-          <a:fontRef idx="minor">
-            <a:schemeClr val="lt1"/>
-          </a:fontRef>
-        </p:style>
-        <p:txBody>
-          <a:bodyPr rtlCol="0" anchor="ctr"/>
-          <a:lstStyle/>
-          <a:p>
-            <a:pPr algn="ctr"/>
-          </a:p>
-        </p:txBody>
-      </p:sp>
-      <p:sp>
-        <p:nvSpPr>
-          <p:cNvPr id="21" name="TextBox 20"/>
-          <p:cNvSpPr txBox="1"/>
-          <p:nvPr/>
-        </p:nvSpPr>
-        <p:spPr>
-          <a:xfrm>
-            <a:off x="1097280" y="3593592"/>
-            <a:ext cx="10362895" cy="402336"/>
-          </a:xfrm>
-          <a:prstGeom prst="rect">
-            <a:avLst/>
-          </a:prstGeom>
-          <a:noFill/>
-        </p:spPr>
-        <p:txBody>
-          <a:bodyPr wrap="square" anchor="ctr"/>
-          <a:lstStyle/>
-          <a:p>
-            <a:r>
-              <a:rPr sz="1500" b="1" i="0">
-                <a:solidFill>
-                  <a:srgbClr val="333333"/>
-                </a:solidFill>
-                <a:latin typeface="Calibri"/>
-              </a:rPr>
-              <a:t>EL MOMENTO EN QUE SE PUDO PARAR</a:t>
-            </a:r>
-            <a:r>
-              <a:rPr sz="1500" b="0" i="0">
-                <a:solidFill>
-                  <a:srgbClr val="333333"/>
-                </a:solidFill>
-                <a:latin typeface="Calibri"/>
-              </a:rPr>
-              <a:t> — El momento </a:t>
-            </a:r>
-            <a:r>
-              <a:rPr sz="1500" b="1" i="0">
-                <a:solidFill>
-                  <a:srgbClr val="333333"/>
-                </a:solidFill>
-                <a:latin typeface="Calibri"/>
-              </a:rPr>
-              <a:t>más temprano</a:t>
-            </a:r>
-            <a:r>
-              <a:rPr sz="1500" b="0" i="0">
-                <a:solidFill>
-                  <a:srgbClr val="333333"/>
-                </a:solidFill>
-                <a:latin typeface="Calibri"/>
-              </a:rPr>
-              <a:t> en que alguien con la información disponible podía cambiar el resultado, y qué debía hacer exactamente ahí (a quién decirle qué, y por escrito o no).</a:t>
-            </a:r>
-          </a:p>
-        </p:txBody>
-      </p:sp>
-      <p:sp>
-        <p:nvSpPr>
-          <p:cNvPr id="22" name="Rounded Rectangle 21"/>
-          <p:cNvSpPr/>
-          <p:nvPr/>
-        </p:nvSpPr>
-        <p:spPr>
-          <a:xfrm>
-            <a:off x="457200" y="4178808"/>
-            <a:ext cx="11277295" cy="566928"/>
-          </a:xfrm>
-          <a:prstGeom prst="roundRect">
-            <a:avLst>
-              <a:gd name="adj" fmla="val 12000"/>
-            </a:avLst>
-          </a:prstGeom>
-          <a:solidFill>
-            <a:srgbClr val="F2F2F2"/>
-          </a:solidFill>
-          <a:ln>
-            <a:noFill/>
-          </a:ln>
-        </p:spPr>
-        <p:style>
-          <a:lnRef idx="1">
-            <a:schemeClr val="accent1"/>
-          </a:lnRef>
-          <a:fillRef idx="3">
-            <a:schemeClr val="accent1"/>
-          </a:fillRef>
-          <a:effectRef idx="2">
-            <a:schemeClr val="accent1"/>
-          </a:effectRef>
-          <a:fontRef idx="minor">
-            <a:schemeClr val="lt1"/>
-          </a:fontRef>
-        </p:style>
-        <p:txBody>
-          <a:bodyPr rtlCol="0" anchor="ctr"/>
-          <a:lstStyle/>
-          <a:p>
-            <a:pPr algn="ctr"/>
-          </a:p>
-        </p:txBody>
-      </p:sp>
-      <p:sp>
-        <p:nvSpPr>
-          <p:cNvPr id="23" name="Rectangle 22"/>
-          <p:cNvSpPr/>
-          <p:nvPr/>
-        </p:nvSpPr>
-        <p:spPr>
-          <a:xfrm>
-            <a:off x="640080" y="4325112"/>
-            <a:ext cx="274320" cy="274320"/>
-          </a:xfrm>
-          <a:prstGeom prst="rect">
-            <a:avLst/>
-          </a:prstGeom>
-          <a:solidFill>
-            <a:srgbClr val="FFFFFF"/>
-          </a:solidFill>
-          <a:ln>
-            <a:solidFill>
-              <a:srgbClr val="333333"/>
-            </a:solidFill>
-          </a:ln>
-        </p:spPr>
-        <p:style>
-          <a:lnRef idx="1">
-            <a:schemeClr val="accent1"/>
-          </a:lnRef>
-          <a:fillRef idx="3">
-            <a:schemeClr val="accent1"/>
-          </a:fillRef>
-          <a:effectRef idx="2">
-            <a:schemeClr val="accent1"/>
-          </a:effectRef>
-          <a:fontRef idx="minor">
-            <a:schemeClr val="lt1"/>
-          </a:fontRef>
-        </p:style>
-        <p:txBody>
-          <a:bodyPr rtlCol="0" anchor="ctr"/>
-          <a:lstStyle/>
-          <a:p>
-            <a:pPr algn="ctr"/>
-          </a:p>
-        </p:txBody>
-      </p:sp>
-      <p:sp>
-        <p:nvSpPr>
-          <p:cNvPr id="24" name="Rectangle 23"/>
-          <p:cNvSpPr/>
-          <p:nvPr/>
-        </p:nvSpPr>
-        <p:spPr>
-          <a:xfrm>
-            <a:off x="640080" y="4325112"/>
-            <a:ext cx="73152" cy="274320"/>
-          </a:xfrm>
-          <a:prstGeom prst="rect">
-            <a:avLst/>
-          </a:prstGeom>
-          <a:solidFill>
-            <a:srgbClr val="269CCB"/>
-          </a:solidFill>
-          <a:ln>
-            <a:noFill/>
-          </a:ln>
-        </p:spPr>
-        <p:style>
-          <a:lnRef idx="1">
-            <a:schemeClr val="accent1"/>
-          </a:lnRef>
-          <a:fillRef idx="3">
-            <a:schemeClr val="accent1"/>
-          </a:fillRef>
-          <a:effectRef idx="2">
-            <a:schemeClr val="accent1"/>
-          </a:effectRef>
-          <a:fontRef idx="minor">
-            <a:schemeClr val="lt1"/>
-          </a:fontRef>
-        </p:style>
-        <p:txBody>
-          <a:bodyPr rtlCol="0" anchor="ctr"/>
-          <a:lstStyle/>
-          <a:p>
-            <a:pPr algn="ctr"/>
-          </a:p>
-        </p:txBody>
-      </p:sp>
-      <p:sp>
-        <p:nvSpPr>
-          <p:cNvPr id="25" name="TextBox 24"/>
-          <p:cNvSpPr txBox="1"/>
-          <p:nvPr/>
-        </p:nvSpPr>
-        <p:spPr>
-          <a:xfrm>
-            <a:off x="1097280" y="4270248"/>
-            <a:ext cx="10362895" cy="402336"/>
-          </a:xfrm>
-          <a:prstGeom prst="rect">
-            <a:avLst/>
-          </a:prstGeom>
-          <a:noFill/>
-        </p:spPr>
-        <p:txBody>
-          <a:bodyPr wrap="square" anchor="ctr"/>
-          <a:lstStyle/>
-          <a:p>
-            <a:r>
-              <a:rPr sz="1500" b="1" i="0">
-                <a:solidFill>
-                  <a:srgbClr val="333333"/>
-                </a:solidFill>
-                <a:latin typeface="Calibri"/>
-              </a:rPr>
-              <a:t>LA REGLA QUE SE LLEVAN</a:t>
-            </a:r>
-            <a:r>
-              <a:rPr sz="1500" b="0" i="0">
-                <a:solidFill>
-                  <a:srgbClr val="333333"/>
-                </a:solidFill>
-                <a:latin typeface="Calibri"/>
-              </a:rPr>
-              <a:t> — Una regla en una frase, escrita para ustedes mismos, que evite repetir esto en el proyecto de este curso. Tiene que ser verificable.</a:t>
-            </a:r>
-          </a:p>
-        </p:txBody>
-      </p:sp>
-      <p:sp>
-        <p:nvSpPr>
-          <p:cNvPr id="26" name="TextBox 25"/>
           <p:cNvSpPr txBox="1"/>
           <p:nvPr/>
         </p:nvSpPr>
@@ -9517,7 +8864,7 @@
         <p:spPr>
           <a:xfrm>
             <a:off x="0" y="0"/>
-            <a:ext cx="12191695" cy="1170432"/>
+            <a:ext cx="12191695" cy="960120"/>
           </a:xfrm>
           <a:prstGeom prst="rect">
             <a:avLst/>
@@ -9559,7 +8906,7 @@
         </p:nvSpPr>
         <p:spPr>
           <a:xfrm>
-            <a:off x="0" y="1170432"/>
+            <a:off x="0" y="960120"/>
             <a:ext cx="12191695" cy="41148"/>
           </a:xfrm>
           <a:prstGeom prst="rect">
@@ -9603,7 +8950,7 @@
         <p:spPr>
           <a:xfrm>
             <a:off x="457200" y="164592"/>
-            <a:ext cx="11277295" cy="384048"/>
+            <a:ext cx="11277295" cy="502920"/>
           </a:xfrm>
           <a:prstGeom prst="rect">
             <a:avLst/>
@@ -9623,55 +8970,21 @@
                 </a:solidFill>
                 <a:latin typeface="Calibri"/>
               </a:rPr>
-              <a:t>Cómo se expone en 3 minutos</a:t>
-            </a:r>
-          </a:p>
-        </p:txBody>
-      </p:sp>
-      <p:sp>
-        <p:nvSpPr>
-          <p:cNvPr id="5" name="TextBox 4"/>
-          <p:cNvSpPr txBox="1"/>
-          <p:nvPr/>
-        </p:nvSpPr>
-        <p:spPr>
-          <a:xfrm>
-            <a:off x="457200" y="566928"/>
-            <a:ext cx="11277295" cy="411480"/>
-          </a:xfrm>
-          <a:prstGeom prst="rect">
-            <a:avLst/>
-          </a:prstGeom>
-          <a:noFill/>
-        </p:spPr>
-        <p:txBody>
-          <a:bodyPr wrap="square">
-            <a:spAutoFit/>
-          </a:bodyPr>
-          <a:lstStyle/>
-          <a:p>
-            <a:r>
-              <a:rPr sz="1400" b="0" i="0">
-                <a:solidFill>
-                  <a:srgbClr val="B8D8EE"/>
-                </a:solidFill>
-                <a:latin typeface="Calibri"/>
-              </a:rPr>
-              <a:t>Habla el vocero con la pantalla ya compartida · cronómetro en pantalla · se corta al llegar a cero</a:t>
-            </a:r>
-          </a:p>
-        </p:txBody>
-      </p:sp>
-      <p:sp>
-        <p:nvSpPr>
-          <p:cNvPr id="6" name="Rounded Rectangle 5"/>
+              <a:t>Guion de la exposicion, con tiempos</a:t>
+            </a:r>
+          </a:p>
+        </p:txBody>
+      </p:sp>
+      <p:sp>
+        <p:nvSpPr>
+          <p:cNvPr id="5" name="Rounded Rectangle 4"/>
           <p:cNvSpPr/>
           <p:nvPr/>
         </p:nvSpPr>
         <p:spPr>
           <a:xfrm>
-            <a:off x="457200" y="1444752"/>
-            <a:ext cx="11277295" cy="908913"/>
+            <a:off x="457200" y="1261872"/>
+            <a:ext cx="11277295" cy="5093208"/>
           </a:xfrm>
           <a:prstGeom prst="roundRect">
             <a:avLst>
@@ -9679,7 +8992,7 @@
             </a:avLst>
           </a:prstGeom>
           <a:solidFill>
-            <a:srgbClr val="F2F2F2"/>
+            <a:srgbClr val="1E2A38"/>
           </a:solidFill>
           <a:ln>
             <a:noFill/>
@@ -9709,19 +9022,17 @@
       </p:sp>
       <p:sp>
         <p:nvSpPr>
-          <p:cNvPr id="7" name="Rounded Rectangle 6"/>
+          <p:cNvPr id="6" name="Rectangle 5"/>
           <p:cNvSpPr/>
           <p:nvPr/>
         </p:nvSpPr>
         <p:spPr>
           <a:xfrm>
-            <a:off x="594360" y="1679752"/>
-            <a:ext cx="438912" cy="438912"/>
-          </a:xfrm>
-          <a:prstGeom prst="roundRect">
-            <a:avLst>
-              <a:gd name="adj" fmla="val 12000"/>
-            </a:avLst>
+            <a:off x="457200" y="1261872"/>
+            <a:ext cx="11277295" cy="320040"/>
+          </a:xfrm>
+          <a:prstGeom prst="rect">
+            <a:avLst/>
           </a:prstGeom>
           <a:solidFill>
             <a:srgbClr val="095292"/>
@@ -9754,14 +9065,46 @@
       </p:sp>
       <p:sp>
         <p:nvSpPr>
+          <p:cNvPr id="7" name="TextBox 6"/>
+          <p:cNvSpPr txBox="1"/>
+          <p:nvPr/>
+        </p:nvSpPr>
+        <p:spPr>
+          <a:xfrm>
+            <a:off x="685800" y="1307592"/>
+            <a:ext cx="10820095" cy="256032"/>
+          </a:xfrm>
+          <a:prstGeom prst="rect">
+            <a:avLst/>
+          </a:prstGeom>
+          <a:noFill/>
+        </p:spPr>
+        <p:txBody>
+          <a:bodyPr wrap="square" anchor="ctr"/>
+          <a:lstStyle/>
+          <a:p>
+            <a:r>
+              <a:rPr sz="1000" b="1" i="0">
+                <a:solidFill>
+                  <a:srgbClr val="269CCB"/>
+                </a:solidFill>
+                <a:latin typeface="Calibri"/>
+              </a:rPr>
+              <a:t>● ● ●</a:t>
+            </a:r>
+          </a:p>
+        </p:txBody>
+      </p:sp>
+      <p:sp>
+        <p:nvSpPr>
           <p:cNvPr id="8" name="TextBox 7"/>
           <p:cNvSpPr txBox="1"/>
           <p:nvPr/>
         </p:nvSpPr>
         <p:spPr>
           <a:xfrm>
-            <a:off x="594360" y="1679752"/>
-            <a:ext cx="438912" cy="438912"/>
+            <a:off x="777240" y="1719072"/>
+            <a:ext cx="10637215" cy="4453128"/>
           </a:xfrm>
           <a:prstGeom prst="rect">
             <a:avLst/>
@@ -9769,18 +9112,168 @@
           <a:noFill/>
         </p:spPr>
         <p:txBody>
-          <a:bodyPr wrap="square" anchor="ctr"/>
-          <a:lstStyle/>
-          <a:p>
-            <a:pPr algn="ctr"/>
-            <a:r>
-              <a:rPr sz="1600" b="1" i="0">
+          <a:bodyPr wrap="square">
+            <a:spAutoFit/>
+          </a:bodyPr>
+          <a:lstStyle/>
+          <a:p>
+            <a:pPr>
+              <a:spcAft>
+                <a:spcPts val="400"/>
+              </a:spcAft>
+            </a:pPr>
+            <a:r>
+              <a:rPr sz="1400" b="0" i="0">
                 <a:solidFill>
                   <a:srgbClr val="FFFFFF"/>
                 </a:solidFill>
                 <a:latin typeface="Calibri"/>
               </a:rPr>
-              <a:t>1</a:t>
+              <a:t># Exposicion de hoy · lo que se califica es el reparto, no el total</a:t>
+            </a:r>
+          </a:p>
+          <a:p>
+            <a:pPr>
+              <a:spcAft>
+                <a:spcPts val="400"/>
+              </a:spcAft>
+            </a:pPr>
+            <a:r>
+              <a:rPr sz="1400" b="0" i="0">
+                <a:solidFill>
+                  <a:srgbClr val="FFFFFF"/>
+                </a:solidFill>
+                <a:latin typeface="Calibri"/>
+              </a:rPr>
+              <a:t/>
+            </a:r>
+          </a:p>
+          <a:p>
+            <a:pPr>
+              <a:spcAft>
+                <a:spcPts val="400"/>
+              </a:spcAft>
+            </a:pPr>
+            <a:r>
+              <a:rPr sz="1400" b="0" i="0">
+                <a:solidFill>
+                  <a:srgbClr val="FFFFFF"/>
+                </a:solidFill>
+                <a:latin typeface="Calibri"/>
+              </a:rPr>
+              <a:t>30 s · Los hechos                  Qué pasó, sin adjetivos. Cinco líneas dichas</a:t>
+            </a:r>
+          </a:p>
+          <a:p>
+            <a:pPr>
+              <a:spcAft>
+                <a:spcPts val="400"/>
+              </a:spcAft>
+            </a:pPr>
+            <a:r>
+              <a:rPr sz="1400" b="0" i="0">
+                <a:solidFill>
+                  <a:srgbClr val="FFFFFF"/>
+                </a:solidFill>
+                <a:latin typeface="Calibri"/>
+              </a:rPr>
+              <a:t>40 s · Quién decidió               La decisión y el rol de quien la tomó. No «l</a:t>
+            </a:r>
+          </a:p>
+          <a:p>
+            <a:pPr>
+              <a:spcAft>
+                <a:spcPts val="400"/>
+              </a:spcAft>
+            </a:pPr>
+            <a:r>
+              <a:rPr sz="1400" b="0" i="0">
+                <a:solidFill>
+                  <a:srgbClr val="FFFFFF"/>
+                </a:solidFill>
+                <a:latin typeface="Calibri"/>
+              </a:rPr>
+              <a:t>50 s · El numeral                  Lea el principio o el artículo y diga por qu</a:t>
+            </a:r>
+          </a:p>
+          <a:p>
+            <a:pPr>
+              <a:spcAft>
+                <a:spcPts val="400"/>
+              </a:spcAft>
+            </a:pPr>
+            <a:r>
+              <a:rPr sz="1400" b="0" i="0">
+                <a:solidFill>
+                  <a:srgbClr val="FFFFFF"/>
+                </a:solidFill>
+                <a:latin typeface="Calibri"/>
+              </a:rPr>
+              <a:t>50 s · El momento de parar         Cuándo y qué había que hacer. Es el minuto o</a:t>
+            </a:r>
+          </a:p>
+          <a:p>
+            <a:pPr>
+              <a:spcAft>
+                <a:spcPts val="400"/>
+              </a:spcAft>
+            </a:pPr>
+            <a:r>
+              <a:rPr sz="1400" b="0" i="0">
+                <a:solidFill>
+                  <a:srgbClr val="FFFFFF"/>
+                </a:solidFill>
+                <a:latin typeface="Calibri"/>
+              </a:rPr>
+              <a:t>10 s · La regla propia             Una frase, verificable, para su propio proye</a:t>
+            </a:r>
+          </a:p>
+          <a:p>
+            <a:pPr>
+              <a:spcAft>
+                <a:spcPts val="400"/>
+              </a:spcAft>
+            </a:pPr>
+            <a:r>
+              <a:rPr sz="1400" b="0" i="0">
+                <a:solidFill>
+                  <a:srgbClr val="FFFFFF"/>
+                </a:solidFill>
+                <a:latin typeface="Calibri"/>
+              </a:rPr>
+              <a:t/>
+            </a:r>
+          </a:p>
+          <a:p>
+            <a:pPr>
+              <a:spcAft>
+                <a:spcPts val="400"/>
+              </a:spcAft>
+            </a:pPr>
+            <a:r>
+              <a:rPr sz="1400" b="0" i="0">
+                <a:solidFill>
+                  <a:srgbClr val="FFFFFF"/>
+                </a:solidFill>
+                <a:latin typeface="Calibri"/>
+              </a:rPr>
+              <a:t># El tramo marcado como obligatorio es el que el jurado califica:</a:t>
+            </a:r>
+          </a:p>
+          <a:p>
+            <a:pPr>
+              <a:spcAft>
+                <a:spcPts val="400"/>
+              </a:spcAft>
+            </a:pPr>
+            <a:r>
+              <a:rPr sz="1400" b="0" i="0">
+                <a:solidFill>
+                  <a:srgbClr val="FFFFFF"/>
+                </a:solidFill>
+                <a:latin typeface="Calibri"/>
+              </a:rPr>
+              <a:t># si el guion no esta cronometrado, es el que se queda sin tiempo.</a:t>
             </a:r>
           </a:p>
         </p:txBody>
@@ -9788,738 +9281,6 @@
       <p:sp>
         <p:nvSpPr>
           <p:cNvPr id="9" name="TextBox 8"/>
-          <p:cNvSpPr txBox="1"/>
-          <p:nvPr/>
-        </p:nvSpPr>
-        <p:spPr>
-          <a:xfrm>
-            <a:off x="1188720" y="1536192"/>
-            <a:ext cx="10271455" cy="744321"/>
-          </a:xfrm>
-          <a:prstGeom prst="rect">
-            <a:avLst/>
-          </a:prstGeom>
-          <a:noFill/>
-        </p:spPr>
-        <p:txBody>
-          <a:bodyPr wrap="square" anchor="ctr"/>
-          <a:lstStyle/>
-          <a:p>
-            <a:r>
-              <a:rPr sz="1500" b="1" i="0">
-                <a:solidFill>
-                  <a:srgbClr val="095292"/>
-                </a:solidFill>
-                <a:latin typeface="Calibri"/>
-              </a:rPr>
-              <a:t>30 s · Los hechos</a:t>
-            </a:r>
-          </a:p>
-          <a:p>
-            <a:pPr>
-              <a:spcBef>
-                <a:spcPts val="200"/>
-              </a:spcBef>
-            </a:pPr>
-            <a:r>
-              <a:rPr sz="1300" b="0" i="0">
-                <a:solidFill>
-                  <a:srgbClr val="333333"/>
-                </a:solidFill>
-                <a:latin typeface="Calibri"/>
-              </a:rPr>
-              <a:t>Qué pasó, sin adjetivos. Cinco líneas dichas en medio minuto.</a:t>
-            </a:r>
-          </a:p>
-        </p:txBody>
-      </p:sp>
-      <p:sp>
-        <p:nvSpPr>
-          <p:cNvPr id="10" name="Rounded Rectangle 9"/>
-          <p:cNvSpPr/>
-          <p:nvPr/>
-        </p:nvSpPr>
-        <p:spPr>
-          <a:xfrm>
-            <a:off x="457200" y="2445105"/>
-            <a:ext cx="11277295" cy="908913"/>
-          </a:xfrm>
-          <a:prstGeom prst="roundRect">
-            <a:avLst>
-              <a:gd name="adj" fmla="val 12000"/>
-            </a:avLst>
-          </a:prstGeom>
-          <a:solidFill>
-            <a:srgbClr val="E8F4FA"/>
-          </a:solidFill>
-          <a:ln>
-            <a:noFill/>
-          </a:ln>
-        </p:spPr>
-        <p:style>
-          <a:lnRef idx="1">
-            <a:schemeClr val="accent1"/>
-          </a:lnRef>
-          <a:fillRef idx="3">
-            <a:schemeClr val="accent1"/>
-          </a:fillRef>
-          <a:effectRef idx="2">
-            <a:schemeClr val="accent1"/>
-          </a:effectRef>
-          <a:fontRef idx="minor">
-            <a:schemeClr val="lt1"/>
-          </a:fontRef>
-        </p:style>
-        <p:txBody>
-          <a:bodyPr rtlCol="0" anchor="ctr"/>
-          <a:lstStyle/>
-          <a:p>
-            <a:pPr algn="ctr"/>
-          </a:p>
-        </p:txBody>
-      </p:sp>
-      <p:sp>
-        <p:nvSpPr>
-          <p:cNvPr id="11" name="Rounded Rectangle 10"/>
-          <p:cNvSpPr/>
-          <p:nvPr/>
-        </p:nvSpPr>
-        <p:spPr>
-          <a:xfrm>
-            <a:off x="594360" y="2680106"/>
-            <a:ext cx="438912" cy="438912"/>
-          </a:xfrm>
-          <a:prstGeom prst="roundRect">
-            <a:avLst>
-              <a:gd name="adj" fmla="val 12000"/>
-            </a:avLst>
-          </a:prstGeom>
-          <a:solidFill>
-            <a:srgbClr val="095292"/>
-          </a:solidFill>
-          <a:ln>
-            <a:noFill/>
-          </a:ln>
-        </p:spPr>
-        <p:style>
-          <a:lnRef idx="1">
-            <a:schemeClr val="accent1"/>
-          </a:lnRef>
-          <a:fillRef idx="3">
-            <a:schemeClr val="accent1"/>
-          </a:fillRef>
-          <a:effectRef idx="2">
-            <a:schemeClr val="accent1"/>
-          </a:effectRef>
-          <a:fontRef idx="minor">
-            <a:schemeClr val="lt1"/>
-          </a:fontRef>
-        </p:style>
-        <p:txBody>
-          <a:bodyPr rtlCol="0" anchor="ctr"/>
-          <a:lstStyle/>
-          <a:p>
-            <a:pPr algn="ctr"/>
-          </a:p>
-        </p:txBody>
-      </p:sp>
-      <p:sp>
-        <p:nvSpPr>
-          <p:cNvPr id="12" name="TextBox 11"/>
-          <p:cNvSpPr txBox="1"/>
-          <p:nvPr/>
-        </p:nvSpPr>
-        <p:spPr>
-          <a:xfrm>
-            <a:off x="594360" y="2680106"/>
-            <a:ext cx="438912" cy="438912"/>
-          </a:xfrm>
-          <a:prstGeom prst="rect">
-            <a:avLst/>
-          </a:prstGeom>
-          <a:noFill/>
-        </p:spPr>
-        <p:txBody>
-          <a:bodyPr wrap="square" anchor="ctr"/>
-          <a:lstStyle/>
-          <a:p>
-            <a:pPr algn="ctr"/>
-            <a:r>
-              <a:rPr sz="1600" b="1" i="0">
-                <a:solidFill>
-                  <a:srgbClr val="FFFFFF"/>
-                </a:solidFill>
-                <a:latin typeface="Calibri"/>
-              </a:rPr>
-              <a:t>2</a:t>
-            </a:r>
-          </a:p>
-        </p:txBody>
-      </p:sp>
-      <p:sp>
-        <p:nvSpPr>
-          <p:cNvPr id="13" name="TextBox 12"/>
-          <p:cNvSpPr txBox="1"/>
-          <p:nvPr/>
-        </p:nvSpPr>
-        <p:spPr>
-          <a:xfrm>
-            <a:off x="1188720" y="2536545"/>
-            <a:ext cx="10271455" cy="744321"/>
-          </a:xfrm>
-          <a:prstGeom prst="rect">
-            <a:avLst/>
-          </a:prstGeom>
-          <a:noFill/>
-        </p:spPr>
-        <p:txBody>
-          <a:bodyPr wrap="square" anchor="ctr"/>
-          <a:lstStyle/>
-          <a:p>
-            <a:r>
-              <a:rPr sz="1500" b="1" i="0">
-                <a:solidFill>
-                  <a:srgbClr val="095292"/>
-                </a:solidFill>
-                <a:latin typeface="Calibri"/>
-              </a:rPr>
-              <a:t>40 s · Quién decidió</a:t>
-            </a:r>
-          </a:p>
-          <a:p>
-            <a:pPr>
-              <a:spcBef>
-                <a:spcPts val="200"/>
-              </a:spcBef>
-            </a:pPr>
-            <a:r>
-              <a:rPr sz="1300" b="0" i="0">
-                <a:solidFill>
-                  <a:srgbClr val="333333"/>
-                </a:solidFill>
-                <a:latin typeface="Calibri"/>
-              </a:rPr>
-              <a:t>La decisión y el rol de quien la tomó. No «la empresa».</a:t>
-            </a:r>
-          </a:p>
-        </p:txBody>
-      </p:sp>
-      <p:sp>
-        <p:nvSpPr>
-          <p:cNvPr id="14" name="Rounded Rectangle 13"/>
-          <p:cNvSpPr/>
-          <p:nvPr/>
-        </p:nvSpPr>
-        <p:spPr>
-          <a:xfrm>
-            <a:off x="457200" y="3445459"/>
-            <a:ext cx="11277295" cy="908913"/>
-          </a:xfrm>
-          <a:prstGeom prst="roundRect">
-            <a:avLst>
-              <a:gd name="adj" fmla="val 12000"/>
-            </a:avLst>
-          </a:prstGeom>
-          <a:solidFill>
-            <a:srgbClr val="F2F2F2"/>
-          </a:solidFill>
-          <a:ln>
-            <a:noFill/>
-          </a:ln>
-        </p:spPr>
-        <p:style>
-          <a:lnRef idx="1">
-            <a:schemeClr val="accent1"/>
-          </a:lnRef>
-          <a:fillRef idx="3">
-            <a:schemeClr val="accent1"/>
-          </a:fillRef>
-          <a:effectRef idx="2">
-            <a:schemeClr val="accent1"/>
-          </a:effectRef>
-          <a:fontRef idx="minor">
-            <a:schemeClr val="lt1"/>
-          </a:fontRef>
-        </p:style>
-        <p:txBody>
-          <a:bodyPr rtlCol="0" anchor="ctr"/>
-          <a:lstStyle/>
-          <a:p>
-            <a:pPr algn="ctr"/>
-          </a:p>
-        </p:txBody>
-      </p:sp>
-      <p:sp>
-        <p:nvSpPr>
-          <p:cNvPr id="15" name="Rounded Rectangle 14"/>
-          <p:cNvSpPr/>
-          <p:nvPr/>
-        </p:nvSpPr>
-        <p:spPr>
-          <a:xfrm>
-            <a:off x="594360" y="3680460"/>
-            <a:ext cx="438912" cy="438912"/>
-          </a:xfrm>
-          <a:prstGeom prst="roundRect">
-            <a:avLst>
-              <a:gd name="adj" fmla="val 12000"/>
-            </a:avLst>
-          </a:prstGeom>
-          <a:solidFill>
-            <a:srgbClr val="095292"/>
-          </a:solidFill>
-          <a:ln>
-            <a:noFill/>
-          </a:ln>
-        </p:spPr>
-        <p:style>
-          <a:lnRef idx="1">
-            <a:schemeClr val="accent1"/>
-          </a:lnRef>
-          <a:fillRef idx="3">
-            <a:schemeClr val="accent1"/>
-          </a:fillRef>
-          <a:effectRef idx="2">
-            <a:schemeClr val="accent1"/>
-          </a:effectRef>
-          <a:fontRef idx="minor">
-            <a:schemeClr val="lt1"/>
-          </a:fontRef>
-        </p:style>
-        <p:txBody>
-          <a:bodyPr rtlCol="0" anchor="ctr"/>
-          <a:lstStyle/>
-          <a:p>
-            <a:pPr algn="ctr"/>
-          </a:p>
-        </p:txBody>
-      </p:sp>
-      <p:sp>
-        <p:nvSpPr>
-          <p:cNvPr id="16" name="TextBox 15"/>
-          <p:cNvSpPr txBox="1"/>
-          <p:nvPr/>
-        </p:nvSpPr>
-        <p:spPr>
-          <a:xfrm>
-            <a:off x="594360" y="3680460"/>
-            <a:ext cx="438912" cy="438912"/>
-          </a:xfrm>
-          <a:prstGeom prst="rect">
-            <a:avLst/>
-          </a:prstGeom>
-          <a:noFill/>
-        </p:spPr>
-        <p:txBody>
-          <a:bodyPr wrap="square" anchor="ctr"/>
-          <a:lstStyle/>
-          <a:p>
-            <a:pPr algn="ctr"/>
-            <a:r>
-              <a:rPr sz="1600" b="1" i="0">
-                <a:solidFill>
-                  <a:srgbClr val="FFFFFF"/>
-                </a:solidFill>
-                <a:latin typeface="Calibri"/>
-              </a:rPr>
-              <a:t>3</a:t>
-            </a:r>
-          </a:p>
-        </p:txBody>
-      </p:sp>
-      <p:sp>
-        <p:nvSpPr>
-          <p:cNvPr id="17" name="TextBox 16"/>
-          <p:cNvSpPr txBox="1"/>
-          <p:nvPr/>
-        </p:nvSpPr>
-        <p:spPr>
-          <a:xfrm>
-            <a:off x="1188720" y="3536899"/>
-            <a:ext cx="10271455" cy="744321"/>
-          </a:xfrm>
-          <a:prstGeom prst="rect">
-            <a:avLst/>
-          </a:prstGeom>
-          <a:noFill/>
-        </p:spPr>
-        <p:txBody>
-          <a:bodyPr wrap="square" anchor="ctr"/>
-          <a:lstStyle/>
-          <a:p>
-            <a:r>
-              <a:rPr sz="1500" b="1" i="0">
-                <a:solidFill>
-                  <a:srgbClr val="095292"/>
-                </a:solidFill>
-                <a:latin typeface="Calibri"/>
-              </a:rPr>
-              <a:t>50 s · El numeral</a:t>
-            </a:r>
-          </a:p>
-          <a:p>
-            <a:pPr>
-              <a:spcBef>
-                <a:spcPts val="200"/>
-              </a:spcBef>
-            </a:pPr>
-            <a:r>
-              <a:rPr sz="1300" b="0" i="0">
-                <a:solidFill>
-                  <a:srgbClr val="333333"/>
-                </a:solidFill>
-                <a:latin typeface="Calibri"/>
-              </a:rPr>
-              <a:t>Lea el principio o el artículo y diga por qué aplica. Es lo que más pesa.</a:t>
-            </a:r>
-          </a:p>
-        </p:txBody>
-      </p:sp>
-      <p:sp>
-        <p:nvSpPr>
-          <p:cNvPr id="18" name="Rounded Rectangle 17"/>
-          <p:cNvSpPr/>
-          <p:nvPr/>
-        </p:nvSpPr>
-        <p:spPr>
-          <a:xfrm>
-            <a:off x="457200" y="4445812"/>
-            <a:ext cx="11277295" cy="908913"/>
-          </a:xfrm>
-          <a:prstGeom prst="roundRect">
-            <a:avLst>
-              <a:gd name="adj" fmla="val 12000"/>
-            </a:avLst>
-          </a:prstGeom>
-          <a:solidFill>
-            <a:srgbClr val="E8F4FA"/>
-          </a:solidFill>
-          <a:ln>
-            <a:noFill/>
-          </a:ln>
-        </p:spPr>
-        <p:style>
-          <a:lnRef idx="1">
-            <a:schemeClr val="accent1"/>
-          </a:lnRef>
-          <a:fillRef idx="3">
-            <a:schemeClr val="accent1"/>
-          </a:fillRef>
-          <a:effectRef idx="2">
-            <a:schemeClr val="accent1"/>
-          </a:effectRef>
-          <a:fontRef idx="minor">
-            <a:schemeClr val="lt1"/>
-          </a:fontRef>
-        </p:style>
-        <p:txBody>
-          <a:bodyPr rtlCol="0" anchor="ctr"/>
-          <a:lstStyle/>
-          <a:p>
-            <a:pPr algn="ctr"/>
-          </a:p>
-        </p:txBody>
-      </p:sp>
-      <p:sp>
-        <p:nvSpPr>
-          <p:cNvPr id="19" name="Rounded Rectangle 18"/>
-          <p:cNvSpPr/>
-          <p:nvPr/>
-        </p:nvSpPr>
-        <p:spPr>
-          <a:xfrm>
-            <a:off x="594360" y="4680813"/>
-            <a:ext cx="438912" cy="438912"/>
-          </a:xfrm>
-          <a:prstGeom prst="roundRect">
-            <a:avLst>
-              <a:gd name="adj" fmla="val 12000"/>
-            </a:avLst>
-          </a:prstGeom>
-          <a:solidFill>
-            <a:srgbClr val="095292"/>
-          </a:solidFill>
-          <a:ln>
-            <a:noFill/>
-          </a:ln>
-        </p:spPr>
-        <p:style>
-          <a:lnRef idx="1">
-            <a:schemeClr val="accent1"/>
-          </a:lnRef>
-          <a:fillRef idx="3">
-            <a:schemeClr val="accent1"/>
-          </a:fillRef>
-          <a:effectRef idx="2">
-            <a:schemeClr val="accent1"/>
-          </a:effectRef>
-          <a:fontRef idx="minor">
-            <a:schemeClr val="lt1"/>
-          </a:fontRef>
-        </p:style>
-        <p:txBody>
-          <a:bodyPr rtlCol="0" anchor="ctr"/>
-          <a:lstStyle/>
-          <a:p>
-            <a:pPr algn="ctr"/>
-          </a:p>
-        </p:txBody>
-      </p:sp>
-      <p:sp>
-        <p:nvSpPr>
-          <p:cNvPr id="20" name="TextBox 19"/>
-          <p:cNvSpPr txBox="1"/>
-          <p:nvPr/>
-        </p:nvSpPr>
-        <p:spPr>
-          <a:xfrm>
-            <a:off x="594360" y="4680813"/>
-            <a:ext cx="438912" cy="438912"/>
-          </a:xfrm>
-          <a:prstGeom prst="rect">
-            <a:avLst/>
-          </a:prstGeom>
-          <a:noFill/>
-        </p:spPr>
-        <p:txBody>
-          <a:bodyPr wrap="square" anchor="ctr"/>
-          <a:lstStyle/>
-          <a:p>
-            <a:pPr algn="ctr"/>
-            <a:r>
-              <a:rPr sz="1600" b="1" i="0">
-                <a:solidFill>
-                  <a:srgbClr val="FFFFFF"/>
-                </a:solidFill>
-                <a:latin typeface="Calibri"/>
-              </a:rPr>
-              <a:t>4</a:t>
-            </a:r>
-          </a:p>
-        </p:txBody>
-      </p:sp>
-      <p:sp>
-        <p:nvSpPr>
-          <p:cNvPr id="21" name="TextBox 20"/>
-          <p:cNvSpPr txBox="1"/>
-          <p:nvPr/>
-        </p:nvSpPr>
-        <p:spPr>
-          <a:xfrm>
-            <a:off x="1188720" y="4537252"/>
-            <a:ext cx="10271455" cy="744321"/>
-          </a:xfrm>
-          <a:prstGeom prst="rect">
-            <a:avLst/>
-          </a:prstGeom>
-          <a:noFill/>
-        </p:spPr>
-        <p:txBody>
-          <a:bodyPr wrap="square" anchor="ctr"/>
-          <a:lstStyle/>
-          <a:p>
-            <a:r>
-              <a:rPr sz="1500" b="1" i="0">
-                <a:solidFill>
-                  <a:srgbClr val="095292"/>
-                </a:solidFill>
-                <a:latin typeface="Calibri"/>
-              </a:rPr>
-              <a:t>50 s · El momento de parar</a:t>
-            </a:r>
-          </a:p>
-          <a:p>
-            <a:pPr>
-              <a:spcBef>
-                <a:spcPts val="200"/>
-              </a:spcBef>
-            </a:pPr>
-            <a:r>
-              <a:rPr sz="1300" b="0" i="0">
-                <a:solidFill>
-                  <a:srgbClr val="333333"/>
-                </a:solidFill>
-                <a:latin typeface="Calibri"/>
-              </a:rPr>
-              <a:t>Cuándo y qué había que hacer. Es el minuto obligatorio.</a:t>
-            </a:r>
-          </a:p>
-        </p:txBody>
-      </p:sp>
-      <p:sp>
-        <p:nvSpPr>
-          <p:cNvPr id="22" name="Rounded Rectangle 21"/>
-          <p:cNvSpPr/>
-          <p:nvPr/>
-        </p:nvSpPr>
-        <p:spPr>
-          <a:xfrm>
-            <a:off x="457200" y="5446166"/>
-            <a:ext cx="11277295" cy="908913"/>
-          </a:xfrm>
-          <a:prstGeom prst="roundRect">
-            <a:avLst>
-              <a:gd name="adj" fmla="val 12000"/>
-            </a:avLst>
-          </a:prstGeom>
-          <a:solidFill>
-            <a:srgbClr val="F2F2F2"/>
-          </a:solidFill>
-          <a:ln>
-            <a:noFill/>
-          </a:ln>
-        </p:spPr>
-        <p:style>
-          <a:lnRef idx="1">
-            <a:schemeClr val="accent1"/>
-          </a:lnRef>
-          <a:fillRef idx="3">
-            <a:schemeClr val="accent1"/>
-          </a:fillRef>
-          <a:effectRef idx="2">
-            <a:schemeClr val="accent1"/>
-          </a:effectRef>
-          <a:fontRef idx="minor">
-            <a:schemeClr val="lt1"/>
-          </a:fontRef>
-        </p:style>
-        <p:txBody>
-          <a:bodyPr rtlCol="0" anchor="ctr"/>
-          <a:lstStyle/>
-          <a:p>
-            <a:pPr algn="ctr"/>
-          </a:p>
-        </p:txBody>
-      </p:sp>
-      <p:sp>
-        <p:nvSpPr>
-          <p:cNvPr id="23" name="Rounded Rectangle 22"/>
-          <p:cNvSpPr/>
-          <p:nvPr/>
-        </p:nvSpPr>
-        <p:spPr>
-          <a:xfrm>
-            <a:off x="594360" y="5681167"/>
-            <a:ext cx="438912" cy="438912"/>
-          </a:xfrm>
-          <a:prstGeom prst="roundRect">
-            <a:avLst>
-              <a:gd name="adj" fmla="val 12000"/>
-            </a:avLst>
-          </a:prstGeom>
-          <a:solidFill>
-            <a:srgbClr val="095292"/>
-          </a:solidFill>
-          <a:ln>
-            <a:noFill/>
-          </a:ln>
-        </p:spPr>
-        <p:style>
-          <a:lnRef idx="1">
-            <a:schemeClr val="accent1"/>
-          </a:lnRef>
-          <a:fillRef idx="3">
-            <a:schemeClr val="accent1"/>
-          </a:fillRef>
-          <a:effectRef idx="2">
-            <a:schemeClr val="accent1"/>
-          </a:effectRef>
-          <a:fontRef idx="minor">
-            <a:schemeClr val="lt1"/>
-          </a:fontRef>
-        </p:style>
-        <p:txBody>
-          <a:bodyPr rtlCol="0" anchor="ctr"/>
-          <a:lstStyle/>
-          <a:p>
-            <a:pPr algn="ctr"/>
-          </a:p>
-        </p:txBody>
-      </p:sp>
-      <p:sp>
-        <p:nvSpPr>
-          <p:cNvPr id="24" name="TextBox 23"/>
-          <p:cNvSpPr txBox="1"/>
-          <p:nvPr/>
-        </p:nvSpPr>
-        <p:spPr>
-          <a:xfrm>
-            <a:off x="594360" y="5681167"/>
-            <a:ext cx="438912" cy="438912"/>
-          </a:xfrm>
-          <a:prstGeom prst="rect">
-            <a:avLst/>
-          </a:prstGeom>
-          <a:noFill/>
-        </p:spPr>
-        <p:txBody>
-          <a:bodyPr wrap="square" anchor="ctr"/>
-          <a:lstStyle/>
-          <a:p>
-            <a:pPr algn="ctr"/>
-            <a:r>
-              <a:rPr sz="1600" b="1" i="0">
-                <a:solidFill>
-                  <a:srgbClr val="FFFFFF"/>
-                </a:solidFill>
-                <a:latin typeface="Calibri"/>
-              </a:rPr>
-              <a:t>5</a:t>
-            </a:r>
-          </a:p>
-        </p:txBody>
-      </p:sp>
-      <p:sp>
-        <p:nvSpPr>
-          <p:cNvPr id="25" name="TextBox 24"/>
-          <p:cNvSpPr txBox="1"/>
-          <p:nvPr/>
-        </p:nvSpPr>
-        <p:spPr>
-          <a:xfrm>
-            <a:off x="1188720" y="5537606"/>
-            <a:ext cx="10271455" cy="744321"/>
-          </a:xfrm>
-          <a:prstGeom prst="rect">
-            <a:avLst/>
-          </a:prstGeom>
-          <a:noFill/>
-        </p:spPr>
-        <p:txBody>
-          <a:bodyPr wrap="square" anchor="ctr"/>
-          <a:lstStyle/>
-          <a:p>
-            <a:r>
-              <a:rPr sz="1500" b="1" i="0">
-                <a:solidFill>
-                  <a:srgbClr val="095292"/>
-                </a:solidFill>
-                <a:latin typeface="Calibri"/>
-              </a:rPr>
-              <a:t>10 s · La regla propia</a:t>
-            </a:r>
-          </a:p>
-          <a:p>
-            <a:pPr>
-              <a:spcBef>
-                <a:spcPts val="200"/>
-              </a:spcBef>
-            </a:pPr>
-            <a:r>
-              <a:rPr sz="1300" b="0" i="0">
-                <a:solidFill>
-                  <a:srgbClr val="333333"/>
-                </a:solidFill>
-                <a:latin typeface="Calibri"/>
-              </a:rPr>
-              <a:t>Una frase, verificable, para su propio proyecto.</a:t>
-            </a:r>
-          </a:p>
-        </p:txBody>
-      </p:sp>
-      <p:sp>
-        <p:nvSpPr>
-          <p:cNvPr id="26" name="TextBox 25"/>
           <p:cNvSpPr txBox="1"/>
           <p:nvPr/>
         </p:nvSpPr>
@@ -10587,7 +9348,7 @@
         <p:spPr>
           <a:xfrm>
             <a:off x="0" y="0"/>
-            <a:ext cx="12191695" cy="960120"/>
+            <a:ext cx="12191695" cy="1170432"/>
           </a:xfrm>
           <a:prstGeom prst="rect">
             <a:avLst/>
@@ -10629,7 +9390,7 @@
         </p:nvSpPr>
         <p:spPr>
           <a:xfrm>
-            <a:off x="0" y="960120"/>
+            <a:off x="0" y="1170432"/>
             <a:ext cx="12191695" cy="41148"/>
           </a:xfrm>
           <a:prstGeom prst="rect">
@@ -10673,7 +9434,7 @@
         <p:spPr>
           <a:xfrm>
             <a:off x="457200" y="164592"/>
-            <a:ext cx="11277295" cy="502920"/>
+            <a:ext cx="11277295" cy="384048"/>
           </a:xfrm>
           <a:prstGeom prst="rect">
             <a:avLst/>
@@ -10693,7 +9454,7 @@
                 </a:solidFill>
                 <a:latin typeface="Calibri"/>
               </a:rPr>
-              <a:t>Para la Clase 5</a:t>
+              <a:t>Taller de hoy: Comité de ética</a:t>
             </a:r>
           </a:p>
         </p:txBody>
@@ -10706,8 +9467,8 @@
         </p:nvSpPr>
         <p:spPr>
           <a:xfrm>
-            <a:off x="457200" y="1170432"/>
-            <a:ext cx="11277295" cy="5230368"/>
+            <a:off x="457200" y="566928"/>
+            <a:ext cx="11277295" cy="411480"/>
           </a:xfrm>
           <a:prstGeom prst="rect">
             <a:avLst/>
@@ -10720,198 +9481,945 @@
           </a:bodyPr>
           <a:lstStyle/>
           <a:p>
-            <a:pPr>
-              <a:spcAft>
-                <a:spcPts val="800"/>
-              </a:spcAft>
-            </a:pPr>
-            <a:r>
-              <a:rPr sz="2000" b="0" i="0">
-                <a:solidFill>
-                  <a:srgbClr val="333333"/>
-                </a:solidFill>
-                <a:latin typeface="Calibri"/>
-              </a:rPr>
-              <a:t>–   </a:t>
-            </a:r>
-            <a:r>
-              <a:rPr sz="2000" b="1" i="0">
-                <a:solidFill>
-                  <a:srgbClr val="333333"/>
-                </a:solidFill>
-                <a:latin typeface="Calibri"/>
-              </a:rPr>
-              <a:t>Trabajo dirigido:</a:t>
-            </a:r>
-            <a:r>
-              <a:rPr sz="2000" b="0" i="0">
-                <a:solidFill>
-                  <a:srgbClr val="333333"/>
-                </a:solidFill>
-                <a:latin typeface="Calibri"/>
-              </a:rPr>
-              <a:t> Lectura del código ético — el código ACM/IEEE completo, los ocho principios, y los deberes del ingeniero frente a la sociedad de la Ley 842 de 2003.</a:t>
-            </a:r>
-          </a:p>
-          <a:p>
-            <a:pPr>
-              <a:spcAft>
-                <a:spcPts val="800"/>
-              </a:spcAft>
-            </a:pPr>
-            <a:r>
-              <a:rPr sz="2000" b="0" i="0">
-                <a:solidFill>
-                  <a:srgbClr val="333333"/>
-                </a:solidFill>
-                <a:latin typeface="Calibri"/>
-              </a:rPr>
-              <a:t>–   </a:t>
-            </a:r>
-            <a:r>
-              <a:rPr sz="2000" b="1" i="0">
-                <a:solidFill>
-                  <a:srgbClr val="333333"/>
-                </a:solidFill>
-                <a:latin typeface="Calibri"/>
-              </a:rPr>
-              <a:t>Trabajo independiente:</a:t>
-            </a:r>
-            <a:r>
-              <a:rPr sz="2000" b="0" i="0">
-                <a:solidFill>
-                  <a:srgbClr val="333333"/>
-                </a:solidFill>
-                <a:latin typeface="Calibri"/>
-              </a:rPr>
-              <a:t> Análisis crítico del código ético: media página sobre </a:t>
-            </a:r>
-            <a:r>
-              <a:rPr sz="2000" b="1" i="0">
-                <a:solidFill>
-                  <a:srgbClr val="333333"/>
-                </a:solidFill>
-                <a:latin typeface="Calibri"/>
-              </a:rPr>
-              <a:t>un principio que su equipo cree difícil de cumplir en la práctica</a:t>
-            </a:r>
-            <a:r>
-              <a:rPr sz="2000" b="0" i="0">
-                <a:solidFill>
-                  <a:srgbClr val="333333"/>
-                </a:solidFill>
-                <a:latin typeface="Calibri"/>
-              </a:rPr>
-              <a:t>, con el motivo.</a:t>
-            </a:r>
-          </a:p>
-          <a:p>
-            <a:pPr>
-              <a:spcAft>
-                <a:spcPts val="800"/>
-              </a:spcAft>
-            </a:pPr>
-            <a:r>
-              <a:rPr sz="2000" b="0" i="0">
-                <a:solidFill>
-                  <a:srgbClr val="333333"/>
-                </a:solidFill>
-                <a:latin typeface="Calibri"/>
-              </a:rPr>
-              <a:t>–   </a:t>
-            </a:r>
-            <a:r>
-              <a:rPr sz="2000" b="1" i="0">
-                <a:solidFill>
-                  <a:srgbClr val="333333"/>
-                </a:solidFill>
-                <a:latin typeface="Calibri"/>
-              </a:rPr>
-              <a:t>Clase 5 · El rol del ingeniero en el contexto ambiental</a:t>
-            </a:r>
-            <a:r>
-              <a:rPr sz="2000" b="0" i="0">
-                <a:solidFill>
-                  <a:srgbClr val="333333"/>
-                </a:solidFill>
-                <a:latin typeface="Calibri"/>
-              </a:rPr>
-              <a:t> — el impacto ambiental del software, que es el daño que no tiene una víctima con nombre y que casi nadie mide.</a:t>
-            </a:r>
-          </a:p>
-          <a:p>
-            <a:pPr>
-              <a:spcAft>
-                <a:spcPts val="800"/>
-              </a:spcAft>
-            </a:pPr>
-            <a:r>
-              <a:rPr sz="2000" b="0" i="0">
-                <a:solidFill>
-                  <a:srgbClr val="333333"/>
-                </a:solidFill>
-                <a:latin typeface="Calibri"/>
-              </a:rPr>
-              <a:t>–   </a:t>
-            </a:r>
-            <a:r>
-              <a:rPr sz="2000" b="1" i="0">
-                <a:solidFill>
-                  <a:srgbClr val="333333"/>
-                </a:solidFill>
-                <a:latin typeface="Calibri"/>
-              </a:rPr>
-              <a:t>Aviso:</a:t>
-            </a:r>
-            <a:r>
-              <a:rPr sz="2000" b="0" i="0">
-                <a:solidFill>
-                  <a:srgbClr val="333333"/>
-                </a:solidFill>
-                <a:latin typeface="Calibri"/>
-              </a:rPr>
-              <a:t> Traigan leído el código de ética y la regla propia de hoy escrita en el documento del equipo. En la sesión 6 esa regla entra en la ficha del problema del proyecto.</a:t>
-            </a:r>
-          </a:p>
-          <a:p>
-            <a:pPr>
-              <a:spcAft>
-                <a:spcPts val="800"/>
-              </a:spcAft>
-            </a:pPr>
-            <a:r>
-              <a:rPr sz="2000" b="0" i="0">
-                <a:solidFill>
-                  <a:srgbClr val="333333"/>
-                </a:solidFill>
-                <a:latin typeface="Calibri"/>
-              </a:rPr>
-              <a:t>–   </a:t>
-            </a:r>
-            <a:r>
-              <a:rPr sz="2000" b="1" i="0">
-                <a:solidFill>
-                  <a:srgbClr val="333333"/>
-                </a:solidFill>
-                <a:latin typeface="Calibri"/>
-              </a:rPr>
-              <a:t>Antes de salir:</a:t>
-            </a:r>
-            <a:r>
-              <a:rPr sz="2000" b="0" i="0">
-                <a:solidFill>
-                  <a:srgbClr val="333333"/>
-                </a:solidFill>
-                <a:latin typeface="Calibri"/>
-              </a:rPr>
-              <a:t> el enlace del documento del equipo en el chat, con permiso de lectura para el docente, y el nombre del vocero de hoy.</a:t>
-            </a:r>
-          </a:p>
-        </p:txBody>
-      </p:sp>
-      <p:sp>
-        <p:nvSpPr>
-          <p:cNvPr id="6" name="TextBox 5"/>
+            <a:r>
+              <a:rPr sz="1400" b="0" i="0">
+                <a:solidFill>
+                  <a:srgbClr val="B8D8EE"/>
+                </a:solidFill>
+                <a:latin typeface="Calibri"/>
+              </a:rPr>
+              <a:t>17 min en equipos · un caso por equipo, del 1 al 5 · acta del comité con el numeral citado</a:t>
+            </a:r>
+          </a:p>
+        </p:txBody>
+      </p:sp>
+      <p:sp>
+        <p:nvSpPr>
+          <p:cNvPr id="6" name="Rounded Rectangle 5"/>
+          <p:cNvSpPr/>
+          <p:nvPr/>
+        </p:nvSpPr>
+        <p:spPr>
+          <a:xfrm>
+            <a:off x="457200" y="1472184"/>
+            <a:ext cx="11277295" cy="566928"/>
+          </a:xfrm>
+          <a:prstGeom prst="roundRect">
+            <a:avLst>
+              <a:gd name="adj" fmla="val 12000"/>
+            </a:avLst>
+          </a:prstGeom>
+          <a:solidFill>
+            <a:srgbClr val="F2F2F2"/>
+          </a:solidFill>
+          <a:ln>
+            <a:noFill/>
+          </a:ln>
+        </p:spPr>
+        <p:style>
+          <a:lnRef idx="1">
+            <a:schemeClr val="accent1"/>
+          </a:lnRef>
+          <a:fillRef idx="3">
+            <a:schemeClr val="accent1"/>
+          </a:fillRef>
+          <a:effectRef idx="2">
+            <a:schemeClr val="accent1"/>
+          </a:effectRef>
+          <a:fontRef idx="minor">
+            <a:schemeClr val="lt1"/>
+          </a:fontRef>
+        </p:style>
+        <p:txBody>
+          <a:bodyPr rtlCol="0" anchor="ctr"/>
+          <a:lstStyle/>
+          <a:p>
+            <a:pPr algn="ctr"/>
+          </a:p>
+        </p:txBody>
+      </p:sp>
+      <p:sp>
+        <p:nvSpPr>
+          <p:cNvPr id="7" name="Rectangle 6"/>
+          <p:cNvSpPr/>
+          <p:nvPr/>
+        </p:nvSpPr>
+        <p:spPr>
+          <a:xfrm>
+            <a:off x="640080" y="1618487"/>
+            <a:ext cx="274320" cy="274320"/>
+          </a:xfrm>
+          <a:prstGeom prst="rect">
+            <a:avLst/>
+          </a:prstGeom>
+          <a:solidFill>
+            <a:srgbClr val="FFFFFF"/>
+          </a:solidFill>
+          <a:ln>
+            <a:solidFill>
+              <a:srgbClr val="333333"/>
+            </a:solidFill>
+          </a:ln>
+        </p:spPr>
+        <p:style>
+          <a:lnRef idx="1">
+            <a:schemeClr val="accent1"/>
+          </a:lnRef>
+          <a:fillRef idx="3">
+            <a:schemeClr val="accent1"/>
+          </a:fillRef>
+          <a:effectRef idx="2">
+            <a:schemeClr val="accent1"/>
+          </a:effectRef>
+          <a:fontRef idx="minor">
+            <a:schemeClr val="lt1"/>
+          </a:fontRef>
+        </p:style>
+        <p:txBody>
+          <a:bodyPr rtlCol="0" anchor="ctr"/>
+          <a:lstStyle/>
+          <a:p>
+            <a:pPr algn="ctr"/>
+          </a:p>
+        </p:txBody>
+      </p:sp>
+      <p:sp>
+        <p:nvSpPr>
+          <p:cNvPr id="8" name="Rectangle 7"/>
+          <p:cNvSpPr/>
+          <p:nvPr/>
+        </p:nvSpPr>
+        <p:spPr>
+          <a:xfrm>
+            <a:off x="640080" y="1618487"/>
+            <a:ext cx="73152" cy="274320"/>
+          </a:xfrm>
+          <a:prstGeom prst="rect">
+            <a:avLst/>
+          </a:prstGeom>
+          <a:solidFill>
+            <a:srgbClr val="269CCB"/>
+          </a:solidFill>
+          <a:ln>
+            <a:noFill/>
+          </a:ln>
+        </p:spPr>
+        <p:style>
+          <a:lnRef idx="1">
+            <a:schemeClr val="accent1"/>
+          </a:lnRef>
+          <a:fillRef idx="3">
+            <a:schemeClr val="accent1"/>
+          </a:fillRef>
+          <a:effectRef idx="2">
+            <a:schemeClr val="accent1"/>
+          </a:effectRef>
+          <a:fontRef idx="minor">
+            <a:schemeClr val="lt1"/>
+          </a:fontRef>
+        </p:style>
+        <p:txBody>
+          <a:bodyPr rtlCol="0" anchor="ctr"/>
+          <a:lstStyle/>
+          <a:p>
+            <a:pPr algn="ctr"/>
+          </a:p>
+        </p:txBody>
+      </p:sp>
+      <p:sp>
+        <p:nvSpPr>
+          <p:cNvPr id="9" name="TextBox 8"/>
+          <p:cNvSpPr txBox="1"/>
+          <p:nvPr/>
+        </p:nvSpPr>
+        <p:spPr>
+          <a:xfrm>
+            <a:off x="1097280" y="1563624"/>
+            <a:ext cx="10362895" cy="402336"/>
+          </a:xfrm>
+          <a:prstGeom prst="rect">
+            <a:avLst/>
+          </a:prstGeom>
+          <a:noFill/>
+        </p:spPr>
+        <p:txBody>
+          <a:bodyPr wrap="square" anchor="ctr"/>
+          <a:lstStyle/>
+          <a:p>
+            <a:r>
+              <a:rPr sz="1500" b="1" i="0">
+                <a:solidFill>
+                  <a:srgbClr val="333333"/>
+                </a:solidFill>
+                <a:latin typeface="Calibri"/>
+              </a:rPr>
+              <a:t>LOS HECHOS, SIN ADJETIVOS</a:t>
+            </a:r>
+            <a:r>
+              <a:rPr sz="1500" b="0" i="0">
+                <a:solidFill>
+                  <a:srgbClr val="333333"/>
+                </a:solidFill>
+                <a:latin typeface="Calibri"/>
+              </a:rPr>
+              <a:t> — Qué pasó, en cinco líneas máximo: qué sistema era, qué hizo, a quién afectó y cómo se supo. Sin opinión todavía.</a:t>
+            </a:r>
+          </a:p>
+        </p:txBody>
+      </p:sp>
+      <p:sp>
+        <p:nvSpPr>
+          <p:cNvPr id="10" name="Rounded Rectangle 9"/>
+          <p:cNvSpPr/>
+          <p:nvPr/>
+        </p:nvSpPr>
+        <p:spPr>
+          <a:xfrm>
+            <a:off x="457200" y="2148839"/>
+            <a:ext cx="11277295" cy="566928"/>
+          </a:xfrm>
+          <a:prstGeom prst="roundRect">
+            <a:avLst>
+              <a:gd name="adj" fmla="val 12000"/>
+            </a:avLst>
+          </a:prstGeom>
+          <a:solidFill>
+            <a:srgbClr val="F2F2F2"/>
+          </a:solidFill>
+          <a:ln>
+            <a:noFill/>
+          </a:ln>
+        </p:spPr>
+        <p:style>
+          <a:lnRef idx="1">
+            <a:schemeClr val="accent1"/>
+          </a:lnRef>
+          <a:fillRef idx="3">
+            <a:schemeClr val="accent1"/>
+          </a:fillRef>
+          <a:effectRef idx="2">
+            <a:schemeClr val="accent1"/>
+          </a:effectRef>
+          <a:fontRef idx="minor">
+            <a:schemeClr val="lt1"/>
+          </a:fontRef>
+        </p:style>
+        <p:txBody>
+          <a:bodyPr rtlCol="0" anchor="ctr"/>
+          <a:lstStyle/>
+          <a:p>
+            <a:pPr algn="ctr"/>
+          </a:p>
+        </p:txBody>
+      </p:sp>
+      <p:sp>
+        <p:nvSpPr>
+          <p:cNvPr id="11" name="Rectangle 10"/>
+          <p:cNvSpPr/>
+          <p:nvPr/>
+        </p:nvSpPr>
+        <p:spPr>
+          <a:xfrm>
+            <a:off x="640080" y="2295144"/>
+            <a:ext cx="274320" cy="274320"/>
+          </a:xfrm>
+          <a:prstGeom prst="rect">
+            <a:avLst/>
+          </a:prstGeom>
+          <a:solidFill>
+            <a:srgbClr val="FFFFFF"/>
+          </a:solidFill>
+          <a:ln>
+            <a:solidFill>
+              <a:srgbClr val="333333"/>
+            </a:solidFill>
+          </a:ln>
+        </p:spPr>
+        <p:style>
+          <a:lnRef idx="1">
+            <a:schemeClr val="accent1"/>
+          </a:lnRef>
+          <a:fillRef idx="3">
+            <a:schemeClr val="accent1"/>
+          </a:fillRef>
+          <a:effectRef idx="2">
+            <a:schemeClr val="accent1"/>
+          </a:effectRef>
+          <a:fontRef idx="minor">
+            <a:schemeClr val="lt1"/>
+          </a:fontRef>
+        </p:style>
+        <p:txBody>
+          <a:bodyPr rtlCol="0" anchor="ctr"/>
+          <a:lstStyle/>
+          <a:p>
+            <a:pPr algn="ctr"/>
+          </a:p>
+        </p:txBody>
+      </p:sp>
+      <p:sp>
+        <p:nvSpPr>
+          <p:cNvPr id="12" name="Rectangle 11"/>
+          <p:cNvSpPr/>
+          <p:nvPr/>
+        </p:nvSpPr>
+        <p:spPr>
+          <a:xfrm>
+            <a:off x="640080" y="2295144"/>
+            <a:ext cx="73152" cy="274320"/>
+          </a:xfrm>
+          <a:prstGeom prst="rect">
+            <a:avLst/>
+          </a:prstGeom>
+          <a:solidFill>
+            <a:srgbClr val="269CCB"/>
+          </a:solidFill>
+          <a:ln>
+            <a:noFill/>
+          </a:ln>
+        </p:spPr>
+        <p:style>
+          <a:lnRef idx="1">
+            <a:schemeClr val="accent1"/>
+          </a:lnRef>
+          <a:fillRef idx="3">
+            <a:schemeClr val="accent1"/>
+          </a:fillRef>
+          <a:effectRef idx="2">
+            <a:schemeClr val="accent1"/>
+          </a:effectRef>
+          <a:fontRef idx="minor">
+            <a:schemeClr val="lt1"/>
+          </a:fontRef>
+        </p:style>
+        <p:txBody>
+          <a:bodyPr rtlCol="0" anchor="ctr"/>
+          <a:lstStyle/>
+          <a:p>
+            <a:pPr algn="ctr"/>
+          </a:p>
+        </p:txBody>
+      </p:sp>
+      <p:sp>
+        <p:nvSpPr>
+          <p:cNvPr id="13" name="TextBox 12"/>
+          <p:cNvSpPr txBox="1"/>
+          <p:nvPr/>
+        </p:nvSpPr>
+        <p:spPr>
+          <a:xfrm>
+            <a:off x="1097280" y="2240279"/>
+            <a:ext cx="10362895" cy="402336"/>
+          </a:xfrm>
+          <a:prstGeom prst="rect">
+            <a:avLst/>
+          </a:prstGeom>
+          <a:noFill/>
+        </p:spPr>
+        <p:txBody>
+          <a:bodyPr wrap="square" anchor="ctr"/>
+          <a:lstStyle/>
+          <a:p>
+            <a:r>
+              <a:rPr sz="1500" b="1" i="0">
+                <a:solidFill>
+                  <a:srgbClr val="333333"/>
+                </a:solidFill>
+                <a:latin typeface="Calibri"/>
+              </a:rPr>
+              <a:t>QUIÉN DECIDIÓ QUÉ</a:t>
+            </a:r>
+            <a:r>
+              <a:rPr sz="1500" b="0" i="0">
+                <a:solidFill>
+                  <a:srgbClr val="333333"/>
+                </a:solidFill>
+                <a:latin typeface="Calibri"/>
+              </a:rPr>
+              <a:t> — La decisión concreta que causó el daño y </a:t>
+            </a:r>
+            <a:r>
+              <a:rPr sz="1500" b="1" i="0">
+                <a:solidFill>
+                  <a:srgbClr val="333333"/>
+                </a:solidFill>
+                <a:latin typeface="Calibri"/>
+              </a:rPr>
+              <a:t>quién la tomó</a:t>
+            </a:r>
+            <a:r>
+              <a:rPr sz="1500" b="0" i="0">
+                <a:solidFill>
+                  <a:srgbClr val="333333"/>
+                </a:solidFill>
+                <a:latin typeface="Calibri"/>
+              </a:rPr>
+              <a:t> (el rol: el diseñador, el gerente de producto, el ingeniero que ejecutó). Si fueron varias personas en cadena, escriban la cadena.</a:t>
+            </a:r>
+          </a:p>
+        </p:txBody>
+      </p:sp>
+      <p:sp>
+        <p:nvSpPr>
+          <p:cNvPr id="14" name="Rounded Rectangle 13"/>
+          <p:cNvSpPr/>
+          <p:nvPr/>
+        </p:nvSpPr>
+        <p:spPr>
+          <a:xfrm>
+            <a:off x="457200" y="2825496"/>
+            <a:ext cx="11277295" cy="566928"/>
+          </a:xfrm>
+          <a:prstGeom prst="roundRect">
+            <a:avLst>
+              <a:gd name="adj" fmla="val 12000"/>
+            </a:avLst>
+          </a:prstGeom>
+          <a:solidFill>
+            <a:srgbClr val="F2F2F2"/>
+          </a:solidFill>
+          <a:ln>
+            <a:noFill/>
+          </a:ln>
+        </p:spPr>
+        <p:style>
+          <a:lnRef idx="1">
+            <a:schemeClr val="accent1"/>
+          </a:lnRef>
+          <a:fillRef idx="3">
+            <a:schemeClr val="accent1"/>
+          </a:fillRef>
+          <a:effectRef idx="2">
+            <a:schemeClr val="accent1"/>
+          </a:effectRef>
+          <a:fontRef idx="minor">
+            <a:schemeClr val="lt1"/>
+          </a:fontRef>
+        </p:style>
+        <p:txBody>
+          <a:bodyPr rtlCol="0" anchor="ctr"/>
+          <a:lstStyle/>
+          <a:p>
+            <a:pPr algn="ctr"/>
+          </a:p>
+        </p:txBody>
+      </p:sp>
+      <p:sp>
+        <p:nvSpPr>
+          <p:cNvPr id="15" name="Rectangle 14"/>
+          <p:cNvSpPr/>
+          <p:nvPr/>
+        </p:nvSpPr>
+        <p:spPr>
+          <a:xfrm>
+            <a:off x="640080" y="2971800"/>
+            <a:ext cx="274320" cy="274320"/>
+          </a:xfrm>
+          <a:prstGeom prst="rect">
+            <a:avLst/>
+          </a:prstGeom>
+          <a:solidFill>
+            <a:srgbClr val="FFFFFF"/>
+          </a:solidFill>
+          <a:ln>
+            <a:solidFill>
+              <a:srgbClr val="333333"/>
+            </a:solidFill>
+          </a:ln>
+        </p:spPr>
+        <p:style>
+          <a:lnRef idx="1">
+            <a:schemeClr val="accent1"/>
+          </a:lnRef>
+          <a:fillRef idx="3">
+            <a:schemeClr val="accent1"/>
+          </a:fillRef>
+          <a:effectRef idx="2">
+            <a:schemeClr val="accent1"/>
+          </a:effectRef>
+          <a:fontRef idx="minor">
+            <a:schemeClr val="lt1"/>
+          </a:fontRef>
+        </p:style>
+        <p:txBody>
+          <a:bodyPr rtlCol="0" anchor="ctr"/>
+          <a:lstStyle/>
+          <a:p>
+            <a:pPr algn="ctr"/>
+          </a:p>
+        </p:txBody>
+      </p:sp>
+      <p:sp>
+        <p:nvSpPr>
+          <p:cNvPr id="16" name="Rectangle 15"/>
+          <p:cNvSpPr/>
+          <p:nvPr/>
+        </p:nvSpPr>
+        <p:spPr>
+          <a:xfrm>
+            <a:off x="640080" y="2971800"/>
+            <a:ext cx="73152" cy="274320"/>
+          </a:xfrm>
+          <a:prstGeom prst="rect">
+            <a:avLst/>
+          </a:prstGeom>
+          <a:solidFill>
+            <a:srgbClr val="269CCB"/>
+          </a:solidFill>
+          <a:ln>
+            <a:noFill/>
+          </a:ln>
+        </p:spPr>
+        <p:style>
+          <a:lnRef idx="1">
+            <a:schemeClr val="accent1"/>
+          </a:lnRef>
+          <a:fillRef idx="3">
+            <a:schemeClr val="accent1"/>
+          </a:fillRef>
+          <a:effectRef idx="2">
+            <a:schemeClr val="accent1"/>
+          </a:effectRef>
+          <a:fontRef idx="minor">
+            <a:schemeClr val="lt1"/>
+          </a:fontRef>
+        </p:style>
+        <p:txBody>
+          <a:bodyPr rtlCol="0" anchor="ctr"/>
+          <a:lstStyle/>
+          <a:p>
+            <a:pPr algn="ctr"/>
+          </a:p>
+        </p:txBody>
+      </p:sp>
+      <p:sp>
+        <p:nvSpPr>
+          <p:cNvPr id="17" name="TextBox 16"/>
+          <p:cNvSpPr txBox="1"/>
+          <p:nvPr/>
+        </p:nvSpPr>
+        <p:spPr>
+          <a:xfrm>
+            <a:off x="1097280" y="2916936"/>
+            <a:ext cx="10362895" cy="402336"/>
+          </a:xfrm>
+          <a:prstGeom prst="rect">
+            <a:avLst/>
+          </a:prstGeom>
+          <a:noFill/>
+        </p:spPr>
+        <p:txBody>
+          <a:bodyPr wrap="square" anchor="ctr"/>
+          <a:lstStyle/>
+          <a:p>
+            <a:r>
+              <a:rPr sz="1500" b="1" i="0">
+                <a:solidFill>
+                  <a:srgbClr val="333333"/>
+                </a:solidFill>
+                <a:latin typeface="Calibri"/>
+              </a:rPr>
+              <a:t>EL NUMERAL QUE SE VIOLÓ</a:t>
+            </a:r>
+            <a:r>
+              <a:rPr sz="1500" b="0" i="0">
+                <a:solidFill>
+                  <a:srgbClr val="333333"/>
+                </a:solidFill>
+                <a:latin typeface="Calibri"/>
+              </a:rPr>
+              <a:t> — Cite </a:t>
+            </a:r>
+            <a:r>
+              <a:rPr sz="1500" b="1" i="0">
+                <a:solidFill>
+                  <a:srgbClr val="333333"/>
+                </a:solidFill>
+                <a:latin typeface="Calibri"/>
+              </a:rPr>
+              <a:t>literalmente</a:t>
+            </a:r>
+            <a:r>
+              <a:rPr sz="1500" b="0" i="0">
+                <a:solidFill>
+                  <a:srgbClr val="333333"/>
+                </a:solidFill>
+                <a:latin typeface="Calibri"/>
+              </a:rPr>
+              <a:t> al menos un principio del código ACM/IEEE o un artículo de la Ley 842 de 2003, la Ley 1581 de 2012 o la Ley 1273 de 2009, y explique en dos líneas por qué aplica a este caso.</a:t>
+            </a:r>
+          </a:p>
+        </p:txBody>
+      </p:sp>
+      <p:sp>
+        <p:nvSpPr>
+          <p:cNvPr id="18" name="Rounded Rectangle 17"/>
+          <p:cNvSpPr/>
+          <p:nvPr/>
+        </p:nvSpPr>
+        <p:spPr>
+          <a:xfrm>
+            <a:off x="457200" y="3502152"/>
+            <a:ext cx="11277295" cy="566928"/>
+          </a:xfrm>
+          <a:prstGeom prst="roundRect">
+            <a:avLst>
+              <a:gd name="adj" fmla="val 12000"/>
+            </a:avLst>
+          </a:prstGeom>
+          <a:solidFill>
+            <a:srgbClr val="F2F2F2"/>
+          </a:solidFill>
+          <a:ln>
+            <a:noFill/>
+          </a:ln>
+        </p:spPr>
+        <p:style>
+          <a:lnRef idx="1">
+            <a:schemeClr val="accent1"/>
+          </a:lnRef>
+          <a:fillRef idx="3">
+            <a:schemeClr val="accent1"/>
+          </a:fillRef>
+          <a:effectRef idx="2">
+            <a:schemeClr val="accent1"/>
+          </a:effectRef>
+          <a:fontRef idx="minor">
+            <a:schemeClr val="lt1"/>
+          </a:fontRef>
+        </p:style>
+        <p:txBody>
+          <a:bodyPr rtlCol="0" anchor="ctr"/>
+          <a:lstStyle/>
+          <a:p>
+            <a:pPr algn="ctr"/>
+          </a:p>
+        </p:txBody>
+      </p:sp>
+      <p:sp>
+        <p:nvSpPr>
+          <p:cNvPr id="19" name="Rectangle 18"/>
+          <p:cNvSpPr/>
+          <p:nvPr/>
+        </p:nvSpPr>
+        <p:spPr>
+          <a:xfrm>
+            <a:off x="640080" y="3648456"/>
+            <a:ext cx="274320" cy="274320"/>
+          </a:xfrm>
+          <a:prstGeom prst="rect">
+            <a:avLst/>
+          </a:prstGeom>
+          <a:solidFill>
+            <a:srgbClr val="FFFFFF"/>
+          </a:solidFill>
+          <a:ln>
+            <a:solidFill>
+              <a:srgbClr val="333333"/>
+            </a:solidFill>
+          </a:ln>
+        </p:spPr>
+        <p:style>
+          <a:lnRef idx="1">
+            <a:schemeClr val="accent1"/>
+          </a:lnRef>
+          <a:fillRef idx="3">
+            <a:schemeClr val="accent1"/>
+          </a:fillRef>
+          <a:effectRef idx="2">
+            <a:schemeClr val="accent1"/>
+          </a:effectRef>
+          <a:fontRef idx="minor">
+            <a:schemeClr val="lt1"/>
+          </a:fontRef>
+        </p:style>
+        <p:txBody>
+          <a:bodyPr rtlCol="0" anchor="ctr"/>
+          <a:lstStyle/>
+          <a:p>
+            <a:pPr algn="ctr"/>
+          </a:p>
+        </p:txBody>
+      </p:sp>
+      <p:sp>
+        <p:nvSpPr>
+          <p:cNvPr id="20" name="Rectangle 19"/>
+          <p:cNvSpPr/>
+          <p:nvPr/>
+        </p:nvSpPr>
+        <p:spPr>
+          <a:xfrm>
+            <a:off x="640080" y="3648456"/>
+            <a:ext cx="73152" cy="274320"/>
+          </a:xfrm>
+          <a:prstGeom prst="rect">
+            <a:avLst/>
+          </a:prstGeom>
+          <a:solidFill>
+            <a:srgbClr val="269CCB"/>
+          </a:solidFill>
+          <a:ln>
+            <a:noFill/>
+          </a:ln>
+        </p:spPr>
+        <p:style>
+          <a:lnRef idx="1">
+            <a:schemeClr val="accent1"/>
+          </a:lnRef>
+          <a:fillRef idx="3">
+            <a:schemeClr val="accent1"/>
+          </a:fillRef>
+          <a:effectRef idx="2">
+            <a:schemeClr val="accent1"/>
+          </a:effectRef>
+          <a:fontRef idx="minor">
+            <a:schemeClr val="lt1"/>
+          </a:fontRef>
+        </p:style>
+        <p:txBody>
+          <a:bodyPr rtlCol="0" anchor="ctr"/>
+          <a:lstStyle/>
+          <a:p>
+            <a:pPr algn="ctr"/>
+          </a:p>
+        </p:txBody>
+      </p:sp>
+      <p:sp>
+        <p:nvSpPr>
+          <p:cNvPr id="21" name="TextBox 20"/>
+          <p:cNvSpPr txBox="1"/>
+          <p:nvPr/>
+        </p:nvSpPr>
+        <p:spPr>
+          <a:xfrm>
+            <a:off x="1097280" y="3593592"/>
+            <a:ext cx="10362895" cy="402336"/>
+          </a:xfrm>
+          <a:prstGeom prst="rect">
+            <a:avLst/>
+          </a:prstGeom>
+          <a:noFill/>
+        </p:spPr>
+        <p:txBody>
+          <a:bodyPr wrap="square" anchor="ctr"/>
+          <a:lstStyle/>
+          <a:p>
+            <a:r>
+              <a:rPr sz="1500" b="1" i="0">
+                <a:solidFill>
+                  <a:srgbClr val="333333"/>
+                </a:solidFill>
+                <a:latin typeface="Calibri"/>
+              </a:rPr>
+              <a:t>EL MOMENTO EN QUE SE PUDO PARAR</a:t>
+            </a:r>
+            <a:r>
+              <a:rPr sz="1500" b="0" i="0">
+                <a:solidFill>
+                  <a:srgbClr val="333333"/>
+                </a:solidFill>
+                <a:latin typeface="Calibri"/>
+              </a:rPr>
+              <a:t> — El momento </a:t>
+            </a:r>
+            <a:r>
+              <a:rPr sz="1500" b="1" i="0">
+                <a:solidFill>
+                  <a:srgbClr val="333333"/>
+                </a:solidFill>
+                <a:latin typeface="Calibri"/>
+              </a:rPr>
+              <a:t>más temprano</a:t>
+            </a:r>
+            <a:r>
+              <a:rPr sz="1500" b="0" i="0">
+                <a:solidFill>
+                  <a:srgbClr val="333333"/>
+                </a:solidFill>
+                <a:latin typeface="Calibri"/>
+              </a:rPr>
+              <a:t> en que alguien con la información disponible podía cambiar el resultado, y qué debía hacer exactamente ahí (a quién decirle qué, y por escrito o no).</a:t>
+            </a:r>
+          </a:p>
+        </p:txBody>
+      </p:sp>
+      <p:sp>
+        <p:nvSpPr>
+          <p:cNvPr id="22" name="Rounded Rectangle 21"/>
+          <p:cNvSpPr/>
+          <p:nvPr/>
+        </p:nvSpPr>
+        <p:spPr>
+          <a:xfrm>
+            <a:off x="457200" y="4178808"/>
+            <a:ext cx="11277295" cy="566928"/>
+          </a:xfrm>
+          <a:prstGeom prst="roundRect">
+            <a:avLst>
+              <a:gd name="adj" fmla="val 12000"/>
+            </a:avLst>
+          </a:prstGeom>
+          <a:solidFill>
+            <a:srgbClr val="F2F2F2"/>
+          </a:solidFill>
+          <a:ln>
+            <a:noFill/>
+          </a:ln>
+        </p:spPr>
+        <p:style>
+          <a:lnRef idx="1">
+            <a:schemeClr val="accent1"/>
+          </a:lnRef>
+          <a:fillRef idx="3">
+            <a:schemeClr val="accent1"/>
+          </a:fillRef>
+          <a:effectRef idx="2">
+            <a:schemeClr val="accent1"/>
+          </a:effectRef>
+          <a:fontRef idx="minor">
+            <a:schemeClr val="lt1"/>
+          </a:fontRef>
+        </p:style>
+        <p:txBody>
+          <a:bodyPr rtlCol="0" anchor="ctr"/>
+          <a:lstStyle/>
+          <a:p>
+            <a:pPr algn="ctr"/>
+          </a:p>
+        </p:txBody>
+      </p:sp>
+      <p:sp>
+        <p:nvSpPr>
+          <p:cNvPr id="23" name="Rectangle 22"/>
+          <p:cNvSpPr/>
+          <p:nvPr/>
+        </p:nvSpPr>
+        <p:spPr>
+          <a:xfrm>
+            <a:off x="640080" y="4325112"/>
+            <a:ext cx="274320" cy="274320"/>
+          </a:xfrm>
+          <a:prstGeom prst="rect">
+            <a:avLst/>
+          </a:prstGeom>
+          <a:solidFill>
+            <a:srgbClr val="FFFFFF"/>
+          </a:solidFill>
+          <a:ln>
+            <a:solidFill>
+              <a:srgbClr val="333333"/>
+            </a:solidFill>
+          </a:ln>
+        </p:spPr>
+        <p:style>
+          <a:lnRef idx="1">
+            <a:schemeClr val="accent1"/>
+          </a:lnRef>
+          <a:fillRef idx="3">
+            <a:schemeClr val="accent1"/>
+          </a:fillRef>
+          <a:effectRef idx="2">
+            <a:schemeClr val="accent1"/>
+          </a:effectRef>
+          <a:fontRef idx="minor">
+            <a:schemeClr val="lt1"/>
+          </a:fontRef>
+        </p:style>
+        <p:txBody>
+          <a:bodyPr rtlCol="0" anchor="ctr"/>
+          <a:lstStyle/>
+          <a:p>
+            <a:pPr algn="ctr"/>
+          </a:p>
+        </p:txBody>
+      </p:sp>
+      <p:sp>
+        <p:nvSpPr>
+          <p:cNvPr id="24" name="Rectangle 23"/>
+          <p:cNvSpPr/>
+          <p:nvPr/>
+        </p:nvSpPr>
+        <p:spPr>
+          <a:xfrm>
+            <a:off x="640080" y="4325112"/>
+            <a:ext cx="73152" cy="274320"/>
+          </a:xfrm>
+          <a:prstGeom prst="rect">
+            <a:avLst/>
+          </a:prstGeom>
+          <a:solidFill>
+            <a:srgbClr val="269CCB"/>
+          </a:solidFill>
+          <a:ln>
+            <a:noFill/>
+          </a:ln>
+        </p:spPr>
+        <p:style>
+          <a:lnRef idx="1">
+            <a:schemeClr val="accent1"/>
+          </a:lnRef>
+          <a:fillRef idx="3">
+            <a:schemeClr val="accent1"/>
+          </a:fillRef>
+          <a:effectRef idx="2">
+            <a:schemeClr val="accent1"/>
+          </a:effectRef>
+          <a:fontRef idx="minor">
+            <a:schemeClr val="lt1"/>
+          </a:fontRef>
+        </p:style>
+        <p:txBody>
+          <a:bodyPr rtlCol="0" anchor="ctr"/>
+          <a:lstStyle/>
+          <a:p>
+            <a:pPr algn="ctr"/>
+          </a:p>
+        </p:txBody>
+      </p:sp>
+      <p:sp>
+        <p:nvSpPr>
+          <p:cNvPr id="25" name="TextBox 24"/>
+          <p:cNvSpPr txBox="1"/>
+          <p:nvPr/>
+        </p:nvSpPr>
+        <p:spPr>
+          <a:xfrm>
+            <a:off x="1097280" y="4270248"/>
+            <a:ext cx="10362895" cy="402336"/>
+          </a:xfrm>
+          <a:prstGeom prst="rect">
+            <a:avLst/>
+          </a:prstGeom>
+          <a:noFill/>
+        </p:spPr>
+        <p:txBody>
+          <a:bodyPr wrap="square" anchor="ctr"/>
+          <a:lstStyle/>
+          <a:p>
+            <a:r>
+              <a:rPr sz="1500" b="1" i="0">
+                <a:solidFill>
+                  <a:srgbClr val="333333"/>
+                </a:solidFill>
+                <a:latin typeface="Calibri"/>
+              </a:rPr>
+              <a:t>LA REGLA QUE SE LLEVAN</a:t>
+            </a:r>
+            <a:r>
+              <a:rPr sz="1500" b="0" i="0">
+                <a:solidFill>
+                  <a:srgbClr val="333333"/>
+                </a:solidFill>
+                <a:latin typeface="Calibri"/>
+              </a:rPr>
+              <a:t> — Una regla en una frase, escrita para ustedes mismos, que evite repetir esto en el proyecto de este curso. Tiene que ser verificable.</a:t>
+            </a:r>
+          </a:p>
+        </p:txBody>
+      </p:sp>
+      <p:sp>
+        <p:nvSpPr>
+          <p:cNvPr id="26" name="TextBox 25"/>
           <p:cNvSpPr txBox="1"/>
           <p:nvPr/>
         </p:nvSpPr>
@@ -10953,6 +10461,1468 @@
 </file>
 
 <file path=ppt/slides/slide26.xml><?xml version="1.0" encoding="utf-8"?>
+<p:sld xmlns:a="http://schemas.openxmlformats.org/drawingml/2006/main" xmlns:p="http://schemas.openxmlformats.org/presentationml/2006/main" xmlns:r="http://schemas.openxmlformats.org/officeDocument/2006/relationships">
+  <p:cSld>
+    <p:bg>
+      <p:bgPr>
+        <a:solidFill>
+          <a:srgbClr val="FFFFFF"/>
+        </a:solidFill>
+        <a:effectLst/>
+      </p:bgPr>
+    </p:bg>
+    <p:spTree>
+      <p:nvGrpSpPr>
+        <p:cNvPr id="1" name=""/>
+        <p:cNvGrpSpPr/>
+        <p:nvPr/>
+      </p:nvGrpSpPr>
+      <p:grpSpPr/>
+      <p:sp>
+        <p:nvSpPr>
+          <p:cNvPr id="2" name="Rectangle 1"/>
+          <p:cNvSpPr/>
+          <p:nvPr/>
+        </p:nvSpPr>
+        <p:spPr>
+          <a:xfrm>
+            <a:off x="0" y="0"/>
+            <a:ext cx="12191695" cy="1170432"/>
+          </a:xfrm>
+          <a:prstGeom prst="rect">
+            <a:avLst/>
+          </a:prstGeom>
+          <a:solidFill>
+            <a:srgbClr val="095292"/>
+          </a:solidFill>
+          <a:ln>
+            <a:noFill/>
+          </a:ln>
+        </p:spPr>
+        <p:style>
+          <a:lnRef idx="1">
+            <a:schemeClr val="accent1"/>
+          </a:lnRef>
+          <a:fillRef idx="3">
+            <a:schemeClr val="accent1"/>
+          </a:fillRef>
+          <a:effectRef idx="2">
+            <a:schemeClr val="accent1"/>
+          </a:effectRef>
+          <a:fontRef idx="minor">
+            <a:schemeClr val="lt1"/>
+          </a:fontRef>
+        </p:style>
+        <p:txBody>
+          <a:bodyPr rtlCol="0" anchor="ctr"/>
+          <a:lstStyle/>
+          <a:p>
+            <a:pPr algn="ctr"/>
+          </a:p>
+        </p:txBody>
+      </p:sp>
+      <p:sp>
+        <p:nvSpPr>
+          <p:cNvPr id="3" name="Rectangle 2"/>
+          <p:cNvSpPr/>
+          <p:nvPr/>
+        </p:nvSpPr>
+        <p:spPr>
+          <a:xfrm>
+            <a:off x="0" y="1170432"/>
+            <a:ext cx="12191695" cy="41148"/>
+          </a:xfrm>
+          <a:prstGeom prst="rect">
+            <a:avLst/>
+          </a:prstGeom>
+          <a:solidFill>
+            <a:srgbClr val="FFD000"/>
+          </a:solidFill>
+          <a:ln>
+            <a:noFill/>
+          </a:ln>
+        </p:spPr>
+        <p:style>
+          <a:lnRef idx="1">
+            <a:schemeClr val="accent1"/>
+          </a:lnRef>
+          <a:fillRef idx="3">
+            <a:schemeClr val="accent1"/>
+          </a:fillRef>
+          <a:effectRef idx="2">
+            <a:schemeClr val="accent1"/>
+          </a:effectRef>
+          <a:fontRef idx="minor">
+            <a:schemeClr val="lt1"/>
+          </a:fontRef>
+        </p:style>
+        <p:txBody>
+          <a:bodyPr rtlCol="0" anchor="ctr"/>
+          <a:lstStyle/>
+          <a:p>
+            <a:pPr algn="ctr"/>
+          </a:p>
+        </p:txBody>
+      </p:sp>
+      <p:sp>
+        <p:nvSpPr>
+          <p:cNvPr id="4" name="TextBox 3"/>
+          <p:cNvSpPr txBox="1"/>
+          <p:nvPr/>
+        </p:nvSpPr>
+        <p:spPr>
+          <a:xfrm>
+            <a:off x="457200" y="164592"/>
+            <a:ext cx="11277295" cy="384048"/>
+          </a:xfrm>
+          <a:prstGeom prst="rect">
+            <a:avLst/>
+          </a:prstGeom>
+          <a:noFill/>
+        </p:spPr>
+        <p:txBody>
+          <a:bodyPr wrap="square">
+            <a:spAutoFit/>
+          </a:bodyPr>
+          <a:lstStyle/>
+          <a:p>
+            <a:r>
+              <a:rPr sz="2600" b="1" i="0">
+                <a:solidFill>
+                  <a:srgbClr val="FFFFFF"/>
+                </a:solidFill>
+                <a:latin typeface="Calibri"/>
+              </a:rPr>
+              <a:t>Cómo se expone en 3 minutos</a:t>
+            </a:r>
+          </a:p>
+        </p:txBody>
+      </p:sp>
+      <p:sp>
+        <p:nvSpPr>
+          <p:cNvPr id="5" name="TextBox 4"/>
+          <p:cNvSpPr txBox="1"/>
+          <p:nvPr/>
+        </p:nvSpPr>
+        <p:spPr>
+          <a:xfrm>
+            <a:off x="457200" y="566928"/>
+            <a:ext cx="11277295" cy="411480"/>
+          </a:xfrm>
+          <a:prstGeom prst="rect">
+            <a:avLst/>
+          </a:prstGeom>
+          <a:noFill/>
+        </p:spPr>
+        <p:txBody>
+          <a:bodyPr wrap="square">
+            <a:spAutoFit/>
+          </a:bodyPr>
+          <a:lstStyle/>
+          <a:p>
+            <a:r>
+              <a:rPr sz="1400" b="0" i="0">
+                <a:solidFill>
+                  <a:srgbClr val="B8D8EE"/>
+                </a:solidFill>
+                <a:latin typeface="Calibri"/>
+              </a:rPr>
+              <a:t>Habla el vocero con la pantalla ya compartida · cronómetro en pantalla · se corta al llegar a cero</a:t>
+            </a:r>
+          </a:p>
+        </p:txBody>
+      </p:sp>
+      <p:sp>
+        <p:nvSpPr>
+          <p:cNvPr id="6" name="Rounded Rectangle 5"/>
+          <p:cNvSpPr/>
+          <p:nvPr/>
+        </p:nvSpPr>
+        <p:spPr>
+          <a:xfrm>
+            <a:off x="457200" y="1444752"/>
+            <a:ext cx="11277295" cy="908913"/>
+          </a:xfrm>
+          <a:prstGeom prst="roundRect">
+            <a:avLst>
+              <a:gd name="adj" fmla="val 12000"/>
+            </a:avLst>
+          </a:prstGeom>
+          <a:solidFill>
+            <a:srgbClr val="F2F2F2"/>
+          </a:solidFill>
+          <a:ln>
+            <a:noFill/>
+          </a:ln>
+        </p:spPr>
+        <p:style>
+          <a:lnRef idx="1">
+            <a:schemeClr val="accent1"/>
+          </a:lnRef>
+          <a:fillRef idx="3">
+            <a:schemeClr val="accent1"/>
+          </a:fillRef>
+          <a:effectRef idx="2">
+            <a:schemeClr val="accent1"/>
+          </a:effectRef>
+          <a:fontRef idx="minor">
+            <a:schemeClr val="lt1"/>
+          </a:fontRef>
+        </p:style>
+        <p:txBody>
+          <a:bodyPr rtlCol="0" anchor="ctr"/>
+          <a:lstStyle/>
+          <a:p>
+            <a:pPr algn="ctr"/>
+          </a:p>
+        </p:txBody>
+      </p:sp>
+      <p:sp>
+        <p:nvSpPr>
+          <p:cNvPr id="7" name="Rounded Rectangle 6"/>
+          <p:cNvSpPr/>
+          <p:nvPr/>
+        </p:nvSpPr>
+        <p:spPr>
+          <a:xfrm>
+            <a:off x="594360" y="1679752"/>
+            <a:ext cx="438912" cy="438912"/>
+          </a:xfrm>
+          <a:prstGeom prst="roundRect">
+            <a:avLst>
+              <a:gd name="adj" fmla="val 12000"/>
+            </a:avLst>
+          </a:prstGeom>
+          <a:solidFill>
+            <a:srgbClr val="095292"/>
+          </a:solidFill>
+          <a:ln>
+            <a:noFill/>
+          </a:ln>
+        </p:spPr>
+        <p:style>
+          <a:lnRef idx="1">
+            <a:schemeClr val="accent1"/>
+          </a:lnRef>
+          <a:fillRef idx="3">
+            <a:schemeClr val="accent1"/>
+          </a:fillRef>
+          <a:effectRef idx="2">
+            <a:schemeClr val="accent1"/>
+          </a:effectRef>
+          <a:fontRef idx="minor">
+            <a:schemeClr val="lt1"/>
+          </a:fontRef>
+        </p:style>
+        <p:txBody>
+          <a:bodyPr rtlCol="0" anchor="ctr"/>
+          <a:lstStyle/>
+          <a:p>
+            <a:pPr algn="ctr"/>
+          </a:p>
+        </p:txBody>
+      </p:sp>
+      <p:sp>
+        <p:nvSpPr>
+          <p:cNvPr id="8" name="TextBox 7"/>
+          <p:cNvSpPr txBox="1"/>
+          <p:nvPr/>
+        </p:nvSpPr>
+        <p:spPr>
+          <a:xfrm>
+            <a:off x="594360" y="1679752"/>
+            <a:ext cx="438912" cy="438912"/>
+          </a:xfrm>
+          <a:prstGeom prst="rect">
+            <a:avLst/>
+          </a:prstGeom>
+          <a:noFill/>
+        </p:spPr>
+        <p:txBody>
+          <a:bodyPr wrap="square" anchor="ctr"/>
+          <a:lstStyle/>
+          <a:p>
+            <a:pPr algn="ctr"/>
+            <a:r>
+              <a:rPr sz="1600" b="1" i="0">
+                <a:solidFill>
+                  <a:srgbClr val="FFFFFF"/>
+                </a:solidFill>
+                <a:latin typeface="Calibri"/>
+              </a:rPr>
+              <a:t>1</a:t>
+            </a:r>
+          </a:p>
+        </p:txBody>
+      </p:sp>
+      <p:sp>
+        <p:nvSpPr>
+          <p:cNvPr id="9" name="TextBox 8"/>
+          <p:cNvSpPr txBox="1"/>
+          <p:nvPr/>
+        </p:nvSpPr>
+        <p:spPr>
+          <a:xfrm>
+            <a:off x="1188720" y="1536192"/>
+            <a:ext cx="10271455" cy="744321"/>
+          </a:xfrm>
+          <a:prstGeom prst="rect">
+            <a:avLst/>
+          </a:prstGeom>
+          <a:noFill/>
+        </p:spPr>
+        <p:txBody>
+          <a:bodyPr wrap="square" anchor="ctr"/>
+          <a:lstStyle/>
+          <a:p>
+            <a:r>
+              <a:rPr sz="1500" b="1" i="0">
+                <a:solidFill>
+                  <a:srgbClr val="095292"/>
+                </a:solidFill>
+                <a:latin typeface="Calibri"/>
+              </a:rPr>
+              <a:t>30 s · Los hechos</a:t>
+            </a:r>
+          </a:p>
+          <a:p>
+            <a:pPr>
+              <a:spcBef>
+                <a:spcPts val="200"/>
+              </a:spcBef>
+            </a:pPr>
+            <a:r>
+              <a:rPr sz="1300" b="0" i="0">
+                <a:solidFill>
+                  <a:srgbClr val="333333"/>
+                </a:solidFill>
+                <a:latin typeface="Calibri"/>
+              </a:rPr>
+              <a:t>Qué pasó, sin adjetivos. Cinco líneas dichas en medio minuto.</a:t>
+            </a:r>
+          </a:p>
+        </p:txBody>
+      </p:sp>
+      <p:sp>
+        <p:nvSpPr>
+          <p:cNvPr id="10" name="Rounded Rectangle 9"/>
+          <p:cNvSpPr/>
+          <p:nvPr/>
+        </p:nvSpPr>
+        <p:spPr>
+          <a:xfrm>
+            <a:off x="457200" y="2445105"/>
+            <a:ext cx="11277295" cy="908913"/>
+          </a:xfrm>
+          <a:prstGeom prst="roundRect">
+            <a:avLst>
+              <a:gd name="adj" fmla="val 12000"/>
+            </a:avLst>
+          </a:prstGeom>
+          <a:solidFill>
+            <a:srgbClr val="E8F4FA"/>
+          </a:solidFill>
+          <a:ln>
+            <a:noFill/>
+          </a:ln>
+        </p:spPr>
+        <p:style>
+          <a:lnRef idx="1">
+            <a:schemeClr val="accent1"/>
+          </a:lnRef>
+          <a:fillRef idx="3">
+            <a:schemeClr val="accent1"/>
+          </a:fillRef>
+          <a:effectRef idx="2">
+            <a:schemeClr val="accent1"/>
+          </a:effectRef>
+          <a:fontRef idx="minor">
+            <a:schemeClr val="lt1"/>
+          </a:fontRef>
+        </p:style>
+        <p:txBody>
+          <a:bodyPr rtlCol="0" anchor="ctr"/>
+          <a:lstStyle/>
+          <a:p>
+            <a:pPr algn="ctr"/>
+          </a:p>
+        </p:txBody>
+      </p:sp>
+      <p:sp>
+        <p:nvSpPr>
+          <p:cNvPr id="11" name="Rounded Rectangle 10"/>
+          <p:cNvSpPr/>
+          <p:nvPr/>
+        </p:nvSpPr>
+        <p:spPr>
+          <a:xfrm>
+            <a:off x="594360" y="2680106"/>
+            <a:ext cx="438912" cy="438912"/>
+          </a:xfrm>
+          <a:prstGeom prst="roundRect">
+            <a:avLst>
+              <a:gd name="adj" fmla="val 12000"/>
+            </a:avLst>
+          </a:prstGeom>
+          <a:solidFill>
+            <a:srgbClr val="095292"/>
+          </a:solidFill>
+          <a:ln>
+            <a:noFill/>
+          </a:ln>
+        </p:spPr>
+        <p:style>
+          <a:lnRef idx="1">
+            <a:schemeClr val="accent1"/>
+          </a:lnRef>
+          <a:fillRef idx="3">
+            <a:schemeClr val="accent1"/>
+          </a:fillRef>
+          <a:effectRef idx="2">
+            <a:schemeClr val="accent1"/>
+          </a:effectRef>
+          <a:fontRef idx="minor">
+            <a:schemeClr val="lt1"/>
+          </a:fontRef>
+        </p:style>
+        <p:txBody>
+          <a:bodyPr rtlCol="0" anchor="ctr"/>
+          <a:lstStyle/>
+          <a:p>
+            <a:pPr algn="ctr"/>
+          </a:p>
+        </p:txBody>
+      </p:sp>
+      <p:sp>
+        <p:nvSpPr>
+          <p:cNvPr id="12" name="TextBox 11"/>
+          <p:cNvSpPr txBox="1"/>
+          <p:nvPr/>
+        </p:nvSpPr>
+        <p:spPr>
+          <a:xfrm>
+            <a:off x="594360" y="2680106"/>
+            <a:ext cx="438912" cy="438912"/>
+          </a:xfrm>
+          <a:prstGeom prst="rect">
+            <a:avLst/>
+          </a:prstGeom>
+          <a:noFill/>
+        </p:spPr>
+        <p:txBody>
+          <a:bodyPr wrap="square" anchor="ctr"/>
+          <a:lstStyle/>
+          <a:p>
+            <a:pPr algn="ctr"/>
+            <a:r>
+              <a:rPr sz="1600" b="1" i="0">
+                <a:solidFill>
+                  <a:srgbClr val="FFFFFF"/>
+                </a:solidFill>
+                <a:latin typeface="Calibri"/>
+              </a:rPr>
+              <a:t>2</a:t>
+            </a:r>
+          </a:p>
+        </p:txBody>
+      </p:sp>
+      <p:sp>
+        <p:nvSpPr>
+          <p:cNvPr id="13" name="TextBox 12"/>
+          <p:cNvSpPr txBox="1"/>
+          <p:nvPr/>
+        </p:nvSpPr>
+        <p:spPr>
+          <a:xfrm>
+            <a:off x="1188720" y="2536545"/>
+            <a:ext cx="10271455" cy="744321"/>
+          </a:xfrm>
+          <a:prstGeom prst="rect">
+            <a:avLst/>
+          </a:prstGeom>
+          <a:noFill/>
+        </p:spPr>
+        <p:txBody>
+          <a:bodyPr wrap="square" anchor="ctr"/>
+          <a:lstStyle/>
+          <a:p>
+            <a:r>
+              <a:rPr sz="1500" b="1" i="0">
+                <a:solidFill>
+                  <a:srgbClr val="095292"/>
+                </a:solidFill>
+                <a:latin typeface="Calibri"/>
+              </a:rPr>
+              <a:t>40 s · Quién decidió</a:t>
+            </a:r>
+          </a:p>
+          <a:p>
+            <a:pPr>
+              <a:spcBef>
+                <a:spcPts val="200"/>
+              </a:spcBef>
+            </a:pPr>
+            <a:r>
+              <a:rPr sz="1300" b="0" i="0">
+                <a:solidFill>
+                  <a:srgbClr val="333333"/>
+                </a:solidFill>
+                <a:latin typeface="Calibri"/>
+              </a:rPr>
+              <a:t>La decisión y el rol de quien la tomó. No «la empresa».</a:t>
+            </a:r>
+          </a:p>
+        </p:txBody>
+      </p:sp>
+      <p:sp>
+        <p:nvSpPr>
+          <p:cNvPr id="14" name="Rounded Rectangle 13"/>
+          <p:cNvSpPr/>
+          <p:nvPr/>
+        </p:nvSpPr>
+        <p:spPr>
+          <a:xfrm>
+            <a:off x="457200" y="3445459"/>
+            <a:ext cx="11277295" cy="908913"/>
+          </a:xfrm>
+          <a:prstGeom prst="roundRect">
+            <a:avLst>
+              <a:gd name="adj" fmla="val 12000"/>
+            </a:avLst>
+          </a:prstGeom>
+          <a:solidFill>
+            <a:srgbClr val="F2F2F2"/>
+          </a:solidFill>
+          <a:ln>
+            <a:noFill/>
+          </a:ln>
+        </p:spPr>
+        <p:style>
+          <a:lnRef idx="1">
+            <a:schemeClr val="accent1"/>
+          </a:lnRef>
+          <a:fillRef idx="3">
+            <a:schemeClr val="accent1"/>
+          </a:fillRef>
+          <a:effectRef idx="2">
+            <a:schemeClr val="accent1"/>
+          </a:effectRef>
+          <a:fontRef idx="minor">
+            <a:schemeClr val="lt1"/>
+          </a:fontRef>
+        </p:style>
+        <p:txBody>
+          <a:bodyPr rtlCol="0" anchor="ctr"/>
+          <a:lstStyle/>
+          <a:p>
+            <a:pPr algn="ctr"/>
+          </a:p>
+        </p:txBody>
+      </p:sp>
+      <p:sp>
+        <p:nvSpPr>
+          <p:cNvPr id="15" name="Rounded Rectangle 14"/>
+          <p:cNvSpPr/>
+          <p:nvPr/>
+        </p:nvSpPr>
+        <p:spPr>
+          <a:xfrm>
+            <a:off x="594360" y="3680460"/>
+            <a:ext cx="438912" cy="438912"/>
+          </a:xfrm>
+          <a:prstGeom prst="roundRect">
+            <a:avLst>
+              <a:gd name="adj" fmla="val 12000"/>
+            </a:avLst>
+          </a:prstGeom>
+          <a:solidFill>
+            <a:srgbClr val="095292"/>
+          </a:solidFill>
+          <a:ln>
+            <a:noFill/>
+          </a:ln>
+        </p:spPr>
+        <p:style>
+          <a:lnRef idx="1">
+            <a:schemeClr val="accent1"/>
+          </a:lnRef>
+          <a:fillRef idx="3">
+            <a:schemeClr val="accent1"/>
+          </a:fillRef>
+          <a:effectRef idx="2">
+            <a:schemeClr val="accent1"/>
+          </a:effectRef>
+          <a:fontRef idx="minor">
+            <a:schemeClr val="lt1"/>
+          </a:fontRef>
+        </p:style>
+        <p:txBody>
+          <a:bodyPr rtlCol="0" anchor="ctr"/>
+          <a:lstStyle/>
+          <a:p>
+            <a:pPr algn="ctr"/>
+          </a:p>
+        </p:txBody>
+      </p:sp>
+      <p:sp>
+        <p:nvSpPr>
+          <p:cNvPr id="16" name="TextBox 15"/>
+          <p:cNvSpPr txBox="1"/>
+          <p:nvPr/>
+        </p:nvSpPr>
+        <p:spPr>
+          <a:xfrm>
+            <a:off x="594360" y="3680460"/>
+            <a:ext cx="438912" cy="438912"/>
+          </a:xfrm>
+          <a:prstGeom prst="rect">
+            <a:avLst/>
+          </a:prstGeom>
+          <a:noFill/>
+        </p:spPr>
+        <p:txBody>
+          <a:bodyPr wrap="square" anchor="ctr"/>
+          <a:lstStyle/>
+          <a:p>
+            <a:pPr algn="ctr"/>
+            <a:r>
+              <a:rPr sz="1600" b="1" i="0">
+                <a:solidFill>
+                  <a:srgbClr val="FFFFFF"/>
+                </a:solidFill>
+                <a:latin typeface="Calibri"/>
+              </a:rPr>
+              <a:t>3</a:t>
+            </a:r>
+          </a:p>
+        </p:txBody>
+      </p:sp>
+      <p:sp>
+        <p:nvSpPr>
+          <p:cNvPr id="17" name="TextBox 16"/>
+          <p:cNvSpPr txBox="1"/>
+          <p:nvPr/>
+        </p:nvSpPr>
+        <p:spPr>
+          <a:xfrm>
+            <a:off x="1188720" y="3536899"/>
+            <a:ext cx="10271455" cy="744321"/>
+          </a:xfrm>
+          <a:prstGeom prst="rect">
+            <a:avLst/>
+          </a:prstGeom>
+          <a:noFill/>
+        </p:spPr>
+        <p:txBody>
+          <a:bodyPr wrap="square" anchor="ctr"/>
+          <a:lstStyle/>
+          <a:p>
+            <a:r>
+              <a:rPr sz="1500" b="1" i="0">
+                <a:solidFill>
+                  <a:srgbClr val="095292"/>
+                </a:solidFill>
+                <a:latin typeface="Calibri"/>
+              </a:rPr>
+              <a:t>50 s · El numeral</a:t>
+            </a:r>
+          </a:p>
+          <a:p>
+            <a:pPr>
+              <a:spcBef>
+                <a:spcPts val="200"/>
+              </a:spcBef>
+            </a:pPr>
+            <a:r>
+              <a:rPr sz="1300" b="0" i="0">
+                <a:solidFill>
+                  <a:srgbClr val="333333"/>
+                </a:solidFill>
+                <a:latin typeface="Calibri"/>
+              </a:rPr>
+              <a:t>Lea el principio o el artículo y diga por qué aplica. Es lo que más pesa.</a:t>
+            </a:r>
+          </a:p>
+        </p:txBody>
+      </p:sp>
+      <p:sp>
+        <p:nvSpPr>
+          <p:cNvPr id="18" name="Rounded Rectangle 17"/>
+          <p:cNvSpPr/>
+          <p:nvPr/>
+        </p:nvSpPr>
+        <p:spPr>
+          <a:xfrm>
+            <a:off x="457200" y="4445812"/>
+            <a:ext cx="11277295" cy="908913"/>
+          </a:xfrm>
+          <a:prstGeom prst="roundRect">
+            <a:avLst>
+              <a:gd name="adj" fmla="val 12000"/>
+            </a:avLst>
+          </a:prstGeom>
+          <a:solidFill>
+            <a:srgbClr val="E8F4FA"/>
+          </a:solidFill>
+          <a:ln>
+            <a:noFill/>
+          </a:ln>
+        </p:spPr>
+        <p:style>
+          <a:lnRef idx="1">
+            <a:schemeClr val="accent1"/>
+          </a:lnRef>
+          <a:fillRef idx="3">
+            <a:schemeClr val="accent1"/>
+          </a:fillRef>
+          <a:effectRef idx="2">
+            <a:schemeClr val="accent1"/>
+          </a:effectRef>
+          <a:fontRef idx="minor">
+            <a:schemeClr val="lt1"/>
+          </a:fontRef>
+        </p:style>
+        <p:txBody>
+          <a:bodyPr rtlCol="0" anchor="ctr"/>
+          <a:lstStyle/>
+          <a:p>
+            <a:pPr algn="ctr"/>
+          </a:p>
+        </p:txBody>
+      </p:sp>
+      <p:sp>
+        <p:nvSpPr>
+          <p:cNvPr id="19" name="Rounded Rectangle 18"/>
+          <p:cNvSpPr/>
+          <p:nvPr/>
+        </p:nvSpPr>
+        <p:spPr>
+          <a:xfrm>
+            <a:off x="594360" y="4680813"/>
+            <a:ext cx="438912" cy="438912"/>
+          </a:xfrm>
+          <a:prstGeom prst="roundRect">
+            <a:avLst>
+              <a:gd name="adj" fmla="val 12000"/>
+            </a:avLst>
+          </a:prstGeom>
+          <a:solidFill>
+            <a:srgbClr val="095292"/>
+          </a:solidFill>
+          <a:ln>
+            <a:noFill/>
+          </a:ln>
+        </p:spPr>
+        <p:style>
+          <a:lnRef idx="1">
+            <a:schemeClr val="accent1"/>
+          </a:lnRef>
+          <a:fillRef idx="3">
+            <a:schemeClr val="accent1"/>
+          </a:fillRef>
+          <a:effectRef idx="2">
+            <a:schemeClr val="accent1"/>
+          </a:effectRef>
+          <a:fontRef idx="minor">
+            <a:schemeClr val="lt1"/>
+          </a:fontRef>
+        </p:style>
+        <p:txBody>
+          <a:bodyPr rtlCol="0" anchor="ctr"/>
+          <a:lstStyle/>
+          <a:p>
+            <a:pPr algn="ctr"/>
+          </a:p>
+        </p:txBody>
+      </p:sp>
+      <p:sp>
+        <p:nvSpPr>
+          <p:cNvPr id="20" name="TextBox 19"/>
+          <p:cNvSpPr txBox="1"/>
+          <p:nvPr/>
+        </p:nvSpPr>
+        <p:spPr>
+          <a:xfrm>
+            <a:off x="594360" y="4680813"/>
+            <a:ext cx="438912" cy="438912"/>
+          </a:xfrm>
+          <a:prstGeom prst="rect">
+            <a:avLst/>
+          </a:prstGeom>
+          <a:noFill/>
+        </p:spPr>
+        <p:txBody>
+          <a:bodyPr wrap="square" anchor="ctr"/>
+          <a:lstStyle/>
+          <a:p>
+            <a:pPr algn="ctr"/>
+            <a:r>
+              <a:rPr sz="1600" b="1" i="0">
+                <a:solidFill>
+                  <a:srgbClr val="FFFFFF"/>
+                </a:solidFill>
+                <a:latin typeface="Calibri"/>
+              </a:rPr>
+              <a:t>4</a:t>
+            </a:r>
+          </a:p>
+        </p:txBody>
+      </p:sp>
+      <p:sp>
+        <p:nvSpPr>
+          <p:cNvPr id="21" name="TextBox 20"/>
+          <p:cNvSpPr txBox="1"/>
+          <p:nvPr/>
+        </p:nvSpPr>
+        <p:spPr>
+          <a:xfrm>
+            <a:off x="1188720" y="4537252"/>
+            <a:ext cx="10271455" cy="744321"/>
+          </a:xfrm>
+          <a:prstGeom prst="rect">
+            <a:avLst/>
+          </a:prstGeom>
+          <a:noFill/>
+        </p:spPr>
+        <p:txBody>
+          <a:bodyPr wrap="square" anchor="ctr"/>
+          <a:lstStyle/>
+          <a:p>
+            <a:r>
+              <a:rPr sz="1500" b="1" i="0">
+                <a:solidFill>
+                  <a:srgbClr val="095292"/>
+                </a:solidFill>
+                <a:latin typeface="Calibri"/>
+              </a:rPr>
+              <a:t>50 s · El momento de parar</a:t>
+            </a:r>
+          </a:p>
+          <a:p>
+            <a:pPr>
+              <a:spcBef>
+                <a:spcPts val="200"/>
+              </a:spcBef>
+            </a:pPr>
+            <a:r>
+              <a:rPr sz="1300" b="0" i="0">
+                <a:solidFill>
+                  <a:srgbClr val="333333"/>
+                </a:solidFill>
+                <a:latin typeface="Calibri"/>
+              </a:rPr>
+              <a:t>Cuándo y qué había que hacer. Es el minuto obligatorio.</a:t>
+            </a:r>
+          </a:p>
+        </p:txBody>
+      </p:sp>
+      <p:sp>
+        <p:nvSpPr>
+          <p:cNvPr id="22" name="Rounded Rectangle 21"/>
+          <p:cNvSpPr/>
+          <p:nvPr/>
+        </p:nvSpPr>
+        <p:spPr>
+          <a:xfrm>
+            <a:off x="457200" y="5446166"/>
+            <a:ext cx="11277295" cy="908913"/>
+          </a:xfrm>
+          <a:prstGeom prst="roundRect">
+            <a:avLst>
+              <a:gd name="adj" fmla="val 12000"/>
+            </a:avLst>
+          </a:prstGeom>
+          <a:solidFill>
+            <a:srgbClr val="F2F2F2"/>
+          </a:solidFill>
+          <a:ln>
+            <a:noFill/>
+          </a:ln>
+        </p:spPr>
+        <p:style>
+          <a:lnRef idx="1">
+            <a:schemeClr val="accent1"/>
+          </a:lnRef>
+          <a:fillRef idx="3">
+            <a:schemeClr val="accent1"/>
+          </a:fillRef>
+          <a:effectRef idx="2">
+            <a:schemeClr val="accent1"/>
+          </a:effectRef>
+          <a:fontRef idx="minor">
+            <a:schemeClr val="lt1"/>
+          </a:fontRef>
+        </p:style>
+        <p:txBody>
+          <a:bodyPr rtlCol="0" anchor="ctr"/>
+          <a:lstStyle/>
+          <a:p>
+            <a:pPr algn="ctr"/>
+          </a:p>
+        </p:txBody>
+      </p:sp>
+      <p:sp>
+        <p:nvSpPr>
+          <p:cNvPr id="23" name="Rounded Rectangle 22"/>
+          <p:cNvSpPr/>
+          <p:nvPr/>
+        </p:nvSpPr>
+        <p:spPr>
+          <a:xfrm>
+            <a:off x="594360" y="5681167"/>
+            <a:ext cx="438912" cy="438912"/>
+          </a:xfrm>
+          <a:prstGeom prst="roundRect">
+            <a:avLst>
+              <a:gd name="adj" fmla="val 12000"/>
+            </a:avLst>
+          </a:prstGeom>
+          <a:solidFill>
+            <a:srgbClr val="095292"/>
+          </a:solidFill>
+          <a:ln>
+            <a:noFill/>
+          </a:ln>
+        </p:spPr>
+        <p:style>
+          <a:lnRef idx="1">
+            <a:schemeClr val="accent1"/>
+          </a:lnRef>
+          <a:fillRef idx="3">
+            <a:schemeClr val="accent1"/>
+          </a:fillRef>
+          <a:effectRef idx="2">
+            <a:schemeClr val="accent1"/>
+          </a:effectRef>
+          <a:fontRef idx="minor">
+            <a:schemeClr val="lt1"/>
+          </a:fontRef>
+        </p:style>
+        <p:txBody>
+          <a:bodyPr rtlCol="0" anchor="ctr"/>
+          <a:lstStyle/>
+          <a:p>
+            <a:pPr algn="ctr"/>
+          </a:p>
+        </p:txBody>
+      </p:sp>
+      <p:sp>
+        <p:nvSpPr>
+          <p:cNvPr id="24" name="TextBox 23"/>
+          <p:cNvSpPr txBox="1"/>
+          <p:nvPr/>
+        </p:nvSpPr>
+        <p:spPr>
+          <a:xfrm>
+            <a:off x="594360" y="5681167"/>
+            <a:ext cx="438912" cy="438912"/>
+          </a:xfrm>
+          <a:prstGeom prst="rect">
+            <a:avLst/>
+          </a:prstGeom>
+          <a:noFill/>
+        </p:spPr>
+        <p:txBody>
+          <a:bodyPr wrap="square" anchor="ctr"/>
+          <a:lstStyle/>
+          <a:p>
+            <a:pPr algn="ctr"/>
+            <a:r>
+              <a:rPr sz="1600" b="1" i="0">
+                <a:solidFill>
+                  <a:srgbClr val="FFFFFF"/>
+                </a:solidFill>
+                <a:latin typeface="Calibri"/>
+              </a:rPr>
+              <a:t>5</a:t>
+            </a:r>
+          </a:p>
+        </p:txBody>
+      </p:sp>
+      <p:sp>
+        <p:nvSpPr>
+          <p:cNvPr id="25" name="TextBox 24"/>
+          <p:cNvSpPr txBox="1"/>
+          <p:nvPr/>
+        </p:nvSpPr>
+        <p:spPr>
+          <a:xfrm>
+            <a:off x="1188720" y="5537606"/>
+            <a:ext cx="10271455" cy="744321"/>
+          </a:xfrm>
+          <a:prstGeom prst="rect">
+            <a:avLst/>
+          </a:prstGeom>
+          <a:noFill/>
+        </p:spPr>
+        <p:txBody>
+          <a:bodyPr wrap="square" anchor="ctr"/>
+          <a:lstStyle/>
+          <a:p>
+            <a:r>
+              <a:rPr sz="1500" b="1" i="0">
+                <a:solidFill>
+                  <a:srgbClr val="095292"/>
+                </a:solidFill>
+                <a:latin typeface="Calibri"/>
+              </a:rPr>
+              <a:t>10 s · La regla propia</a:t>
+            </a:r>
+          </a:p>
+          <a:p>
+            <a:pPr>
+              <a:spcBef>
+                <a:spcPts val="200"/>
+              </a:spcBef>
+            </a:pPr>
+            <a:r>
+              <a:rPr sz="1300" b="0" i="0">
+                <a:solidFill>
+                  <a:srgbClr val="333333"/>
+                </a:solidFill>
+                <a:latin typeface="Calibri"/>
+              </a:rPr>
+              <a:t>Una frase, verificable, para su propio proyecto.</a:t>
+            </a:r>
+          </a:p>
+        </p:txBody>
+      </p:sp>
+      <p:sp>
+        <p:nvSpPr>
+          <p:cNvPr id="26" name="TextBox 25"/>
+          <p:cNvSpPr txBox="1"/>
+          <p:nvPr/>
+        </p:nvSpPr>
+        <p:spPr>
+          <a:xfrm>
+            <a:off x="11185855" y="6473952"/>
+            <a:ext cx="640080" cy="274320"/>
+          </a:xfrm>
+          <a:prstGeom prst="rect">
+            <a:avLst/>
+          </a:prstGeom>
+          <a:noFill/>
+        </p:spPr>
+        <p:txBody>
+          <a:bodyPr wrap="square">
+            <a:spAutoFit/>
+          </a:bodyPr>
+          <a:lstStyle/>
+          <a:p>
+            <a:pPr algn="r"/>
+            <a:r>
+              <a:rPr sz="1100" b="0" i="0">
+                <a:solidFill>
+                  <a:srgbClr val="666666"/>
+                </a:solidFill>
+                <a:latin typeface="Calibri"/>
+              </a:rPr>
+              <a:t>26</a:t>
+            </a:r>
+          </a:p>
+        </p:txBody>
+      </p:sp>
+    </p:spTree>
+  </p:cSld>
+  <p:clrMapOvr>
+    <a:masterClrMapping/>
+  </p:clrMapOvr>
+</p:sld>
+</file>
+
+<file path=ppt/slides/slide27.xml><?xml version="1.0" encoding="utf-8"?>
+<p:sld xmlns:a="http://schemas.openxmlformats.org/drawingml/2006/main" xmlns:p="http://schemas.openxmlformats.org/presentationml/2006/main" xmlns:r="http://schemas.openxmlformats.org/officeDocument/2006/relationships">
+  <p:cSld>
+    <p:bg>
+      <p:bgPr>
+        <a:solidFill>
+          <a:srgbClr val="FFFFFF"/>
+        </a:solidFill>
+        <a:effectLst/>
+      </p:bgPr>
+    </p:bg>
+    <p:spTree>
+      <p:nvGrpSpPr>
+        <p:cNvPr id="1" name=""/>
+        <p:cNvGrpSpPr/>
+        <p:nvPr/>
+      </p:nvGrpSpPr>
+      <p:grpSpPr/>
+      <p:sp>
+        <p:nvSpPr>
+          <p:cNvPr id="2" name="Rectangle 1"/>
+          <p:cNvSpPr/>
+          <p:nvPr/>
+        </p:nvSpPr>
+        <p:spPr>
+          <a:xfrm>
+            <a:off x="0" y="0"/>
+            <a:ext cx="12191695" cy="960120"/>
+          </a:xfrm>
+          <a:prstGeom prst="rect">
+            <a:avLst/>
+          </a:prstGeom>
+          <a:solidFill>
+            <a:srgbClr val="095292"/>
+          </a:solidFill>
+          <a:ln>
+            <a:noFill/>
+          </a:ln>
+        </p:spPr>
+        <p:style>
+          <a:lnRef idx="1">
+            <a:schemeClr val="accent1"/>
+          </a:lnRef>
+          <a:fillRef idx="3">
+            <a:schemeClr val="accent1"/>
+          </a:fillRef>
+          <a:effectRef idx="2">
+            <a:schemeClr val="accent1"/>
+          </a:effectRef>
+          <a:fontRef idx="minor">
+            <a:schemeClr val="lt1"/>
+          </a:fontRef>
+        </p:style>
+        <p:txBody>
+          <a:bodyPr rtlCol="0" anchor="ctr"/>
+          <a:lstStyle/>
+          <a:p>
+            <a:pPr algn="ctr"/>
+          </a:p>
+        </p:txBody>
+      </p:sp>
+      <p:sp>
+        <p:nvSpPr>
+          <p:cNvPr id="3" name="Rectangle 2"/>
+          <p:cNvSpPr/>
+          <p:nvPr/>
+        </p:nvSpPr>
+        <p:spPr>
+          <a:xfrm>
+            <a:off x="0" y="960120"/>
+            <a:ext cx="12191695" cy="41148"/>
+          </a:xfrm>
+          <a:prstGeom prst="rect">
+            <a:avLst/>
+          </a:prstGeom>
+          <a:solidFill>
+            <a:srgbClr val="FFD000"/>
+          </a:solidFill>
+          <a:ln>
+            <a:noFill/>
+          </a:ln>
+        </p:spPr>
+        <p:style>
+          <a:lnRef idx="1">
+            <a:schemeClr val="accent1"/>
+          </a:lnRef>
+          <a:fillRef idx="3">
+            <a:schemeClr val="accent1"/>
+          </a:fillRef>
+          <a:effectRef idx="2">
+            <a:schemeClr val="accent1"/>
+          </a:effectRef>
+          <a:fontRef idx="minor">
+            <a:schemeClr val="lt1"/>
+          </a:fontRef>
+        </p:style>
+        <p:txBody>
+          <a:bodyPr rtlCol="0" anchor="ctr"/>
+          <a:lstStyle/>
+          <a:p>
+            <a:pPr algn="ctr"/>
+          </a:p>
+        </p:txBody>
+      </p:sp>
+      <p:sp>
+        <p:nvSpPr>
+          <p:cNvPr id="4" name="TextBox 3"/>
+          <p:cNvSpPr txBox="1"/>
+          <p:nvPr/>
+        </p:nvSpPr>
+        <p:spPr>
+          <a:xfrm>
+            <a:off x="457200" y="164592"/>
+            <a:ext cx="11277295" cy="502920"/>
+          </a:xfrm>
+          <a:prstGeom prst="rect">
+            <a:avLst/>
+          </a:prstGeom>
+          <a:noFill/>
+        </p:spPr>
+        <p:txBody>
+          <a:bodyPr wrap="square">
+            <a:spAutoFit/>
+          </a:bodyPr>
+          <a:lstStyle/>
+          <a:p>
+            <a:r>
+              <a:rPr sz="2600" b="1" i="0">
+                <a:solidFill>
+                  <a:srgbClr val="FFFFFF"/>
+                </a:solidFill>
+                <a:latin typeface="Calibri"/>
+              </a:rPr>
+              <a:t>Para la Clase 5</a:t>
+            </a:r>
+          </a:p>
+        </p:txBody>
+      </p:sp>
+      <p:sp>
+        <p:nvSpPr>
+          <p:cNvPr id="5" name="TextBox 4"/>
+          <p:cNvSpPr txBox="1"/>
+          <p:nvPr/>
+        </p:nvSpPr>
+        <p:spPr>
+          <a:xfrm>
+            <a:off x="457200" y="1170432"/>
+            <a:ext cx="11277295" cy="5230368"/>
+          </a:xfrm>
+          <a:prstGeom prst="rect">
+            <a:avLst/>
+          </a:prstGeom>
+          <a:noFill/>
+        </p:spPr>
+        <p:txBody>
+          <a:bodyPr wrap="square">
+            <a:spAutoFit/>
+          </a:bodyPr>
+          <a:lstStyle/>
+          <a:p>
+            <a:pPr>
+              <a:spcAft>
+                <a:spcPts val="800"/>
+              </a:spcAft>
+            </a:pPr>
+            <a:r>
+              <a:rPr sz="2000" b="0" i="0">
+                <a:solidFill>
+                  <a:srgbClr val="333333"/>
+                </a:solidFill>
+                <a:latin typeface="Calibri"/>
+              </a:rPr>
+              <a:t>–   </a:t>
+            </a:r>
+            <a:r>
+              <a:rPr sz="2000" b="1" i="0">
+                <a:solidFill>
+                  <a:srgbClr val="333333"/>
+                </a:solidFill>
+                <a:latin typeface="Calibri"/>
+              </a:rPr>
+              <a:t>Trabajo dirigido:</a:t>
+            </a:r>
+            <a:r>
+              <a:rPr sz="2000" b="0" i="0">
+                <a:solidFill>
+                  <a:srgbClr val="333333"/>
+                </a:solidFill>
+                <a:latin typeface="Calibri"/>
+              </a:rPr>
+              <a:t> Lectura del código ético — el código ACM/IEEE completo, los ocho principios, y los deberes del ingeniero frente a la sociedad de la Ley 842 de 2003.</a:t>
+            </a:r>
+          </a:p>
+          <a:p>
+            <a:pPr>
+              <a:spcAft>
+                <a:spcPts val="800"/>
+              </a:spcAft>
+            </a:pPr>
+            <a:r>
+              <a:rPr sz="2000" b="0" i="0">
+                <a:solidFill>
+                  <a:srgbClr val="333333"/>
+                </a:solidFill>
+                <a:latin typeface="Calibri"/>
+              </a:rPr>
+              <a:t>–   </a:t>
+            </a:r>
+            <a:r>
+              <a:rPr sz="2000" b="1" i="0">
+                <a:solidFill>
+                  <a:srgbClr val="333333"/>
+                </a:solidFill>
+                <a:latin typeface="Calibri"/>
+              </a:rPr>
+              <a:t>Trabajo independiente:</a:t>
+            </a:r>
+            <a:r>
+              <a:rPr sz="2000" b="0" i="0">
+                <a:solidFill>
+                  <a:srgbClr val="333333"/>
+                </a:solidFill>
+                <a:latin typeface="Calibri"/>
+              </a:rPr>
+              <a:t> Análisis crítico del código ético: media página sobre </a:t>
+            </a:r>
+            <a:r>
+              <a:rPr sz="2000" b="1" i="0">
+                <a:solidFill>
+                  <a:srgbClr val="333333"/>
+                </a:solidFill>
+                <a:latin typeface="Calibri"/>
+              </a:rPr>
+              <a:t>un principio que su equipo cree difícil de cumplir en la práctica</a:t>
+            </a:r>
+            <a:r>
+              <a:rPr sz="2000" b="0" i="0">
+                <a:solidFill>
+                  <a:srgbClr val="333333"/>
+                </a:solidFill>
+                <a:latin typeface="Calibri"/>
+              </a:rPr>
+              <a:t>, con el motivo.</a:t>
+            </a:r>
+          </a:p>
+          <a:p>
+            <a:pPr>
+              <a:spcAft>
+                <a:spcPts val="800"/>
+              </a:spcAft>
+            </a:pPr>
+            <a:r>
+              <a:rPr sz="2000" b="0" i="0">
+                <a:solidFill>
+                  <a:srgbClr val="333333"/>
+                </a:solidFill>
+                <a:latin typeface="Calibri"/>
+              </a:rPr>
+              <a:t>–   </a:t>
+            </a:r>
+            <a:r>
+              <a:rPr sz="2000" b="1" i="0">
+                <a:solidFill>
+                  <a:srgbClr val="333333"/>
+                </a:solidFill>
+                <a:latin typeface="Calibri"/>
+              </a:rPr>
+              <a:t>Clase 5 · El rol del ingeniero en el contexto ambiental</a:t>
+            </a:r>
+            <a:r>
+              <a:rPr sz="2000" b="0" i="0">
+                <a:solidFill>
+                  <a:srgbClr val="333333"/>
+                </a:solidFill>
+                <a:latin typeface="Calibri"/>
+              </a:rPr>
+              <a:t> — el impacto ambiental del software, que es el daño que no tiene una víctima con nombre y que casi nadie mide.</a:t>
+            </a:r>
+          </a:p>
+          <a:p>
+            <a:pPr>
+              <a:spcAft>
+                <a:spcPts val="800"/>
+              </a:spcAft>
+            </a:pPr>
+            <a:r>
+              <a:rPr sz="2000" b="0" i="0">
+                <a:solidFill>
+                  <a:srgbClr val="333333"/>
+                </a:solidFill>
+                <a:latin typeface="Calibri"/>
+              </a:rPr>
+              <a:t>–   </a:t>
+            </a:r>
+            <a:r>
+              <a:rPr sz="2000" b="1" i="0">
+                <a:solidFill>
+                  <a:srgbClr val="333333"/>
+                </a:solidFill>
+                <a:latin typeface="Calibri"/>
+              </a:rPr>
+              <a:t>Aviso:</a:t>
+            </a:r>
+            <a:r>
+              <a:rPr sz="2000" b="0" i="0">
+                <a:solidFill>
+                  <a:srgbClr val="333333"/>
+                </a:solidFill>
+                <a:latin typeface="Calibri"/>
+              </a:rPr>
+              <a:t> Traigan leído el código de ética y la regla propia de hoy escrita en el documento del equipo. En la sesión 6 esa regla entra en la ficha del problema del proyecto.</a:t>
+            </a:r>
+          </a:p>
+          <a:p>
+            <a:pPr>
+              <a:spcAft>
+                <a:spcPts val="800"/>
+              </a:spcAft>
+            </a:pPr>
+            <a:r>
+              <a:rPr sz="2000" b="0" i="0">
+                <a:solidFill>
+                  <a:srgbClr val="333333"/>
+                </a:solidFill>
+                <a:latin typeface="Calibri"/>
+              </a:rPr>
+              <a:t>–   </a:t>
+            </a:r>
+            <a:r>
+              <a:rPr sz="2000" b="1" i="0">
+                <a:solidFill>
+                  <a:srgbClr val="333333"/>
+                </a:solidFill>
+                <a:latin typeface="Calibri"/>
+              </a:rPr>
+              <a:t>Antes de salir:</a:t>
+            </a:r>
+            <a:r>
+              <a:rPr sz="2000" b="0" i="0">
+                <a:solidFill>
+                  <a:srgbClr val="333333"/>
+                </a:solidFill>
+                <a:latin typeface="Calibri"/>
+              </a:rPr>
+              <a:t> el enlace del documento del equipo en el chat, con permiso de lectura para el docente, y el nombre del vocero de hoy.</a:t>
+            </a:r>
+          </a:p>
+        </p:txBody>
+      </p:sp>
+      <p:sp>
+        <p:nvSpPr>
+          <p:cNvPr id="6" name="TextBox 5"/>
+          <p:cNvSpPr txBox="1"/>
+          <p:nvPr/>
+        </p:nvSpPr>
+        <p:spPr>
+          <a:xfrm>
+            <a:off x="11185855" y="6473952"/>
+            <a:ext cx="640080" cy="274320"/>
+          </a:xfrm>
+          <a:prstGeom prst="rect">
+            <a:avLst/>
+          </a:prstGeom>
+          <a:noFill/>
+        </p:spPr>
+        <p:txBody>
+          <a:bodyPr wrap="square">
+            <a:spAutoFit/>
+          </a:bodyPr>
+          <a:lstStyle/>
+          <a:p>
+            <a:pPr algn="r"/>
+            <a:r>
+              <a:rPr sz="1100" b="0" i="0">
+                <a:solidFill>
+                  <a:srgbClr val="666666"/>
+                </a:solidFill>
+                <a:latin typeface="Calibri"/>
+              </a:rPr>
+              <a:t>27</a:t>
+            </a:r>
+          </a:p>
+        </p:txBody>
+      </p:sp>
+    </p:spTree>
+  </p:cSld>
+  <p:clrMapOvr>
+    <a:masterClrMapping/>
+  </p:clrMapOvr>
+</p:sld>
+</file>
+
+<file path=ppt/slides/slide28.xml><?xml version="1.0" encoding="utf-8"?>
 <p:sld xmlns:a="http://schemas.openxmlformats.org/drawingml/2006/main" xmlns:p="http://schemas.openxmlformats.org/presentationml/2006/main" xmlns:r="http://schemas.openxmlformats.org/officeDocument/2006/relationships">
   <p:cSld>
     <p:bg>

--- a/Introduccion a la Ingenieria/Clases/Clase 4 - Principios eticos en la Ingenieria/Presentacion.pptx
+++ b/Introduccion a la Ingenieria/Clases/Clase 4 - Principios eticos en la Ingenieria/Presentacion.pptx
@@ -20,9 +20,6 @@
     <p:sldId id="268" r:id="rId20"/>
     <p:sldId id="269" r:id="rId21"/>
     <p:sldId id="270" r:id="rId22"/>
-    <p:sldId id="271" r:id="rId23"/>
-    <p:sldId id="272" r:id="rId24"/>
-    <p:sldId id="273" r:id="rId25"/>
   </p:sldIdLst>
   <p:sldSz cx="12191695" cy="6858000" type="screen4x3"/>
   <p:notesSz cx="6858000" cy="9144000"/>
@@ -9027,2607 +9024,6 @@
         <p:spPr>
           <a:xfrm>
             <a:off x="0" y="0"/>
-            <a:ext cx="12191695" cy="1170432"/>
-          </a:xfrm>
-          <a:prstGeom prst="rect">
-            <a:avLst/>
-          </a:prstGeom>
-          <a:solidFill>
-            <a:srgbClr val="095292"/>
-          </a:solidFill>
-          <a:ln>
-            <a:noFill/>
-          </a:ln>
-        </p:spPr>
-        <p:style>
-          <a:lnRef idx="1">
-            <a:schemeClr val="accent1"/>
-          </a:lnRef>
-          <a:fillRef idx="3">
-            <a:schemeClr val="accent1"/>
-          </a:fillRef>
-          <a:effectRef idx="2">
-            <a:schemeClr val="accent1"/>
-          </a:effectRef>
-          <a:fontRef idx="minor">
-            <a:schemeClr val="lt1"/>
-          </a:fontRef>
-        </p:style>
-        <p:txBody>
-          <a:bodyPr rtlCol="0" anchor="ctr"/>
-          <a:lstStyle/>
-          <a:p>
-            <a:pPr algn="ctr"/>
-          </a:p>
-        </p:txBody>
-      </p:sp>
-      <p:sp>
-        <p:nvSpPr>
-          <p:cNvPr id="3" name="Rectangle 2"/>
-          <p:cNvSpPr/>
-          <p:nvPr/>
-        </p:nvSpPr>
-        <p:spPr>
-          <a:xfrm>
-            <a:off x="0" y="1170432"/>
-            <a:ext cx="12191695" cy="41148"/>
-          </a:xfrm>
-          <a:prstGeom prst="rect">
-            <a:avLst/>
-          </a:prstGeom>
-          <a:solidFill>
-            <a:srgbClr val="FFD000"/>
-          </a:solidFill>
-          <a:ln>
-            <a:noFill/>
-          </a:ln>
-        </p:spPr>
-        <p:style>
-          <a:lnRef idx="1">
-            <a:schemeClr val="accent1"/>
-          </a:lnRef>
-          <a:fillRef idx="3">
-            <a:schemeClr val="accent1"/>
-          </a:fillRef>
-          <a:effectRef idx="2">
-            <a:schemeClr val="accent1"/>
-          </a:effectRef>
-          <a:fontRef idx="minor">
-            <a:schemeClr val="lt1"/>
-          </a:fontRef>
-        </p:style>
-        <p:txBody>
-          <a:bodyPr rtlCol="0" anchor="ctr"/>
-          <a:lstStyle/>
-          <a:p>
-            <a:pPr algn="ctr"/>
-          </a:p>
-        </p:txBody>
-      </p:sp>
-      <p:sp>
-        <p:nvSpPr>
-          <p:cNvPr id="4" name="TextBox 3"/>
-          <p:cNvSpPr txBox="1"/>
-          <p:nvPr/>
-        </p:nvSpPr>
-        <p:spPr>
-          <a:xfrm>
-            <a:off x="457200" y="164592"/>
-            <a:ext cx="11277295" cy="384048"/>
-          </a:xfrm>
-          <a:prstGeom prst="rect">
-            <a:avLst/>
-          </a:prstGeom>
-          <a:noFill/>
-        </p:spPr>
-        <p:txBody>
-          <a:bodyPr wrap="square">
-            <a:spAutoFit/>
-          </a:bodyPr>
-          <a:lstStyle/>
-          <a:p>
-            <a:r>
-              <a:rPr sz="2600" b="1" i="0">
-                <a:solidFill>
-                  <a:srgbClr val="FFFFFF"/>
-                </a:solidFill>
-                <a:latin typeface="Calibri"/>
-              </a:rPr>
-              <a:t>Taller de hoy: Comité de ética</a:t>
-            </a:r>
-          </a:p>
-        </p:txBody>
-      </p:sp>
-      <p:sp>
-        <p:nvSpPr>
-          <p:cNvPr id="5" name="TextBox 4"/>
-          <p:cNvSpPr txBox="1"/>
-          <p:nvPr/>
-        </p:nvSpPr>
-        <p:spPr>
-          <a:xfrm>
-            <a:off x="457200" y="566928"/>
-            <a:ext cx="11277295" cy="411480"/>
-          </a:xfrm>
-          <a:prstGeom prst="rect">
-            <a:avLst/>
-          </a:prstGeom>
-          <a:noFill/>
-        </p:spPr>
-        <p:txBody>
-          <a:bodyPr wrap="square">
-            <a:spAutoFit/>
-          </a:bodyPr>
-          <a:lstStyle/>
-          <a:p>
-            <a:r>
-              <a:rPr sz="1400" b="0" i="0">
-                <a:solidFill>
-                  <a:srgbClr val="B8D8EE"/>
-                </a:solidFill>
-                <a:latin typeface="Calibri"/>
-              </a:rPr>
-              <a:t>17 min en equipos · un caso por equipo, del 1 al 5 · acta del comité con el numeral citado</a:t>
-            </a:r>
-          </a:p>
-        </p:txBody>
-      </p:sp>
-      <p:sp>
-        <p:nvSpPr>
-          <p:cNvPr id="6" name="Rounded Rectangle 5"/>
-          <p:cNvSpPr/>
-          <p:nvPr/>
-        </p:nvSpPr>
-        <p:spPr>
-          <a:xfrm>
-            <a:off x="457200" y="1472184"/>
-            <a:ext cx="11277295" cy="566928"/>
-          </a:xfrm>
-          <a:prstGeom prst="roundRect">
-            <a:avLst>
-              <a:gd name="adj" fmla="val 12000"/>
-            </a:avLst>
-          </a:prstGeom>
-          <a:solidFill>
-            <a:srgbClr val="F2F2F2"/>
-          </a:solidFill>
-          <a:ln>
-            <a:noFill/>
-          </a:ln>
-        </p:spPr>
-        <p:style>
-          <a:lnRef idx="1">
-            <a:schemeClr val="accent1"/>
-          </a:lnRef>
-          <a:fillRef idx="3">
-            <a:schemeClr val="accent1"/>
-          </a:fillRef>
-          <a:effectRef idx="2">
-            <a:schemeClr val="accent1"/>
-          </a:effectRef>
-          <a:fontRef idx="minor">
-            <a:schemeClr val="lt1"/>
-          </a:fontRef>
-        </p:style>
-        <p:txBody>
-          <a:bodyPr rtlCol="0" anchor="ctr"/>
-          <a:lstStyle/>
-          <a:p>
-            <a:pPr algn="ctr"/>
-          </a:p>
-        </p:txBody>
-      </p:sp>
-      <p:sp>
-        <p:nvSpPr>
-          <p:cNvPr id="7" name="Rectangle 6"/>
-          <p:cNvSpPr/>
-          <p:nvPr/>
-        </p:nvSpPr>
-        <p:spPr>
-          <a:xfrm>
-            <a:off x="640080" y="1618487"/>
-            <a:ext cx="274320" cy="274320"/>
-          </a:xfrm>
-          <a:prstGeom prst="rect">
-            <a:avLst/>
-          </a:prstGeom>
-          <a:solidFill>
-            <a:srgbClr val="FFFFFF"/>
-          </a:solidFill>
-          <a:ln>
-            <a:solidFill>
-              <a:srgbClr val="333333"/>
-            </a:solidFill>
-          </a:ln>
-        </p:spPr>
-        <p:style>
-          <a:lnRef idx="1">
-            <a:schemeClr val="accent1"/>
-          </a:lnRef>
-          <a:fillRef idx="3">
-            <a:schemeClr val="accent1"/>
-          </a:fillRef>
-          <a:effectRef idx="2">
-            <a:schemeClr val="accent1"/>
-          </a:effectRef>
-          <a:fontRef idx="minor">
-            <a:schemeClr val="lt1"/>
-          </a:fontRef>
-        </p:style>
-        <p:txBody>
-          <a:bodyPr rtlCol="0" anchor="ctr"/>
-          <a:lstStyle/>
-          <a:p>
-            <a:pPr algn="ctr"/>
-          </a:p>
-        </p:txBody>
-      </p:sp>
-      <p:sp>
-        <p:nvSpPr>
-          <p:cNvPr id="8" name="Rectangle 7"/>
-          <p:cNvSpPr/>
-          <p:nvPr/>
-        </p:nvSpPr>
-        <p:spPr>
-          <a:xfrm>
-            <a:off x="640080" y="1618487"/>
-            <a:ext cx="73152" cy="274320"/>
-          </a:xfrm>
-          <a:prstGeom prst="rect">
-            <a:avLst/>
-          </a:prstGeom>
-          <a:solidFill>
-            <a:srgbClr val="269CCB"/>
-          </a:solidFill>
-          <a:ln>
-            <a:noFill/>
-          </a:ln>
-        </p:spPr>
-        <p:style>
-          <a:lnRef idx="1">
-            <a:schemeClr val="accent1"/>
-          </a:lnRef>
-          <a:fillRef idx="3">
-            <a:schemeClr val="accent1"/>
-          </a:fillRef>
-          <a:effectRef idx="2">
-            <a:schemeClr val="accent1"/>
-          </a:effectRef>
-          <a:fontRef idx="minor">
-            <a:schemeClr val="lt1"/>
-          </a:fontRef>
-        </p:style>
-        <p:txBody>
-          <a:bodyPr rtlCol="0" anchor="ctr"/>
-          <a:lstStyle/>
-          <a:p>
-            <a:pPr algn="ctr"/>
-          </a:p>
-        </p:txBody>
-      </p:sp>
-      <p:sp>
-        <p:nvSpPr>
-          <p:cNvPr id="9" name="TextBox 8"/>
-          <p:cNvSpPr txBox="1"/>
-          <p:nvPr/>
-        </p:nvSpPr>
-        <p:spPr>
-          <a:xfrm>
-            <a:off x="1097280" y="1563624"/>
-            <a:ext cx="10362895" cy="402336"/>
-          </a:xfrm>
-          <a:prstGeom prst="rect">
-            <a:avLst/>
-          </a:prstGeom>
-          <a:noFill/>
-        </p:spPr>
-        <p:txBody>
-          <a:bodyPr wrap="square" anchor="ctr"/>
-          <a:lstStyle/>
-          <a:p>
-            <a:r>
-              <a:rPr sz="1500" b="1" i="0">
-                <a:solidFill>
-                  <a:srgbClr val="333333"/>
-                </a:solidFill>
-                <a:latin typeface="Calibri"/>
-              </a:rPr>
-              <a:t>LOS HECHOS, SIN ADJETIVOS</a:t>
-            </a:r>
-            <a:r>
-              <a:rPr sz="1500" b="0" i="0">
-                <a:solidFill>
-                  <a:srgbClr val="333333"/>
-                </a:solidFill>
-                <a:latin typeface="Calibri"/>
-              </a:rPr>
-              <a:t> — Qué pasó, en cinco líneas máximo: qué sistema era, qué hizo, a quién afectó y cómo se supo. Sin opinión todavía.</a:t>
-            </a:r>
-          </a:p>
-        </p:txBody>
-      </p:sp>
-      <p:sp>
-        <p:nvSpPr>
-          <p:cNvPr id="10" name="Rounded Rectangle 9"/>
-          <p:cNvSpPr/>
-          <p:nvPr/>
-        </p:nvSpPr>
-        <p:spPr>
-          <a:xfrm>
-            <a:off x="457200" y="2148839"/>
-            <a:ext cx="11277295" cy="566928"/>
-          </a:xfrm>
-          <a:prstGeom prst="roundRect">
-            <a:avLst>
-              <a:gd name="adj" fmla="val 12000"/>
-            </a:avLst>
-          </a:prstGeom>
-          <a:solidFill>
-            <a:srgbClr val="F2F2F2"/>
-          </a:solidFill>
-          <a:ln>
-            <a:noFill/>
-          </a:ln>
-        </p:spPr>
-        <p:style>
-          <a:lnRef idx="1">
-            <a:schemeClr val="accent1"/>
-          </a:lnRef>
-          <a:fillRef idx="3">
-            <a:schemeClr val="accent1"/>
-          </a:fillRef>
-          <a:effectRef idx="2">
-            <a:schemeClr val="accent1"/>
-          </a:effectRef>
-          <a:fontRef idx="minor">
-            <a:schemeClr val="lt1"/>
-          </a:fontRef>
-        </p:style>
-        <p:txBody>
-          <a:bodyPr rtlCol="0" anchor="ctr"/>
-          <a:lstStyle/>
-          <a:p>
-            <a:pPr algn="ctr"/>
-          </a:p>
-        </p:txBody>
-      </p:sp>
-      <p:sp>
-        <p:nvSpPr>
-          <p:cNvPr id="11" name="Rectangle 10"/>
-          <p:cNvSpPr/>
-          <p:nvPr/>
-        </p:nvSpPr>
-        <p:spPr>
-          <a:xfrm>
-            <a:off x="640080" y="2295144"/>
-            <a:ext cx="274320" cy="274320"/>
-          </a:xfrm>
-          <a:prstGeom prst="rect">
-            <a:avLst/>
-          </a:prstGeom>
-          <a:solidFill>
-            <a:srgbClr val="FFFFFF"/>
-          </a:solidFill>
-          <a:ln>
-            <a:solidFill>
-              <a:srgbClr val="333333"/>
-            </a:solidFill>
-          </a:ln>
-        </p:spPr>
-        <p:style>
-          <a:lnRef idx="1">
-            <a:schemeClr val="accent1"/>
-          </a:lnRef>
-          <a:fillRef idx="3">
-            <a:schemeClr val="accent1"/>
-          </a:fillRef>
-          <a:effectRef idx="2">
-            <a:schemeClr val="accent1"/>
-          </a:effectRef>
-          <a:fontRef idx="minor">
-            <a:schemeClr val="lt1"/>
-          </a:fontRef>
-        </p:style>
-        <p:txBody>
-          <a:bodyPr rtlCol="0" anchor="ctr"/>
-          <a:lstStyle/>
-          <a:p>
-            <a:pPr algn="ctr"/>
-          </a:p>
-        </p:txBody>
-      </p:sp>
-      <p:sp>
-        <p:nvSpPr>
-          <p:cNvPr id="12" name="Rectangle 11"/>
-          <p:cNvSpPr/>
-          <p:nvPr/>
-        </p:nvSpPr>
-        <p:spPr>
-          <a:xfrm>
-            <a:off x="640080" y="2295144"/>
-            <a:ext cx="73152" cy="274320"/>
-          </a:xfrm>
-          <a:prstGeom prst="rect">
-            <a:avLst/>
-          </a:prstGeom>
-          <a:solidFill>
-            <a:srgbClr val="269CCB"/>
-          </a:solidFill>
-          <a:ln>
-            <a:noFill/>
-          </a:ln>
-        </p:spPr>
-        <p:style>
-          <a:lnRef idx="1">
-            <a:schemeClr val="accent1"/>
-          </a:lnRef>
-          <a:fillRef idx="3">
-            <a:schemeClr val="accent1"/>
-          </a:fillRef>
-          <a:effectRef idx="2">
-            <a:schemeClr val="accent1"/>
-          </a:effectRef>
-          <a:fontRef idx="minor">
-            <a:schemeClr val="lt1"/>
-          </a:fontRef>
-        </p:style>
-        <p:txBody>
-          <a:bodyPr rtlCol="0" anchor="ctr"/>
-          <a:lstStyle/>
-          <a:p>
-            <a:pPr algn="ctr"/>
-          </a:p>
-        </p:txBody>
-      </p:sp>
-      <p:sp>
-        <p:nvSpPr>
-          <p:cNvPr id="13" name="TextBox 12"/>
-          <p:cNvSpPr txBox="1"/>
-          <p:nvPr/>
-        </p:nvSpPr>
-        <p:spPr>
-          <a:xfrm>
-            <a:off x="1097280" y="2240279"/>
-            <a:ext cx="10362895" cy="402336"/>
-          </a:xfrm>
-          <a:prstGeom prst="rect">
-            <a:avLst/>
-          </a:prstGeom>
-          <a:noFill/>
-        </p:spPr>
-        <p:txBody>
-          <a:bodyPr wrap="square" anchor="ctr"/>
-          <a:lstStyle/>
-          <a:p>
-            <a:r>
-              <a:rPr sz="1500" b="1" i="0">
-                <a:solidFill>
-                  <a:srgbClr val="333333"/>
-                </a:solidFill>
-                <a:latin typeface="Calibri"/>
-              </a:rPr>
-              <a:t>QUIÉN DECIDIÓ QUÉ</a:t>
-            </a:r>
-            <a:r>
-              <a:rPr sz="1500" b="0" i="0">
-                <a:solidFill>
-                  <a:srgbClr val="333333"/>
-                </a:solidFill>
-                <a:latin typeface="Calibri"/>
-              </a:rPr>
-              <a:t> — La decisión concreta que causó el daño y </a:t>
-            </a:r>
-            <a:r>
-              <a:rPr sz="1500" b="1" i="0">
-                <a:solidFill>
-                  <a:srgbClr val="333333"/>
-                </a:solidFill>
-                <a:latin typeface="Calibri"/>
-              </a:rPr>
-              <a:t>quién la tomó</a:t>
-            </a:r>
-            <a:r>
-              <a:rPr sz="1500" b="0" i="0">
-                <a:solidFill>
-                  <a:srgbClr val="333333"/>
-                </a:solidFill>
-                <a:latin typeface="Calibri"/>
-              </a:rPr>
-              <a:t> (el rol: el diseñador, el gerente de producto, el ingeniero que ejecutó). Si fueron varias personas en cadena, escriban la cadena.</a:t>
-            </a:r>
-          </a:p>
-        </p:txBody>
-      </p:sp>
-      <p:sp>
-        <p:nvSpPr>
-          <p:cNvPr id="14" name="Rounded Rectangle 13"/>
-          <p:cNvSpPr/>
-          <p:nvPr/>
-        </p:nvSpPr>
-        <p:spPr>
-          <a:xfrm>
-            <a:off x="457200" y="2825496"/>
-            <a:ext cx="11277295" cy="566928"/>
-          </a:xfrm>
-          <a:prstGeom prst="roundRect">
-            <a:avLst>
-              <a:gd name="adj" fmla="val 12000"/>
-            </a:avLst>
-          </a:prstGeom>
-          <a:solidFill>
-            <a:srgbClr val="F2F2F2"/>
-          </a:solidFill>
-          <a:ln>
-            <a:noFill/>
-          </a:ln>
-        </p:spPr>
-        <p:style>
-          <a:lnRef idx="1">
-            <a:schemeClr val="accent1"/>
-          </a:lnRef>
-          <a:fillRef idx="3">
-            <a:schemeClr val="accent1"/>
-          </a:fillRef>
-          <a:effectRef idx="2">
-            <a:schemeClr val="accent1"/>
-          </a:effectRef>
-          <a:fontRef idx="minor">
-            <a:schemeClr val="lt1"/>
-          </a:fontRef>
-        </p:style>
-        <p:txBody>
-          <a:bodyPr rtlCol="0" anchor="ctr"/>
-          <a:lstStyle/>
-          <a:p>
-            <a:pPr algn="ctr"/>
-          </a:p>
-        </p:txBody>
-      </p:sp>
-      <p:sp>
-        <p:nvSpPr>
-          <p:cNvPr id="15" name="Rectangle 14"/>
-          <p:cNvSpPr/>
-          <p:nvPr/>
-        </p:nvSpPr>
-        <p:spPr>
-          <a:xfrm>
-            <a:off x="640080" y="2971800"/>
-            <a:ext cx="274320" cy="274320"/>
-          </a:xfrm>
-          <a:prstGeom prst="rect">
-            <a:avLst/>
-          </a:prstGeom>
-          <a:solidFill>
-            <a:srgbClr val="FFFFFF"/>
-          </a:solidFill>
-          <a:ln>
-            <a:solidFill>
-              <a:srgbClr val="333333"/>
-            </a:solidFill>
-          </a:ln>
-        </p:spPr>
-        <p:style>
-          <a:lnRef idx="1">
-            <a:schemeClr val="accent1"/>
-          </a:lnRef>
-          <a:fillRef idx="3">
-            <a:schemeClr val="accent1"/>
-          </a:fillRef>
-          <a:effectRef idx="2">
-            <a:schemeClr val="accent1"/>
-          </a:effectRef>
-          <a:fontRef idx="minor">
-            <a:schemeClr val="lt1"/>
-          </a:fontRef>
-        </p:style>
-        <p:txBody>
-          <a:bodyPr rtlCol="0" anchor="ctr"/>
-          <a:lstStyle/>
-          <a:p>
-            <a:pPr algn="ctr"/>
-          </a:p>
-        </p:txBody>
-      </p:sp>
-      <p:sp>
-        <p:nvSpPr>
-          <p:cNvPr id="16" name="Rectangle 15"/>
-          <p:cNvSpPr/>
-          <p:nvPr/>
-        </p:nvSpPr>
-        <p:spPr>
-          <a:xfrm>
-            <a:off x="640080" y="2971800"/>
-            <a:ext cx="73152" cy="274320"/>
-          </a:xfrm>
-          <a:prstGeom prst="rect">
-            <a:avLst/>
-          </a:prstGeom>
-          <a:solidFill>
-            <a:srgbClr val="269CCB"/>
-          </a:solidFill>
-          <a:ln>
-            <a:noFill/>
-          </a:ln>
-        </p:spPr>
-        <p:style>
-          <a:lnRef idx="1">
-            <a:schemeClr val="accent1"/>
-          </a:lnRef>
-          <a:fillRef idx="3">
-            <a:schemeClr val="accent1"/>
-          </a:fillRef>
-          <a:effectRef idx="2">
-            <a:schemeClr val="accent1"/>
-          </a:effectRef>
-          <a:fontRef idx="minor">
-            <a:schemeClr val="lt1"/>
-          </a:fontRef>
-        </p:style>
-        <p:txBody>
-          <a:bodyPr rtlCol="0" anchor="ctr"/>
-          <a:lstStyle/>
-          <a:p>
-            <a:pPr algn="ctr"/>
-          </a:p>
-        </p:txBody>
-      </p:sp>
-      <p:sp>
-        <p:nvSpPr>
-          <p:cNvPr id="17" name="TextBox 16"/>
-          <p:cNvSpPr txBox="1"/>
-          <p:nvPr/>
-        </p:nvSpPr>
-        <p:spPr>
-          <a:xfrm>
-            <a:off x="1097280" y="2916936"/>
-            <a:ext cx="10362895" cy="402336"/>
-          </a:xfrm>
-          <a:prstGeom prst="rect">
-            <a:avLst/>
-          </a:prstGeom>
-          <a:noFill/>
-        </p:spPr>
-        <p:txBody>
-          <a:bodyPr wrap="square" anchor="ctr"/>
-          <a:lstStyle/>
-          <a:p>
-            <a:r>
-              <a:rPr sz="1500" b="1" i="0">
-                <a:solidFill>
-                  <a:srgbClr val="333333"/>
-                </a:solidFill>
-                <a:latin typeface="Calibri"/>
-              </a:rPr>
-              <a:t>EL NUMERAL QUE SE VIOLÓ</a:t>
-            </a:r>
-            <a:r>
-              <a:rPr sz="1500" b="0" i="0">
-                <a:solidFill>
-                  <a:srgbClr val="333333"/>
-                </a:solidFill>
-                <a:latin typeface="Calibri"/>
-              </a:rPr>
-              <a:t> — Cite </a:t>
-            </a:r>
-            <a:r>
-              <a:rPr sz="1500" b="1" i="0">
-                <a:solidFill>
-                  <a:srgbClr val="333333"/>
-                </a:solidFill>
-                <a:latin typeface="Calibri"/>
-              </a:rPr>
-              <a:t>literalmente</a:t>
-            </a:r>
-            <a:r>
-              <a:rPr sz="1500" b="0" i="0">
-                <a:solidFill>
-                  <a:srgbClr val="333333"/>
-                </a:solidFill>
-                <a:latin typeface="Calibri"/>
-              </a:rPr>
-              <a:t> al menos un principio del código ACM/IEEE o un artículo de la Ley 842 de 2003, la Ley 1581 de 2012 o la Ley 1273 de 2009, y explique en dos líneas por qué aplica a este caso.</a:t>
-            </a:r>
-          </a:p>
-        </p:txBody>
-      </p:sp>
-      <p:sp>
-        <p:nvSpPr>
-          <p:cNvPr id="18" name="Rounded Rectangle 17"/>
-          <p:cNvSpPr/>
-          <p:nvPr/>
-        </p:nvSpPr>
-        <p:spPr>
-          <a:xfrm>
-            <a:off x="457200" y="3502152"/>
-            <a:ext cx="11277295" cy="566928"/>
-          </a:xfrm>
-          <a:prstGeom prst="roundRect">
-            <a:avLst>
-              <a:gd name="adj" fmla="val 12000"/>
-            </a:avLst>
-          </a:prstGeom>
-          <a:solidFill>
-            <a:srgbClr val="F2F2F2"/>
-          </a:solidFill>
-          <a:ln>
-            <a:noFill/>
-          </a:ln>
-        </p:spPr>
-        <p:style>
-          <a:lnRef idx="1">
-            <a:schemeClr val="accent1"/>
-          </a:lnRef>
-          <a:fillRef idx="3">
-            <a:schemeClr val="accent1"/>
-          </a:fillRef>
-          <a:effectRef idx="2">
-            <a:schemeClr val="accent1"/>
-          </a:effectRef>
-          <a:fontRef idx="minor">
-            <a:schemeClr val="lt1"/>
-          </a:fontRef>
-        </p:style>
-        <p:txBody>
-          <a:bodyPr rtlCol="0" anchor="ctr"/>
-          <a:lstStyle/>
-          <a:p>
-            <a:pPr algn="ctr"/>
-          </a:p>
-        </p:txBody>
-      </p:sp>
-      <p:sp>
-        <p:nvSpPr>
-          <p:cNvPr id="19" name="Rectangle 18"/>
-          <p:cNvSpPr/>
-          <p:nvPr/>
-        </p:nvSpPr>
-        <p:spPr>
-          <a:xfrm>
-            <a:off x="640080" y="3648456"/>
-            <a:ext cx="274320" cy="274320"/>
-          </a:xfrm>
-          <a:prstGeom prst="rect">
-            <a:avLst/>
-          </a:prstGeom>
-          <a:solidFill>
-            <a:srgbClr val="FFFFFF"/>
-          </a:solidFill>
-          <a:ln>
-            <a:solidFill>
-              <a:srgbClr val="333333"/>
-            </a:solidFill>
-          </a:ln>
-        </p:spPr>
-        <p:style>
-          <a:lnRef idx="1">
-            <a:schemeClr val="accent1"/>
-          </a:lnRef>
-          <a:fillRef idx="3">
-            <a:schemeClr val="accent1"/>
-          </a:fillRef>
-          <a:effectRef idx="2">
-            <a:schemeClr val="accent1"/>
-          </a:effectRef>
-          <a:fontRef idx="minor">
-            <a:schemeClr val="lt1"/>
-          </a:fontRef>
-        </p:style>
-        <p:txBody>
-          <a:bodyPr rtlCol="0" anchor="ctr"/>
-          <a:lstStyle/>
-          <a:p>
-            <a:pPr algn="ctr"/>
-          </a:p>
-        </p:txBody>
-      </p:sp>
-      <p:sp>
-        <p:nvSpPr>
-          <p:cNvPr id="20" name="Rectangle 19"/>
-          <p:cNvSpPr/>
-          <p:nvPr/>
-        </p:nvSpPr>
-        <p:spPr>
-          <a:xfrm>
-            <a:off x="640080" y="3648456"/>
-            <a:ext cx="73152" cy="274320"/>
-          </a:xfrm>
-          <a:prstGeom prst="rect">
-            <a:avLst/>
-          </a:prstGeom>
-          <a:solidFill>
-            <a:srgbClr val="269CCB"/>
-          </a:solidFill>
-          <a:ln>
-            <a:noFill/>
-          </a:ln>
-        </p:spPr>
-        <p:style>
-          <a:lnRef idx="1">
-            <a:schemeClr val="accent1"/>
-          </a:lnRef>
-          <a:fillRef idx="3">
-            <a:schemeClr val="accent1"/>
-          </a:fillRef>
-          <a:effectRef idx="2">
-            <a:schemeClr val="accent1"/>
-          </a:effectRef>
-          <a:fontRef idx="minor">
-            <a:schemeClr val="lt1"/>
-          </a:fontRef>
-        </p:style>
-        <p:txBody>
-          <a:bodyPr rtlCol="0" anchor="ctr"/>
-          <a:lstStyle/>
-          <a:p>
-            <a:pPr algn="ctr"/>
-          </a:p>
-        </p:txBody>
-      </p:sp>
-      <p:sp>
-        <p:nvSpPr>
-          <p:cNvPr id="21" name="TextBox 20"/>
-          <p:cNvSpPr txBox="1"/>
-          <p:nvPr/>
-        </p:nvSpPr>
-        <p:spPr>
-          <a:xfrm>
-            <a:off x="1097280" y="3593592"/>
-            <a:ext cx="10362895" cy="402336"/>
-          </a:xfrm>
-          <a:prstGeom prst="rect">
-            <a:avLst/>
-          </a:prstGeom>
-          <a:noFill/>
-        </p:spPr>
-        <p:txBody>
-          <a:bodyPr wrap="square" anchor="ctr"/>
-          <a:lstStyle/>
-          <a:p>
-            <a:r>
-              <a:rPr sz="1500" b="1" i="0">
-                <a:solidFill>
-                  <a:srgbClr val="333333"/>
-                </a:solidFill>
-                <a:latin typeface="Calibri"/>
-              </a:rPr>
-              <a:t>EL MOMENTO EN QUE SE PUDO PARAR</a:t>
-            </a:r>
-            <a:r>
-              <a:rPr sz="1500" b="0" i="0">
-                <a:solidFill>
-                  <a:srgbClr val="333333"/>
-                </a:solidFill>
-                <a:latin typeface="Calibri"/>
-              </a:rPr>
-              <a:t> — El momento </a:t>
-            </a:r>
-            <a:r>
-              <a:rPr sz="1500" b="1" i="0">
-                <a:solidFill>
-                  <a:srgbClr val="333333"/>
-                </a:solidFill>
-                <a:latin typeface="Calibri"/>
-              </a:rPr>
-              <a:t>más temprano</a:t>
-            </a:r>
-            <a:r>
-              <a:rPr sz="1500" b="0" i="0">
-                <a:solidFill>
-                  <a:srgbClr val="333333"/>
-                </a:solidFill>
-                <a:latin typeface="Calibri"/>
-              </a:rPr>
-              <a:t> en que alguien con la información disponible podía cambiar el resultado, y qué debía hacer exactamente ahí (a quién decirle qué, y por escrito o no).</a:t>
-            </a:r>
-          </a:p>
-        </p:txBody>
-      </p:sp>
-      <p:sp>
-        <p:nvSpPr>
-          <p:cNvPr id="22" name="Rounded Rectangle 21"/>
-          <p:cNvSpPr/>
-          <p:nvPr/>
-        </p:nvSpPr>
-        <p:spPr>
-          <a:xfrm>
-            <a:off x="457200" y="4178808"/>
-            <a:ext cx="11277295" cy="566928"/>
-          </a:xfrm>
-          <a:prstGeom prst="roundRect">
-            <a:avLst>
-              <a:gd name="adj" fmla="val 12000"/>
-            </a:avLst>
-          </a:prstGeom>
-          <a:solidFill>
-            <a:srgbClr val="F2F2F2"/>
-          </a:solidFill>
-          <a:ln>
-            <a:noFill/>
-          </a:ln>
-        </p:spPr>
-        <p:style>
-          <a:lnRef idx="1">
-            <a:schemeClr val="accent1"/>
-          </a:lnRef>
-          <a:fillRef idx="3">
-            <a:schemeClr val="accent1"/>
-          </a:fillRef>
-          <a:effectRef idx="2">
-            <a:schemeClr val="accent1"/>
-          </a:effectRef>
-          <a:fontRef idx="minor">
-            <a:schemeClr val="lt1"/>
-          </a:fontRef>
-        </p:style>
-        <p:txBody>
-          <a:bodyPr rtlCol="0" anchor="ctr"/>
-          <a:lstStyle/>
-          <a:p>
-            <a:pPr algn="ctr"/>
-          </a:p>
-        </p:txBody>
-      </p:sp>
-      <p:sp>
-        <p:nvSpPr>
-          <p:cNvPr id="23" name="Rectangle 22"/>
-          <p:cNvSpPr/>
-          <p:nvPr/>
-        </p:nvSpPr>
-        <p:spPr>
-          <a:xfrm>
-            <a:off x="640080" y="4325112"/>
-            <a:ext cx="274320" cy="274320"/>
-          </a:xfrm>
-          <a:prstGeom prst="rect">
-            <a:avLst/>
-          </a:prstGeom>
-          <a:solidFill>
-            <a:srgbClr val="FFFFFF"/>
-          </a:solidFill>
-          <a:ln>
-            <a:solidFill>
-              <a:srgbClr val="333333"/>
-            </a:solidFill>
-          </a:ln>
-        </p:spPr>
-        <p:style>
-          <a:lnRef idx="1">
-            <a:schemeClr val="accent1"/>
-          </a:lnRef>
-          <a:fillRef idx="3">
-            <a:schemeClr val="accent1"/>
-          </a:fillRef>
-          <a:effectRef idx="2">
-            <a:schemeClr val="accent1"/>
-          </a:effectRef>
-          <a:fontRef idx="minor">
-            <a:schemeClr val="lt1"/>
-          </a:fontRef>
-        </p:style>
-        <p:txBody>
-          <a:bodyPr rtlCol="0" anchor="ctr"/>
-          <a:lstStyle/>
-          <a:p>
-            <a:pPr algn="ctr"/>
-          </a:p>
-        </p:txBody>
-      </p:sp>
-      <p:sp>
-        <p:nvSpPr>
-          <p:cNvPr id="24" name="Rectangle 23"/>
-          <p:cNvSpPr/>
-          <p:nvPr/>
-        </p:nvSpPr>
-        <p:spPr>
-          <a:xfrm>
-            <a:off x="640080" y="4325112"/>
-            <a:ext cx="73152" cy="274320"/>
-          </a:xfrm>
-          <a:prstGeom prst="rect">
-            <a:avLst/>
-          </a:prstGeom>
-          <a:solidFill>
-            <a:srgbClr val="269CCB"/>
-          </a:solidFill>
-          <a:ln>
-            <a:noFill/>
-          </a:ln>
-        </p:spPr>
-        <p:style>
-          <a:lnRef idx="1">
-            <a:schemeClr val="accent1"/>
-          </a:lnRef>
-          <a:fillRef idx="3">
-            <a:schemeClr val="accent1"/>
-          </a:fillRef>
-          <a:effectRef idx="2">
-            <a:schemeClr val="accent1"/>
-          </a:effectRef>
-          <a:fontRef idx="minor">
-            <a:schemeClr val="lt1"/>
-          </a:fontRef>
-        </p:style>
-        <p:txBody>
-          <a:bodyPr rtlCol="0" anchor="ctr"/>
-          <a:lstStyle/>
-          <a:p>
-            <a:pPr algn="ctr"/>
-          </a:p>
-        </p:txBody>
-      </p:sp>
-      <p:sp>
-        <p:nvSpPr>
-          <p:cNvPr id="25" name="TextBox 24"/>
-          <p:cNvSpPr txBox="1"/>
-          <p:nvPr/>
-        </p:nvSpPr>
-        <p:spPr>
-          <a:xfrm>
-            <a:off x="1097280" y="4270248"/>
-            <a:ext cx="10362895" cy="402336"/>
-          </a:xfrm>
-          <a:prstGeom prst="rect">
-            <a:avLst/>
-          </a:prstGeom>
-          <a:noFill/>
-        </p:spPr>
-        <p:txBody>
-          <a:bodyPr wrap="square" anchor="ctr"/>
-          <a:lstStyle/>
-          <a:p>
-            <a:r>
-              <a:rPr sz="1500" b="1" i="0">
-                <a:solidFill>
-                  <a:srgbClr val="333333"/>
-                </a:solidFill>
-                <a:latin typeface="Calibri"/>
-              </a:rPr>
-              <a:t>LA REGLA QUE SE LLEVAN</a:t>
-            </a:r>
-            <a:r>
-              <a:rPr sz="1500" b="0" i="0">
-                <a:solidFill>
-                  <a:srgbClr val="333333"/>
-                </a:solidFill>
-                <a:latin typeface="Calibri"/>
-              </a:rPr>
-              <a:t> — Una regla en una frase, escrita para ustedes mismos, que evite repetir esto en el proyecto de este curso. Tiene que ser verificable.</a:t>
-            </a:r>
-          </a:p>
-        </p:txBody>
-      </p:sp>
-      <p:sp>
-        <p:nvSpPr>
-          <p:cNvPr id="26" name="TextBox 25"/>
-          <p:cNvSpPr txBox="1"/>
-          <p:nvPr/>
-        </p:nvSpPr>
-        <p:spPr>
-          <a:xfrm>
-            <a:off x="11185855" y="6473952"/>
-            <a:ext cx="640080" cy="274320"/>
-          </a:xfrm>
-          <a:prstGeom prst="rect">
-            <a:avLst/>
-          </a:prstGeom>
-          <a:noFill/>
-        </p:spPr>
-        <p:txBody>
-          <a:bodyPr wrap="square">
-            <a:spAutoFit/>
-          </a:bodyPr>
-          <a:lstStyle/>
-          <a:p>
-            <a:pPr algn="r"/>
-            <a:r>
-              <a:rPr sz="1100" b="0" i="0">
-                <a:solidFill>
-                  <a:srgbClr val="666666"/>
-                </a:solidFill>
-                <a:latin typeface="Calibri"/>
-              </a:rPr>
-              <a:t>15</a:t>
-            </a:r>
-          </a:p>
-        </p:txBody>
-      </p:sp>
-    </p:spTree>
-  </p:cSld>
-  <p:clrMapOvr>
-    <a:masterClrMapping/>
-  </p:clrMapOvr>
-</p:sld>
-</file>
-
-<file path=ppt/slides/slide16.xml><?xml version="1.0" encoding="utf-8"?>
-<p:sld xmlns:a="http://schemas.openxmlformats.org/drawingml/2006/main" xmlns:p="http://schemas.openxmlformats.org/presentationml/2006/main" xmlns:r="http://schemas.openxmlformats.org/officeDocument/2006/relationships">
-  <p:cSld>
-    <p:bg>
-      <p:bgPr>
-        <a:solidFill>
-          <a:srgbClr val="FFFFFF"/>
-        </a:solidFill>
-        <a:effectLst/>
-      </p:bgPr>
-    </p:bg>
-    <p:spTree>
-      <p:nvGrpSpPr>
-        <p:cNvPr id="1" name=""/>
-        <p:cNvGrpSpPr/>
-        <p:nvPr/>
-      </p:nvGrpSpPr>
-      <p:grpSpPr/>
-      <p:sp>
-        <p:nvSpPr>
-          <p:cNvPr id="2" name="Rectangle 1"/>
-          <p:cNvSpPr/>
-          <p:nvPr/>
-        </p:nvSpPr>
-        <p:spPr>
-          <a:xfrm>
-            <a:off x="0" y="0"/>
-            <a:ext cx="12191695" cy="1170432"/>
-          </a:xfrm>
-          <a:prstGeom prst="rect">
-            <a:avLst/>
-          </a:prstGeom>
-          <a:solidFill>
-            <a:srgbClr val="095292"/>
-          </a:solidFill>
-          <a:ln>
-            <a:noFill/>
-          </a:ln>
-        </p:spPr>
-        <p:style>
-          <a:lnRef idx="1">
-            <a:schemeClr val="accent1"/>
-          </a:lnRef>
-          <a:fillRef idx="3">
-            <a:schemeClr val="accent1"/>
-          </a:fillRef>
-          <a:effectRef idx="2">
-            <a:schemeClr val="accent1"/>
-          </a:effectRef>
-          <a:fontRef idx="minor">
-            <a:schemeClr val="lt1"/>
-          </a:fontRef>
-        </p:style>
-        <p:txBody>
-          <a:bodyPr rtlCol="0" anchor="ctr"/>
-          <a:lstStyle/>
-          <a:p>
-            <a:pPr algn="ctr"/>
-          </a:p>
-        </p:txBody>
-      </p:sp>
-      <p:sp>
-        <p:nvSpPr>
-          <p:cNvPr id="3" name="Rectangle 2"/>
-          <p:cNvSpPr/>
-          <p:nvPr/>
-        </p:nvSpPr>
-        <p:spPr>
-          <a:xfrm>
-            <a:off x="0" y="1170432"/>
-            <a:ext cx="12191695" cy="41148"/>
-          </a:xfrm>
-          <a:prstGeom prst="rect">
-            <a:avLst/>
-          </a:prstGeom>
-          <a:solidFill>
-            <a:srgbClr val="FFD000"/>
-          </a:solidFill>
-          <a:ln>
-            <a:noFill/>
-          </a:ln>
-        </p:spPr>
-        <p:style>
-          <a:lnRef idx="1">
-            <a:schemeClr val="accent1"/>
-          </a:lnRef>
-          <a:fillRef idx="3">
-            <a:schemeClr val="accent1"/>
-          </a:fillRef>
-          <a:effectRef idx="2">
-            <a:schemeClr val="accent1"/>
-          </a:effectRef>
-          <a:fontRef idx="minor">
-            <a:schemeClr val="lt1"/>
-          </a:fontRef>
-        </p:style>
-        <p:txBody>
-          <a:bodyPr rtlCol="0" anchor="ctr"/>
-          <a:lstStyle/>
-          <a:p>
-            <a:pPr algn="ctr"/>
-          </a:p>
-        </p:txBody>
-      </p:sp>
-      <p:sp>
-        <p:nvSpPr>
-          <p:cNvPr id="4" name="TextBox 3"/>
-          <p:cNvSpPr txBox="1"/>
-          <p:nvPr/>
-        </p:nvSpPr>
-        <p:spPr>
-          <a:xfrm>
-            <a:off x="457200" y="164592"/>
-            <a:ext cx="11277295" cy="384048"/>
-          </a:xfrm>
-          <a:prstGeom prst="rect">
-            <a:avLst/>
-          </a:prstGeom>
-          <a:noFill/>
-        </p:spPr>
-        <p:txBody>
-          <a:bodyPr wrap="square">
-            <a:spAutoFit/>
-          </a:bodyPr>
-          <a:lstStyle/>
-          <a:p>
-            <a:r>
-              <a:rPr sz="2600" b="1" i="0">
-                <a:solidFill>
-                  <a:srgbClr val="FFFFFF"/>
-                </a:solidFill>
-                <a:latin typeface="Calibri"/>
-              </a:rPr>
-              <a:t>Cómo se expone en 3 minutos</a:t>
-            </a:r>
-          </a:p>
-        </p:txBody>
-      </p:sp>
-      <p:sp>
-        <p:nvSpPr>
-          <p:cNvPr id="5" name="TextBox 4"/>
-          <p:cNvSpPr txBox="1"/>
-          <p:nvPr/>
-        </p:nvSpPr>
-        <p:spPr>
-          <a:xfrm>
-            <a:off x="457200" y="566928"/>
-            <a:ext cx="11277295" cy="411480"/>
-          </a:xfrm>
-          <a:prstGeom prst="rect">
-            <a:avLst/>
-          </a:prstGeom>
-          <a:noFill/>
-        </p:spPr>
-        <p:txBody>
-          <a:bodyPr wrap="square">
-            <a:spAutoFit/>
-          </a:bodyPr>
-          <a:lstStyle/>
-          <a:p>
-            <a:r>
-              <a:rPr sz="1400" b="0" i="0">
-                <a:solidFill>
-                  <a:srgbClr val="B8D8EE"/>
-                </a:solidFill>
-                <a:latin typeface="Calibri"/>
-              </a:rPr>
-              <a:t>Habla el vocero con la pantalla ya compartida · cronómetro en pantalla · se corta al llegar a cero</a:t>
-            </a:r>
-          </a:p>
-        </p:txBody>
-      </p:sp>
-      <p:sp>
-        <p:nvSpPr>
-          <p:cNvPr id="6" name="Rounded Rectangle 5"/>
-          <p:cNvSpPr/>
-          <p:nvPr/>
-        </p:nvSpPr>
-        <p:spPr>
-          <a:xfrm>
-            <a:off x="457200" y="1444752"/>
-            <a:ext cx="11277295" cy="908913"/>
-          </a:xfrm>
-          <a:prstGeom prst="roundRect">
-            <a:avLst>
-              <a:gd name="adj" fmla="val 12000"/>
-            </a:avLst>
-          </a:prstGeom>
-          <a:solidFill>
-            <a:srgbClr val="F2F2F2"/>
-          </a:solidFill>
-          <a:ln>
-            <a:noFill/>
-          </a:ln>
-        </p:spPr>
-        <p:style>
-          <a:lnRef idx="1">
-            <a:schemeClr val="accent1"/>
-          </a:lnRef>
-          <a:fillRef idx="3">
-            <a:schemeClr val="accent1"/>
-          </a:fillRef>
-          <a:effectRef idx="2">
-            <a:schemeClr val="accent1"/>
-          </a:effectRef>
-          <a:fontRef idx="minor">
-            <a:schemeClr val="lt1"/>
-          </a:fontRef>
-        </p:style>
-        <p:txBody>
-          <a:bodyPr rtlCol="0" anchor="ctr"/>
-          <a:lstStyle/>
-          <a:p>
-            <a:pPr algn="ctr"/>
-          </a:p>
-        </p:txBody>
-      </p:sp>
-      <p:sp>
-        <p:nvSpPr>
-          <p:cNvPr id="7" name="Rounded Rectangle 6"/>
-          <p:cNvSpPr/>
-          <p:nvPr/>
-        </p:nvSpPr>
-        <p:spPr>
-          <a:xfrm>
-            <a:off x="594360" y="1679752"/>
-            <a:ext cx="438912" cy="438912"/>
-          </a:xfrm>
-          <a:prstGeom prst="roundRect">
-            <a:avLst>
-              <a:gd name="adj" fmla="val 12000"/>
-            </a:avLst>
-          </a:prstGeom>
-          <a:solidFill>
-            <a:srgbClr val="095292"/>
-          </a:solidFill>
-          <a:ln>
-            <a:noFill/>
-          </a:ln>
-        </p:spPr>
-        <p:style>
-          <a:lnRef idx="1">
-            <a:schemeClr val="accent1"/>
-          </a:lnRef>
-          <a:fillRef idx="3">
-            <a:schemeClr val="accent1"/>
-          </a:fillRef>
-          <a:effectRef idx="2">
-            <a:schemeClr val="accent1"/>
-          </a:effectRef>
-          <a:fontRef idx="minor">
-            <a:schemeClr val="lt1"/>
-          </a:fontRef>
-        </p:style>
-        <p:txBody>
-          <a:bodyPr rtlCol="0" anchor="ctr"/>
-          <a:lstStyle/>
-          <a:p>
-            <a:pPr algn="ctr"/>
-          </a:p>
-        </p:txBody>
-      </p:sp>
-      <p:sp>
-        <p:nvSpPr>
-          <p:cNvPr id="8" name="TextBox 7"/>
-          <p:cNvSpPr txBox="1"/>
-          <p:nvPr/>
-        </p:nvSpPr>
-        <p:spPr>
-          <a:xfrm>
-            <a:off x="594360" y="1679752"/>
-            <a:ext cx="438912" cy="438912"/>
-          </a:xfrm>
-          <a:prstGeom prst="rect">
-            <a:avLst/>
-          </a:prstGeom>
-          <a:noFill/>
-        </p:spPr>
-        <p:txBody>
-          <a:bodyPr wrap="square" anchor="ctr"/>
-          <a:lstStyle/>
-          <a:p>
-            <a:pPr algn="ctr"/>
-            <a:r>
-              <a:rPr sz="1600" b="1" i="0">
-                <a:solidFill>
-                  <a:srgbClr val="FFFFFF"/>
-                </a:solidFill>
-                <a:latin typeface="Calibri"/>
-              </a:rPr>
-              <a:t>1</a:t>
-            </a:r>
-          </a:p>
-        </p:txBody>
-      </p:sp>
-      <p:sp>
-        <p:nvSpPr>
-          <p:cNvPr id="9" name="TextBox 8"/>
-          <p:cNvSpPr txBox="1"/>
-          <p:nvPr/>
-        </p:nvSpPr>
-        <p:spPr>
-          <a:xfrm>
-            <a:off x="1188720" y="1536192"/>
-            <a:ext cx="10271455" cy="744321"/>
-          </a:xfrm>
-          <a:prstGeom prst="rect">
-            <a:avLst/>
-          </a:prstGeom>
-          <a:noFill/>
-        </p:spPr>
-        <p:txBody>
-          <a:bodyPr wrap="square" anchor="ctr"/>
-          <a:lstStyle/>
-          <a:p>
-            <a:r>
-              <a:rPr sz="1500" b="1" i="0">
-                <a:solidFill>
-                  <a:srgbClr val="095292"/>
-                </a:solidFill>
-                <a:latin typeface="Calibri"/>
-              </a:rPr>
-              <a:t>30 s · Los hechos</a:t>
-            </a:r>
-          </a:p>
-          <a:p>
-            <a:pPr>
-              <a:spcBef>
-                <a:spcPts val="200"/>
-              </a:spcBef>
-            </a:pPr>
-            <a:r>
-              <a:rPr sz="1300" b="0" i="0">
-                <a:solidFill>
-                  <a:srgbClr val="333333"/>
-                </a:solidFill>
-                <a:latin typeface="Calibri"/>
-              </a:rPr>
-              <a:t>Qué pasó, sin adjetivos. Cinco líneas dichas en medio minuto.</a:t>
-            </a:r>
-          </a:p>
-        </p:txBody>
-      </p:sp>
-      <p:sp>
-        <p:nvSpPr>
-          <p:cNvPr id="10" name="Rounded Rectangle 9"/>
-          <p:cNvSpPr/>
-          <p:nvPr/>
-        </p:nvSpPr>
-        <p:spPr>
-          <a:xfrm>
-            <a:off x="457200" y="2445105"/>
-            <a:ext cx="11277295" cy="908913"/>
-          </a:xfrm>
-          <a:prstGeom prst="roundRect">
-            <a:avLst>
-              <a:gd name="adj" fmla="val 12000"/>
-            </a:avLst>
-          </a:prstGeom>
-          <a:solidFill>
-            <a:srgbClr val="E8F4FA"/>
-          </a:solidFill>
-          <a:ln>
-            <a:noFill/>
-          </a:ln>
-        </p:spPr>
-        <p:style>
-          <a:lnRef idx="1">
-            <a:schemeClr val="accent1"/>
-          </a:lnRef>
-          <a:fillRef idx="3">
-            <a:schemeClr val="accent1"/>
-          </a:fillRef>
-          <a:effectRef idx="2">
-            <a:schemeClr val="accent1"/>
-          </a:effectRef>
-          <a:fontRef idx="minor">
-            <a:schemeClr val="lt1"/>
-          </a:fontRef>
-        </p:style>
-        <p:txBody>
-          <a:bodyPr rtlCol="0" anchor="ctr"/>
-          <a:lstStyle/>
-          <a:p>
-            <a:pPr algn="ctr"/>
-          </a:p>
-        </p:txBody>
-      </p:sp>
-      <p:sp>
-        <p:nvSpPr>
-          <p:cNvPr id="11" name="Rounded Rectangle 10"/>
-          <p:cNvSpPr/>
-          <p:nvPr/>
-        </p:nvSpPr>
-        <p:spPr>
-          <a:xfrm>
-            <a:off x="594360" y="2680106"/>
-            <a:ext cx="438912" cy="438912"/>
-          </a:xfrm>
-          <a:prstGeom prst="roundRect">
-            <a:avLst>
-              <a:gd name="adj" fmla="val 12000"/>
-            </a:avLst>
-          </a:prstGeom>
-          <a:solidFill>
-            <a:srgbClr val="095292"/>
-          </a:solidFill>
-          <a:ln>
-            <a:noFill/>
-          </a:ln>
-        </p:spPr>
-        <p:style>
-          <a:lnRef idx="1">
-            <a:schemeClr val="accent1"/>
-          </a:lnRef>
-          <a:fillRef idx="3">
-            <a:schemeClr val="accent1"/>
-          </a:fillRef>
-          <a:effectRef idx="2">
-            <a:schemeClr val="accent1"/>
-          </a:effectRef>
-          <a:fontRef idx="minor">
-            <a:schemeClr val="lt1"/>
-          </a:fontRef>
-        </p:style>
-        <p:txBody>
-          <a:bodyPr rtlCol="0" anchor="ctr"/>
-          <a:lstStyle/>
-          <a:p>
-            <a:pPr algn="ctr"/>
-          </a:p>
-        </p:txBody>
-      </p:sp>
-      <p:sp>
-        <p:nvSpPr>
-          <p:cNvPr id="12" name="TextBox 11"/>
-          <p:cNvSpPr txBox="1"/>
-          <p:nvPr/>
-        </p:nvSpPr>
-        <p:spPr>
-          <a:xfrm>
-            <a:off x="594360" y="2680106"/>
-            <a:ext cx="438912" cy="438912"/>
-          </a:xfrm>
-          <a:prstGeom prst="rect">
-            <a:avLst/>
-          </a:prstGeom>
-          <a:noFill/>
-        </p:spPr>
-        <p:txBody>
-          <a:bodyPr wrap="square" anchor="ctr"/>
-          <a:lstStyle/>
-          <a:p>
-            <a:pPr algn="ctr"/>
-            <a:r>
-              <a:rPr sz="1600" b="1" i="0">
-                <a:solidFill>
-                  <a:srgbClr val="FFFFFF"/>
-                </a:solidFill>
-                <a:latin typeface="Calibri"/>
-              </a:rPr>
-              <a:t>2</a:t>
-            </a:r>
-          </a:p>
-        </p:txBody>
-      </p:sp>
-      <p:sp>
-        <p:nvSpPr>
-          <p:cNvPr id="13" name="TextBox 12"/>
-          <p:cNvSpPr txBox="1"/>
-          <p:nvPr/>
-        </p:nvSpPr>
-        <p:spPr>
-          <a:xfrm>
-            <a:off x="1188720" y="2536545"/>
-            <a:ext cx="10271455" cy="744321"/>
-          </a:xfrm>
-          <a:prstGeom prst="rect">
-            <a:avLst/>
-          </a:prstGeom>
-          <a:noFill/>
-        </p:spPr>
-        <p:txBody>
-          <a:bodyPr wrap="square" anchor="ctr"/>
-          <a:lstStyle/>
-          <a:p>
-            <a:r>
-              <a:rPr sz="1500" b="1" i="0">
-                <a:solidFill>
-                  <a:srgbClr val="095292"/>
-                </a:solidFill>
-                <a:latin typeface="Calibri"/>
-              </a:rPr>
-              <a:t>40 s · Quién decidió</a:t>
-            </a:r>
-          </a:p>
-          <a:p>
-            <a:pPr>
-              <a:spcBef>
-                <a:spcPts val="200"/>
-              </a:spcBef>
-            </a:pPr>
-            <a:r>
-              <a:rPr sz="1300" b="0" i="0">
-                <a:solidFill>
-                  <a:srgbClr val="333333"/>
-                </a:solidFill>
-                <a:latin typeface="Calibri"/>
-              </a:rPr>
-              <a:t>La decisión y el rol de quien la tomó. No «la empresa».</a:t>
-            </a:r>
-          </a:p>
-        </p:txBody>
-      </p:sp>
-      <p:sp>
-        <p:nvSpPr>
-          <p:cNvPr id="14" name="Rounded Rectangle 13"/>
-          <p:cNvSpPr/>
-          <p:nvPr/>
-        </p:nvSpPr>
-        <p:spPr>
-          <a:xfrm>
-            <a:off x="457200" y="3445459"/>
-            <a:ext cx="11277295" cy="908913"/>
-          </a:xfrm>
-          <a:prstGeom prst="roundRect">
-            <a:avLst>
-              <a:gd name="adj" fmla="val 12000"/>
-            </a:avLst>
-          </a:prstGeom>
-          <a:solidFill>
-            <a:srgbClr val="F2F2F2"/>
-          </a:solidFill>
-          <a:ln>
-            <a:noFill/>
-          </a:ln>
-        </p:spPr>
-        <p:style>
-          <a:lnRef idx="1">
-            <a:schemeClr val="accent1"/>
-          </a:lnRef>
-          <a:fillRef idx="3">
-            <a:schemeClr val="accent1"/>
-          </a:fillRef>
-          <a:effectRef idx="2">
-            <a:schemeClr val="accent1"/>
-          </a:effectRef>
-          <a:fontRef idx="minor">
-            <a:schemeClr val="lt1"/>
-          </a:fontRef>
-        </p:style>
-        <p:txBody>
-          <a:bodyPr rtlCol="0" anchor="ctr"/>
-          <a:lstStyle/>
-          <a:p>
-            <a:pPr algn="ctr"/>
-          </a:p>
-        </p:txBody>
-      </p:sp>
-      <p:sp>
-        <p:nvSpPr>
-          <p:cNvPr id="15" name="Rounded Rectangle 14"/>
-          <p:cNvSpPr/>
-          <p:nvPr/>
-        </p:nvSpPr>
-        <p:spPr>
-          <a:xfrm>
-            <a:off x="594360" y="3680460"/>
-            <a:ext cx="438912" cy="438912"/>
-          </a:xfrm>
-          <a:prstGeom prst="roundRect">
-            <a:avLst>
-              <a:gd name="adj" fmla="val 12000"/>
-            </a:avLst>
-          </a:prstGeom>
-          <a:solidFill>
-            <a:srgbClr val="095292"/>
-          </a:solidFill>
-          <a:ln>
-            <a:noFill/>
-          </a:ln>
-        </p:spPr>
-        <p:style>
-          <a:lnRef idx="1">
-            <a:schemeClr val="accent1"/>
-          </a:lnRef>
-          <a:fillRef idx="3">
-            <a:schemeClr val="accent1"/>
-          </a:fillRef>
-          <a:effectRef idx="2">
-            <a:schemeClr val="accent1"/>
-          </a:effectRef>
-          <a:fontRef idx="minor">
-            <a:schemeClr val="lt1"/>
-          </a:fontRef>
-        </p:style>
-        <p:txBody>
-          <a:bodyPr rtlCol="0" anchor="ctr"/>
-          <a:lstStyle/>
-          <a:p>
-            <a:pPr algn="ctr"/>
-          </a:p>
-        </p:txBody>
-      </p:sp>
-      <p:sp>
-        <p:nvSpPr>
-          <p:cNvPr id="16" name="TextBox 15"/>
-          <p:cNvSpPr txBox="1"/>
-          <p:nvPr/>
-        </p:nvSpPr>
-        <p:spPr>
-          <a:xfrm>
-            <a:off x="594360" y="3680460"/>
-            <a:ext cx="438912" cy="438912"/>
-          </a:xfrm>
-          <a:prstGeom prst="rect">
-            <a:avLst/>
-          </a:prstGeom>
-          <a:noFill/>
-        </p:spPr>
-        <p:txBody>
-          <a:bodyPr wrap="square" anchor="ctr"/>
-          <a:lstStyle/>
-          <a:p>
-            <a:pPr algn="ctr"/>
-            <a:r>
-              <a:rPr sz="1600" b="1" i="0">
-                <a:solidFill>
-                  <a:srgbClr val="FFFFFF"/>
-                </a:solidFill>
-                <a:latin typeface="Calibri"/>
-              </a:rPr>
-              <a:t>3</a:t>
-            </a:r>
-          </a:p>
-        </p:txBody>
-      </p:sp>
-      <p:sp>
-        <p:nvSpPr>
-          <p:cNvPr id="17" name="TextBox 16"/>
-          <p:cNvSpPr txBox="1"/>
-          <p:nvPr/>
-        </p:nvSpPr>
-        <p:spPr>
-          <a:xfrm>
-            <a:off x="1188720" y="3536899"/>
-            <a:ext cx="10271455" cy="744321"/>
-          </a:xfrm>
-          <a:prstGeom prst="rect">
-            <a:avLst/>
-          </a:prstGeom>
-          <a:noFill/>
-        </p:spPr>
-        <p:txBody>
-          <a:bodyPr wrap="square" anchor="ctr"/>
-          <a:lstStyle/>
-          <a:p>
-            <a:r>
-              <a:rPr sz="1500" b="1" i="0">
-                <a:solidFill>
-                  <a:srgbClr val="095292"/>
-                </a:solidFill>
-                <a:latin typeface="Calibri"/>
-              </a:rPr>
-              <a:t>50 s · El numeral</a:t>
-            </a:r>
-          </a:p>
-          <a:p>
-            <a:pPr>
-              <a:spcBef>
-                <a:spcPts val="200"/>
-              </a:spcBef>
-            </a:pPr>
-            <a:r>
-              <a:rPr sz="1300" b="0" i="0">
-                <a:solidFill>
-                  <a:srgbClr val="333333"/>
-                </a:solidFill>
-                <a:latin typeface="Calibri"/>
-              </a:rPr>
-              <a:t>Lea el principio o el artículo y diga por qué aplica. Es lo que más pesa.</a:t>
-            </a:r>
-          </a:p>
-        </p:txBody>
-      </p:sp>
-      <p:sp>
-        <p:nvSpPr>
-          <p:cNvPr id="18" name="Rounded Rectangle 17"/>
-          <p:cNvSpPr/>
-          <p:nvPr/>
-        </p:nvSpPr>
-        <p:spPr>
-          <a:xfrm>
-            <a:off x="457200" y="4445812"/>
-            <a:ext cx="11277295" cy="908913"/>
-          </a:xfrm>
-          <a:prstGeom prst="roundRect">
-            <a:avLst>
-              <a:gd name="adj" fmla="val 12000"/>
-            </a:avLst>
-          </a:prstGeom>
-          <a:solidFill>
-            <a:srgbClr val="E8F4FA"/>
-          </a:solidFill>
-          <a:ln>
-            <a:noFill/>
-          </a:ln>
-        </p:spPr>
-        <p:style>
-          <a:lnRef idx="1">
-            <a:schemeClr val="accent1"/>
-          </a:lnRef>
-          <a:fillRef idx="3">
-            <a:schemeClr val="accent1"/>
-          </a:fillRef>
-          <a:effectRef idx="2">
-            <a:schemeClr val="accent1"/>
-          </a:effectRef>
-          <a:fontRef idx="minor">
-            <a:schemeClr val="lt1"/>
-          </a:fontRef>
-        </p:style>
-        <p:txBody>
-          <a:bodyPr rtlCol="0" anchor="ctr"/>
-          <a:lstStyle/>
-          <a:p>
-            <a:pPr algn="ctr"/>
-          </a:p>
-        </p:txBody>
-      </p:sp>
-      <p:sp>
-        <p:nvSpPr>
-          <p:cNvPr id="19" name="Rounded Rectangle 18"/>
-          <p:cNvSpPr/>
-          <p:nvPr/>
-        </p:nvSpPr>
-        <p:spPr>
-          <a:xfrm>
-            <a:off x="594360" y="4680813"/>
-            <a:ext cx="438912" cy="438912"/>
-          </a:xfrm>
-          <a:prstGeom prst="roundRect">
-            <a:avLst>
-              <a:gd name="adj" fmla="val 12000"/>
-            </a:avLst>
-          </a:prstGeom>
-          <a:solidFill>
-            <a:srgbClr val="095292"/>
-          </a:solidFill>
-          <a:ln>
-            <a:noFill/>
-          </a:ln>
-        </p:spPr>
-        <p:style>
-          <a:lnRef idx="1">
-            <a:schemeClr val="accent1"/>
-          </a:lnRef>
-          <a:fillRef idx="3">
-            <a:schemeClr val="accent1"/>
-          </a:fillRef>
-          <a:effectRef idx="2">
-            <a:schemeClr val="accent1"/>
-          </a:effectRef>
-          <a:fontRef idx="minor">
-            <a:schemeClr val="lt1"/>
-          </a:fontRef>
-        </p:style>
-        <p:txBody>
-          <a:bodyPr rtlCol="0" anchor="ctr"/>
-          <a:lstStyle/>
-          <a:p>
-            <a:pPr algn="ctr"/>
-          </a:p>
-        </p:txBody>
-      </p:sp>
-      <p:sp>
-        <p:nvSpPr>
-          <p:cNvPr id="20" name="TextBox 19"/>
-          <p:cNvSpPr txBox="1"/>
-          <p:nvPr/>
-        </p:nvSpPr>
-        <p:spPr>
-          <a:xfrm>
-            <a:off x="594360" y="4680813"/>
-            <a:ext cx="438912" cy="438912"/>
-          </a:xfrm>
-          <a:prstGeom prst="rect">
-            <a:avLst/>
-          </a:prstGeom>
-          <a:noFill/>
-        </p:spPr>
-        <p:txBody>
-          <a:bodyPr wrap="square" anchor="ctr"/>
-          <a:lstStyle/>
-          <a:p>
-            <a:pPr algn="ctr"/>
-            <a:r>
-              <a:rPr sz="1600" b="1" i="0">
-                <a:solidFill>
-                  <a:srgbClr val="FFFFFF"/>
-                </a:solidFill>
-                <a:latin typeface="Calibri"/>
-              </a:rPr>
-              <a:t>4</a:t>
-            </a:r>
-          </a:p>
-        </p:txBody>
-      </p:sp>
-      <p:sp>
-        <p:nvSpPr>
-          <p:cNvPr id="21" name="TextBox 20"/>
-          <p:cNvSpPr txBox="1"/>
-          <p:nvPr/>
-        </p:nvSpPr>
-        <p:spPr>
-          <a:xfrm>
-            <a:off x="1188720" y="4537252"/>
-            <a:ext cx="10271455" cy="744321"/>
-          </a:xfrm>
-          <a:prstGeom prst="rect">
-            <a:avLst/>
-          </a:prstGeom>
-          <a:noFill/>
-        </p:spPr>
-        <p:txBody>
-          <a:bodyPr wrap="square" anchor="ctr"/>
-          <a:lstStyle/>
-          <a:p>
-            <a:r>
-              <a:rPr sz="1500" b="1" i="0">
-                <a:solidFill>
-                  <a:srgbClr val="095292"/>
-                </a:solidFill>
-                <a:latin typeface="Calibri"/>
-              </a:rPr>
-              <a:t>50 s · El momento de parar</a:t>
-            </a:r>
-          </a:p>
-          <a:p>
-            <a:pPr>
-              <a:spcBef>
-                <a:spcPts val="200"/>
-              </a:spcBef>
-            </a:pPr>
-            <a:r>
-              <a:rPr sz="1300" b="0" i="0">
-                <a:solidFill>
-                  <a:srgbClr val="333333"/>
-                </a:solidFill>
-                <a:latin typeface="Calibri"/>
-              </a:rPr>
-              <a:t>Cuándo y qué había que hacer. Es el minuto obligatorio.</a:t>
-            </a:r>
-          </a:p>
-        </p:txBody>
-      </p:sp>
-      <p:sp>
-        <p:nvSpPr>
-          <p:cNvPr id="22" name="Rounded Rectangle 21"/>
-          <p:cNvSpPr/>
-          <p:nvPr/>
-        </p:nvSpPr>
-        <p:spPr>
-          <a:xfrm>
-            <a:off x="457200" y="5446166"/>
-            <a:ext cx="11277295" cy="908913"/>
-          </a:xfrm>
-          <a:prstGeom prst="roundRect">
-            <a:avLst>
-              <a:gd name="adj" fmla="val 12000"/>
-            </a:avLst>
-          </a:prstGeom>
-          <a:solidFill>
-            <a:srgbClr val="F2F2F2"/>
-          </a:solidFill>
-          <a:ln>
-            <a:noFill/>
-          </a:ln>
-        </p:spPr>
-        <p:style>
-          <a:lnRef idx="1">
-            <a:schemeClr val="accent1"/>
-          </a:lnRef>
-          <a:fillRef idx="3">
-            <a:schemeClr val="accent1"/>
-          </a:fillRef>
-          <a:effectRef idx="2">
-            <a:schemeClr val="accent1"/>
-          </a:effectRef>
-          <a:fontRef idx="minor">
-            <a:schemeClr val="lt1"/>
-          </a:fontRef>
-        </p:style>
-        <p:txBody>
-          <a:bodyPr rtlCol="0" anchor="ctr"/>
-          <a:lstStyle/>
-          <a:p>
-            <a:pPr algn="ctr"/>
-          </a:p>
-        </p:txBody>
-      </p:sp>
-      <p:sp>
-        <p:nvSpPr>
-          <p:cNvPr id="23" name="Rounded Rectangle 22"/>
-          <p:cNvSpPr/>
-          <p:nvPr/>
-        </p:nvSpPr>
-        <p:spPr>
-          <a:xfrm>
-            <a:off x="594360" y="5681167"/>
-            <a:ext cx="438912" cy="438912"/>
-          </a:xfrm>
-          <a:prstGeom prst="roundRect">
-            <a:avLst>
-              <a:gd name="adj" fmla="val 12000"/>
-            </a:avLst>
-          </a:prstGeom>
-          <a:solidFill>
-            <a:srgbClr val="095292"/>
-          </a:solidFill>
-          <a:ln>
-            <a:noFill/>
-          </a:ln>
-        </p:spPr>
-        <p:style>
-          <a:lnRef idx="1">
-            <a:schemeClr val="accent1"/>
-          </a:lnRef>
-          <a:fillRef idx="3">
-            <a:schemeClr val="accent1"/>
-          </a:fillRef>
-          <a:effectRef idx="2">
-            <a:schemeClr val="accent1"/>
-          </a:effectRef>
-          <a:fontRef idx="minor">
-            <a:schemeClr val="lt1"/>
-          </a:fontRef>
-        </p:style>
-        <p:txBody>
-          <a:bodyPr rtlCol="0" anchor="ctr"/>
-          <a:lstStyle/>
-          <a:p>
-            <a:pPr algn="ctr"/>
-          </a:p>
-        </p:txBody>
-      </p:sp>
-      <p:sp>
-        <p:nvSpPr>
-          <p:cNvPr id="24" name="TextBox 23"/>
-          <p:cNvSpPr txBox="1"/>
-          <p:nvPr/>
-        </p:nvSpPr>
-        <p:spPr>
-          <a:xfrm>
-            <a:off x="594360" y="5681167"/>
-            <a:ext cx="438912" cy="438912"/>
-          </a:xfrm>
-          <a:prstGeom prst="rect">
-            <a:avLst/>
-          </a:prstGeom>
-          <a:noFill/>
-        </p:spPr>
-        <p:txBody>
-          <a:bodyPr wrap="square" anchor="ctr"/>
-          <a:lstStyle/>
-          <a:p>
-            <a:pPr algn="ctr"/>
-            <a:r>
-              <a:rPr sz="1600" b="1" i="0">
-                <a:solidFill>
-                  <a:srgbClr val="FFFFFF"/>
-                </a:solidFill>
-                <a:latin typeface="Calibri"/>
-              </a:rPr>
-              <a:t>5</a:t>
-            </a:r>
-          </a:p>
-        </p:txBody>
-      </p:sp>
-      <p:sp>
-        <p:nvSpPr>
-          <p:cNvPr id="25" name="TextBox 24"/>
-          <p:cNvSpPr txBox="1"/>
-          <p:nvPr/>
-        </p:nvSpPr>
-        <p:spPr>
-          <a:xfrm>
-            <a:off x="1188720" y="5537606"/>
-            <a:ext cx="10271455" cy="744321"/>
-          </a:xfrm>
-          <a:prstGeom prst="rect">
-            <a:avLst/>
-          </a:prstGeom>
-          <a:noFill/>
-        </p:spPr>
-        <p:txBody>
-          <a:bodyPr wrap="square" anchor="ctr"/>
-          <a:lstStyle/>
-          <a:p>
-            <a:r>
-              <a:rPr sz="1500" b="1" i="0">
-                <a:solidFill>
-                  <a:srgbClr val="095292"/>
-                </a:solidFill>
-                <a:latin typeface="Calibri"/>
-              </a:rPr>
-              <a:t>10 s · La regla propia</a:t>
-            </a:r>
-          </a:p>
-          <a:p>
-            <a:pPr>
-              <a:spcBef>
-                <a:spcPts val="200"/>
-              </a:spcBef>
-            </a:pPr>
-            <a:r>
-              <a:rPr sz="1300" b="0" i="0">
-                <a:solidFill>
-                  <a:srgbClr val="333333"/>
-                </a:solidFill>
-                <a:latin typeface="Calibri"/>
-              </a:rPr>
-              <a:t>Una frase, verificable, para su propio proyecto.</a:t>
-            </a:r>
-          </a:p>
-        </p:txBody>
-      </p:sp>
-      <p:sp>
-        <p:nvSpPr>
-          <p:cNvPr id="26" name="TextBox 25"/>
-          <p:cNvSpPr txBox="1"/>
-          <p:nvPr/>
-        </p:nvSpPr>
-        <p:spPr>
-          <a:xfrm>
-            <a:off x="11185855" y="6473952"/>
-            <a:ext cx="640080" cy="274320"/>
-          </a:xfrm>
-          <a:prstGeom prst="rect">
-            <a:avLst/>
-          </a:prstGeom>
-          <a:noFill/>
-        </p:spPr>
-        <p:txBody>
-          <a:bodyPr wrap="square">
-            <a:spAutoFit/>
-          </a:bodyPr>
-          <a:lstStyle/>
-          <a:p>
-            <a:pPr algn="r"/>
-            <a:r>
-              <a:rPr sz="1100" b="0" i="0">
-                <a:solidFill>
-                  <a:srgbClr val="666666"/>
-                </a:solidFill>
-                <a:latin typeface="Calibri"/>
-              </a:rPr>
-              <a:t>16</a:t>
-            </a:r>
-          </a:p>
-        </p:txBody>
-      </p:sp>
-    </p:spTree>
-  </p:cSld>
-  <p:clrMapOvr>
-    <a:masterClrMapping/>
-  </p:clrMapOvr>
-</p:sld>
-</file>
-
-<file path=ppt/slides/slide17.xml><?xml version="1.0" encoding="utf-8"?>
-<p:sld xmlns:a="http://schemas.openxmlformats.org/drawingml/2006/main" xmlns:p="http://schemas.openxmlformats.org/presentationml/2006/main" xmlns:r="http://schemas.openxmlformats.org/officeDocument/2006/relationships">
-  <p:cSld>
-    <p:bg>
-      <p:bgPr>
-        <a:solidFill>
-          <a:srgbClr val="FFFFFF"/>
-        </a:solidFill>
-        <a:effectLst/>
-      </p:bgPr>
-    </p:bg>
-    <p:spTree>
-      <p:nvGrpSpPr>
-        <p:cNvPr id="1" name=""/>
-        <p:cNvGrpSpPr/>
-        <p:nvPr/>
-      </p:nvGrpSpPr>
-      <p:grpSpPr/>
-      <p:sp>
-        <p:nvSpPr>
-          <p:cNvPr id="2" name="Rectangle 1"/>
-          <p:cNvSpPr/>
-          <p:nvPr/>
-        </p:nvSpPr>
-        <p:spPr>
-          <a:xfrm>
-            <a:off x="0" y="0"/>
-            <a:ext cx="12191695" cy="960120"/>
-          </a:xfrm>
-          <a:prstGeom prst="rect">
-            <a:avLst/>
-          </a:prstGeom>
-          <a:solidFill>
-            <a:srgbClr val="095292"/>
-          </a:solidFill>
-          <a:ln>
-            <a:noFill/>
-          </a:ln>
-        </p:spPr>
-        <p:style>
-          <a:lnRef idx="1">
-            <a:schemeClr val="accent1"/>
-          </a:lnRef>
-          <a:fillRef idx="3">
-            <a:schemeClr val="accent1"/>
-          </a:fillRef>
-          <a:effectRef idx="2">
-            <a:schemeClr val="accent1"/>
-          </a:effectRef>
-          <a:fontRef idx="minor">
-            <a:schemeClr val="lt1"/>
-          </a:fontRef>
-        </p:style>
-        <p:txBody>
-          <a:bodyPr rtlCol="0" anchor="ctr"/>
-          <a:lstStyle/>
-          <a:p>
-            <a:pPr algn="ctr"/>
-          </a:p>
-        </p:txBody>
-      </p:sp>
-      <p:sp>
-        <p:nvSpPr>
-          <p:cNvPr id="3" name="Rectangle 2"/>
-          <p:cNvSpPr/>
-          <p:nvPr/>
-        </p:nvSpPr>
-        <p:spPr>
-          <a:xfrm>
-            <a:off x="0" y="960120"/>
-            <a:ext cx="12191695" cy="41148"/>
-          </a:xfrm>
-          <a:prstGeom prst="rect">
-            <a:avLst/>
-          </a:prstGeom>
-          <a:solidFill>
-            <a:srgbClr val="FFD000"/>
-          </a:solidFill>
-          <a:ln>
-            <a:noFill/>
-          </a:ln>
-        </p:spPr>
-        <p:style>
-          <a:lnRef idx="1">
-            <a:schemeClr val="accent1"/>
-          </a:lnRef>
-          <a:fillRef idx="3">
-            <a:schemeClr val="accent1"/>
-          </a:fillRef>
-          <a:effectRef idx="2">
-            <a:schemeClr val="accent1"/>
-          </a:effectRef>
-          <a:fontRef idx="minor">
-            <a:schemeClr val="lt1"/>
-          </a:fontRef>
-        </p:style>
-        <p:txBody>
-          <a:bodyPr rtlCol="0" anchor="ctr"/>
-          <a:lstStyle/>
-          <a:p>
-            <a:pPr algn="ctr"/>
-          </a:p>
-        </p:txBody>
-      </p:sp>
-      <p:sp>
-        <p:nvSpPr>
-          <p:cNvPr id="4" name="TextBox 3"/>
-          <p:cNvSpPr txBox="1"/>
-          <p:nvPr/>
-        </p:nvSpPr>
-        <p:spPr>
-          <a:xfrm>
-            <a:off x="457200" y="164592"/>
-            <a:ext cx="11277295" cy="502920"/>
-          </a:xfrm>
-          <a:prstGeom prst="rect">
-            <a:avLst/>
-          </a:prstGeom>
-          <a:noFill/>
-        </p:spPr>
-        <p:txBody>
-          <a:bodyPr wrap="square">
-            <a:spAutoFit/>
-          </a:bodyPr>
-          <a:lstStyle/>
-          <a:p>
-            <a:r>
-              <a:rPr sz="2600" b="1" i="0">
-                <a:solidFill>
-                  <a:srgbClr val="FFFFFF"/>
-                </a:solidFill>
-                <a:latin typeface="Calibri"/>
-              </a:rPr>
-              <a:t>Para la Clase 5</a:t>
-            </a:r>
-          </a:p>
-        </p:txBody>
-      </p:sp>
-      <p:sp>
-        <p:nvSpPr>
-          <p:cNvPr id="5" name="TextBox 4"/>
-          <p:cNvSpPr txBox="1"/>
-          <p:nvPr/>
-        </p:nvSpPr>
-        <p:spPr>
-          <a:xfrm>
-            <a:off x="457200" y="1170432"/>
-            <a:ext cx="11277295" cy="5230368"/>
-          </a:xfrm>
-          <a:prstGeom prst="rect">
-            <a:avLst/>
-          </a:prstGeom>
-          <a:noFill/>
-        </p:spPr>
-        <p:txBody>
-          <a:bodyPr wrap="square">
-            <a:spAutoFit/>
-          </a:bodyPr>
-          <a:lstStyle/>
-          <a:p>
-            <a:pPr>
-              <a:spcAft>
-                <a:spcPts val="800"/>
-              </a:spcAft>
-            </a:pPr>
-            <a:r>
-              <a:rPr sz="2000" b="0" i="0">
-                <a:solidFill>
-                  <a:srgbClr val="333333"/>
-                </a:solidFill>
-                <a:latin typeface="Calibri"/>
-              </a:rPr>
-              <a:t>–   </a:t>
-            </a:r>
-            <a:r>
-              <a:rPr sz="2000" b="1" i="0">
-                <a:solidFill>
-                  <a:srgbClr val="333333"/>
-                </a:solidFill>
-                <a:latin typeface="Calibri"/>
-              </a:rPr>
-              <a:t>Trabajo dirigido:</a:t>
-            </a:r>
-            <a:r>
-              <a:rPr sz="2000" b="0" i="0">
-                <a:solidFill>
-                  <a:srgbClr val="333333"/>
-                </a:solidFill>
-                <a:latin typeface="Calibri"/>
-              </a:rPr>
-              <a:t> Lectura del código ético — el código ACM/IEEE completo, los ocho principios, y los deberes del ingeniero frente a la sociedad de la Ley 842 de 2003.</a:t>
-            </a:r>
-          </a:p>
-          <a:p>
-            <a:pPr>
-              <a:spcAft>
-                <a:spcPts val="800"/>
-              </a:spcAft>
-            </a:pPr>
-            <a:r>
-              <a:rPr sz="2000" b="0" i="0">
-                <a:solidFill>
-                  <a:srgbClr val="333333"/>
-                </a:solidFill>
-                <a:latin typeface="Calibri"/>
-              </a:rPr>
-              <a:t>–   </a:t>
-            </a:r>
-            <a:r>
-              <a:rPr sz="2000" b="1" i="0">
-                <a:solidFill>
-                  <a:srgbClr val="333333"/>
-                </a:solidFill>
-                <a:latin typeface="Calibri"/>
-              </a:rPr>
-              <a:t>Trabajo independiente:</a:t>
-            </a:r>
-            <a:r>
-              <a:rPr sz="2000" b="0" i="0">
-                <a:solidFill>
-                  <a:srgbClr val="333333"/>
-                </a:solidFill>
-                <a:latin typeface="Calibri"/>
-              </a:rPr>
-              <a:t> Análisis crítico del código ético: media página sobre </a:t>
-            </a:r>
-            <a:r>
-              <a:rPr sz="2000" b="1" i="0">
-                <a:solidFill>
-                  <a:srgbClr val="333333"/>
-                </a:solidFill>
-                <a:latin typeface="Calibri"/>
-              </a:rPr>
-              <a:t>un principio que su equipo cree difícil de cumplir en la práctica</a:t>
-            </a:r>
-            <a:r>
-              <a:rPr sz="2000" b="0" i="0">
-                <a:solidFill>
-                  <a:srgbClr val="333333"/>
-                </a:solidFill>
-                <a:latin typeface="Calibri"/>
-              </a:rPr>
-              <a:t>, con el motivo.</a:t>
-            </a:r>
-          </a:p>
-          <a:p>
-            <a:pPr>
-              <a:spcAft>
-                <a:spcPts val="800"/>
-              </a:spcAft>
-            </a:pPr>
-            <a:r>
-              <a:rPr sz="2000" b="0" i="0">
-                <a:solidFill>
-                  <a:srgbClr val="333333"/>
-                </a:solidFill>
-                <a:latin typeface="Calibri"/>
-              </a:rPr>
-              <a:t>–   </a:t>
-            </a:r>
-            <a:r>
-              <a:rPr sz="2000" b="1" i="0">
-                <a:solidFill>
-                  <a:srgbClr val="333333"/>
-                </a:solidFill>
-                <a:latin typeface="Calibri"/>
-              </a:rPr>
-              <a:t>Clase 5 · El rol del ingeniero en el contexto ambiental</a:t>
-            </a:r>
-            <a:r>
-              <a:rPr sz="2000" b="0" i="0">
-                <a:solidFill>
-                  <a:srgbClr val="333333"/>
-                </a:solidFill>
-                <a:latin typeface="Calibri"/>
-              </a:rPr>
-              <a:t> — el impacto ambiental del software, que es el daño que no tiene una víctima con nombre y que casi nadie mide.</a:t>
-            </a:r>
-          </a:p>
-          <a:p>
-            <a:pPr>
-              <a:spcAft>
-                <a:spcPts val="800"/>
-              </a:spcAft>
-            </a:pPr>
-            <a:r>
-              <a:rPr sz="2000" b="0" i="0">
-                <a:solidFill>
-                  <a:srgbClr val="333333"/>
-                </a:solidFill>
-                <a:latin typeface="Calibri"/>
-              </a:rPr>
-              <a:t>–   </a:t>
-            </a:r>
-            <a:r>
-              <a:rPr sz="2000" b="1" i="0">
-                <a:solidFill>
-                  <a:srgbClr val="333333"/>
-                </a:solidFill>
-                <a:latin typeface="Calibri"/>
-              </a:rPr>
-              <a:t>Aviso:</a:t>
-            </a:r>
-            <a:r>
-              <a:rPr sz="2000" b="0" i="0">
-                <a:solidFill>
-                  <a:srgbClr val="333333"/>
-                </a:solidFill>
-                <a:latin typeface="Calibri"/>
-              </a:rPr>
-              <a:t> Traigan leído el código de ética y la regla propia de hoy escrita en el documento del equipo. En la sesión 6 esa regla entra en la ficha del problema del proyecto.</a:t>
-            </a:r>
-          </a:p>
-          <a:p>
-            <a:pPr>
-              <a:spcAft>
-                <a:spcPts val="800"/>
-              </a:spcAft>
-            </a:pPr>
-            <a:r>
-              <a:rPr sz="2000" b="0" i="0">
-                <a:solidFill>
-                  <a:srgbClr val="333333"/>
-                </a:solidFill>
-                <a:latin typeface="Calibri"/>
-              </a:rPr>
-              <a:t>–   </a:t>
-            </a:r>
-            <a:r>
-              <a:rPr sz="2000" b="1" i="0">
-                <a:solidFill>
-                  <a:srgbClr val="333333"/>
-                </a:solidFill>
-                <a:latin typeface="Calibri"/>
-              </a:rPr>
-              <a:t>Antes de salir:</a:t>
-            </a:r>
-            <a:r>
-              <a:rPr sz="2000" b="0" i="0">
-                <a:solidFill>
-                  <a:srgbClr val="333333"/>
-                </a:solidFill>
-                <a:latin typeface="Calibri"/>
-              </a:rPr>
-              <a:t> el enlace del documento del equipo en el chat, con permiso de lectura para el docente, y el nombre del vocero de hoy.</a:t>
-            </a:r>
-          </a:p>
-        </p:txBody>
-      </p:sp>
-      <p:sp>
-        <p:nvSpPr>
-          <p:cNvPr id="6" name="TextBox 5"/>
-          <p:cNvSpPr txBox="1"/>
-          <p:nvPr/>
-        </p:nvSpPr>
-        <p:spPr>
-          <a:xfrm>
-            <a:off x="11185855" y="6473952"/>
-            <a:ext cx="640080" cy="274320"/>
-          </a:xfrm>
-          <a:prstGeom prst="rect">
-            <a:avLst/>
-          </a:prstGeom>
-          <a:noFill/>
-        </p:spPr>
-        <p:txBody>
-          <a:bodyPr wrap="square">
-            <a:spAutoFit/>
-          </a:bodyPr>
-          <a:lstStyle/>
-          <a:p>
-            <a:pPr algn="r"/>
-            <a:r>
-              <a:rPr sz="1100" b="0" i="0">
-                <a:solidFill>
-                  <a:srgbClr val="666666"/>
-                </a:solidFill>
-                <a:latin typeface="Calibri"/>
-              </a:rPr>
-              <a:t>17</a:t>
-            </a:r>
-          </a:p>
-        </p:txBody>
-      </p:sp>
-    </p:spTree>
-  </p:cSld>
-  <p:clrMapOvr>
-    <a:masterClrMapping/>
-  </p:clrMapOvr>
-</p:sld>
-</file>
-
-<file path=ppt/slides/slide18.xml><?xml version="1.0" encoding="utf-8"?>
-<p:sld xmlns:a="http://schemas.openxmlformats.org/drawingml/2006/main" xmlns:p="http://schemas.openxmlformats.org/presentationml/2006/main" xmlns:r="http://schemas.openxmlformats.org/officeDocument/2006/relationships">
-  <p:cSld>
-    <p:bg>
-      <p:bgPr>
-        <a:solidFill>
-          <a:srgbClr val="FFFFFF"/>
-        </a:solidFill>
-        <a:effectLst/>
-      </p:bgPr>
-    </p:bg>
-    <p:spTree>
-      <p:nvGrpSpPr>
-        <p:cNvPr id="1" name=""/>
-        <p:cNvGrpSpPr/>
-        <p:nvPr/>
-      </p:nvGrpSpPr>
-      <p:grpSpPr/>
-      <p:sp>
-        <p:nvSpPr>
-          <p:cNvPr id="2" name="Rectangle 1"/>
-          <p:cNvSpPr/>
-          <p:nvPr/>
-        </p:nvSpPr>
-        <p:spPr>
-          <a:xfrm>
-            <a:off x="0" y="0"/>
             <a:ext cx="12191695" cy="164592"/>
           </a:xfrm>
           <a:prstGeom prst="rect">
@@ -12372,7 +9768,7 @@
                 </a:solidFill>
                 <a:latin typeface="Calibri"/>
               </a:rPr>
-              <a:t>Taller — comité de ética: juzgar un caso con el código en la mano</a:t>
+              <a:t>Práctica en equipos (opcional · la guía está en la carpeta de la clase)</a:t>
             </a:r>
           </a:p>
         </p:txBody>
@@ -12487,7 +9883,7 @@
                 </a:solidFill>
                 <a:latin typeface="Calibri"/>
               </a:rPr>
-              <a:t>5 equipos × 3 min — el veredicto y el momento en que se pudo parar</a:t>
+              <a:t>Socialización de la práctica, si se hizo</a:t>
             </a:r>
           </a:p>
         </p:txBody>

--- a/Introduccion a la Ingenieria/Clases/Clase 4 - Principios eticos en la Ingenieria/Presentacion.pptx
+++ b/Introduccion a la Ingenieria/Clases/Clase 4 - Principios eticos en la Ingenieria/Presentacion.pptx
@@ -4919,16 +4919,16 @@
         </p:nvSpPr>
         <p:spPr>
           <a:xfrm>
-            <a:off x="457200" y="1444752"/>
-            <a:ext cx="11277295" cy="908913"/>
+            <a:off x="5934611" y="1399031"/>
+            <a:ext cx="5735574" cy="4617720"/>
           </a:xfrm>
           <a:prstGeom prst="roundRect">
             <a:avLst>
-              <a:gd name="adj" fmla="val 12000"/>
+              <a:gd name="adj" fmla="val 4000"/>
             </a:avLst>
           </a:prstGeom>
           <a:solidFill>
-            <a:srgbClr val="F2F2F2"/>
+            <a:srgbClr val="E8EEF4"/>
           </a:solidFill>
           <a:ln>
             <a:noFill/>
@@ -4956,61 +4956,147 @@
           </a:p>
         </p:txBody>
       </p:sp>
-      <p:sp>
-        <p:nvSpPr>
-          <p:cNvPr id="7" name="Rounded Rectangle 6"/>
-          <p:cNvSpPr/>
-          <p:nvPr/>
-        </p:nvSpPr>
-        <p:spPr>
-          <a:xfrm>
-            <a:off x="594360" y="1679752"/>
-            <a:ext cx="438912" cy="438912"/>
-          </a:xfrm>
-          <a:prstGeom prst="roundRect">
-            <a:avLst>
-              <a:gd name="adj" fmla="val 12000"/>
-            </a:avLst>
-          </a:prstGeom>
-          <a:solidFill>
-            <a:srgbClr val="095292"/>
-          </a:solidFill>
-          <a:ln>
-            <a:noFill/>
-          </a:ln>
-        </p:spPr>
-        <p:style>
-          <a:lnRef idx="1">
-            <a:schemeClr val="accent1"/>
-          </a:lnRef>
-          <a:fillRef idx="3">
-            <a:schemeClr val="accent1"/>
-          </a:fillRef>
-          <a:effectRef idx="2">
-            <a:schemeClr val="accent1"/>
-          </a:effectRef>
-          <a:fontRef idx="minor">
-            <a:schemeClr val="lt1"/>
-          </a:fontRef>
-        </p:style>
-        <p:txBody>
-          <a:bodyPr rtlCol="0" anchor="ctr"/>
+      <p:pic>
+        <p:nvPicPr>
+          <p:cNvPr id="7" name="Picture 6" descr="therac25-paso1.png"/>
+          <p:cNvPicPr>
+            <a:picLocks noChangeAspect="1"/>
+          </p:cNvPicPr>
+          <p:nvPr/>
+        </p:nvPicPr>
+        <p:blipFill>
+          <a:blip r:embed="rId2"/>
+          <a:stretch>
+            <a:fillRect/>
+          </a:stretch>
+        </p:blipFill>
+        <p:spPr>
+          <a:xfrm>
+            <a:off x="6007763" y="1472184"/>
+            <a:ext cx="5589270" cy="4471416"/>
+          </a:xfrm>
+          <a:prstGeom prst="rect">
+            <a:avLst/>
+          </a:prstGeom>
+        </p:spPr>
+      </p:pic>
+      <p:pic>
+        <p:nvPicPr>
+          <p:cNvPr id="8" name="Picture 7" descr="therac25-paso2.png"/>
+          <p:cNvPicPr>
+            <a:picLocks noChangeAspect="1"/>
+          </p:cNvPicPr>
+          <p:nvPr/>
+        </p:nvPicPr>
+        <p:blipFill>
+          <a:blip r:embed="rId3"/>
+          <a:stretch>
+            <a:fillRect/>
+          </a:stretch>
+        </p:blipFill>
+        <p:spPr>
+          <a:xfrm>
+            <a:off x="6007763" y="1472184"/>
+            <a:ext cx="5589270" cy="4471416"/>
+          </a:xfrm>
+          <a:prstGeom prst="rect">
+            <a:avLst/>
+          </a:prstGeom>
+        </p:spPr>
+      </p:pic>
+      <p:pic>
+        <p:nvPicPr>
+          <p:cNvPr id="9" name="Picture 8" descr="therac25-paso3.png"/>
+          <p:cNvPicPr>
+            <a:picLocks noChangeAspect="1"/>
+          </p:cNvPicPr>
+          <p:nvPr/>
+        </p:nvPicPr>
+        <p:blipFill>
+          <a:blip r:embed="rId4"/>
+          <a:stretch>
+            <a:fillRect/>
+          </a:stretch>
+        </p:blipFill>
+        <p:spPr>
+          <a:xfrm>
+            <a:off x="6007763" y="1472184"/>
+            <a:ext cx="5589270" cy="4471416"/>
+          </a:xfrm>
+          <a:prstGeom prst="rect">
+            <a:avLst/>
+          </a:prstGeom>
+        </p:spPr>
+      </p:pic>
+      <p:pic>
+        <p:nvPicPr>
+          <p:cNvPr id="10" name="Picture 9" descr="therac25-paso4.png"/>
+          <p:cNvPicPr>
+            <a:picLocks noChangeAspect="1"/>
+          </p:cNvPicPr>
+          <p:nvPr/>
+        </p:nvPicPr>
+        <p:blipFill>
+          <a:blip r:embed="rId5"/>
+          <a:stretch>
+            <a:fillRect/>
+          </a:stretch>
+        </p:blipFill>
+        <p:spPr>
+          <a:xfrm>
+            <a:off x="6007763" y="1472184"/>
+            <a:ext cx="5589270" cy="4471416"/>
+          </a:xfrm>
+          <a:prstGeom prst="rect">
+            <a:avLst/>
+          </a:prstGeom>
+        </p:spPr>
+      </p:pic>
+      <p:sp>
+        <p:nvSpPr>
+          <p:cNvPr id="18" name="TextBox 17"/>
+          <p:cNvSpPr txBox="1"/>
+          <p:nvPr/>
+        </p:nvSpPr>
+        <p:spPr>
+          <a:xfrm>
+            <a:off x="5870301" y="5961888"/>
+            <a:ext cx="5864193" cy="320040"/>
+          </a:xfrm>
+          <a:prstGeom prst="rect">
+            <a:avLst/>
+          </a:prstGeom>
+          <a:noFill/>
+        </p:spPr>
+        <p:txBody>
+          <a:bodyPr wrap="square">
+            <a:spAutoFit/>
+          </a:bodyPr>
           <a:lstStyle/>
           <a:p>
             <a:pPr algn="ctr"/>
-          </a:p>
-        </p:txBody>
-      </p:sp>
-      <p:sp>
-        <p:nvSpPr>
-          <p:cNvPr id="8" name="TextBox 7"/>
+            <a:r>
+              <a:rPr sz="1100" b="0" i="1">
+                <a:solidFill>
+                  <a:srgbClr val="666666"/>
+                </a:solidFill>
+                <a:latin typeface="Calibri"/>
+              </a:rPr>
+              <a:t>Clic para avanzar la animación</a:t>
+            </a:r>
+          </a:p>
+        </p:txBody>
+      </p:sp>
+      <p:sp>
+        <p:nvSpPr>
+          <p:cNvPr id="19" name="TextBox 18"/>
           <p:cNvSpPr txBox="1"/>
           <p:nvPr/>
         </p:nvSpPr>
         <p:spPr>
           <a:xfrm>
-            <a:off x="594360" y="1679752"/>
-            <a:ext cx="438912" cy="438912"/>
+            <a:off x="457200" y="1563624"/>
+            <a:ext cx="5093061" cy="4837176"/>
           </a:xfrm>
           <a:prstGeom prst="rect">
             <a:avLst/>
@@ -5018,757 +5104,117 @@
           <a:noFill/>
         </p:spPr>
         <p:txBody>
-          <a:bodyPr wrap="square" anchor="ctr"/>
-          <a:lstStyle/>
-          <a:p>
-            <a:pPr algn="ctr"/>
-            <a:r>
-              <a:rPr sz="1600" b="1" i="0">
-                <a:solidFill>
-                  <a:srgbClr val="FFFFFF"/>
-                </a:solidFill>
-                <a:latin typeface="Calibri"/>
-              </a:rPr>
-              <a:t>1</a:t>
-            </a:r>
-          </a:p>
-        </p:txBody>
-      </p:sp>
-      <p:sp>
-        <p:nvSpPr>
-          <p:cNvPr id="9" name="TextBox 8"/>
-          <p:cNvSpPr txBox="1"/>
-          <p:nvPr/>
-        </p:nvSpPr>
-        <p:spPr>
-          <a:xfrm>
-            <a:off x="1188720" y="1536192"/>
-            <a:ext cx="10271455" cy="744321"/>
-          </a:xfrm>
-          <a:prstGeom prst="rect">
-            <a:avLst/>
-          </a:prstGeom>
-          <a:noFill/>
-        </p:spPr>
-        <p:txBody>
-          <a:bodyPr wrap="square" anchor="ctr"/>
-          <a:lstStyle/>
-          <a:p>
-            <a:r>
-              <a:rPr sz="1500" b="1" i="0">
-                <a:solidFill>
-                  <a:srgbClr val="095292"/>
-                </a:solidFill>
-                <a:latin typeface="Calibri"/>
-              </a:rPr>
-              <a:t>1 · Se quitaron los seguros</a:t>
-            </a:r>
-          </a:p>
+          <a:bodyPr wrap="square">
+            <a:spAutoFit/>
+          </a:bodyPr>
+          <a:lstStyle/>
           <a:p>
             <a:pPr>
-              <a:spcBef>
-                <a:spcPts val="200"/>
-              </a:spcBef>
+              <a:spcAft>
+                <a:spcPts val="800"/>
+              </a:spcAft>
             </a:pPr>
             <a:r>
-              <a:rPr sz="1300" b="0" i="0">
+              <a:rPr sz="2000" b="0" i="0">
                 <a:solidFill>
                   <a:srgbClr val="333333"/>
                 </a:solidFill>
                 <a:latin typeface="Calibri"/>
               </a:rPr>
-              <a:t>Los modelos viejos tenían frenos físicos. En el nuevo se quitaron: «el software lo evita».</a:t>
-            </a:r>
-          </a:p>
-        </p:txBody>
-      </p:sp>
-      <p:sp>
-        <p:nvSpPr>
-          <p:cNvPr id="10" name="Rounded Rectangle 9"/>
-          <p:cNvSpPr/>
-          <p:nvPr/>
-        </p:nvSpPr>
-        <p:spPr>
-          <a:xfrm>
-            <a:off x="457200" y="2445105"/>
-            <a:ext cx="11277295" cy="908913"/>
-          </a:xfrm>
-          <a:prstGeom prst="roundRect">
-            <a:avLst>
-              <a:gd name="adj" fmla="val 12000"/>
-            </a:avLst>
-          </a:prstGeom>
-          <a:solidFill>
-            <a:srgbClr val="E8F4FA"/>
-          </a:solidFill>
-          <a:ln>
-            <a:noFill/>
-          </a:ln>
-        </p:spPr>
-        <p:style>
-          <a:lnRef idx="1">
-            <a:schemeClr val="accent1"/>
-          </a:lnRef>
-          <a:fillRef idx="3">
-            <a:schemeClr val="accent1"/>
-          </a:fillRef>
-          <a:effectRef idx="2">
-            <a:schemeClr val="accent1"/>
-          </a:effectRef>
-          <a:fontRef idx="minor">
-            <a:schemeClr val="lt1"/>
-          </a:fontRef>
-        </p:style>
-        <p:txBody>
-          <a:bodyPr rtlCol="0" anchor="ctr"/>
-          <a:lstStyle/>
-          <a:p>
-            <a:pPr algn="ctr"/>
-          </a:p>
-        </p:txBody>
-      </p:sp>
-      <p:sp>
-        <p:nvSpPr>
-          <p:cNvPr id="11" name="Rounded Rectangle 10"/>
-          <p:cNvSpPr/>
-          <p:nvPr/>
-        </p:nvSpPr>
-        <p:spPr>
-          <a:xfrm>
-            <a:off x="594360" y="2680106"/>
-            <a:ext cx="438912" cy="438912"/>
-          </a:xfrm>
-          <a:prstGeom prst="roundRect">
-            <a:avLst>
-              <a:gd name="adj" fmla="val 12000"/>
-            </a:avLst>
-          </a:prstGeom>
-          <a:solidFill>
-            <a:srgbClr val="095292"/>
-          </a:solidFill>
-          <a:ln>
-            <a:noFill/>
-          </a:ln>
-        </p:spPr>
-        <p:style>
-          <a:lnRef idx="1">
-            <a:schemeClr val="accent1"/>
-          </a:lnRef>
-          <a:fillRef idx="3">
-            <a:schemeClr val="accent1"/>
-          </a:fillRef>
-          <a:effectRef idx="2">
-            <a:schemeClr val="accent1"/>
-          </a:effectRef>
-          <a:fontRef idx="minor">
-            <a:schemeClr val="lt1"/>
-          </a:fontRef>
-        </p:style>
-        <p:txBody>
-          <a:bodyPr rtlCol="0" anchor="ctr"/>
-          <a:lstStyle/>
-          <a:p>
-            <a:pPr algn="ctr"/>
-          </a:p>
-        </p:txBody>
-      </p:sp>
-      <p:sp>
-        <p:nvSpPr>
-          <p:cNvPr id="12" name="TextBox 11"/>
-          <p:cNvSpPr txBox="1"/>
-          <p:nvPr/>
-        </p:nvSpPr>
-        <p:spPr>
-          <a:xfrm>
-            <a:off x="594360" y="2680106"/>
-            <a:ext cx="438912" cy="438912"/>
-          </a:xfrm>
-          <a:prstGeom prst="rect">
-            <a:avLst/>
-          </a:prstGeom>
-          <a:noFill/>
-        </p:spPr>
-        <p:txBody>
-          <a:bodyPr wrap="square" anchor="ctr"/>
-          <a:lstStyle/>
-          <a:p>
-            <a:pPr algn="ctr"/>
-            <a:r>
-              <a:rPr sz="1600" b="1" i="0">
-                <a:solidFill>
-                  <a:srgbClr val="FFFFFF"/>
-                </a:solidFill>
-                <a:latin typeface="Calibri"/>
-              </a:rPr>
-              <a:t>2</a:t>
-            </a:r>
-          </a:p>
-        </p:txBody>
-      </p:sp>
-      <p:sp>
-        <p:nvSpPr>
-          <p:cNvPr id="13" name="TextBox 12"/>
-          <p:cNvSpPr txBox="1"/>
-          <p:nvPr/>
-        </p:nvSpPr>
-        <p:spPr>
-          <a:xfrm>
-            <a:off x="1188720" y="2536545"/>
-            <a:ext cx="10271455" cy="744321"/>
-          </a:xfrm>
-          <a:prstGeom prst="rect">
-            <a:avLst/>
-          </a:prstGeom>
-          <a:noFill/>
-        </p:spPr>
-        <p:txBody>
-          <a:bodyPr wrap="square" anchor="ctr"/>
-          <a:lstStyle/>
-          <a:p>
-            <a:r>
-              <a:rPr sz="1500" b="1" i="0">
-                <a:solidFill>
-                  <a:srgbClr val="095292"/>
-                </a:solidFill>
-                <a:latin typeface="Calibri"/>
-              </a:rPr>
-              <a:t>2 · Se reutilizó el código</a:t>
+              <a:t>–   </a:t>
+            </a:r>
+            <a:r>
+              <a:rPr sz="2000" b="1" i="0">
+                <a:solidFill>
+                  <a:srgbClr val="333333"/>
+                </a:solidFill>
+                <a:latin typeface="Calibri"/>
+              </a:rPr>
+              <a:t>1 · Se quitaron los seguros:</a:t>
+            </a:r>
+            <a:r>
+              <a:rPr sz="2000" b="0" i="0">
+                <a:solidFill>
+                  <a:srgbClr val="333333"/>
+                </a:solidFill>
+                <a:latin typeface="Calibri"/>
+              </a:rPr>
+              <a:t> Los modelos viejos tenían frenos físicos. En el nuevo se quitaron: «el software lo evita».</a:t>
             </a:r>
           </a:p>
           <a:p>
             <a:pPr>
-              <a:spcBef>
-                <a:spcPts val="200"/>
-              </a:spcBef>
+              <a:spcAft>
+                <a:spcPts val="800"/>
+              </a:spcAft>
             </a:pPr>
             <a:r>
-              <a:rPr sz="1300" b="0" i="0">
+              <a:rPr sz="2000" b="0" i="0">
                 <a:solidFill>
                   <a:srgbClr val="333333"/>
                 </a:solidFill>
                 <a:latin typeface="Calibri"/>
               </a:rPr>
-              <a:t>El software venía de los modelos viejos, con errores que antes tapaban esos frenos.</a:t>
-            </a:r>
-          </a:p>
-        </p:txBody>
-      </p:sp>
-      <p:sp>
-        <p:nvSpPr>
-          <p:cNvPr id="14" name="Rounded Rectangle 13"/>
-          <p:cNvSpPr/>
-          <p:nvPr/>
-        </p:nvSpPr>
-        <p:spPr>
-          <a:xfrm>
-            <a:off x="457200" y="3445459"/>
-            <a:ext cx="11277295" cy="908913"/>
-          </a:xfrm>
-          <a:prstGeom prst="roundRect">
-            <a:avLst>
-              <a:gd name="adj" fmla="val 12000"/>
-            </a:avLst>
-          </a:prstGeom>
-          <a:solidFill>
-            <a:srgbClr val="F2F2F2"/>
-          </a:solidFill>
-          <a:ln>
-            <a:noFill/>
-          </a:ln>
-        </p:spPr>
-        <p:style>
-          <a:lnRef idx="1">
-            <a:schemeClr val="accent1"/>
-          </a:lnRef>
-          <a:fillRef idx="3">
-            <a:schemeClr val="accent1"/>
-          </a:fillRef>
-          <a:effectRef idx="2">
-            <a:schemeClr val="accent1"/>
-          </a:effectRef>
-          <a:fontRef idx="minor">
-            <a:schemeClr val="lt1"/>
-          </a:fontRef>
-        </p:style>
-        <p:txBody>
-          <a:bodyPr rtlCol="0" anchor="ctr"/>
-          <a:lstStyle/>
-          <a:p>
-            <a:pPr algn="ctr"/>
-          </a:p>
-        </p:txBody>
-      </p:sp>
-      <p:sp>
-        <p:nvSpPr>
-          <p:cNvPr id="15" name="Rounded Rectangle 14"/>
-          <p:cNvSpPr/>
-          <p:nvPr/>
-        </p:nvSpPr>
-        <p:spPr>
-          <a:xfrm>
-            <a:off x="594360" y="3680460"/>
-            <a:ext cx="438912" cy="438912"/>
-          </a:xfrm>
-          <a:prstGeom prst="roundRect">
-            <a:avLst>
-              <a:gd name="adj" fmla="val 12000"/>
-            </a:avLst>
-          </a:prstGeom>
-          <a:solidFill>
-            <a:srgbClr val="095292"/>
-          </a:solidFill>
-          <a:ln>
-            <a:noFill/>
-          </a:ln>
-        </p:spPr>
-        <p:style>
-          <a:lnRef idx="1">
-            <a:schemeClr val="accent1"/>
-          </a:lnRef>
-          <a:fillRef idx="3">
-            <a:schemeClr val="accent1"/>
-          </a:fillRef>
-          <a:effectRef idx="2">
-            <a:schemeClr val="accent1"/>
-          </a:effectRef>
-          <a:fontRef idx="minor">
-            <a:schemeClr val="lt1"/>
-          </a:fontRef>
-        </p:style>
-        <p:txBody>
-          <a:bodyPr rtlCol="0" anchor="ctr"/>
-          <a:lstStyle/>
-          <a:p>
-            <a:pPr algn="ctr"/>
-          </a:p>
-        </p:txBody>
-      </p:sp>
-      <p:sp>
-        <p:nvSpPr>
-          <p:cNvPr id="16" name="TextBox 15"/>
-          <p:cNvSpPr txBox="1"/>
-          <p:nvPr/>
-        </p:nvSpPr>
-        <p:spPr>
-          <a:xfrm>
-            <a:off x="594360" y="3680460"/>
-            <a:ext cx="438912" cy="438912"/>
-          </a:xfrm>
-          <a:prstGeom prst="rect">
-            <a:avLst/>
-          </a:prstGeom>
-          <a:noFill/>
-        </p:spPr>
-        <p:txBody>
-          <a:bodyPr wrap="square" anchor="ctr"/>
-          <a:lstStyle/>
-          <a:p>
-            <a:pPr algn="ctr"/>
-            <a:r>
-              <a:rPr sz="1600" b="1" i="0">
-                <a:solidFill>
-                  <a:srgbClr val="FFFFFF"/>
-                </a:solidFill>
-                <a:latin typeface="Calibri"/>
-              </a:rPr>
-              <a:t>3</a:t>
-            </a:r>
-          </a:p>
-        </p:txBody>
-      </p:sp>
-      <p:sp>
-        <p:nvSpPr>
-          <p:cNvPr id="17" name="TextBox 16"/>
-          <p:cNvSpPr txBox="1"/>
-          <p:nvPr/>
-        </p:nvSpPr>
-        <p:spPr>
-          <a:xfrm>
-            <a:off x="1188720" y="3536899"/>
-            <a:ext cx="10271455" cy="744321"/>
-          </a:xfrm>
-          <a:prstGeom prst="rect">
-            <a:avLst/>
-          </a:prstGeom>
-          <a:noFill/>
-        </p:spPr>
-        <p:txBody>
-          <a:bodyPr wrap="square" anchor="ctr"/>
-          <a:lstStyle/>
-          <a:p>
-            <a:r>
-              <a:rPr sz="1500" b="1" i="0">
-                <a:solidFill>
-                  <a:srgbClr val="095292"/>
-                </a:solidFill>
-                <a:latin typeface="Calibri"/>
-              </a:rPr>
-              <a:t>3 · Apareció la falla</a:t>
+              <a:t>–   </a:t>
+            </a:r>
+            <a:r>
+              <a:rPr sz="2000" b="1" i="0">
+                <a:solidFill>
+                  <a:srgbClr val="333333"/>
+                </a:solidFill>
+                <a:latin typeface="Calibri"/>
+              </a:rPr>
+              <a:t>2 · Se reutilizó el código:</a:t>
+            </a:r>
+            <a:r>
+              <a:rPr sz="2000" b="0" i="0">
+                <a:solidFill>
+                  <a:srgbClr val="333333"/>
+                </a:solidFill>
+                <a:latin typeface="Calibri"/>
+              </a:rPr>
+              <a:t> El software venía de los modelos viejos, con errores que antes tapaban esos frenos.</a:t>
             </a:r>
           </a:p>
           <a:p>
             <a:pPr>
-              <a:spcBef>
-                <a:spcPts val="200"/>
-              </a:spcBef>
+              <a:spcAft>
+                <a:spcPts val="800"/>
+              </a:spcAft>
             </a:pPr>
             <a:r>
-              <a:rPr sz="1300" b="0" i="0">
+              <a:rPr sz="2000" b="0" i="0">
                 <a:solidFill>
                   <a:srgbClr val="333333"/>
                 </a:solidFill>
                 <a:latin typeface="Calibri"/>
               </a:rPr>
-              <a:t>Si la operadora corregía la pantalla muy rápido, la máquina quedaba mal configurada.</a:t>
-            </a:r>
-          </a:p>
-        </p:txBody>
-      </p:sp>
-      <p:sp>
-        <p:nvSpPr>
-          <p:cNvPr id="18" name="Rounded Rectangle 17"/>
-          <p:cNvSpPr/>
-          <p:nvPr/>
-        </p:nvSpPr>
-        <p:spPr>
-          <a:xfrm>
-            <a:off x="457200" y="4445812"/>
-            <a:ext cx="11277295" cy="908913"/>
-          </a:xfrm>
-          <a:prstGeom prst="roundRect">
-            <a:avLst>
-              <a:gd name="adj" fmla="val 12000"/>
-            </a:avLst>
-          </a:prstGeom>
-          <a:solidFill>
-            <a:srgbClr val="E8F4FA"/>
-          </a:solidFill>
-          <a:ln>
-            <a:noFill/>
-          </a:ln>
-        </p:spPr>
-        <p:style>
-          <a:lnRef idx="1">
-            <a:schemeClr val="accent1"/>
-          </a:lnRef>
-          <a:fillRef idx="3">
-            <a:schemeClr val="accent1"/>
-          </a:fillRef>
-          <a:effectRef idx="2">
-            <a:schemeClr val="accent1"/>
-          </a:effectRef>
-          <a:fontRef idx="minor">
-            <a:schemeClr val="lt1"/>
-          </a:fontRef>
-        </p:style>
-        <p:txBody>
-          <a:bodyPr rtlCol="0" anchor="ctr"/>
-          <a:lstStyle/>
-          <a:p>
-            <a:pPr algn="ctr"/>
-          </a:p>
-        </p:txBody>
-      </p:sp>
-      <p:sp>
-        <p:nvSpPr>
-          <p:cNvPr id="19" name="Rounded Rectangle 18"/>
-          <p:cNvSpPr/>
-          <p:nvPr/>
-        </p:nvSpPr>
-        <p:spPr>
-          <a:xfrm>
-            <a:off x="594360" y="4680813"/>
-            <a:ext cx="438912" cy="438912"/>
-          </a:xfrm>
-          <a:prstGeom prst="roundRect">
-            <a:avLst>
-              <a:gd name="adj" fmla="val 12000"/>
-            </a:avLst>
-          </a:prstGeom>
-          <a:solidFill>
-            <a:srgbClr val="095292"/>
-          </a:solidFill>
-          <a:ln>
-            <a:noFill/>
-          </a:ln>
-        </p:spPr>
-        <p:style>
-          <a:lnRef idx="1">
-            <a:schemeClr val="accent1"/>
-          </a:lnRef>
-          <a:fillRef idx="3">
-            <a:schemeClr val="accent1"/>
-          </a:fillRef>
-          <a:effectRef idx="2">
-            <a:schemeClr val="accent1"/>
-          </a:effectRef>
-          <a:fontRef idx="minor">
-            <a:schemeClr val="lt1"/>
-          </a:fontRef>
-        </p:style>
-        <p:txBody>
-          <a:bodyPr rtlCol="0" anchor="ctr"/>
-          <a:lstStyle/>
-          <a:p>
-            <a:pPr algn="ctr"/>
+              <a:t>–   </a:t>
+            </a:r>
+            <a:r>
+              <a:rPr sz="2000" b="1" i="0">
+                <a:solidFill>
+                  <a:srgbClr val="333333"/>
+                </a:solidFill>
+                <a:latin typeface="Calibri"/>
+              </a:rPr>
+              <a:t>3 · Apareció la falla:</a:t>
+            </a:r>
+            <a:r>
+              <a:rPr sz="2000" b="0" i="0">
+                <a:solidFill>
+                  <a:srgbClr val="333333"/>
+                </a:solidFill>
+                <a:latin typeface="Calibri"/>
+              </a:rPr>
+              <a:t> Si la operadora corregía la pantalla muy rápido, la máquina quedaba mal configurada.</a:t>
+            </a:r>
           </a:p>
         </p:txBody>
       </p:sp>
       <p:sp>
         <p:nvSpPr>
           <p:cNvPr id="20" name="TextBox 19"/>
-          <p:cNvSpPr txBox="1"/>
-          <p:nvPr/>
-        </p:nvSpPr>
-        <p:spPr>
-          <a:xfrm>
-            <a:off x="594360" y="4680813"/>
-            <a:ext cx="438912" cy="438912"/>
-          </a:xfrm>
-          <a:prstGeom prst="rect">
-            <a:avLst/>
-          </a:prstGeom>
-          <a:noFill/>
-        </p:spPr>
-        <p:txBody>
-          <a:bodyPr wrap="square" anchor="ctr"/>
-          <a:lstStyle/>
-          <a:p>
-            <a:pPr algn="ctr"/>
-            <a:r>
-              <a:rPr sz="1600" b="1" i="0">
-                <a:solidFill>
-                  <a:srgbClr val="FFFFFF"/>
-                </a:solidFill>
-                <a:latin typeface="Calibri"/>
-              </a:rPr>
-              <a:t>4</a:t>
-            </a:r>
-          </a:p>
-        </p:txBody>
-      </p:sp>
-      <p:sp>
-        <p:nvSpPr>
-          <p:cNvPr id="21" name="TextBox 20"/>
-          <p:cNvSpPr txBox="1"/>
-          <p:nvPr/>
-        </p:nvSpPr>
-        <p:spPr>
-          <a:xfrm>
-            <a:off x="1188720" y="4537252"/>
-            <a:ext cx="10271455" cy="744321"/>
-          </a:xfrm>
-          <a:prstGeom prst="rect">
-            <a:avLst/>
-          </a:prstGeom>
-          <a:noFill/>
-        </p:spPr>
-        <p:txBody>
-          <a:bodyPr wrap="square" anchor="ctr"/>
-          <a:lstStyle/>
-          <a:p>
-            <a:r>
-              <a:rPr sz="1500" b="1" i="0">
-                <a:solidFill>
-                  <a:srgbClr val="095292"/>
-                </a:solidFill>
-                <a:latin typeface="Calibri"/>
-              </a:rPr>
-              <a:t>4 · Los errores no se entendían</a:t>
-            </a:r>
-          </a:p>
-          <a:p>
-            <a:pPr>
-              <a:spcBef>
-                <a:spcPts val="200"/>
-              </a:spcBef>
-            </a:pPr>
-            <a:r>
-              <a:rPr sz="1300" b="0" i="0">
-                <a:solidFill>
-                  <a:srgbClr val="333333"/>
-                </a:solidFill>
-                <a:latin typeface="Calibri"/>
-              </a:rPr>
-              <a:t>La pantalla decía un código sin explicación. Las operadoras lo ignoraban y seguían.</a:t>
-            </a:r>
-          </a:p>
-        </p:txBody>
-      </p:sp>
-      <p:sp>
-        <p:nvSpPr>
-          <p:cNvPr id="22" name="Rounded Rectangle 21"/>
-          <p:cNvSpPr/>
-          <p:nvPr/>
-        </p:nvSpPr>
-        <p:spPr>
-          <a:xfrm>
-            <a:off x="457200" y="5446166"/>
-            <a:ext cx="11277295" cy="908913"/>
-          </a:xfrm>
-          <a:prstGeom prst="roundRect">
-            <a:avLst>
-              <a:gd name="adj" fmla="val 12000"/>
-            </a:avLst>
-          </a:prstGeom>
-          <a:solidFill>
-            <a:srgbClr val="F2F2F2"/>
-          </a:solidFill>
-          <a:ln>
-            <a:noFill/>
-          </a:ln>
-        </p:spPr>
-        <p:style>
-          <a:lnRef idx="1">
-            <a:schemeClr val="accent1"/>
-          </a:lnRef>
-          <a:fillRef idx="3">
-            <a:schemeClr val="accent1"/>
-          </a:fillRef>
-          <a:effectRef idx="2">
-            <a:schemeClr val="accent1"/>
-          </a:effectRef>
-          <a:fontRef idx="minor">
-            <a:schemeClr val="lt1"/>
-          </a:fontRef>
-        </p:style>
-        <p:txBody>
-          <a:bodyPr rtlCol="0" anchor="ctr"/>
-          <a:lstStyle/>
-          <a:p>
-            <a:pPr algn="ctr"/>
-          </a:p>
-        </p:txBody>
-      </p:sp>
-      <p:sp>
-        <p:nvSpPr>
-          <p:cNvPr id="23" name="Rounded Rectangle 22"/>
-          <p:cNvSpPr/>
-          <p:nvPr/>
-        </p:nvSpPr>
-        <p:spPr>
-          <a:xfrm>
-            <a:off x="594360" y="5681167"/>
-            <a:ext cx="438912" cy="438912"/>
-          </a:xfrm>
-          <a:prstGeom prst="roundRect">
-            <a:avLst>
-              <a:gd name="adj" fmla="val 12000"/>
-            </a:avLst>
-          </a:prstGeom>
-          <a:solidFill>
-            <a:srgbClr val="095292"/>
-          </a:solidFill>
-          <a:ln>
-            <a:noFill/>
-          </a:ln>
-        </p:spPr>
-        <p:style>
-          <a:lnRef idx="1">
-            <a:schemeClr val="accent1"/>
-          </a:lnRef>
-          <a:fillRef idx="3">
-            <a:schemeClr val="accent1"/>
-          </a:fillRef>
-          <a:effectRef idx="2">
-            <a:schemeClr val="accent1"/>
-          </a:effectRef>
-          <a:fontRef idx="minor">
-            <a:schemeClr val="lt1"/>
-          </a:fontRef>
-        </p:style>
-        <p:txBody>
-          <a:bodyPr rtlCol="0" anchor="ctr"/>
-          <a:lstStyle/>
-          <a:p>
-            <a:pPr algn="ctr"/>
-          </a:p>
-        </p:txBody>
-      </p:sp>
-      <p:sp>
-        <p:nvSpPr>
-          <p:cNvPr id="24" name="TextBox 23"/>
-          <p:cNvSpPr txBox="1"/>
-          <p:nvPr/>
-        </p:nvSpPr>
-        <p:spPr>
-          <a:xfrm>
-            <a:off x="594360" y="5681167"/>
-            <a:ext cx="438912" cy="438912"/>
-          </a:xfrm>
-          <a:prstGeom prst="rect">
-            <a:avLst/>
-          </a:prstGeom>
-          <a:noFill/>
-        </p:spPr>
-        <p:txBody>
-          <a:bodyPr wrap="square" anchor="ctr"/>
-          <a:lstStyle/>
-          <a:p>
-            <a:pPr algn="ctr"/>
-            <a:r>
-              <a:rPr sz="1600" b="1" i="0">
-                <a:solidFill>
-                  <a:srgbClr val="FFFFFF"/>
-                </a:solidFill>
-                <a:latin typeface="Calibri"/>
-              </a:rPr>
-              <a:t>5</a:t>
-            </a:r>
-          </a:p>
-        </p:txBody>
-      </p:sp>
-      <p:sp>
-        <p:nvSpPr>
-          <p:cNvPr id="25" name="TextBox 24"/>
-          <p:cNvSpPr txBox="1"/>
-          <p:nvPr/>
-        </p:nvSpPr>
-        <p:spPr>
-          <a:xfrm>
-            <a:off x="1188720" y="5537606"/>
-            <a:ext cx="10271455" cy="744321"/>
-          </a:xfrm>
-          <a:prstGeom prst="rect">
-            <a:avLst/>
-          </a:prstGeom>
-          <a:noFill/>
-        </p:spPr>
-        <p:txBody>
-          <a:bodyPr wrap="square" anchor="ctr"/>
-          <a:lstStyle/>
-          <a:p>
-            <a:r>
-              <a:rPr sz="1500" b="1" i="0">
-                <a:solidFill>
-                  <a:srgbClr val="095292"/>
-                </a:solidFill>
-                <a:latin typeface="Calibri"/>
-              </a:rPr>
-              <a:t>El resultado</a:t>
-            </a:r>
-          </a:p>
-          <a:p>
-            <a:pPr>
-              <a:spcBef>
-                <a:spcPts val="200"/>
-              </a:spcBef>
-            </a:pPr>
-            <a:r>
-              <a:rPr sz="1300" b="0" i="0">
-                <a:solidFill>
-                  <a:srgbClr val="333333"/>
-                </a:solidFill>
-                <a:latin typeface="Calibri"/>
-              </a:rPr>
-              <a:t>Sobredosis masivas y muertes. El software hacía lo que estaba programado.</a:t>
-            </a:r>
-          </a:p>
-        </p:txBody>
-      </p:sp>
-      <p:sp>
-        <p:nvSpPr>
-          <p:cNvPr id="26" name="TextBox 25"/>
           <p:cNvSpPr txBox="1"/>
           <p:nvPr/>
         </p:nvSpPr>
@@ -5806,6 +5252,195 @@
   <p:clrMapOvr>
     <a:masterClrMapping/>
   </p:clrMapOvr>
+  <p:timing>
+    <p:tnLst>
+      <p:par>
+        <p:cTn id="1" dur="indefinite" restart="never" nodeType="tmRoot">
+          <p:childTnLst>
+            <p:seq concurrent="1" nextAc="seek">
+              <p:cTn id="2" dur="indefinite" nodeType="mainSeq">
+                <p:childTnLst>
+                  <p:par>
+                    <p:cTn id="3" fill="hold">
+                      <p:stCondLst>
+                        <p:cond delay="indefinite"/>
+                      </p:stCondLst>
+                      <p:childTnLst>
+                        <p:par>
+                          <p:cTn id="4" fill="hold">
+                            <p:stCondLst>
+                              <p:cond delay="0"/>
+                            </p:stCondLst>
+                            <p:childTnLst>
+                              <p:par>
+                                <p:cTn id="5" presetID="10" presetClass="entr" presetSubtype="0" fill="hold" nodeType="clickEffect">
+                                  <p:stCondLst>
+                                    <p:cond delay="0"/>
+                                  </p:stCondLst>
+                                  <p:childTnLst>
+                                    <p:set>
+                                      <p:cBhvr>
+                                        <p:cTn id="6" dur="1" fill="hold">
+                                          <p:stCondLst>
+                                            <p:cond delay="0"/>
+                                          </p:stCondLst>
+                                        </p:cTn>
+                                        <p:tgtEl>
+                                          <p:spTgt spid="8"/>
+                                        </p:tgtEl>
+                                        <p:attrNameLst>
+                                          <p:attrName>style.visibility</p:attrName>
+                                        </p:attrNameLst>
+                                      </p:cBhvr>
+                                      <p:to>
+                                        <p:strVal val="visible"/>
+                                      </p:to>
+                                    </p:set>
+                                    <p:animEffect transition="in" filter="fade">
+                                      <p:cBhvr>
+                                        <p:cTn id="7" dur="450"/>
+                                        <p:tgtEl>
+                                          <p:spTgt spid="8"/>
+                                        </p:tgtEl>
+                                      </p:cBhvr>
+                                    </p:animEffect>
+                                  </p:childTnLst>
+                                </p:cTn>
+                              </p:par>
+                            </p:childTnLst>
+                          </p:cTn>
+                        </p:par>
+                      </p:childTnLst>
+                    </p:cTn>
+                  </p:par>
+                  <p:par>
+                    <p:cTn id="8" fill="hold">
+                      <p:stCondLst>
+                        <p:cond delay="indefinite"/>
+                      </p:stCondLst>
+                      <p:childTnLst>
+                        <p:par>
+                          <p:cTn id="9" fill="hold">
+                            <p:stCondLst>
+                              <p:cond delay="0"/>
+                            </p:stCondLst>
+                            <p:childTnLst>
+                              <p:par>
+                                <p:cTn id="10" presetID="10" presetClass="entr" presetSubtype="0" fill="hold" nodeType="clickEffect">
+                                  <p:stCondLst>
+                                    <p:cond delay="0"/>
+                                  </p:stCondLst>
+                                  <p:childTnLst>
+                                    <p:set>
+                                      <p:cBhvr>
+                                        <p:cTn id="11" dur="1" fill="hold">
+                                          <p:stCondLst>
+                                            <p:cond delay="0"/>
+                                          </p:stCondLst>
+                                        </p:cTn>
+                                        <p:tgtEl>
+                                          <p:spTgt spid="9"/>
+                                        </p:tgtEl>
+                                        <p:attrNameLst>
+                                          <p:attrName>style.visibility</p:attrName>
+                                        </p:attrNameLst>
+                                      </p:cBhvr>
+                                      <p:to>
+                                        <p:strVal val="visible"/>
+                                      </p:to>
+                                    </p:set>
+                                    <p:animEffect transition="in" filter="fade">
+                                      <p:cBhvr>
+                                        <p:cTn id="12" dur="450"/>
+                                        <p:tgtEl>
+                                          <p:spTgt spid="9"/>
+                                        </p:tgtEl>
+                                      </p:cBhvr>
+                                    </p:animEffect>
+                                  </p:childTnLst>
+                                </p:cTn>
+                              </p:par>
+                            </p:childTnLst>
+                          </p:cTn>
+                        </p:par>
+                      </p:childTnLst>
+                    </p:cTn>
+                  </p:par>
+                  <p:par>
+                    <p:cTn id="13" fill="hold">
+                      <p:stCondLst>
+                        <p:cond delay="indefinite"/>
+                      </p:stCondLst>
+                      <p:childTnLst>
+                        <p:par>
+                          <p:cTn id="14" fill="hold">
+                            <p:stCondLst>
+                              <p:cond delay="0"/>
+                            </p:stCondLst>
+                            <p:childTnLst>
+                              <p:par>
+                                <p:cTn id="15" presetID="10" presetClass="entr" presetSubtype="0" fill="hold" nodeType="clickEffect">
+                                  <p:stCondLst>
+                                    <p:cond delay="0"/>
+                                  </p:stCondLst>
+                                  <p:childTnLst>
+                                    <p:set>
+                                      <p:cBhvr>
+                                        <p:cTn id="16" dur="1" fill="hold">
+                                          <p:stCondLst>
+                                            <p:cond delay="0"/>
+                                          </p:stCondLst>
+                                        </p:cTn>
+                                        <p:tgtEl>
+                                          <p:spTgt spid="10"/>
+                                        </p:tgtEl>
+                                        <p:attrNameLst>
+                                          <p:attrName>style.visibility</p:attrName>
+                                        </p:attrNameLst>
+                                      </p:cBhvr>
+                                      <p:to>
+                                        <p:strVal val="visible"/>
+                                      </p:to>
+                                    </p:set>
+                                    <p:animEffect transition="in" filter="fade">
+                                      <p:cBhvr>
+                                        <p:cTn id="17" dur="450"/>
+                                        <p:tgtEl>
+                                          <p:spTgt spid="10"/>
+                                        </p:tgtEl>
+                                      </p:cBhvr>
+                                    </p:animEffect>
+                                  </p:childTnLst>
+                                </p:cTn>
+                              </p:par>
+                            </p:childTnLst>
+                          </p:cTn>
+                        </p:par>
+                      </p:childTnLst>
+                    </p:cTn>
+                  </p:par>
+                </p:childTnLst>
+              </p:cTn>
+              <p:prevCondLst>
+                <p:cond evt="onPrev" delay="0">
+                  <p:tgtEl>
+                    <p:sldTgt/>
+                  </p:tgtEl>
+                </p:cond>
+              </p:prevCondLst>
+              <p:nextCondLst>
+                <p:cond evt="onNext" delay="0">
+                  <p:tgtEl>
+                    <p:sldTgt/>
+                  </p:tgtEl>
+                </p:cond>
+              </p:nextCondLst>
+            </p:seq>
+          </p:childTnLst>
+        </p:cTn>
+      </p:par>
+    </p:tnLst>
+  </p:timing>
 </p:sld>
 </file>
 
@@ -6589,14 +6224,118 @@
       </p:sp>
       <p:sp>
         <p:nvSpPr>
-          <p:cNvPr id="5" name="TextBox 4"/>
+          <p:cNvPr id="5" name="Rounded Rectangle 4"/>
+          <p:cNvSpPr/>
+          <p:nvPr/>
+        </p:nvSpPr>
+        <p:spPr>
+          <a:xfrm>
+            <a:off x="5797149" y="1573813"/>
+            <a:ext cx="6010497" cy="4057845"/>
+          </a:xfrm>
+          <a:prstGeom prst="roundRect">
+            <a:avLst>
+              <a:gd name="adj" fmla="val 4000"/>
+            </a:avLst>
+          </a:prstGeom>
+          <a:solidFill>
+            <a:srgbClr val="E8EEF4"/>
+          </a:solidFill>
+          <a:ln>
+            <a:noFill/>
+          </a:ln>
+        </p:spPr>
+        <p:style>
+          <a:lnRef idx="1">
+            <a:schemeClr val="accent1"/>
+          </a:lnRef>
+          <a:fillRef idx="3">
+            <a:schemeClr val="accent1"/>
+          </a:fillRef>
+          <a:effectRef idx="2">
+            <a:schemeClr val="accent1"/>
+          </a:effectRef>
+          <a:fontRef idx="minor">
+            <a:schemeClr val="lt1"/>
+          </a:fontRef>
+        </p:style>
+        <p:txBody>
+          <a:bodyPr rtlCol="0" anchor="ctr"/>
+          <a:lstStyle/>
+          <a:p>
+            <a:pPr algn="ctr"/>
+          </a:p>
+        </p:txBody>
+      </p:sp>
+      <p:pic>
+        <p:nvPicPr>
+          <p:cNvPr id="6" name="Picture 5" descr="person-writing-email-laptop-office.jpg"/>
+          <p:cNvPicPr>
+            <a:picLocks noChangeAspect="1"/>
+          </p:cNvPicPr>
+          <p:nvPr/>
+        </p:nvPicPr>
+        <p:blipFill>
+          <a:blip r:embed="rId2"/>
+          <a:stretch>
+            <a:fillRect/>
+          </a:stretch>
+        </p:blipFill>
+        <p:spPr>
+          <a:xfrm>
+            <a:off x="5870301" y="1646965"/>
+            <a:ext cx="5864193" cy="3911541"/>
+          </a:xfrm>
+          <a:prstGeom prst="rect">
+            <a:avLst/>
+          </a:prstGeom>
+        </p:spPr>
+      </p:pic>
+      <p:sp>
+        <p:nvSpPr>
+          <p:cNvPr id="7" name="TextBox 6"/>
           <p:cNvSpPr txBox="1"/>
           <p:nvPr/>
         </p:nvSpPr>
         <p:spPr>
           <a:xfrm>
-            <a:off x="457200" y="1170432"/>
-            <a:ext cx="11277295" cy="5230368"/>
+            <a:off x="5870301" y="5961888"/>
+            <a:ext cx="5864193" cy="320040"/>
+          </a:xfrm>
+          <a:prstGeom prst="rect">
+            <a:avLst/>
+          </a:prstGeom>
+          <a:noFill/>
+        </p:spPr>
+        <p:txBody>
+          <a:bodyPr wrap="square">
+            <a:spAutoFit/>
+          </a:bodyPr>
+          <a:lstStyle/>
+          <a:p>
+            <a:pPr algn="ctr"/>
+            <a:r>
+              <a:rPr sz="1100" b="0" i="1">
+                <a:solidFill>
+                  <a:srgbClr val="666666"/>
+                </a:solidFill>
+                <a:latin typeface="Calibri"/>
+              </a:rPr>
+              <a:t>Foto: SHVETS production · Pexels</a:t>
+            </a:r>
+          </a:p>
+        </p:txBody>
+      </p:sp>
+      <p:sp>
+        <p:nvSpPr>
+          <p:cNvPr id="8" name="TextBox 7"/>
+          <p:cNvSpPr txBox="1"/>
+          <p:nvPr/>
+        </p:nvSpPr>
+        <p:spPr>
+          <a:xfrm>
+            <a:off x="457200" y="1353312"/>
+            <a:ext cx="5093061" cy="5047488"/>
           </a:xfrm>
           <a:prstGeom prst="rect">
             <a:avLst/>
@@ -6744,79 +6483,11 @@
               <a:t> exportar solo nombre y ciudad, que es lo que el reporte necesita.</a:t>
             </a:r>
           </a:p>
-          <a:p>
-            <a:pPr>
-              <a:spcAft>
-                <a:spcPts val="800"/>
-              </a:spcAft>
-            </a:pPr>
-            <a:r>
-              <a:rPr sz="2000" b="0" i="0">
-                <a:solidFill>
-                  <a:srgbClr val="333333"/>
-                </a:solidFill>
-                <a:latin typeface="Calibri"/>
-              </a:rPr>
-              <a:t>–   </a:t>
-            </a:r>
-            <a:r>
-              <a:rPr sz="2000" b="1" i="0">
-                <a:solidFill>
-                  <a:srgbClr val="333333"/>
-                </a:solidFill>
-                <a:latin typeface="Calibri"/>
-              </a:rPr>
-              <a:t>Quedo atento</a:t>
-            </a:r>
-            <a:r>
-              <a:rPr sz="2000" b="0" i="0">
-                <a:solidFill>
-                  <a:srgbClr val="333333"/>
-                </a:solidFill>
-                <a:latin typeface="Calibri"/>
-              </a:rPr>
-              <a:t> a su decisión. — Firmado, con fecha.</a:t>
-            </a:r>
-          </a:p>
-          <a:p>
-            <a:pPr>
-              <a:spcAft>
-                <a:spcPts val="800"/>
-              </a:spcAft>
-            </a:pPr>
-            <a:r>
-              <a:rPr sz="2000" b="0" i="0">
-                <a:solidFill>
-                  <a:srgbClr val="333333"/>
-                </a:solidFill>
-                <a:latin typeface="Calibri"/>
-              </a:rPr>
-              <a:t>–   </a:t>
-            </a:r>
-            <a:r>
-              <a:rPr sz="2000" b="1" i="0">
-                <a:solidFill>
-                  <a:srgbClr val="333333"/>
-                </a:solidFill>
-                <a:latin typeface="Calibri"/>
-              </a:rPr>
-              <a:t>Cinco líneas.</a:t>
-            </a:r>
-            <a:r>
-              <a:rPr sz="2000" b="0" i="0">
-                <a:solidFill>
-                  <a:srgbClr val="333333"/>
-                </a:solidFill>
-                <a:latin typeface="Calibri"/>
-              </a:rPr>
-              <a:t> Si el jefe insiste, la decisión ya no es suya, y queda escrito que avisó.</a:t>
-            </a:r>
-          </a:p>
-        </p:txBody>
-      </p:sp>
-      <p:sp>
-        <p:nvSpPr>
-          <p:cNvPr id="6" name="TextBox 5"/>
+        </p:txBody>
+      </p:sp>
+      <p:sp>
+        <p:nvSpPr>
+          <p:cNvPr id="9" name="TextBox 8"/>
           <p:cNvSpPr txBox="1"/>
           <p:nvPr/>
         </p:nvSpPr>
@@ -7037,16 +6708,16 @@
         </p:nvSpPr>
         <p:spPr>
           <a:xfrm>
-            <a:off x="457200" y="1444752"/>
-            <a:ext cx="11277295" cy="908913"/>
+            <a:off x="5934611" y="1399031"/>
+            <a:ext cx="5735574" cy="4617720"/>
           </a:xfrm>
           <a:prstGeom prst="roundRect">
             <a:avLst>
-              <a:gd name="adj" fmla="val 12000"/>
+              <a:gd name="adj" fmla="val 4000"/>
             </a:avLst>
           </a:prstGeom>
           <a:solidFill>
-            <a:srgbClr val="F2F2F2"/>
+            <a:srgbClr val="E8EEF4"/>
           </a:solidFill>
           <a:ln>
             <a:noFill/>
@@ -7074,61 +6745,147 @@
           </a:p>
         </p:txBody>
       </p:sp>
-      <p:sp>
-        <p:nvSpPr>
-          <p:cNvPr id="7" name="Rounded Rectangle 6"/>
-          <p:cNvSpPr/>
-          <p:nvPr/>
-        </p:nvSpPr>
-        <p:spPr>
-          <a:xfrm>
-            <a:off x="594360" y="1679752"/>
-            <a:ext cx="438912" cy="438912"/>
-          </a:xfrm>
-          <a:prstGeom prst="roundRect">
-            <a:avLst>
-              <a:gd name="adj" fmla="val 12000"/>
-            </a:avLst>
-          </a:prstGeom>
-          <a:solidFill>
-            <a:srgbClr val="095292"/>
-          </a:solidFill>
-          <a:ln>
-            <a:noFill/>
-          </a:ln>
-        </p:spPr>
-        <p:style>
-          <a:lnRef idx="1">
-            <a:schemeClr val="accent1"/>
-          </a:lnRef>
-          <a:fillRef idx="3">
-            <a:schemeClr val="accent1"/>
-          </a:fillRef>
-          <a:effectRef idx="2">
-            <a:schemeClr val="accent1"/>
-          </a:effectRef>
-          <a:fontRef idx="minor">
-            <a:schemeClr val="lt1"/>
-          </a:fontRef>
-        </p:style>
-        <p:txBody>
-          <a:bodyPr rtlCol="0" anchor="ctr"/>
+      <p:pic>
+        <p:nvPicPr>
+          <p:cNvPr id="7" name="Picture 6" descr="cinco-preguntas-paso1.png"/>
+          <p:cNvPicPr>
+            <a:picLocks noChangeAspect="1"/>
+          </p:cNvPicPr>
+          <p:nvPr/>
+        </p:nvPicPr>
+        <p:blipFill>
+          <a:blip r:embed="rId2"/>
+          <a:stretch>
+            <a:fillRect/>
+          </a:stretch>
+        </p:blipFill>
+        <p:spPr>
+          <a:xfrm>
+            <a:off x="6007763" y="1472184"/>
+            <a:ext cx="5589270" cy="4471416"/>
+          </a:xfrm>
+          <a:prstGeom prst="rect">
+            <a:avLst/>
+          </a:prstGeom>
+        </p:spPr>
+      </p:pic>
+      <p:pic>
+        <p:nvPicPr>
+          <p:cNvPr id="8" name="Picture 7" descr="cinco-preguntas-paso2.png"/>
+          <p:cNvPicPr>
+            <a:picLocks noChangeAspect="1"/>
+          </p:cNvPicPr>
+          <p:nvPr/>
+        </p:nvPicPr>
+        <p:blipFill>
+          <a:blip r:embed="rId3"/>
+          <a:stretch>
+            <a:fillRect/>
+          </a:stretch>
+        </p:blipFill>
+        <p:spPr>
+          <a:xfrm>
+            <a:off x="6007763" y="1472184"/>
+            <a:ext cx="5589270" cy="4471416"/>
+          </a:xfrm>
+          <a:prstGeom prst="rect">
+            <a:avLst/>
+          </a:prstGeom>
+        </p:spPr>
+      </p:pic>
+      <p:pic>
+        <p:nvPicPr>
+          <p:cNvPr id="9" name="Picture 8" descr="cinco-preguntas-paso3.png"/>
+          <p:cNvPicPr>
+            <a:picLocks noChangeAspect="1"/>
+          </p:cNvPicPr>
+          <p:nvPr/>
+        </p:nvPicPr>
+        <p:blipFill>
+          <a:blip r:embed="rId4"/>
+          <a:stretch>
+            <a:fillRect/>
+          </a:stretch>
+        </p:blipFill>
+        <p:spPr>
+          <a:xfrm>
+            <a:off x="6007763" y="1472184"/>
+            <a:ext cx="5589270" cy="4471416"/>
+          </a:xfrm>
+          <a:prstGeom prst="rect">
+            <a:avLst/>
+          </a:prstGeom>
+        </p:spPr>
+      </p:pic>
+      <p:pic>
+        <p:nvPicPr>
+          <p:cNvPr id="10" name="Picture 9" descr="cinco-preguntas-paso4.png"/>
+          <p:cNvPicPr>
+            <a:picLocks noChangeAspect="1"/>
+          </p:cNvPicPr>
+          <p:nvPr/>
+        </p:nvPicPr>
+        <p:blipFill>
+          <a:blip r:embed="rId5"/>
+          <a:stretch>
+            <a:fillRect/>
+          </a:stretch>
+        </p:blipFill>
+        <p:spPr>
+          <a:xfrm>
+            <a:off x="6007763" y="1472184"/>
+            <a:ext cx="5589270" cy="4471416"/>
+          </a:xfrm>
+          <a:prstGeom prst="rect">
+            <a:avLst/>
+          </a:prstGeom>
+        </p:spPr>
+      </p:pic>
+      <p:sp>
+        <p:nvSpPr>
+          <p:cNvPr id="18" name="TextBox 17"/>
+          <p:cNvSpPr txBox="1"/>
+          <p:nvPr/>
+        </p:nvSpPr>
+        <p:spPr>
+          <a:xfrm>
+            <a:off x="5870301" y="5961888"/>
+            <a:ext cx="5864193" cy="320040"/>
+          </a:xfrm>
+          <a:prstGeom prst="rect">
+            <a:avLst/>
+          </a:prstGeom>
+          <a:noFill/>
+        </p:spPr>
+        <p:txBody>
+          <a:bodyPr wrap="square">
+            <a:spAutoFit/>
+          </a:bodyPr>
           <a:lstStyle/>
           <a:p>
             <a:pPr algn="ctr"/>
-          </a:p>
-        </p:txBody>
-      </p:sp>
-      <p:sp>
-        <p:nvSpPr>
-          <p:cNvPr id="8" name="TextBox 7"/>
+            <a:r>
+              <a:rPr sz="1100" b="0" i="1">
+                <a:solidFill>
+                  <a:srgbClr val="666666"/>
+                </a:solidFill>
+                <a:latin typeface="Calibri"/>
+              </a:rPr>
+              <a:t>Clic para avanzar la animación</a:t>
+            </a:r>
+          </a:p>
+        </p:txBody>
+      </p:sp>
+      <p:sp>
+        <p:nvSpPr>
+          <p:cNvPr id="19" name="TextBox 18"/>
           <p:cNvSpPr txBox="1"/>
           <p:nvPr/>
         </p:nvSpPr>
         <p:spPr>
           <a:xfrm>
-            <a:off x="594360" y="1679752"/>
-            <a:ext cx="438912" cy="438912"/>
+            <a:off x="457200" y="1563624"/>
+            <a:ext cx="5093061" cy="4837176"/>
           </a:xfrm>
           <a:prstGeom prst="rect">
             <a:avLst/>
@@ -7136,757 +6893,117 @@
           <a:noFill/>
         </p:spPr>
         <p:txBody>
-          <a:bodyPr wrap="square" anchor="ctr"/>
-          <a:lstStyle/>
-          <a:p>
-            <a:pPr algn="ctr"/>
-            <a:r>
-              <a:rPr sz="1600" b="1" i="0">
-                <a:solidFill>
-                  <a:srgbClr val="FFFFFF"/>
-                </a:solidFill>
-                <a:latin typeface="Calibri"/>
-              </a:rPr>
-              <a:t>1</a:t>
-            </a:r>
-          </a:p>
-        </p:txBody>
-      </p:sp>
-      <p:sp>
-        <p:nvSpPr>
-          <p:cNvPr id="9" name="TextBox 8"/>
-          <p:cNvSpPr txBox="1"/>
-          <p:nvPr/>
-        </p:nvSpPr>
-        <p:spPr>
-          <a:xfrm>
-            <a:off x="1188720" y="1536192"/>
-            <a:ext cx="10271455" cy="744321"/>
-          </a:xfrm>
-          <a:prstGeom prst="rect">
-            <a:avLst/>
-          </a:prstGeom>
-          <a:noFill/>
-        </p:spPr>
-        <p:txBody>
-          <a:bodyPr wrap="square" anchor="ctr"/>
-          <a:lstStyle/>
-          <a:p>
-            <a:r>
-              <a:rPr sz="1500" b="1" i="0">
-                <a:solidFill>
-                  <a:srgbClr val="095292"/>
-                </a:solidFill>
-                <a:latin typeface="Calibri"/>
-              </a:rPr>
-              <a:t>1 · ¿Quién se puede dañar?</a:t>
-            </a:r>
-          </a:p>
+          <a:bodyPr wrap="square">
+            <a:spAutoFit/>
+          </a:bodyPr>
+          <a:lstStyle/>
           <a:p>
             <a:pPr>
-              <a:spcBef>
-                <a:spcPts val="200"/>
-              </a:spcBef>
+              <a:spcAft>
+                <a:spcPts val="800"/>
+              </a:spcAft>
             </a:pPr>
             <a:r>
-              <a:rPr sz="1300" b="0" i="0">
+              <a:rPr sz="2000" b="0" i="0">
                 <a:solidFill>
                   <a:srgbClr val="333333"/>
                 </a:solidFill>
                 <a:latin typeface="Calibri"/>
               </a:rPr>
-              <a:t>Nómbrelo. Si la respuesta es «nadie», busque de nuevo: siempre hay alguien que no está en la reunión.</a:t>
-            </a:r>
-          </a:p>
-        </p:txBody>
-      </p:sp>
-      <p:sp>
-        <p:nvSpPr>
-          <p:cNvPr id="10" name="Rounded Rectangle 9"/>
-          <p:cNvSpPr/>
-          <p:nvPr/>
-        </p:nvSpPr>
-        <p:spPr>
-          <a:xfrm>
-            <a:off x="457200" y="2445105"/>
-            <a:ext cx="11277295" cy="908913"/>
-          </a:xfrm>
-          <a:prstGeom prst="roundRect">
-            <a:avLst>
-              <a:gd name="adj" fmla="val 12000"/>
-            </a:avLst>
-          </a:prstGeom>
-          <a:solidFill>
-            <a:srgbClr val="E8F4FA"/>
-          </a:solidFill>
-          <a:ln>
-            <a:noFill/>
-          </a:ln>
-        </p:spPr>
-        <p:style>
-          <a:lnRef idx="1">
-            <a:schemeClr val="accent1"/>
-          </a:lnRef>
-          <a:fillRef idx="3">
-            <a:schemeClr val="accent1"/>
-          </a:fillRef>
-          <a:effectRef idx="2">
-            <a:schemeClr val="accent1"/>
-          </a:effectRef>
-          <a:fontRef idx="minor">
-            <a:schemeClr val="lt1"/>
-          </a:fontRef>
-        </p:style>
-        <p:txBody>
-          <a:bodyPr rtlCol="0" anchor="ctr"/>
-          <a:lstStyle/>
-          <a:p>
-            <a:pPr algn="ctr"/>
-          </a:p>
-        </p:txBody>
-      </p:sp>
-      <p:sp>
-        <p:nvSpPr>
-          <p:cNvPr id="11" name="Rounded Rectangle 10"/>
-          <p:cNvSpPr/>
-          <p:nvPr/>
-        </p:nvSpPr>
-        <p:spPr>
-          <a:xfrm>
-            <a:off x="594360" y="2680106"/>
-            <a:ext cx="438912" cy="438912"/>
-          </a:xfrm>
-          <a:prstGeom prst="roundRect">
-            <a:avLst>
-              <a:gd name="adj" fmla="val 12000"/>
-            </a:avLst>
-          </a:prstGeom>
-          <a:solidFill>
-            <a:srgbClr val="095292"/>
-          </a:solidFill>
-          <a:ln>
-            <a:noFill/>
-          </a:ln>
-        </p:spPr>
-        <p:style>
-          <a:lnRef idx="1">
-            <a:schemeClr val="accent1"/>
-          </a:lnRef>
-          <a:fillRef idx="3">
-            <a:schemeClr val="accent1"/>
-          </a:fillRef>
-          <a:effectRef idx="2">
-            <a:schemeClr val="accent1"/>
-          </a:effectRef>
-          <a:fontRef idx="minor">
-            <a:schemeClr val="lt1"/>
-          </a:fontRef>
-        </p:style>
-        <p:txBody>
-          <a:bodyPr rtlCol="0" anchor="ctr"/>
-          <a:lstStyle/>
-          <a:p>
-            <a:pPr algn="ctr"/>
-          </a:p>
-        </p:txBody>
-      </p:sp>
-      <p:sp>
-        <p:nvSpPr>
-          <p:cNvPr id="12" name="TextBox 11"/>
-          <p:cNvSpPr txBox="1"/>
-          <p:nvPr/>
-        </p:nvSpPr>
-        <p:spPr>
-          <a:xfrm>
-            <a:off x="594360" y="2680106"/>
-            <a:ext cx="438912" cy="438912"/>
-          </a:xfrm>
-          <a:prstGeom prst="rect">
-            <a:avLst/>
-          </a:prstGeom>
-          <a:noFill/>
-        </p:spPr>
-        <p:txBody>
-          <a:bodyPr wrap="square" anchor="ctr"/>
-          <a:lstStyle/>
-          <a:p>
-            <a:pPr algn="ctr"/>
-            <a:r>
-              <a:rPr sz="1600" b="1" i="0">
-                <a:solidFill>
-                  <a:srgbClr val="FFFFFF"/>
-                </a:solidFill>
-                <a:latin typeface="Calibri"/>
-              </a:rPr>
-              <a:t>2</a:t>
-            </a:r>
-          </a:p>
-        </p:txBody>
-      </p:sp>
-      <p:sp>
-        <p:nvSpPr>
-          <p:cNvPr id="13" name="TextBox 12"/>
-          <p:cNvSpPr txBox="1"/>
-          <p:nvPr/>
-        </p:nvSpPr>
-        <p:spPr>
-          <a:xfrm>
-            <a:off x="1188720" y="2536545"/>
-            <a:ext cx="10271455" cy="744321"/>
-          </a:xfrm>
-          <a:prstGeom prst="rect">
-            <a:avLst/>
-          </a:prstGeom>
-          <a:noFill/>
-        </p:spPr>
-        <p:txBody>
-          <a:bodyPr wrap="square" anchor="ctr"/>
-          <a:lstStyle/>
-          <a:p>
-            <a:r>
-              <a:rPr sz="1500" b="1" i="0">
-                <a:solidFill>
-                  <a:srgbClr val="095292"/>
-                </a:solidFill>
-                <a:latin typeface="Calibri"/>
-              </a:rPr>
-              <a:t>2 · ¿Lo sabe y lo aceptó?</a:t>
+              <a:t>–   </a:t>
+            </a:r>
+            <a:r>
+              <a:rPr sz="2000" b="1" i="0">
+                <a:solidFill>
+                  <a:srgbClr val="333333"/>
+                </a:solidFill>
+                <a:latin typeface="Calibri"/>
+              </a:rPr>
+              <a:t>1 · ¿Quién se puede dañar?:</a:t>
+            </a:r>
+            <a:r>
+              <a:rPr sz="2000" b="0" i="0">
+                <a:solidFill>
+                  <a:srgbClr val="333333"/>
+                </a:solidFill>
+                <a:latin typeface="Calibri"/>
+              </a:rPr>
+              <a:t> Nómbrelo. Si la respuesta es «nadie», busque de nuevo: siempre hay alguien que no está en la reunión.</a:t>
             </a:r>
           </a:p>
           <a:p>
             <a:pPr>
-              <a:spcBef>
-                <a:spcPts val="200"/>
-              </a:spcBef>
+              <a:spcAft>
+                <a:spcPts val="800"/>
+              </a:spcAft>
             </a:pPr>
             <a:r>
-              <a:rPr sz="1300" b="0" i="0">
+              <a:rPr sz="2000" b="0" i="0">
                 <a:solidFill>
                   <a:srgbClr val="333333"/>
                 </a:solidFill>
                 <a:latin typeface="Calibri"/>
               </a:rPr>
-              <a:t>Consentimiento informado. Si el afectado no sabe que existe el sistema, ya hay un problema.</a:t>
-            </a:r>
-          </a:p>
-        </p:txBody>
-      </p:sp>
-      <p:sp>
-        <p:nvSpPr>
-          <p:cNvPr id="14" name="Rounded Rectangle 13"/>
-          <p:cNvSpPr/>
-          <p:nvPr/>
-        </p:nvSpPr>
-        <p:spPr>
-          <a:xfrm>
-            <a:off x="457200" y="3445459"/>
-            <a:ext cx="11277295" cy="908913"/>
-          </a:xfrm>
-          <a:prstGeom prst="roundRect">
-            <a:avLst>
-              <a:gd name="adj" fmla="val 12000"/>
-            </a:avLst>
-          </a:prstGeom>
-          <a:solidFill>
-            <a:srgbClr val="F2F2F2"/>
-          </a:solidFill>
-          <a:ln>
-            <a:noFill/>
-          </a:ln>
-        </p:spPr>
-        <p:style>
-          <a:lnRef idx="1">
-            <a:schemeClr val="accent1"/>
-          </a:lnRef>
-          <a:fillRef idx="3">
-            <a:schemeClr val="accent1"/>
-          </a:fillRef>
-          <a:effectRef idx="2">
-            <a:schemeClr val="accent1"/>
-          </a:effectRef>
-          <a:fontRef idx="minor">
-            <a:schemeClr val="lt1"/>
-          </a:fontRef>
-        </p:style>
-        <p:txBody>
-          <a:bodyPr rtlCol="0" anchor="ctr"/>
-          <a:lstStyle/>
-          <a:p>
-            <a:pPr algn="ctr"/>
-          </a:p>
-        </p:txBody>
-      </p:sp>
-      <p:sp>
-        <p:nvSpPr>
-          <p:cNvPr id="15" name="Rounded Rectangle 14"/>
-          <p:cNvSpPr/>
-          <p:nvPr/>
-        </p:nvSpPr>
-        <p:spPr>
-          <a:xfrm>
-            <a:off x="594360" y="3680460"/>
-            <a:ext cx="438912" cy="438912"/>
-          </a:xfrm>
-          <a:prstGeom prst="roundRect">
-            <a:avLst>
-              <a:gd name="adj" fmla="val 12000"/>
-            </a:avLst>
-          </a:prstGeom>
-          <a:solidFill>
-            <a:srgbClr val="095292"/>
-          </a:solidFill>
-          <a:ln>
-            <a:noFill/>
-          </a:ln>
-        </p:spPr>
-        <p:style>
-          <a:lnRef idx="1">
-            <a:schemeClr val="accent1"/>
-          </a:lnRef>
-          <a:fillRef idx="3">
-            <a:schemeClr val="accent1"/>
-          </a:fillRef>
-          <a:effectRef idx="2">
-            <a:schemeClr val="accent1"/>
-          </a:effectRef>
-          <a:fontRef idx="minor">
-            <a:schemeClr val="lt1"/>
-          </a:fontRef>
-        </p:style>
-        <p:txBody>
-          <a:bodyPr rtlCol="0" anchor="ctr"/>
-          <a:lstStyle/>
-          <a:p>
-            <a:pPr algn="ctr"/>
-          </a:p>
-        </p:txBody>
-      </p:sp>
-      <p:sp>
-        <p:nvSpPr>
-          <p:cNvPr id="16" name="TextBox 15"/>
-          <p:cNvSpPr txBox="1"/>
-          <p:nvPr/>
-        </p:nvSpPr>
-        <p:spPr>
-          <a:xfrm>
-            <a:off x="594360" y="3680460"/>
-            <a:ext cx="438912" cy="438912"/>
-          </a:xfrm>
-          <a:prstGeom prst="rect">
-            <a:avLst/>
-          </a:prstGeom>
-          <a:noFill/>
-        </p:spPr>
-        <p:txBody>
-          <a:bodyPr wrap="square" anchor="ctr"/>
-          <a:lstStyle/>
-          <a:p>
-            <a:pPr algn="ctr"/>
-            <a:r>
-              <a:rPr sz="1600" b="1" i="0">
-                <a:solidFill>
-                  <a:srgbClr val="FFFFFF"/>
-                </a:solidFill>
-                <a:latin typeface="Calibri"/>
-              </a:rPr>
-              <a:t>3</a:t>
-            </a:r>
-          </a:p>
-        </p:txBody>
-      </p:sp>
-      <p:sp>
-        <p:nvSpPr>
-          <p:cNvPr id="17" name="TextBox 16"/>
-          <p:cNvSpPr txBox="1"/>
-          <p:nvPr/>
-        </p:nvSpPr>
-        <p:spPr>
-          <a:xfrm>
-            <a:off x="1188720" y="3536899"/>
-            <a:ext cx="10271455" cy="744321"/>
-          </a:xfrm>
-          <a:prstGeom prst="rect">
-            <a:avLst/>
-          </a:prstGeom>
-          <a:noFill/>
-        </p:spPr>
-        <p:txBody>
-          <a:bodyPr wrap="square" anchor="ctr"/>
-          <a:lstStyle/>
-          <a:p>
-            <a:r>
-              <a:rPr sz="1500" b="1" i="0">
-                <a:solidFill>
-                  <a:srgbClr val="095292"/>
-                </a:solidFill>
-                <a:latin typeface="Calibri"/>
-              </a:rPr>
-              <a:t>3 · ¿Aguanta que se sepa?</a:t>
+              <a:t>–   </a:t>
+            </a:r>
+            <a:r>
+              <a:rPr sz="2000" b="1" i="0">
+                <a:solidFill>
+                  <a:srgbClr val="333333"/>
+                </a:solidFill>
+                <a:latin typeface="Calibri"/>
+              </a:rPr>
+              <a:t>2 · ¿Lo sabe y lo aceptó?:</a:t>
+            </a:r>
+            <a:r>
+              <a:rPr sz="2000" b="0" i="0">
+                <a:solidFill>
+                  <a:srgbClr val="333333"/>
+                </a:solidFill>
+                <a:latin typeface="Calibri"/>
+              </a:rPr>
+              <a:t> Consentimiento informado. Si el afectado no sabe que existe el sistema, ya hay un problema.</a:t>
             </a:r>
           </a:p>
           <a:p>
             <a:pPr>
-              <a:spcBef>
-                <a:spcPts val="200"/>
-              </a:spcBef>
+              <a:spcAft>
+                <a:spcPts val="800"/>
+              </a:spcAft>
             </a:pPr>
             <a:r>
-              <a:rPr sz="1300" b="0" i="0">
+              <a:rPr sz="2000" b="0" i="0">
                 <a:solidFill>
                   <a:srgbClr val="333333"/>
                 </a:solidFill>
                 <a:latin typeface="Calibri"/>
               </a:rPr>
-              <a:t>Si esto sale publicado mañana con su nombre, ¿lo defiende? Es la prueba más rápida que existe.</a:t>
-            </a:r>
-          </a:p>
-        </p:txBody>
-      </p:sp>
-      <p:sp>
-        <p:nvSpPr>
-          <p:cNvPr id="18" name="Rounded Rectangle 17"/>
-          <p:cNvSpPr/>
-          <p:nvPr/>
-        </p:nvSpPr>
-        <p:spPr>
-          <a:xfrm>
-            <a:off x="457200" y="4445812"/>
-            <a:ext cx="11277295" cy="908913"/>
-          </a:xfrm>
-          <a:prstGeom prst="roundRect">
-            <a:avLst>
-              <a:gd name="adj" fmla="val 12000"/>
-            </a:avLst>
-          </a:prstGeom>
-          <a:solidFill>
-            <a:srgbClr val="E8F4FA"/>
-          </a:solidFill>
-          <a:ln>
-            <a:noFill/>
-          </a:ln>
-        </p:spPr>
-        <p:style>
-          <a:lnRef idx="1">
-            <a:schemeClr val="accent1"/>
-          </a:lnRef>
-          <a:fillRef idx="3">
-            <a:schemeClr val="accent1"/>
-          </a:fillRef>
-          <a:effectRef idx="2">
-            <a:schemeClr val="accent1"/>
-          </a:effectRef>
-          <a:fontRef idx="minor">
-            <a:schemeClr val="lt1"/>
-          </a:fontRef>
-        </p:style>
-        <p:txBody>
-          <a:bodyPr rtlCol="0" anchor="ctr"/>
-          <a:lstStyle/>
-          <a:p>
-            <a:pPr algn="ctr"/>
-          </a:p>
-        </p:txBody>
-      </p:sp>
-      <p:sp>
-        <p:nvSpPr>
-          <p:cNvPr id="19" name="Rounded Rectangle 18"/>
-          <p:cNvSpPr/>
-          <p:nvPr/>
-        </p:nvSpPr>
-        <p:spPr>
-          <a:xfrm>
-            <a:off x="594360" y="4680813"/>
-            <a:ext cx="438912" cy="438912"/>
-          </a:xfrm>
-          <a:prstGeom prst="roundRect">
-            <a:avLst>
-              <a:gd name="adj" fmla="val 12000"/>
-            </a:avLst>
-          </a:prstGeom>
-          <a:solidFill>
-            <a:srgbClr val="095292"/>
-          </a:solidFill>
-          <a:ln>
-            <a:noFill/>
-          </a:ln>
-        </p:spPr>
-        <p:style>
-          <a:lnRef idx="1">
-            <a:schemeClr val="accent1"/>
-          </a:lnRef>
-          <a:fillRef idx="3">
-            <a:schemeClr val="accent1"/>
-          </a:fillRef>
-          <a:effectRef idx="2">
-            <a:schemeClr val="accent1"/>
-          </a:effectRef>
-          <a:fontRef idx="minor">
-            <a:schemeClr val="lt1"/>
-          </a:fontRef>
-        </p:style>
-        <p:txBody>
-          <a:bodyPr rtlCol="0" anchor="ctr"/>
-          <a:lstStyle/>
-          <a:p>
-            <a:pPr algn="ctr"/>
+              <a:t>–   </a:t>
+            </a:r>
+            <a:r>
+              <a:rPr sz="2000" b="1" i="0">
+                <a:solidFill>
+                  <a:srgbClr val="333333"/>
+                </a:solidFill>
+                <a:latin typeface="Calibri"/>
+              </a:rPr>
+              <a:t>3 · ¿Aguanta que se sepa?:</a:t>
+            </a:r>
+            <a:r>
+              <a:rPr sz="2000" b="0" i="0">
+                <a:solidFill>
+                  <a:srgbClr val="333333"/>
+                </a:solidFill>
+                <a:latin typeface="Calibri"/>
+              </a:rPr>
+              <a:t> Si esto sale publicado mañana con su nombre, ¿lo defiende? Es la prueba más rápida que existe.</a:t>
+            </a:r>
           </a:p>
         </p:txBody>
       </p:sp>
       <p:sp>
         <p:nvSpPr>
           <p:cNvPr id="20" name="TextBox 19"/>
-          <p:cNvSpPr txBox="1"/>
-          <p:nvPr/>
-        </p:nvSpPr>
-        <p:spPr>
-          <a:xfrm>
-            <a:off x="594360" y="4680813"/>
-            <a:ext cx="438912" cy="438912"/>
-          </a:xfrm>
-          <a:prstGeom prst="rect">
-            <a:avLst/>
-          </a:prstGeom>
-          <a:noFill/>
-        </p:spPr>
-        <p:txBody>
-          <a:bodyPr wrap="square" anchor="ctr"/>
-          <a:lstStyle/>
-          <a:p>
-            <a:pPr algn="ctr"/>
-            <a:r>
-              <a:rPr sz="1600" b="1" i="0">
-                <a:solidFill>
-                  <a:srgbClr val="FFFFFF"/>
-                </a:solidFill>
-                <a:latin typeface="Calibri"/>
-              </a:rPr>
-              <a:t>4</a:t>
-            </a:r>
-          </a:p>
-        </p:txBody>
-      </p:sp>
-      <p:sp>
-        <p:nvSpPr>
-          <p:cNvPr id="21" name="TextBox 20"/>
-          <p:cNvSpPr txBox="1"/>
-          <p:nvPr/>
-        </p:nvSpPr>
-        <p:spPr>
-          <a:xfrm>
-            <a:off x="1188720" y="4537252"/>
-            <a:ext cx="10271455" cy="744321"/>
-          </a:xfrm>
-          <a:prstGeom prst="rect">
-            <a:avLst/>
-          </a:prstGeom>
-          <a:noFill/>
-        </p:spPr>
-        <p:txBody>
-          <a:bodyPr wrap="square" anchor="ctr"/>
-          <a:lstStyle/>
-          <a:p>
-            <a:r>
-              <a:rPr sz="1500" b="1" i="0">
-                <a:solidFill>
-                  <a:srgbClr val="095292"/>
-                </a:solidFill>
-                <a:latin typeface="Calibri"/>
-              </a:rPr>
-              <a:t>4 · ¿Qué dice el código?</a:t>
-            </a:r>
-          </a:p>
-          <a:p>
-            <a:pPr>
-              <a:spcBef>
-                <a:spcPts val="200"/>
-              </a:spcBef>
-            </a:pPr>
-            <a:r>
-              <a:rPr sz="1300" b="0" i="0">
-                <a:solidFill>
-                  <a:srgbClr val="333333"/>
-                </a:solidFill>
-                <a:latin typeface="Calibri"/>
-              </a:rPr>
-              <a:t>Busque el numeral. Citar un principio escrito es más fuerte que dar una opinión.</a:t>
-            </a:r>
-          </a:p>
-        </p:txBody>
-      </p:sp>
-      <p:sp>
-        <p:nvSpPr>
-          <p:cNvPr id="22" name="Rounded Rectangle 21"/>
-          <p:cNvSpPr/>
-          <p:nvPr/>
-        </p:nvSpPr>
-        <p:spPr>
-          <a:xfrm>
-            <a:off x="457200" y="5446166"/>
-            <a:ext cx="11277295" cy="908913"/>
-          </a:xfrm>
-          <a:prstGeom prst="roundRect">
-            <a:avLst>
-              <a:gd name="adj" fmla="val 12000"/>
-            </a:avLst>
-          </a:prstGeom>
-          <a:solidFill>
-            <a:srgbClr val="F2F2F2"/>
-          </a:solidFill>
-          <a:ln>
-            <a:noFill/>
-          </a:ln>
-        </p:spPr>
-        <p:style>
-          <a:lnRef idx="1">
-            <a:schemeClr val="accent1"/>
-          </a:lnRef>
-          <a:fillRef idx="3">
-            <a:schemeClr val="accent1"/>
-          </a:fillRef>
-          <a:effectRef idx="2">
-            <a:schemeClr val="accent1"/>
-          </a:effectRef>
-          <a:fontRef idx="minor">
-            <a:schemeClr val="lt1"/>
-          </a:fontRef>
-        </p:style>
-        <p:txBody>
-          <a:bodyPr rtlCol="0" anchor="ctr"/>
-          <a:lstStyle/>
-          <a:p>
-            <a:pPr algn="ctr"/>
-          </a:p>
-        </p:txBody>
-      </p:sp>
-      <p:sp>
-        <p:nvSpPr>
-          <p:cNvPr id="23" name="Rounded Rectangle 22"/>
-          <p:cNvSpPr/>
-          <p:nvPr/>
-        </p:nvSpPr>
-        <p:spPr>
-          <a:xfrm>
-            <a:off x="594360" y="5681167"/>
-            <a:ext cx="438912" cy="438912"/>
-          </a:xfrm>
-          <a:prstGeom prst="roundRect">
-            <a:avLst>
-              <a:gd name="adj" fmla="val 12000"/>
-            </a:avLst>
-          </a:prstGeom>
-          <a:solidFill>
-            <a:srgbClr val="095292"/>
-          </a:solidFill>
-          <a:ln>
-            <a:noFill/>
-          </a:ln>
-        </p:spPr>
-        <p:style>
-          <a:lnRef idx="1">
-            <a:schemeClr val="accent1"/>
-          </a:lnRef>
-          <a:fillRef idx="3">
-            <a:schemeClr val="accent1"/>
-          </a:fillRef>
-          <a:effectRef idx="2">
-            <a:schemeClr val="accent1"/>
-          </a:effectRef>
-          <a:fontRef idx="minor">
-            <a:schemeClr val="lt1"/>
-          </a:fontRef>
-        </p:style>
-        <p:txBody>
-          <a:bodyPr rtlCol="0" anchor="ctr"/>
-          <a:lstStyle/>
-          <a:p>
-            <a:pPr algn="ctr"/>
-          </a:p>
-        </p:txBody>
-      </p:sp>
-      <p:sp>
-        <p:nvSpPr>
-          <p:cNvPr id="24" name="TextBox 23"/>
-          <p:cNvSpPr txBox="1"/>
-          <p:nvPr/>
-        </p:nvSpPr>
-        <p:spPr>
-          <a:xfrm>
-            <a:off x="594360" y="5681167"/>
-            <a:ext cx="438912" cy="438912"/>
-          </a:xfrm>
-          <a:prstGeom prst="rect">
-            <a:avLst/>
-          </a:prstGeom>
-          <a:noFill/>
-        </p:spPr>
-        <p:txBody>
-          <a:bodyPr wrap="square" anchor="ctr"/>
-          <a:lstStyle/>
-          <a:p>
-            <a:pPr algn="ctr"/>
-            <a:r>
-              <a:rPr sz="1600" b="1" i="0">
-                <a:solidFill>
-                  <a:srgbClr val="FFFFFF"/>
-                </a:solidFill>
-                <a:latin typeface="Calibri"/>
-              </a:rPr>
-              <a:t>5</a:t>
-            </a:r>
-          </a:p>
-        </p:txBody>
-      </p:sp>
-      <p:sp>
-        <p:nvSpPr>
-          <p:cNvPr id="25" name="TextBox 24"/>
-          <p:cNvSpPr txBox="1"/>
-          <p:nvPr/>
-        </p:nvSpPr>
-        <p:spPr>
-          <a:xfrm>
-            <a:off x="1188720" y="5537606"/>
-            <a:ext cx="10271455" cy="744321"/>
-          </a:xfrm>
-          <a:prstGeom prst="rect">
-            <a:avLst/>
-          </a:prstGeom>
-          <a:noFill/>
-        </p:spPr>
-        <p:txBody>
-          <a:bodyPr wrap="square" anchor="ctr"/>
-          <a:lstStyle/>
-          <a:p>
-            <a:r>
-              <a:rPr sz="1500" b="1" i="0">
-                <a:solidFill>
-                  <a:srgbClr val="095292"/>
-                </a:solidFill>
-                <a:latin typeface="Calibri"/>
-              </a:rPr>
-              <a:t>5 · ¿Cuándo se puede parar?</a:t>
-            </a:r>
-          </a:p>
-          <a:p>
-            <a:pPr>
-              <a:spcBef>
-                <a:spcPts val="200"/>
-              </a:spcBef>
-            </a:pPr>
-            <a:r>
-              <a:rPr sz="1300" b="0" i="0">
-                <a:solidFill>
-                  <a:srgbClr val="333333"/>
-                </a:solidFill>
-                <a:latin typeface="Calibri"/>
-              </a:rPr>
-              <a:t>Encuentre el momento más temprano y más barato. Después de entregar cuesta cien veces más.</a:t>
-            </a:r>
-          </a:p>
-        </p:txBody>
-      </p:sp>
-      <p:sp>
-        <p:nvSpPr>
-          <p:cNvPr id="26" name="TextBox 25"/>
           <p:cNvSpPr txBox="1"/>
           <p:nvPr/>
         </p:nvSpPr>
@@ -7924,6 +7041,195 @@
   <p:clrMapOvr>
     <a:masterClrMapping/>
   </p:clrMapOvr>
+  <p:timing>
+    <p:tnLst>
+      <p:par>
+        <p:cTn id="1" dur="indefinite" restart="never" nodeType="tmRoot">
+          <p:childTnLst>
+            <p:seq concurrent="1" nextAc="seek">
+              <p:cTn id="2" dur="indefinite" nodeType="mainSeq">
+                <p:childTnLst>
+                  <p:par>
+                    <p:cTn id="3" fill="hold">
+                      <p:stCondLst>
+                        <p:cond delay="indefinite"/>
+                      </p:stCondLst>
+                      <p:childTnLst>
+                        <p:par>
+                          <p:cTn id="4" fill="hold">
+                            <p:stCondLst>
+                              <p:cond delay="0"/>
+                            </p:stCondLst>
+                            <p:childTnLst>
+                              <p:par>
+                                <p:cTn id="5" presetID="10" presetClass="entr" presetSubtype="0" fill="hold" nodeType="clickEffect">
+                                  <p:stCondLst>
+                                    <p:cond delay="0"/>
+                                  </p:stCondLst>
+                                  <p:childTnLst>
+                                    <p:set>
+                                      <p:cBhvr>
+                                        <p:cTn id="6" dur="1" fill="hold">
+                                          <p:stCondLst>
+                                            <p:cond delay="0"/>
+                                          </p:stCondLst>
+                                        </p:cTn>
+                                        <p:tgtEl>
+                                          <p:spTgt spid="8"/>
+                                        </p:tgtEl>
+                                        <p:attrNameLst>
+                                          <p:attrName>style.visibility</p:attrName>
+                                        </p:attrNameLst>
+                                      </p:cBhvr>
+                                      <p:to>
+                                        <p:strVal val="visible"/>
+                                      </p:to>
+                                    </p:set>
+                                    <p:animEffect transition="in" filter="fade">
+                                      <p:cBhvr>
+                                        <p:cTn id="7" dur="450"/>
+                                        <p:tgtEl>
+                                          <p:spTgt spid="8"/>
+                                        </p:tgtEl>
+                                      </p:cBhvr>
+                                    </p:animEffect>
+                                  </p:childTnLst>
+                                </p:cTn>
+                              </p:par>
+                            </p:childTnLst>
+                          </p:cTn>
+                        </p:par>
+                      </p:childTnLst>
+                    </p:cTn>
+                  </p:par>
+                  <p:par>
+                    <p:cTn id="8" fill="hold">
+                      <p:stCondLst>
+                        <p:cond delay="indefinite"/>
+                      </p:stCondLst>
+                      <p:childTnLst>
+                        <p:par>
+                          <p:cTn id="9" fill="hold">
+                            <p:stCondLst>
+                              <p:cond delay="0"/>
+                            </p:stCondLst>
+                            <p:childTnLst>
+                              <p:par>
+                                <p:cTn id="10" presetID="10" presetClass="entr" presetSubtype="0" fill="hold" nodeType="clickEffect">
+                                  <p:stCondLst>
+                                    <p:cond delay="0"/>
+                                  </p:stCondLst>
+                                  <p:childTnLst>
+                                    <p:set>
+                                      <p:cBhvr>
+                                        <p:cTn id="11" dur="1" fill="hold">
+                                          <p:stCondLst>
+                                            <p:cond delay="0"/>
+                                          </p:stCondLst>
+                                        </p:cTn>
+                                        <p:tgtEl>
+                                          <p:spTgt spid="9"/>
+                                        </p:tgtEl>
+                                        <p:attrNameLst>
+                                          <p:attrName>style.visibility</p:attrName>
+                                        </p:attrNameLst>
+                                      </p:cBhvr>
+                                      <p:to>
+                                        <p:strVal val="visible"/>
+                                      </p:to>
+                                    </p:set>
+                                    <p:animEffect transition="in" filter="fade">
+                                      <p:cBhvr>
+                                        <p:cTn id="12" dur="450"/>
+                                        <p:tgtEl>
+                                          <p:spTgt spid="9"/>
+                                        </p:tgtEl>
+                                      </p:cBhvr>
+                                    </p:animEffect>
+                                  </p:childTnLst>
+                                </p:cTn>
+                              </p:par>
+                            </p:childTnLst>
+                          </p:cTn>
+                        </p:par>
+                      </p:childTnLst>
+                    </p:cTn>
+                  </p:par>
+                  <p:par>
+                    <p:cTn id="13" fill="hold">
+                      <p:stCondLst>
+                        <p:cond delay="indefinite"/>
+                      </p:stCondLst>
+                      <p:childTnLst>
+                        <p:par>
+                          <p:cTn id="14" fill="hold">
+                            <p:stCondLst>
+                              <p:cond delay="0"/>
+                            </p:stCondLst>
+                            <p:childTnLst>
+                              <p:par>
+                                <p:cTn id="15" presetID="10" presetClass="entr" presetSubtype="0" fill="hold" nodeType="clickEffect">
+                                  <p:stCondLst>
+                                    <p:cond delay="0"/>
+                                  </p:stCondLst>
+                                  <p:childTnLst>
+                                    <p:set>
+                                      <p:cBhvr>
+                                        <p:cTn id="16" dur="1" fill="hold">
+                                          <p:stCondLst>
+                                            <p:cond delay="0"/>
+                                          </p:stCondLst>
+                                        </p:cTn>
+                                        <p:tgtEl>
+                                          <p:spTgt spid="10"/>
+                                        </p:tgtEl>
+                                        <p:attrNameLst>
+                                          <p:attrName>style.visibility</p:attrName>
+                                        </p:attrNameLst>
+                                      </p:cBhvr>
+                                      <p:to>
+                                        <p:strVal val="visible"/>
+                                      </p:to>
+                                    </p:set>
+                                    <p:animEffect transition="in" filter="fade">
+                                      <p:cBhvr>
+                                        <p:cTn id="17" dur="450"/>
+                                        <p:tgtEl>
+                                          <p:spTgt spid="10"/>
+                                        </p:tgtEl>
+                                      </p:cBhvr>
+                                    </p:animEffect>
+                                  </p:childTnLst>
+                                </p:cTn>
+                              </p:par>
+                            </p:childTnLst>
+                          </p:cTn>
+                        </p:par>
+                      </p:childTnLst>
+                    </p:cTn>
+                  </p:par>
+                </p:childTnLst>
+              </p:cTn>
+              <p:prevCondLst>
+                <p:cond evt="onPrev" delay="0">
+                  <p:tgtEl>
+                    <p:sldTgt/>
+                  </p:tgtEl>
+                </p:cond>
+              </p:prevCondLst>
+              <p:nextCondLst>
+                <p:cond evt="onNext" delay="0">
+                  <p:tgtEl>
+                    <p:sldTgt/>
+                  </p:tgtEl>
+                </p:cond>
+              </p:nextCondLst>
+            </p:seq>
+          </p:childTnLst>
+        </p:cTn>
+      </p:par>
+    </p:tnLst>
+  </p:timing>
 </p:sld>
 </file>
 
@@ -10239,14 +9545,118 @@
       </p:sp>
       <p:sp>
         <p:nvSpPr>
-          <p:cNvPr id="5" name="TextBox 4"/>
+          <p:cNvPr id="5" name="Rounded Rectangle 4"/>
+          <p:cNvSpPr/>
+          <p:nvPr/>
+        </p:nvSpPr>
+        <p:spPr>
+          <a:xfrm>
+            <a:off x="5797149" y="1573813"/>
+            <a:ext cx="6010497" cy="4057845"/>
+          </a:xfrm>
+          <a:prstGeom prst="roundRect">
+            <a:avLst>
+              <a:gd name="adj" fmla="val 4000"/>
+            </a:avLst>
+          </a:prstGeom>
+          <a:solidFill>
+            <a:srgbClr val="E8EEF4"/>
+          </a:solidFill>
+          <a:ln>
+            <a:noFill/>
+          </a:ln>
+        </p:spPr>
+        <p:style>
+          <a:lnRef idx="1">
+            <a:schemeClr val="accent1"/>
+          </a:lnRef>
+          <a:fillRef idx="3">
+            <a:schemeClr val="accent1"/>
+          </a:fillRef>
+          <a:effectRef idx="2">
+            <a:schemeClr val="accent1"/>
+          </a:effectRef>
+          <a:fontRef idx="minor">
+            <a:schemeClr val="lt1"/>
+          </a:fontRef>
+        </p:style>
+        <p:txBody>
+          <a:bodyPr rtlCol="0" anchor="ctr"/>
+          <a:lstStyle/>
+          <a:p>
+            <a:pPr algn="ctr"/>
+          </a:p>
+        </p:txBody>
+      </p:sp>
+      <p:pic>
+        <p:nvPicPr>
+          <p:cNvPr id="6" name="Picture 5" descr="students-learning-laptops-classroom.jpg"/>
+          <p:cNvPicPr>
+            <a:picLocks noChangeAspect="1"/>
+          </p:cNvPicPr>
+          <p:nvPr/>
+        </p:nvPicPr>
+        <p:blipFill>
+          <a:blip r:embed="rId2"/>
+          <a:stretch>
+            <a:fillRect/>
+          </a:stretch>
+        </p:blipFill>
+        <p:spPr>
+          <a:xfrm>
+            <a:off x="5870301" y="1646965"/>
+            <a:ext cx="5864193" cy="3911541"/>
+          </a:xfrm>
+          <a:prstGeom prst="rect">
+            <a:avLst/>
+          </a:prstGeom>
+        </p:spPr>
+      </p:pic>
+      <p:sp>
+        <p:nvSpPr>
+          <p:cNvPr id="7" name="TextBox 6"/>
           <p:cNvSpPr txBox="1"/>
           <p:nvPr/>
         </p:nvSpPr>
         <p:spPr>
           <a:xfrm>
-            <a:off x="457200" y="1170432"/>
-            <a:ext cx="11277295" cy="5230368"/>
+            <a:off x="5870301" y="5961888"/>
+            <a:ext cx="5864193" cy="320040"/>
+          </a:xfrm>
+          <a:prstGeom prst="rect">
+            <a:avLst/>
+          </a:prstGeom>
+          <a:noFill/>
+        </p:spPr>
+        <p:txBody>
+          <a:bodyPr wrap="square">
+            <a:spAutoFit/>
+          </a:bodyPr>
+          <a:lstStyle/>
+          <a:p>
+            <a:pPr algn="ctr"/>
+            <a:r>
+              <a:rPr sz="1100" b="0" i="1">
+                <a:solidFill>
+                  <a:srgbClr val="666666"/>
+                </a:solidFill>
+                <a:latin typeface="Calibri"/>
+              </a:rPr>
+              <a:t>Foto: Mikhail Nilov · Pexels</a:t>
+            </a:r>
+          </a:p>
+        </p:txBody>
+      </p:sp>
+      <p:sp>
+        <p:nvSpPr>
+          <p:cNvPr id="8" name="TextBox 7"/>
+          <p:cNvSpPr txBox="1"/>
+          <p:nvPr/>
+        </p:nvSpPr>
+        <p:spPr>
+          <a:xfrm>
+            <a:off x="457200" y="1353312"/>
+            <a:ext cx="5093061" cy="5047488"/>
           </a:xfrm>
           <a:prstGeom prst="rect">
             <a:avLst/>
@@ -10416,7 +9826,7 @@
       </p:sp>
       <p:sp>
         <p:nvSpPr>
-          <p:cNvPr id="6" name="TextBox 5"/>
+          <p:cNvPr id="9" name="TextBox 8"/>
           <p:cNvSpPr txBox="1"/>
           <p:nvPr/>
         </p:nvSpPr>
@@ -11427,9 +10837,57 @@
           </a:p>
         </p:txBody>
       </p:sp>
-      <p:sp>
-        <p:nvSpPr>
-          <p:cNvPr id="13" name="TextBox 12"/>
+      <p:pic>
+        <p:nvPicPr>
+          <p:cNvPr id="13" name="Picture 12" descr="sello_mal.png"/>
+          <p:cNvPicPr>
+            <a:picLocks noChangeAspect="1"/>
+          </p:cNvPicPr>
+          <p:nvPr/>
+        </p:nvPicPr>
+        <p:blipFill>
+          <a:blip r:embed="rId2"/>
+          <a:stretch>
+            <a:fillRect/>
+          </a:stretch>
+        </p:blipFill>
+        <p:spPr>
+          <a:xfrm>
+            <a:off x="566928" y="1316736"/>
+            <a:ext cx="393192" cy="393192"/>
+          </a:xfrm>
+          <a:prstGeom prst="rect">
+            <a:avLst/>
+          </a:prstGeom>
+        </p:spPr>
+      </p:pic>
+      <p:pic>
+        <p:nvPicPr>
+          <p:cNvPr id="14" name="Picture 13" descr="sello_bien.png"/>
+          <p:cNvPicPr>
+            <a:picLocks noChangeAspect="1"/>
+          </p:cNvPicPr>
+          <p:nvPr/>
+        </p:nvPicPr>
+        <p:blipFill>
+          <a:blip r:embed="rId3"/>
+          <a:stretch>
+            <a:fillRect/>
+          </a:stretch>
+        </p:blipFill>
+        <p:spPr>
+          <a:xfrm>
+            <a:off x="6365595" y="1316736"/>
+            <a:ext cx="393192" cy="393192"/>
+          </a:xfrm>
+          <a:prstGeom prst="rect">
+            <a:avLst/>
+          </a:prstGeom>
+        </p:spPr>
+      </p:pic>
+      <p:sp>
+        <p:nvSpPr>
+          <p:cNvPr id="15" name="TextBox 14"/>
           <p:cNvSpPr txBox="1"/>
           <p:nvPr/>
         </p:nvSpPr>
@@ -12130,9 +11588,57 @@
           </a:p>
         </p:txBody>
       </p:sp>
-      <p:sp>
-        <p:nvSpPr>
-          <p:cNvPr id="14" name="TextBox 13"/>
+      <p:pic>
+        <p:nvPicPr>
+          <p:cNvPr id="14" name="Picture 13" descr="sello_mal.png"/>
+          <p:cNvPicPr>
+            <a:picLocks noChangeAspect="1"/>
+          </p:cNvPicPr>
+          <p:nvPr/>
+        </p:nvPicPr>
+        <p:blipFill>
+          <a:blip r:embed="rId2"/>
+          <a:stretch>
+            <a:fillRect/>
+          </a:stretch>
+        </p:blipFill>
+        <p:spPr>
+          <a:xfrm>
+            <a:off x="566928" y="1527048"/>
+            <a:ext cx="393192" cy="393192"/>
+          </a:xfrm>
+          <a:prstGeom prst="rect">
+            <a:avLst/>
+          </a:prstGeom>
+        </p:spPr>
+      </p:pic>
+      <p:pic>
+        <p:nvPicPr>
+          <p:cNvPr id="15" name="Picture 14" descr="sello_bien.png"/>
+          <p:cNvPicPr>
+            <a:picLocks noChangeAspect="1"/>
+          </p:cNvPicPr>
+          <p:nvPr/>
+        </p:nvPicPr>
+        <p:blipFill>
+          <a:blip r:embed="rId3"/>
+          <a:stretch>
+            <a:fillRect/>
+          </a:stretch>
+        </p:blipFill>
+        <p:spPr>
+          <a:xfrm>
+            <a:off x="6365595" y="1527048"/>
+            <a:ext cx="393192" cy="393192"/>
+          </a:xfrm>
+          <a:prstGeom prst="rect">
+            <a:avLst/>
+          </a:prstGeom>
+        </p:spPr>
+      </p:pic>
+      <p:sp>
+        <p:nvSpPr>
+          <p:cNvPr id="16" name="TextBox 15"/>
           <p:cNvSpPr txBox="1"/>
           <p:nvPr/>
         </p:nvSpPr>
@@ -13642,9 +13148,57 @@
           </a:p>
         </p:txBody>
       </p:sp>
-      <p:sp>
-        <p:nvSpPr>
-          <p:cNvPr id="14" name="TextBox 13"/>
+      <p:pic>
+        <p:nvPicPr>
+          <p:cNvPr id="14" name="Picture 13" descr="sello_mal.png"/>
+          <p:cNvPicPr>
+            <a:picLocks noChangeAspect="1"/>
+          </p:cNvPicPr>
+          <p:nvPr/>
+        </p:nvPicPr>
+        <p:blipFill>
+          <a:blip r:embed="rId2"/>
+          <a:stretch>
+            <a:fillRect/>
+          </a:stretch>
+        </p:blipFill>
+        <p:spPr>
+          <a:xfrm>
+            <a:off x="566928" y="1527048"/>
+            <a:ext cx="393192" cy="393192"/>
+          </a:xfrm>
+          <a:prstGeom prst="rect">
+            <a:avLst/>
+          </a:prstGeom>
+        </p:spPr>
+      </p:pic>
+      <p:pic>
+        <p:nvPicPr>
+          <p:cNvPr id="15" name="Picture 14" descr="sello_bien.png"/>
+          <p:cNvPicPr>
+            <a:picLocks noChangeAspect="1"/>
+          </p:cNvPicPr>
+          <p:nvPr/>
+        </p:nvPicPr>
+        <p:blipFill>
+          <a:blip r:embed="rId3"/>
+          <a:stretch>
+            <a:fillRect/>
+          </a:stretch>
+        </p:blipFill>
+        <p:spPr>
+          <a:xfrm>
+            <a:off x="6365595" y="1527048"/>
+            <a:ext cx="393192" cy="393192"/>
+          </a:xfrm>
+          <a:prstGeom prst="rect">
+            <a:avLst/>
+          </a:prstGeom>
+        </p:spPr>
+      </p:pic>
+      <p:sp>
+        <p:nvSpPr>
+          <p:cNvPr id="16" name="TextBox 15"/>
           <p:cNvSpPr txBox="1"/>
           <p:nvPr/>
         </p:nvSpPr>

--- a/Introduccion a la Ingenieria/Clases/Clase 4 - Principios eticos en la Ingenieria/Presentacion.pptx
+++ b/Introduccion a la Ingenieria/Clases/Clase 4 - Principios eticos en la Ingenieria/Presentacion.pptx
@@ -6224,118 +6224,14 @@
       </p:sp>
       <p:sp>
         <p:nvSpPr>
-          <p:cNvPr id="5" name="Rounded Rectangle 4"/>
-          <p:cNvSpPr/>
-          <p:nvPr/>
-        </p:nvSpPr>
-        <p:spPr>
-          <a:xfrm>
-            <a:off x="5797149" y="1573813"/>
-            <a:ext cx="6010497" cy="4057845"/>
-          </a:xfrm>
-          <a:prstGeom prst="roundRect">
-            <a:avLst>
-              <a:gd name="adj" fmla="val 4000"/>
-            </a:avLst>
-          </a:prstGeom>
-          <a:solidFill>
-            <a:srgbClr val="E8EEF4"/>
-          </a:solidFill>
-          <a:ln>
-            <a:noFill/>
-          </a:ln>
-        </p:spPr>
-        <p:style>
-          <a:lnRef idx="1">
-            <a:schemeClr val="accent1"/>
-          </a:lnRef>
-          <a:fillRef idx="3">
-            <a:schemeClr val="accent1"/>
-          </a:fillRef>
-          <a:effectRef idx="2">
-            <a:schemeClr val="accent1"/>
-          </a:effectRef>
-          <a:fontRef idx="minor">
-            <a:schemeClr val="lt1"/>
-          </a:fontRef>
-        </p:style>
-        <p:txBody>
-          <a:bodyPr rtlCol="0" anchor="ctr"/>
-          <a:lstStyle/>
-          <a:p>
-            <a:pPr algn="ctr"/>
-          </a:p>
-        </p:txBody>
-      </p:sp>
-      <p:pic>
-        <p:nvPicPr>
-          <p:cNvPr id="6" name="Picture 5" descr="person-writing-email-laptop-office.jpg"/>
-          <p:cNvPicPr>
-            <a:picLocks noChangeAspect="1"/>
-          </p:cNvPicPr>
-          <p:nvPr/>
-        </p:nvPicPr>
-        <p:blipFill>
-          <a:blip r:embed="rId2"/>
-          <a:stretch>
-            <a:fillRect/>
-          </a:stretch>
-        </p:blipFill>
-        <p:spPr>
-          <a:xfrm>
-            <a:off x="5870301" y="1646965"/>
-            <a:ext cx="5864193" cy="3911541"/>
-          </a:xfrm>
-          <a:prstGeom prst="rect">
-            <a:avLst/>
-          </a:prstGeom>
-        </p:spPr>
-      </p:pic>
-      <p:sp>
-        <p:nvSpPr>
-          <p:cNvPr id="7" name="TextBox 6"/>
+          <p:cNvPr id="5" name="TextBox 4"/>
           <p:cNvSpPr txBox="1"/>
           <p:nvPr/>
         </p:nvSpPr>
         <p:spPr>
           <a:xfrm>
-            <a:off x="5870301" y="5961888"/>
-            <a:ext cx="5864193" cy="320040"/>
-          </a:xfrm>
-          <a:prstGeom prst="rect">
-            <a:avLst/>
-          </a:prstGeom>
-          <a:noFill/>
-        </p:spPr>
-        <p:txBody>
-          <a:bodyPr wrap="square">
-            <a:spAutoFit/>
-          </a:bodyPr>
-          <a:lstStyle/>
-          <a:p>
-            <a:pPr algn="ctr"/>
-            <a:r>
-              <a:rPr sz="1100" b="0" i="1">
-                <a:solidFill>
-                  <a:srgbClr val="666666"/>
-                </a:solidFill>
-                <a:latin typeface="Calibri"/>
-              </a:rPr>
-              <a:t>Foto: SHVETS production · Pexels</a:t>
-            </a:r>
-          </a:p>
-        </p:txBody>
-      </p:sp>
-      <p:sp>
-        <p:nvSpPr>
-          <p:cNvPr id="8" name="TextBox 7"/>
-          <p:cNvSpPr txBox="1"/>
-          <p:nvPr/>
-        </p:nvSpPr>
-        <p:spPr>
-          <a:xfrm>
-            <a:off x="457200" y="1353312"/>
-            <a:ext cx="5093061" cy="5047488"/>
+            <a:off x="457200" y="1170432"/>
+            <a:ext cx="11277295" cy="5230368"/>
           </a:xfrm>
           <a:prstGeom prst="rect">
             <a:avLst/>
@@ -6483,11 +6379,79 @@
               <a:t> exportar solo nombre y ciudad, que es lo que el reporte necesita.</a:t>
             </a:r>
           </a:p>
-        </p:txBody>
-      </p:sp>
-      <p:sp>
-        <p:nvSpPr>
-          <p:cNvPr id="9" name="TextBox 8"/>
+          <a:p>
+            <a:pPr>
+              <a:spcAft>
+                <a:spcPts val="800"/>
+              </a:spcAft>
+            </a:pPr>
+            <a:r>
+              <a:rPr sz="2000" b="0" i="0">
+                <a:solidFill>
+                  <a:srgbClr val="333333"/>
+                </a:solidFill>
+                <a:latin typeface="Calibri"/>
+              </a:rPr>
+              <a:t>–   </a:t>
+            </a:r>
+            <a:r>
+              <a:rPr sz="2000" b="1" i="0">
+                <a:solidFill>
+                  <a:srgbClr val="333333"/>
+                </a:solidFill>
+                <a:latin typeface="Calibri"/>
+              </a:rPr>
+              <a:t>Quedo atento</a:t>
+            </a:r>
+            <a:r>
+              <a:rPr sz="2000" b="0" i="0">
+                <a:solidFill>
+                  <a:srgbClr val="333333"/>
+                </a:solidFill>
+                <a:latin typeface="Calibri"/>
+              </a:rPr>
+              <a:t> a su decisión. — Firmado, con fecha.</a:t>
+            </a:r>
+          </a:p>
+          <a:p>
+            <a:pPr>
+              <a:spcAft>
+                <a:spcPts val="800"/>
+              </a:spcAft>
+            </a:pPr>
+            <a:r>
+              <a:rPr sz="2000" b="0" i="0">
+                <a:solidFill>
+                  <a:srgbClr val="333333"/>
+                </a:solidFill>
+                <a:latin typeface="Calibri"/>
+              </a:rPr>
+              <a:t>–   </a:t>
+            </a:r>
+            <a:r>
+              <a:rPr sz="2000" b="1" i="0">
+                <a:solidFill>
+                  <a:srgbClr val="333333"/>
+                </a:solidFill>
+                <a:latin typeface="Calibri"/>
+              </a:rPr>
+              <a:t>Cinco líneas.</a:t>
+            </a:r>
+            <a:r>
+              <a:rPr sz="2000" b="0" i="0">
+                <a:solidFill>
+                  <a:srgbClr val="333333"/>
+                </a:solidFill>
+                <a:latin typeface="Calibri"/>
+              </a:rPr>
+              <a:t> Si el jefe insiste, la decisión ya no es suya, y queda escrito que avisó.</a:t>
+            </a:r>
+          </a:p>
+        </p:txBody>
+      </p:sp>
+      <p:sp>
+        <p:nvSpPr>
+          <p:cNvPr id="6" name="TextBox 5"/>
           <p:cNvSpPr txBox="1"/>
           <p:nvPr/>
         </p:nvSpPr>
@@ -9545,118 +9509,14 @@
       </p:sp>
       <p:sp>
         <p:nvSpPr>
-          <p:cNvPr id="5" name="Rounded Rectangle 4"/>
-          <p:cNvSpPr/>
-          <p:nvPr/>
-        </p:nvSpPr>
-        <p:spPr>
-          <a:xfrm>
-            <a:off x="5797149" y="1573813"/>
-            <a:ext cx="6010497" cy="4057845"/>
-          </a:xfrm>
-          <a:prstGeom prst="roundRect">
-            <a:avLst>
-              <a:gd name="adj" fmla="val 4000"/>
-            </a:avLst>
-          </a:prstGeom>
-          <a:solidFill>
-            <a:srgbClr val="E8EEF4"/>
-          </a:solidFill>
-          <a:ln>
-            <a:noFill/>
-          </a:ln>
-        </p:spPr>
-        <p:style>
-          <a:lnRef idx="1">
-            <a:schemeClr val="accent1"/>
-          </a:lnRef>
-          <a:fillRef idx="3">
-            <a:schemeClr val="accent1"/>
-          </a:fillRef>
-          <a:effectRef idx="2">
-            <a:schemeClr val="accent1"/>
-          </a:effectRef>
-          <a:fontRef idx="minor">
-            <a:schemeClr val="lt1"/>
-          </a:fontRef>
-        </p:style>
-        <p:txBody>
-          <a:bodyPr rtlCol="0" anchor="ctr"/>
-          <a:lstStyle/>
-          <a:p>
-            <a:pPr algn="ctr"/>
-          </a:p>
-        </p:txBody>
-      </p:sp>
-      <p:pic>
-        <p:nvPicPr>
-          <p:cNvPr id="6" name="Picture 5" descr="students-learning-laptops-classroom.jpg"/>
-          <p:cNvPicPr>
-            <a:picLocks noChangeAspect="1"/>
-          </p:cNvPicPr>
-          <p:nvPr/>
-        </p:nvPicPr>
-        <p:blipFill>
-          <a:blip r:embed="rId2"/>
-          <a:stretch>
-            <a:fillRect/>
-          </a:stretch>
-        </p:blipFill>
-        <p:spPr>
-          <a:xfrm>
-            <a:off x="5870301" y="1646965"/>
-            <a:ext cx="5864193" cy="3911541"/>
-          </a:xfrm>
-          <a:prstGeom prst="rect">
-            <a:avLst/>
-          </a:prstGeom>
-        </p:spPr>
-      </p:pic>
-      <p:sp>
-        <p:nvSpPr>
-          <p:cNvPr id="7" name="TextBox 6"/>
+          <p:cNvPr id="5" name="TextBox 4"/>
           <p:cNvSpPr txBox="1"/>
           <p:nvPr/>
         </p:nvSpPr>
         <p:spPr>
           <a:xfrm>
-            <a:off x="5870301" y="5961888"/>
-            <a:ext cx="5864193" cy="320040"/>
-          </a:xfrm>
-          <a:prstGeom prst="rect">
-            <a:avLst/>
-          </a:prstGeom>
-          <a:noFill/>
-        </p:spPr>
-        <p:txBody>
-          <a:bodyPr wrap="square">
-            <a:spAutoFit/>
-          </a:bodyPr>
-          <a:lstStyle/>
-          <a:p>
-            <a:pPr algn="ctr"/>
-            <a:r>
-              <a:rPr sz="1100" b="0" i="1">
-                <a:solidFill>
-                  <a:srgbClr val="666666"/>
-                </a:solidFill>
-                <a:latin typeface="Calibri"/>
-              </a:rPr>
-              <a:t>Foto: Mikhail Nilov · Pexels</a:t>
-            </a:r>
-          </a:p>
-        </p:txBody>
-      </p:sp>
-      <p:sp>
-        <p:nvSpPr>
-          <p:cNvPr id="8" name="TextBox 7"/>
-          <p:cNvSpPr txBox="1"/>
-          <p:nvPr/>
-        </p:nvSpPr>
-        <p:spPr>
-          <a:xfrm>
-            <a:off x="457200" y="1353312"/>
-            <a:ext cx="5093061" cy="5047488"/>
+            <a:off x="457200" y="1170432"/>
+            <a:ext cx="11277295" cy="5230368"/>
           </a:xfrm>
           <a:prstGeom prst="rect">
             <a:avLst/>
@@ -9826,7 +9686,7 @@
       </p:sp>
       <p:sp>
         <p:nvSpPr>
-          <p:cNvPr id="9" name="TextBox 8"/>
+          <p:cNvPr id="6" name="TextBox 5"/>
           <p:cNvSpPr txBox="1"/>
           <p:nvPr/>
         </p:nvSpPr>

--- a/Introduccion a la Ingenieria/Clases/Clase 4 - Principios eticos en la Ingenieria/Presentacion.pptx
+++ b/Introduccion a la Ingenieria/Clases/Clase 4 - Principios eticos en la Ingenieria/Presentacion.pptx
@@ -900,6 +900,48 @@
         <p:txBody>
           <a:bodyPr/>
           <a:lstStyle/>
+          <a:p>
+            <a:r>
+              <a:t>TEXTO COMPLETO DE LA LÁMINA (se proyecta resumido):</a:t>
+            </a:r>
+          </a:p>
+          <a:p/>
+          <a:p>
+            <a:r>
+              <a:t>Asunto: Riesgo en la función de exportar clientes</a:t>
+            </a:r>
+          </a:p>
+          <a:p/>
+          <a:p>
+            <a:r>
+              <a:t>Lo que me piden: exportar la lista de clientes con cédula y celular a un archivo compartido.</a:t>
+            </a:r>
+          </a:p>
+          <a:p/>
+          <a:p>
+            <a:r>
+              <a:t>El riesgo: si el archivo se filtra, quedan expuestos los datos de unas 2.000 personas.</a:t>
+            </a:r>
+          </a:p>
+          <a:p/>
+          <a:p>
+            <a:r>
+              <a:t>Lo que propongo: exportar solo nombre y ciudad, que es lo que el reporte necesita.</a:t>
+            </a:r>
+          </a:p>
+          <a:p/>
+          <a:p>
+            <a:r>
+              <a:t>Quedo atento a su decisión. — Firmado, con fecha.</a:t>
+            </a:r>
+          </a:p>
+          <a:p/>
+          <a:p>
+            <a:r>
+              <a:t>Cinco líneas. Si el jefe insiste, la decisión ya no es suya, y queda escrito que avisó.</a:t>
+            </a:r>
+          </a:p>
+          <a:p/>
           <a:p>
             <a:r>
               <a:t>Este es el contenido más útil de la clase para su vida laboral: no es heroísmo, es un correo de cinco líneas. Pídales que escriban uno para su propio proyecto antes de terminar.</a:t>
@@ -5052,9 +5094,33 @@
           </a:prstGeom>
         </p:spPr>
       </p:pic>
-      <p:sp>
-        <p:nvSpPr>
-          <p:cNvPr id="18" name="TextBox 17"/>
+      <p:pic>
+        <p:nvPicPr>
+          <p:cNvPr id="11" name="Picture 10" descr="therac25-paso5.png"/>
+          <p:cNvPicPr>
+            <a:picLocks noChangeAspect="1"/>
+          </p:cNvPicPr>
+          <p:nvPr/>
+        </p:nvPicPr>
+        <p:blipFill>
+          <a:blip r:embed="rId6"/>
+          <a:stretch>
+            <a:fillRect/>
+          </a:stretch>
+        </p:blipFill>
+        <p:spPr>
+          <a:xfrm>
+            <a:off x="6007763" y="1472184"/>
+            <a:ext cx="5589270" cy="4471416"/>
+          </a:xfrm>
+          <a:prstGeom prst="rect">
+            <a:avLst/>
+          </a:prstGeom>
+        </p:spPr>
+      </p:pic>
+      <p:sp>
+        <p:nvSpPr>
+          <p:cNvPr id="23" name="TextBox 22"/>
           <p:cNvSpPr txBox="1"/>
           <p:nvPr/>
         </p:nvSpPr>
@@ -5089,7 +5155,7 @@
       </p:sp>
       <p:sp>
         <p:nvSpPr>
-          <p:cNvPr id="19" name="TextBox 18"/>
+          <p:cNvPr id="24" name="TextBox 23"/>
           <p:cNvSpPr txBox="1"/>
           <p:nvPr/>
         </p:nvSpPr>
@@ -5214,7 +5280,7 @@
       </p:sp>
       <p:sp>
         <p:nvSpPr>
-          <p:cNvPr id="20" name="TextBox 19"/>
+          <p:cNvPr id="25" name="TextBox 24"/>
           <p:cNvSpPr txBox="1"/>
           <p:nvPr/>
         </p:nvSpPr>
@@ -5419,6 +5485,59 @@
                       </p:childTnLst>
                     </p:cTn>
                   </p:par>
+                  <p:par>
+                    <p:cTn id="18" fill="hold">
+                      <p:stCondLst>
+                        <p:cond delay="indefinite"/>
+                      </p:stCondLst>
+                      <p:childTnLst>
+                        <p:par>
+                          <p:cTn id="19" fill="hold">
+                            <p:stCondLst>
+                              <p:cond delay="0"/>
+                            </p:stCondLst>
+                            <p:childTnLst>
+                              <p:par>
+                                <p:cTn id="20" presetID="10" presetClass="entr" presetSubtype="0" fill="hold" nodeType="clickEffect">
+                                  <p:stCondLst>
+                                    <p:cond delay="0"/>
+                                  </p:stCondLst>
+                                  <p:childTnLst>
+                                    <p:set>
+                                      <p:cBhvr>
+                                        <p:cTn id="21" dur="1" fill="hold">
+                                          <p:stCondLst>
+                                            <p:cond delay="0"/>
+                                          </p:stCondLst>
+                                        </p:cTn>
+                                        <p:tgtEl>
+                                          <p:spTgt spid="11"/>
+                                        </p:tgtEl>
+                                        <p:attrNameLst>
+                                          <p:attrName>style.visibility</p:attrName>
+                                        </p:attrNameLst>
+                                      </p:cBhvr>
+                                      <p:to>
+                                        <p:strVal val="visible"/>
+                                      </p:to>
+                                    </p:set>
+                                    <p:animEffect transition="in" filter="fade">
+                                      <p:cBhvr>
+                                        <p:cTn id="22" dur="450"/>
+                                        <p:tgtEl>
+                                          <p:spTgt spid="11"/>
+                                        </p:tgtEl>
+                                      </p:cBhvr>
+                                    </p:animEffect>
+                                  </p:childTnLst>
+                                </p:cTn>
+                              </p:par>
+                            </p:childTnLst>
+                          </p:cTn>
+                        </p:par>
+                      </p:childTnLst>
+                    </p:cTn>
+                  </p:par>
                 </p:childTnLst>
               </p:cTn>
               <p:prevCondLst>
@@ -6224,14 +6343,83 @@
       </p:sp>
       <p:sp>
         <p:nvSpPr>
-          <p:cNvPr id="5" name="TextBox 4"/>
+          <p:cNvPr id="5" name="Rounded Rectangle 4"/>
+          <p:cNvSpPr/>
+          <p:nvPr/>
+        </p:nvSpPr>
+        <p:spPr>
+          <a:xfrm>
+            <a:off x="5797149" y="1343926"/>
+            <a:ext cx="6010497" cy="4837658"/>
+          </a:xfrm>
+          <a:prstGeom prst="roundRect">
+            <a:avLst>
+              <a:gd name="adj" fmla="val 4000"/>
+            </a:avLst>
+          </a:prstGeom>
+          <a:solidFill>
+            <a:srgbClr val="E8EEF4"/>
+          </a:solidFill>
+          <a:ln>
+            <a:noFill/>
+          </a:ln>
+        </p:spPr>
+        <p:style>
+          <a:lnRef idx="1">
+            <a:schemeClr val="accent1"/>
+          </a:lnRef>
+          <a:fillRef idx="3">
+            <a:schemeClr val="accent1"/>
+          </a:fillRef>
+          <a:effectRef idx="2">
+            <a:schemeClr val="accent1"/>
+          </a:effectRef>
+          <a:fontRef idx="minor">
+            <a:schemeClr val="lt1"/>
+          </a:fontRef>
+        </p:style>
+        <p:txBody>
+          <a:bodyPr rtlCol="0" anchor="ctr"/>
+          <a:lstStyle/>
+          <a:p>
+            <a:pPr algn="ctr"/>
+          </a:p>
+        </p:txBody>
+      </p:sp>
+      <p:pic>
+        <p:nvPicPr>
+          <p:cNvPr id="6" name="Picture 5" descr="ilus-correo-rastro-paso1.png"/>
+          <p:cNvPicPr>
+            <a:picLocks noChangeAspect="1"/>
+          </p:cNvPicPr>
+          <p:nvPr/>
+        </p:nvPicPr>
+        <p:blipFill>
+          <a:blip r:embed="rId2"/>
+          <a:stretch>
+            <a:fillRect/>
+          </a:stretch>
+        </p:blipFill>
+        <p:spPr>
+          <a:xfrm>
+            <a:off x="5870301" y="1417078"/>
+            <a:ext cx="5864193" cy="4691354"/>
+          </a:xfrm>
+          <a:prstGeom prst="rect">
+            <a:avLst/>
+          </a:prstGeom>
+        </p:spPr>
+      </p:pic>
+      <p:sp>
+        <p:nvSpPr>
+          <p:cNvPr id="7" name="TextBox 6"/>
           <p:cNvSpPr txBox="1"/>
           <p:nvPr/>
         </p:nvSpPr>
         <p:spPr>
           <a:xfrm>
-            <a:off x="457200" y="1170432"/>
-            <a:ext cx="11277295" cy="5230368"/>
+            <a:off x="457200" y="1353312"/>
+            <a:ext cx="5093061" cy="5047488"/>
           </a:xfrm>
           <a:prstGeom prst="rect">
             <a:avLst/>
@@ -6379,79 +6567,11 @@
               <a:t> exportar solo nombre y ciudad, que es lo que el reporte necesita.</a:t>
             </a:r>
           </a:p>
-          <a:p>
-            <a:pPr>
-              <a:spcAft>
-                <a:spcPts val="800"/>
-              </a:spcAft>
-            </a:pPr>
-            <a:r>
-              <a:rPr sz="2000" b="0" i="0">
-                <a:solidFill>
-                  <a:srgbClr val="333333"/>
-                </a:solidFill>
-                <a:latin typeface="Calibri"/>
-              </a:rPr>
-              <a:t>–   </a:t>
-            </a:r>
-            <a:r>
-              <a:rPr sz="2000" b="1" i="0">
-                <a:solidFill>
-                  <a:srgbClr val="333333"/>
-                </a:solidFill>
-                <a:latin typeface="Calibri"/>
-              </a:rPr>
-              <a:t>Quedo atento</a:t>
-            </a:r>
-            <a:r>
-              <a:rPr sz="2000" b="0" i="0">
-                <a:solidFill>
-                  <a:srgbClr val="333333"/>
-                </a:solidFill>
-                <a:latin typeface="Calibri"/>
-              </a:rPr>
-              <a:t> a su decisión. — Firmado, con fecha.</a:t>
-            </a:r>
-          </a:p>
-          <a:p>
-            <a:pPr>
-              <a:spcAft>
-                <a:spcPts val="800"/>
-              </a:spcAft>
-            </a:pPr>
-            <a:r>
-              <a:rPr sz="2000" b="0" i="0">
-                <a:solidFill>
-                  <a:srgbClr val="333333"/>
-                </a:solidFill>
-                <a:latin typeface="Calibri"/>
-              </a:rPr>
-              <a:t>–   </a:t>
-            </a:r>
-            <a:r>
-              <a:rPr sz="2000" b="1" i="0">
-                <a:solidFill>
-                  <a:srgbClr val="333333"/>
-                </a:solidFill>
-                <a:latin typeface="Calibri"/>
-              </a:rPr>
-              <a:t>Cinco líneas.</a:t>
-            </a:r>
-            <a:r>
-              <a:rPr sz="2000" b="0" i="0">
-                <a:solidFill>
-                  <a:srgbClr val="333333"/>
-                </a:solidFill>
-                <a:latin typeface="Calibri"/>
-              </a:rPr>
-              <a:t> Si el jefe insiste, la decisión ya no es suya, y queda escrito que avisó.</a:t>
-            </a:r>
-          </a:p>
-        </p:txBody>
-      </p:sp>
-      <p:sp>
-        <p:nvSpPr>
-          <p:cNvPr id="6" name="TextBox 5"/>
+        </p:txBody>
+      </p:sp>
+      <p:sp>
+        <p:nvSpPr>
+          <p:cNvPr id="8" name="TextBox 7"/>
           <p:cNvSpPr txBox="1"/>
           <p:nvPr/>
         </p:nvSpPr>
@@ -6805,9 +6925,33 @@
           </a:prstGeom>
         </p:spPr>
       </p:pic>
-      <p:sp>
-        <p:nvSpPr>
-          <p:cNvPr id="18" name="TextBox 17"/>
+      <p:pic>
+        <p:nvPicPr>
+          <p:cNvPr id="11" name="Picture 10" descr="cinco-preguntas-paso5.png"/>
+          <p:cNvPicPr>
+            <a:picLocks noChangeAspect="1"/>
+          </p:cNvPicPr>
+          <p:nvPr/>
+        </p:nvPicPr>
+        <p:blipFill>
+          <a:blip r:embed="rId6"/>
+          <a:stretch>
+            <a:fillRect/>
+          </a:stretch>
+        </p:blipFill>
+        <p:spPr>
+          <a:xfrm>
+            <a:off x="6007763" y="1472184"/>
+            <a:ext cx="5589270" cy="4471416"/>
+          </a:xfrm>
+          <a:prstGeom prst="rect">
+            <a:avLst/>
+          </a:prstGeom>
+        </p:spPr>
+      </p:pic>
+      <p:sp>
+        <p:nvSpPr>
+          <p:cNvPr id="23" name="TextBox 22"/>
           <p:cNvSpPr txBox="1"/>
           <p:nvPr/>
         </p:nvSpPr>
@@ -6842,7 +6986,7 @@
       </p:sp>
       <p:sp>
         <p:nvSpPr>
-          <p:cNvPr id="19" name="TextBox 18"/>
+          <p:cNvPr id="24" name="TextBox 23"/>
           <p:cNvSpPr txBox="1"/>
           <p:nvPr/>
         </p:nvSpPr>
@@ -6967,7 +7111,7 @@
       </p:sp>
       <p:sp>
         <p:nvSpPr>
-          <p:cNvPr id="20" name="TextBox 19"/>
+          <p:cNvPr id="25" name="TextBox 24"/>
           <p:cNvSpPr txBox="1"/>
           <p:nvPr/>
         </p:nvSpPr>
@@ -7160,6 +7304,59 @@
                                         <p:cTn id="17" dur="450"/>
                                         <p:tgtEl>
                                           <p:spTgt spid="10"/>
+                                        </p:tgtEl>
+                                      </p:cBhvr>
+                                    </p:animEffect>
+                                  </p:childTnLst>
+                                </p:cTn>
+                              </p:par>
+                            </p:childTnLst>
+                          </p:cTn>
+                        </p:par>
+                      </p:childTnLst>
+                    </p:cTn>
+                  </p:par>
+                  <p:par>
+                    <p:cTn id="18" fill="hold">
+                      <p:stCondLst>
+                        <p:cond delay="indefinite"/>
+                      </p:stCondLst>
+                      <p:childTnLst>
+                        <p:par>
+                          <p:cTn id="19" fill="hold">
+                            <p:stCondLst>
+                              <p:cond delay="0"/>
+                            </p:stCondLst>
+                            <p:childTnLst>
+                              <p:par>
+                                <p:cTn id="20" presetID="10" presetClass="entr" presetSubtype="0" fill="hold" nodeType="clickEffect">
+                                  <p:stCondLst>
+                                    <p:cond delay="0"/>
+                                  </p:stCondLst>
+                                  <p:childTnLst>
+                                    <p:set>
+                                      <p:cBhvr>
+                                        <p:cTn id="21" dur="1" fill="hold">
+                                          <p:stCondLst>
+                                            <p:cond delay="0"/>
+                                          </p:stCondLst>
+                                        </p:cTn>
+                                        <p:tgtEl>
+                                          <p:spTgt spid="11"/>
+                                        </p:tgtEl>
+                                        <p:attrNameLst>
+                                          <p:attrName>style.visibility</p:attrName>
+                                        </p:attrNameLst>
+                                      </p:cBhvr>
+                                      <p:to>
+                                        <p:strVal val="visible"/>
+                                      </p:to>
+                                    </p:set>
+                                    <p:animEffect transition="in" filter="fade">
+                                      <p:cBhvr>
+                                        <p:cTn id="22" dur="450"/>
+                                        <p:tgtEl>
+                                          <p:spTgt spid="11"/>
                                         </p:tgtEl>
                                       </p:cBhvr>
                                     </p:animEffect>

--- a/Introduccion a la Ingenieria/Clases/Clase 4 - Principios eticos en la Ingenieria/Presentacion.pptx
+++ b/Introduccion a la Ingenieria/Clases/Clase 4 - Principios eticos en la Ingenieria/Presentacion.pptx
@@ -592,7 +592,7 @@
           <a:p/>
           <a:p>
             <a:r>
-              <a:t>«Yo solo programé lo que me pidieron» es la frase que el estudiante va a usar espontáneamente en el taller, y hay que desarmarla con hechos en vez de con moralina. Legalmente no funciona: el caso Volkswagen tiene un ingeniero condenado a prisión por ejecutar. Profesionalmente tampoco: el código ACM/IEEE pone el interés público por encima del empleador, así que el conflicto ya está resuelto en el texto.</a:t>
+              <a:t>«Yo solo programé lo que me pidieron» es la frase que el estudiante va a usar espontáneamente en el taller, y hay que desarmarla con hechos en vez de con sermones. Legalmente no funciona: el caso Volkswagen tiene un ingeniero condenado a prisión por ejecutar. Profesionalmente tampoco: el código ACM/IEEE pone el interés público por encima del empleador, así que el conflicto ya está resuelto en el texto.</a:t>
             </a:r>
           </a:p>
           <a:p/>
@@ -680,7 +680,7 @@
           <a:p/>
           <a:p>
             <a:r>
-              <a:t>«Yo solo programé lo que me pidieron» es la frase que el estudiante va a usar espontáneamente en el taller, y hay que desarmarla con hechos en vez de con moralina. Legalmente no funciona: el caso Volkswagen tiene un ingeniero condenado a prisión por ejecutar. Profesionalmente tampoco: el código ACM/IEEE pone el interés público por encima del empleador, así que el conflicto ya está resuelto en el texto.</a:t>
+              <a:t>«Yo solo programé lo que me pidieron» es la frase que el estudiante va a usar espontáneamente en el taller, y hay que desarmarla con hechos en vez de con sermones. Legalmente no funciona: el caso Volkswagen tiene un ingeniero condenado a prisión por ejecutar. Profesionalmente tampoco: el código ACM/IEEE pone el interés público por encima del empleador, así que el conflicto ya está resuelto en el texto.</a:t>
             </a:r>
           </a:p>
           <a:p/>
@@ -1096,7 +1096,7 @@
           <a:p/>
           <a:p>
             <a:r>
-              <a:t>El estudiante de primer semestre tiene interiorizada la idea de que la responsabilidad es del jefe y que el programador ejecuta. Este caso la rompe con un hecho verificable, y por eso es mejor abrir con él que con una definición de ética. Recoja las respuestas en el muro los primeros diez minutos —van a aparecer «robó», «hackeó», «se equivocó»— y en el minuto 30, cuando llegue al caso en la tabla, muestre que ninguna era: no hubo error, no hubo robo, hubo una decisión de diseño que se ejecutó bien.</a:t>
+              <a:t>El estudiante de primer semestre trae aprendida la idea de que la responsabilidad es del jefe y que el programador ejecuta. Este caso la rompe con un hecho verificable, y por eso es mejor abrir con él que con una definición de ética. Recoja las respuestas en el muro los primeros diez minutos —van a aparecer «robó», «hackeó», «se equivocó»— y en el minuto 30, cuando llegue al caso en la tabla, muestre que ninguna era: no hubo error, no hubo robo, hubo una decisión de diseño que se ejecutó bien.</a:t>
             </a:r>
           </a:p>
         </p:txBody>
@@ -1366,7 +1366,7 @@
           <a:p/>
           <a:p>
             <a:r>
-              <a:t>Therac-25 (1985–1987). Máquina de radioterapia de la Atomic Energy of Canada Limited. Seis accidentes conocidos con sobredosis masivas de radiación y varios muertos. Las causas son de manual y hay que contarlas completas porque son técnicas: los modelos anteriores tenían seguros físicos que impedían mecánicamente una configuración peligrosa, y en el Therac-25 se quitaron confiando en que el software lo evitaría; el software venía reutilizado de los modelos anteriores, con errores que antes quedaban tapados por esos seguros; había una condición de carrera que se disparaba cuando la operadora corregía la pantalla muy rápido, algo que hacían las operadoras expertas; los mensajes de error eran crípticos («MALFUNCTION 54») y aparecían tan seguido que se ignoraban; nunca hubo revisión independiente del código; y el fabricante sostuvo al principio que la sobredosis era imposible. La investigación de Nancy Leveson y Clark Turner (1993) es la fuente canónica y está disponible. El momento de parar fue la decisión de quitar los seguros físicos: ahí, en una reunión de diseño, era gratis.</a:t>
+              <a:t>Therac-25 (1985–1987). Máquina de radioterapia de la Atomic Energy of Canada Limited. Seis accidentes conocidos con sobredosis masivas de radiación y varios muertos. Las causas son de manual y hay que contarlas completas porque son técnicas: los modelos anteriores tenían seguros físicos que impedían mecánicamente una configuración peligrosa, y en el Therac-25 se quitaron confiando en que el software lo evitaría; el software venía reutilizado de los modelos anteriores, con errores que antes quedaban tapados por esos seguros; había una condición de carrera que se disparaba cuando la operadora corregía la pantalla muy rápido, algo que hacían las operadoras expertas; los mensajes de error eran difíciles de entender («MALFUNCTION 54») y aparecían tan seguido que se ignoraban; nunca hubo revisión independiente del código; y el fabricante sostuvo al principio que la sobredosis era imposible. La investigación de Nancy Leveson y Clark Turner (1993) es la fuente canónica y está disponible. El momento de parar fue la decisión de quitar los seguros físicos: ahí, en una reunión de diseño, era gratis.</a:t>
             </a:r>
           </a:p>
           <a:p/>
@@ -1384,7 +1384,7 @@
           <a:p/>
           <a:p>
             <a:r>
-              <a:t>Cambridge Analytica (2018). Una aplicación de cuestionarios recogía datos del usuario y de sus amigos, que nunca la instalaron ni supieron de ella, aprovechando una interfaz de la plataforma que lo permitía. Los datos de decenas de millones de personas terminaron en perfilamiento político. La consecuencia fue una multa histórica a la plataforma. El momento de parar fue el diseño de esa interfaz: alguien decidió que el consentimiento de una persona alcanzara para entregar los datos de sus contactos. Es el caso que conecta directo con la Ley 1581 y con el principio de finalidad.</a:t>
+              <a:t>Cambridge Analytica (2018). Una aplicación de cuestionarios recogía datos del usuario y de sus amigos, que nunca la instalaron ni supieron de ella, aprovechando una interfaz de la plataforma que lo permitía. Los datos de decenas de millones de personas terminaron usados para clasificar votantes con fines políticos. La consecuencia fue una multa histórica a la plataforma. El momento de parar fue el diseño de esa interfaz: alguien decidió que el consentimiento de una persona alcanzara para entregar los datos de sus contactos. Es el caso que conecta directo con la Ley 1581 y con el principio de finalidad.</a:t>
             </a:r>
           </a:p>
           <a:p/>
@@ -13813,7 +13813,7 @@
                           </a:solidFill>
                           <a:latin typeface="Calibri"/>
                         </a:rPr>
-                        <a:t>Datos de decenas de millones de personas usados para perfilamiento político sin que ellas lo supieran.</a:t>
+                        <a:t>Datos de decenas de millones de personas usados para clasificar votantes con fines políticos sin que ellas lo supieran.</a:t>
                       </a:r>
                     </a:p>
                   </a:txBody>
